--- a/templates/03-portfolio-pixel-art-portfolio/03__retropixel.pptx
+++ b/templates/03-portfolio-pixel-art-portfolio/03__retropixel.pptx
@@ -20,6 +20,9 @@
     <p:sldId id="268" r:id="rId19"/>
     <p:sldId id="269" r:id="rId20"/>
     <p:sldId id="270" r:id="rId21"/>
+    <p:sldId id="271" r:id="rId22"/>
+    <p:sldId id="272" r:id="rId23"/>
+    <p:sldId id="273" r:id="rId24"/>
   </p:sldIdLst>
   <p:sldSz cx="12191695" cy="6858000" type="screen4x3"/>
   <p:notesSz cx="6858000" cy="9144000"/>
@@ -3424,13 +3427,57 @@
       </p:sp>
       <p:sp>
         <p:nvSpPr>
-          <p:cNvPr id="9" name="Rectangle 8"/>
+          <p:cNvPr id="9" name="TextBox 8"/>
+          <p:cNvSpPr txBox="1"/>
+          <p:nvPr/>
+        </p:nvSpPr>
+        <p:spPr>
+          <a:xfrm>
+            <a:off x="1097280" y="2377440"/>
+            <a:ext cx="9966960" cy="1463040"/>
+          </a:xfrm>
+          <a:prstGeom prst="rect">
+            <a:avLst/>
+          </a:prstGeom>
+          <a:noFill/>
+        </p:spPr>
+        <p:txBody>
+          <a:bodyPr wrap="square" anchor="t" lIns="0" rIns="0" tIns="0" bIns="0">
+            <a:spAutoFit/>
+          </a:bodyPr>
+          <a:lstStyle/>
+          <a:p>
+            <a:pPr algn="ctr">
+              <a:lnSpc>
+                <a:spcPct val="102000"/>
+              </a:lnSpc>
+              <a:spcAft>
+                <a:spcPts val="400"/>
+              </a:spcAft>
+            </a:pPr>
+            <a:r>
+              <a:rPr sz="4600" b="1" i="0">
+                <a:solidFill>
+                  <a:srgbClr val="F4F4F8"/>
+                </a:solidFill>
+                <a:latin typeface="Consolas"/>
+                <a:ea typeface="等线"/>
+                <a:cs typeface="等线"/>
+              </a:rPr>
+              <a:t>像素与美术作品集</a:t>
+            </a:r>
+          </a:p>
+        </p:txBody>
+      </p:sp>
+      <p:sp>
+        <p:nvSpPr>
+          <p:cNvPr id="10" name="Rectangle 9"/>
           <p:cNvSpPr/>
           <p:nvPr/>
         </p:nvSpPr>
         <p:spPr>
           <a:xfrm>
-            <a:off x="822960" y="1874519"/>
+            <a:off x="5684367" y="3886200"/>
             <a:ext cx="822960" cy="91440"/>
           </a:xfrm>
           <a:prstGeom prst="rect">
@@ -3468,14 +3515,14 @@
       </p:sp>
       <p:sp>
         <p:nvSpPr>
-          <p:cNvPr id="10" name="TextBox 9"/>
+          <p:cNvPr id="11" name="TextBox 10"/>
           <p:cNvSpPr txBox="1"/>
           <p:nvPr/>
         </p:nvSpPr>
         <p:spPr>
           <a:xfrm>
-            <a:off x="822960" y="2194560"/>
-            <a:ext cx="9692640" cy="1463040"/>
+            <a:off x="1097280" y="4114800"/>
+            <a:ext cx="9966960" cy="548640"/>
           </a:xfrm>
           <a:prstGeom prst="rect">
             <a:avLst/>
@@ -3488,51 +3535,7 @@
           </a:bodyPr>
           <a:lstStyle/>
           <a:p>
-            <a:pPr algn="l">
-              <a:lnSpc>
-                <a:spcPct val="102000"/>
-              </a:lnSpc>
-              <a:spcAft>
-                <a:spcPts val="400"/>
-              </a:spcAft>
-            </a:pPr>
-            <a:r>
-              <a:rPr sz="4400" b="1" i="0">
-                <a:solidFill>
-                  <a:srgbClr val="F4F4F8"/>
-                </a:solidFill>
-                <a:latin typeface="Consolas"/>
-                <a:ea typeface="等线"/>
-                <a:cs typeface="等线"/>
-              </a:rPr>
-              <a:t>像素与美术作品集</a:t>
-            </a:r>
-          </a:p>
-        </p:txBody>
-      </p:sp>
-      <p:sp>
-        <p:nvSpPr>
-          <p:cNvPr id="11" name="TextBox 10"/>
-          <p:cNvSpPr txBox="1"/>
-          <p:nvPr/>
-        </p:nvSpPr>
-        <p:spPr>
-          <a:xfrm>
-            <a:off x="822960" y="3794760"/>
-            <a:ext cx="9144000" cy="548640"/>
-          </a:xfrm>
-          <a:prstGeom prst="rect">
-            <a:avLst/>
-          </a:prstGeom>
-          <a:noFill/>
-        </p:spPr>
-        <p:txBody>
-          <a:bodyPr wrap="square" anchor="t" lIns="0" rIns="0" tIns="0" bIns="0">
-            <a:spAutoFit/>
-          </a:bodyPr>
-          <a:lstStyle/>
-          <a:p>
-            <a:pPr algn="l">
+            <a:pPr algn="ctr">
               <a:lnSpc>
                 <a:spcPct val="100000"/>
               </a:lnSpc>
@@ -3549,7 +3552,7 @@
                 <a:ea typeface="微软雅黑"/>
                 <a:cs typeface="微软雅黑"/>
               </a:rPr>
-              <a:t>作品集 · 在此输入作者署名</a:t>
+              <a:t>像素与美术作品集 · 在此输入副标题 / 项目名称</a:t>
             </a:r>
           </a:p>
         </p:txBody>
@@ -3562,8 +3565,8 @@
         </p:nvSpPr>
         <p:spPr>
           <a:xfrm>
-            <a:off x="822960" y="5394960"/>
-            <a:ext cx="7315200" cy="365760"/>
+            <a:off x="1097280" y="5669280"/>
+            <a:ext cx="9966960" cy="365760"/>
           </a:xfrm>
           <a:prstGeom prst="rect">
             <a:avLst/>
@@ -3576,7 +3579,7 @@
           </a:bodyPr>
           <a:lstStyle/>
           <a:p>
-            <a:pPr algn="l">
+            <a:pPr algn="ctr">
               <a:lnSpc>
                 <a:spcPct val="100000"/>
               </a:lnSpc>
@@ -3593,7 +3596,7 @@
                 <a:ea typeface="微软雅黑"/>
                 <a:cs typeface="微软雅黑"/>
               </a:rPr>
-              <a:t>领域 / 风格  ·  YYYY</a:t>
+              <a:t>团队 / 姓名  ·  YYYY-MM-DD</a:t>
             </a:r>
           </a:p>
         </p:txBody>
@@ -3603,6 +3606,9 @@
   <p:clrMapOvr>
     <a:masterClrMapping/>
   </p:clrMapOvr>
+  <p:transition spd="med">
+    <p:push/>
+  </p:transition>
 </p:sld>
 </file>
 
@@ -3699,7 +3705,7 @@
                 <a:ea typeface="微软雅黑"/>
                 <a:cs typeface="微软雅黑"/>
               </a:rPr>
-              <a:t>CONTACT</a:t>
+              <a:t>DATA</a:t>
             </a:r>
           </a:p>
         </p:txBody>
@@ -3713,7 +3719,7 @@
         <p:spPr>
           <a:xfrm>
             <a:off x="822960" y="868680"/>
-            <a:ext cx="10515600" cy="548640"/>
+            <a:ext cx="10607040" cy="548640"/>
           </a:xfrm>
           <a:prstGeom prst="rect">
             <a:avLst/>
@@ -3875,7 +3881,7 @@
                 <a:ea typeface="微软雅黑"/>
                 <a:cs typeface="微软雅黑"/>
               </a:rPr>
-              <a:t>作品</a:t>
+              <a:t>项目</a:t>
             </a:r>
           </a:p>
         </p:txBody>
@@ -3919,7 +3925,7 @@
                 <a:ea typeface="微软雅黑"/>
                 <a:cs typeface="微软雅黑"/>
               </a:rPr>
-              <a:t>类型</a:t>
+              <a:t>内容</a:t>
             </a:r>
           </a:p>
         </p:txBody>
@@ -3963,7 +3969,7 @@
                 <a:ea typeface="微软雅黑"/>
                 <a:cs typeface="微软雅黑"/>
               </a:rPr>
-              <a:t>年份</a:t>
+              <a:t>备注</a:t>
             </a:r>
           </a:p>
         </p:txBody>
@@ -4087,7 +4093,7 @@
                 <a:ea typeface="微软雅黑"/>
                 <a:cs typeface="微软雅黑"/>
               </a:rPr>
-              <a:t>作品一</a:t>
+              <a:t>项一</a:t>
             </a:r>
           </a:p>
         </p:txBody>
@@ -4131,7 +4137,7 @@
                 <a:ea typeface="微软雅黑"/>
                 <a:cs typeface="微软雅黑"/>
               </a:rPr>
-              <a:t>在此填类型</a:t>
+              <a:t>在此填内容</a:t>
             </a:r>
           </a:p>
         </p:txBody>
@@ -4175,7 +4181,7 @@
                 <a:ea typeface="微软雅黑"/>
                 <a:cs typeface="微软雅黑"/>
               </a:rPr>
-              <a:t>在此填年份</a:t>
+              <a:t>在此填备注</a:t>
             </a:r>
           </a:p>
         </p:txBody>
@@ -4255,7 +4261,7 @@
                 <a:ea typeface="微软雅黑"/>
                 <a:cs typeface="微软雅黑"/>
               </a:rPr>
-              <a:t>作品二</a:t>
+              <a:t>项二</a:t>
             </a:r>
           </a:p>
         </p:txBody>
@@ -4299,7 +4305,7 @@
                 <a:ea typeface="微软雅黑"/>
                 <a:cs typeface="微软雅黑"/>
               </a:rPr>
-              <a:t>在此填类型</a:t>
+              <a:t>在此填内容</a:t>
             </a:r>
           </a:p>
         </p:txBody>
@@ -4343,7 +4349,7 @@
                 <a:ea typeface="微软雅黑"/>
                 <a:cs typeface="微软雅黑"/>
               </a:rPr>
-              <a:t>在此填年份</a:t>
+              <a:t>在此填备注</a:t>
             </a:r>
           </a:p>
         </p:txBody>
@@ -4467,7 +4473,7 @@
                 <a:ea typeface="微软雅黑"/>
                 <a:cs typeface="微软雅黑"/>
               </a:rPr>
-              <a:t>作品三</a:t>
+              <a:t>项三</a:t>
             </a:r>
           </a:p>
         </p:txBody>
@@ -4511,7 +4517,7 @@
                 <a:ea typeface="微软雅黑"/>
                 <a:cs typeface="微软雅黑"/>
               </a:rPr>
-              <a:t>在此填类型</a:t>
+              <a:t>在此填内容</a:t>
             </a:r>
           </a:p>
         </p:txBody>
@@ -4555,7 +4561,7 @@
                 <a:ea typeface="微软雅黑"/>
                 <a:cs typeface="微软雅黑"/>
               </a:rPr>
-              <a:t>在此填年份</a:t>
+              <a:t>在此填备注</a:t>
             </a:r>
           </a:p>
         </p:txBody>
@@ -4613,7 +4619,7 @@
         <p:spPr>
           <a:xfrm>
             <a:off x="822960" y="6355080"/>
-            <a:ext cx="6400800" cy="274320"/>
+            <a:ext cx="6583680" cy="274320"/>
           </a:xfrm>
           <a:prstGeom prst="rect">
             <a:avLst/>
@@ -4653,6 +4659,9 @@
   <p:clrMapOvr>
     <a:masterClrMapping/>
   </p:clrMapOvr>
+  <p:transition spd="med">
+    <p:push/>
+  </p:transition>
 </p:sld>
 </file>
 
@@ -4749,7 +4758,7 @@
                 <a:ea typeface="微软雅黑"/>
                 <a:cs typeface="微软雅黑"/>
               </a:rPr>
-              <a:t>SELECTED WORKS</a:t>
+              <a:t>KEY POINTS</a:t>
             </a:r>
           </a:p>
         </p:txBody>
@@ -4763,7 +4772,7 @@
         <p:spPr>
           <a:xfrm>
             <a:off x="822960" y="868680"/>
-            <a:ext cx="10515600" cy="548640"/>
+            <a:ext cx="10607040" cy="548640"/>
           </a:xfrm>
           <a:prstGeom prst="rect">
             <a:avLst/>
@@ -5441,7 +5450,7 @@
         <p:spPr>
           <a:xfrm>
             <a:off x="822960" y="6355080"/>
-            <a:ext cx="6400800" cy="274320"/>
+            <a:ext cx="6583680" cy="274320"/>
           </a:xfrm>
           <a:prstGeom prst="rect">
             <a:avLst/>
@@ -5481,6 +5490,9 @@
   <p:clrMapOvr>
     <a:masterClrMapping/>
   </p:clrMapOvr>
+  <p:transition spd="med">
+    <p:push/>
+  </p:transition>
 </p:sld>
 </file>
 
@@ -6043,7 +6055,7 @@
         <p:spPr>
           <a:xfrm>
             <a:off x="822960" y="6355080"/>
-            <a:ext cx="6400800" cy="274320"/>
+            <a:ext cx="6583680" cy="274320"/>
           </a:xfrm>
           <a:prstGeom prst="rect">
             <a:avLst/>
@@ -6083,6 +6095,9 @@
   <p:clrMapOvr>
     <a:masterClrMapping/>
   </p:clrMapOvr>
+  <p:transition spd="med">
+    <p:push/>
+  </p:transition>
 </p:sld>
 </file>
 
@@ -6587,7 +6602,7 @@
                 <a:ea typeface="微软雅黑"/>
                 <a:cs typeface="微软雅黑"/>
               </a:rPr>
-              <a:t>— 作者</a:t>
+              <a:t>— 署名 / 出处</a:t>
             </a:r>
           </a:p>
         </p:txBody>
@@ -6645,7 +6660,7 @@
         <p:spPr>
           <a:xfrm>
             <a:off x="822960" y="6355080"/>
-            <a:ext cx="6400800" cy="274320"/>
+            <a:ext cx="6583680" cy="274320"/>
           </a:xfrm>
           <a:prstGeom prst="rect">
             <a:avLst/>
@@ -6685,6 +6700,9 @@
   <p:clrMapOvr>
     <a:masterClrMapping/>
   </p:clrMapOvr>
+  <p:transition spd="med">
+    <p:push/>
+  </p:transition>
 </p:sld>
 </file>
 
@@ -6781,7 +6799,7 @@
                 <a:ea typeface="微软雅黑"/>
                 <a:cs typeface="微软雅黑"/>
               </a:rPr>
-              <a:t>CONTACT</a:t>
+              <a:t>TEAM</a:t>
             </a:r>
           </a:p>
         </p:txBody>
@@ -6795,7 +6813,7 @@
         <p:spPr>
           <a:xfrm>
             <a:off x="822960" y="868680"/>
-            <a:ext cx="10515600" cy="548640"/>
+            <a:ext cx="10607040" cy="548640"/>
           </a:xfrm>
           <a:prstGeom prst="rect">
             <a:avLst/>
@@ -7093,7 +7111,7 @@
                 <a:ea typeface="微软雅黑"/>
                 <a:cs typeface="微软雅黑"/>
               </a:rPr>
-              <a:t>像素美术</a:t>
+              <a:t>角色一</a:t>
             </a:r>
           </a:p>
         </p:txBody>
@@ -7317,7 +7335,7 @@
                 <a:ea typeface="微软雅黑"/>
                 <a:cs typeface="微软雅黑"/>
               </a:rPr>
-              <a:t>插画</a:t>
+              <a:t>角色二</a:t>
             </a:r>
           </a:p>
         </p:txBody>
@@ -7541,7 +7559,7 @@
                 <a:ea typeface="微软雅黑"/>
                 <a:cs typeface="微软雅黑"/>
               </a:rPr>
-              <a:t>动效</a:t>
+              <a:t>角色三</a:t>
             </a:r>
           </a:p>
         </p:txBody>
@@ -7599,7 +7617,7 @@
         <p:spPr>
           <a:xfrm>
             <a:off x="822960" y="6355080"/>
-            <a:ext cx="6400800" cy="274320"/>
+            <a:ext cx="6583680" cy="274320"/>
           </a:xfrm>
           <a:prstGeom prst="rect">
             <a:avLst/>
@@ -7639,6 +7657,9 @@
   <p:clrMapOvr>
     <a:masterClrMapping/>
   </p:clrMapOvr>
+  <p:transition spd="med">
+    <p:push/>
+  </p:transition>
 </p:sld>
 </file>
 
@@ -7698,6 +7719,2555 @@
       </p:sp>
       <p:sp>
         <p:nvSpPr>
+          <p:cNvPr id="3" name="TextBox 2"/>
+          <p:cNvSpPr txBox="1"/>
+          <p:nvPr/>
+        </p:nvSpPr>
+        <p:spPr>
+          <a:xfrm>
+            <a:off x="822960" y="566928"/>
+            <a:ext cx="7772400" cy="274320"/>
+          </a:xfrm>
+          <a:prstGeom prst="rect">
+            <a:avLst/>
+          </a:prstGeom>
+          <a:noFill/>
+        </p:spPr>
+        <p:txBody>
+          <a:bodyPr wrap="square" anchor="t" lIns="0" rIns="0" tIns="0" bIns="0">
+            <a:spAutoFit/>
+          </a:bodyPr>
+          <a:lstStyle/>
+          <a:p>
+            <a:pPr algn="l">
+              <a:lnSpc>
+                <a:spcPct val="100000"/>
+              </a:lnSpc>
+              <a:spcAft>
+                <a:spcPts val="400"/>
+              </a:spcAft>
+            </a:pPr>
+            <a:r>
+              <a:rPr sz="1150" b="1" i="0">
+                <a:solidFill>
+                  <a:srgbClr val="FF6B6B"/>
+                </a:solidFill>
+                <a:latin typeface="Segoe UI"/>
+                <a:ea typeface="微软雅黑"/>
+                <a:cs typeface="微软雅黑"/>
+              </a:rPr>
+              <a:t>STEPS</a:t>
+            </a:r>
+          </a:p>
+        </p:txBody>
+      </p:sp>
+      <p:sp>
+        <p:nvSpPr>
+          <p:cNvPr id="4" name="TextBox 3"/>
+          <p:cNvSpPr txBox="1"/>
+          <p:nvPr/>
+        </p:nvSpPr>
+        <p:spPr>
+          <a:xfrm>
+            <a:off x="822960" y="868680"/>
+            <a:ext cx="10607040" cy="548640"/>
+          </a:xfrm>
+          <a:prstGeom prst="rect">
+            <a:avLst/>
+          </a:prstGeom>
+          <a:noFill/>
+        </p:spPr>
+        <p:txBody>
+          <a:bodyPr wrap="square" anchor="t" lIns="0" rIns="0" tIns="0" bIns="0">
+            <a:spAutoFit/>
+          </a:bodyPr>
+          <a:lstStyle/>
+          <a:p>
+            <a:pPr algn="l">
+              <a:lnSpc>
+                <a:spcPct val="100000"/>
+              </a:lnSpc>
+              <a:spcAft>
+                <a:spcPts val="400"/>
+              </a:spcAft>
+            </a:pPr>
+            <a:r>
+              <a:rPr sz="2800" b="1" i="0">
+                <a:solidFill>
+                  <a:srgbClr val="F4F4F8"/>
+                </a:solidFill>
+                <a:latin typeface="Consolas"/>
+                <a:ea typeface="等线"/>
+                <a:cs typeface="等线"/>
+              </a:rPr>
+              <a:t>分步说明</a:t>
+            </a:r>
+          </a:p>
+        </p:txBody>
+      </p:sp>
+      <p:sp>
+        <p:nvSpPr>
+          <p:cNvPr id="5" name="Rectangle 4"/>
+          <p:cNvSpPr/>
+          <p:nvPr/>
+        </p:nvSpPr>
+        <p:spPr>
+          <a:xfrm>
+            <a:off x="822960" y="1572768"/>
+            <a:ext cx="566928" cy="50292"/>
+          </a:xfrm>
+          <a:prstGeom prst="rect">
+            <a:avLst/>
+          </a:prstGeom>
+          <a:solidFill>
+            <a:srgbClr val="FF6B6B"/>
+          </a:solidFill>
+          <a:ln>
+            <a:noFill/>
+          </a:ln>
+          <a:effectLst/>
+        </p:spPr>
+        <p:style>
+          <a:lnRef idx="1">
+            <a:schemeClr val="accent1"/>
+          </a:lnRef>
+          <a:fillRef idx="3">
+            <a:schemeClr val="accent1"/>
+          </a:fillRef>
+          <a:effectRef idx="2">
+            <a:schemeClr val="accent1"/>
+          </a:effectRef>
+          <a:fontRef idx="minor">
+            <a:schemeClr val="lt1"/>
+          </a:fontRef>
+        </p:style>
+        <p:txBody>
+          <a:bodyPr rtlCol="0" anchor="ctr"/>
+          <a:lstStyle/>
+          <a:p>
+            <a:pPr algn="ctr"/>
+          </a:p>
+        </p:txBody>
+      </p:sp>
+      <p:cxnSp>
+        <p:nvCxnSpPr>
+          <p:cNvPr id="6" name="Connector 5"/>
+          <p:cNvCxnSpPr/>
+          <p:nvPr/>
+        </p:nvCxnSpPr>
+        <p:spPr>
+          <a:xfrm>
+            <a:off x="1371600" y="2286000"/>
+            <a:ext cx="0" cy="2331720"/>
+          </a:xfrm>
+          <a:prstGeom prst="line">
+            <a:avLst/>
+          </a:prstGeom>
+          <a:ln w="20320">
+            <a:solidFill>
+              <a:srgbClr val="3B3B63"/>
+            </a:solidFill>
+          </a:ln>
+          <a:effectLst/>
+        </p:spPr>
+        <p:style>
+          <a:lnRef idx="2">
+            <a:schemeClr val="accent1"/>
+          </a:lnRef>
+          <a:fillRef idx="0">
+            <a:schemeClr val="accent1"/>
+          </a:fillRef>
+          <a:effectRef idx="1">
+            <a:schemeClr val="accent1"/>
+          </a:effectRef>
+          <a:fontRef idx="minor">
+            <a:schemeClr val="tx1"/>
+          </a:fontRef>
+        </p:style>
+      </p:cxnSp>
+      <p:sp>
+        <p:nvSpPr>
+          <p:cNvPr id="7" name="Oval 6"/>
+          <p:cNvSpPr/>
+          <p:nvPr/>
+        </p:nvSpPr>
+        <p:spPr>
+          <a:xfrm>
+            <a:off x="1197864" y="2212848"/>
+            <a:ext cx="347472" cy="347472"/>
+          </a:xfrm>
+          <a:prstGeom prst="ellipse">
+            <a:avLst/>
+          </a:prstGeom>
+          <a:solidFill>
+            <a:srgbClr val="FF6B6B"/>
+          </a:solidFill>
+          <a:ln>
+            <a:noFill/>
+          </a:ln>
+          <a:effectLst/>
+        </p:spPr>
+        <p:style>
+          <a:lnRef idx="1">
+            <a:schemeClr val="accent1"/>
+          </a:lnRef>
+          <a:fillRef idx="3">
+            <a:schemeClr val="accent1"/>
+          </a:fillRef>
+          <a:effectRef idx="2">
+            <a:schemeClr val="accent1"/>
+          </a:effectRef>
+          <a:fontRef idx="minor">
+            <a:schemeClr val="lt1"/>
+          </a:fontRef>
+        </p:style>
+        <p:txBody>
+          <a:bodyPr rtlCol="0" anchor="ctr"/>
+          <a:lstStyle/>
+          <a:p>
+            <a:pPr algn="ctr"/>
+          </a:p>
+        </p:txBody>
+      </p:sp>
+      <p:sp>
+        <p:nvSpPr>
+          <p:cNvPr id="8" name="TextBox 7"/>
+          <p:cNvSpPr txBox="1"/>
+          <p:nvPr/>
+        </p:nvSpPr>
+        <p:spPr>
+          <a:xfrm>
+            <a:off x="1197864" y="2212848"/>
+            <a:ext cx="347472" cy="347472"/>
+          </a:xfrm>
+          <a:prstGeom prst="rect">
+            <a:avLst/>
+          </a:prstGeom>
+          <a:noFill/>
+        </p:spPr>
+        <p:txBody>
+          <a:bodyPr wrap="square" anchor="ctr" lIns="0" rIns="0" tIns="0" bIns="0">
+            <a:spAutoFit/>
+          </a:bodyPr>
+          <a:lstStyle/>
+          <a:p>
+            <a:pPr algn="ctr">
+              <a:lnSpc>
+                <a:spcPct val="100000"/>
+              </a:lnSpc>
+              <a:spcAft>
+                <a:spcPts val="400"/>
+              </a:spcAft>
+            </a:pPr>
+            <a:r>
+              <a:rPr sz="1200" b="1" i="0">
+                <a:solidFill>
+                  <a:srgbClr val="FFFFFF"/>
+                </a:solidFill>
+                <a:latin typeface="Segoe UI"/>
+                <a:ea typeface="微软雅黑"/>
+                <a:cs typeface="微软雅黑"/>
+              </a:rPr>
+              <a:t>1</a:t>
+            </a:r>
+          </a:p>
+        </p:txBody>
+      </p:sp>
+      <p:sp>
+        <p:nvSpPr>
+          <p:cNvPr id="9" name="TextBox 8"/>
+          <p:cNvSpPr txBox="1"/>
+          <p:nvPr/>
+        </p:nvSpPr>
+        <p:spPr>
+          <a:xfrm>
+            <a:off x="1828800" y="2148840"/>
+            <a:ext cx="3657600" cy="365760"/>
+          </a:xfrm>
+          <a:prstGeom prst="rect">
+            <a:avLst/>
+          </a:prstGeom>
+          <a:noFill/>
+        </p:spPr>
+        <p:txBody>
+          <a:bodyPr wrap="square" anchor="t" lIns="0" rIns="0" tIns="0" bIns="0">
+            <a:spAutoFit/>
+          </a:bodyPr>
+          <a:lstStyle/>
+          <a:p>
+            <a:pPr algn="l">
+              <a:lnSpc>
+                <a:spcPct val="100000"/>
+              </a:lnSpc>
+              <a:spcAft>
+                <a:spcPts val="400"/>
+              </a:spcAft>
+            </a:pPr>
+            <a:r>
+              <a:rPr sz="1500" b="1" i="0">
+                <a:solidFill>
+                  <a:srgbClr val="F4F4F8"/>
+                </a:solidFill>
+                <a:latin typeface="Consolas"/>
+                <a:ea typeface="等线"/>
+                <a:cs typeface="等线"/>
+              </a:rPr>
+              <a:t>作者简介</a:t>
+            </a:r>
+          </a:p>
+        </p:txBody>
+      </p:sp>
+      <p:sp>
+        <p:nvSpPr>
+          <p:cNvPr id="10" name="TextBox 9"/>
+          <p:cNvSpPr txBox="1"/>
+          <p:nvPr/>
+        </p:nvSpPr>
+        <p:spPr>
+          <a:xfrm>
+            <a:off x="1828800" y="2487168"/>
+            <a:ext cx="8961120" cy="365760"/>
+          </a:xfrm>
+          <a:prstGeom prst="rect">
+            <a:avLst/>
+          </a:prstGeom>
+          <a:noFill/>
+        </p:spPr>
+        <p:txBody>
+          <a:bodyPr wrap="square" anchor="t" lIns="0" rIns="0" tIns="0" bIns="0">
+            <a:spAutoFit/>
+          </a:bodyPr>
+          <a:lstStyle/>
+          <a:p>
+            <a:pPr algn="l">
+              <a:lnSpc>
+                <a:spcPct val="100000"/>
+              </a:lnSpc>
+              <a:spcAft>
+                <a:spcPts val="400"/>
+              </a:spcAft>
+            </a:pPr>
+            <a:r>
+              <a:rPr sz="1250" b="0" i="0">
+                <a:solidFill>
+                  <a:srgbClr val="A6A6C9"/>
+                </a:solidFill>
+                <a:latin typeface="Segoe UI"/>
+                <a:ea typeface="微软雅黑"/>
+                <a:cs typeface="微软雅黑"/>
+              </a:rPr>
+              <a:t>在此输入步骤说明（占位）</a:t>
+            </a:r>
+          </a:p>
+        </p:txBody>
+      </p:sp>
+      <p:sp>
+        <p:nvSpPr>
+          <p:cNvPr id="11" name="Oval 10"/>
+          <p:cNvSpPr/>
+          <p:nvPr/>
+        </p:nvSpPr>
+        <p:spPr>
+          <a:xfrm>
+            <a:off x="1197864" y="2990088"/>
+            <a:ext cx="347472" cy="347472"/>
+          </a:xfrm>
+          <a:prstGeom prst="ellipse">
+            <a:avLst/>
+          </a:prstGeom>
+          <a:solidFill>
+            <a:srgbClr val="FF6B6B"/>
+          </a:solidFill>
+          <a:ln>
+            <a:noFill/>
+          </a:ln>
+          <a:effectLst/>
+        </p:spPr>
+        <p:style>
+          <a:lnRef idx="1">
+            <a:schemeClr val="accent1"/>
+          </a:lnRef>
+          <a:fillRef idx="3">
+            <a:schemeClr val="accent1"/>
+          </a:fillRef>
+          <a:effectRef idx="2">
+            <a:schemeClr val="accent1"/>
+          </a:effectRef>
+          <a:fontRef idx="minor">
+            <a:schemeClr val="lt1"/>
+          </a:fontRef>
+        </p:style>
+        <p:txBody>
+          <a:bodyPr rtlCol="0" anchor="ctr"/>
+          <a:lstStyle/>
+          <a:p>
+            <a:pPr algn="ctr"/>
+          </a:p>
+        </p:txBody>
+      </p:sp>
+      <p:sp>
+        <p:nvSpPr>
+          <p:cNvPr id="12" name="TextBox 11"/>
+          <p:cNvSpPr txBox="1"/>
+          <p:nvPr/>
+        </p:nvSpPr>
+        <p:spPr>
+          <a:xfrm>
+            <a:off x="1197864" y="2990088"/>
+            <a:ext cx="347472" cy="347472"/>
+          </a:xfrm>
+          <a:prstGeom prst="rect">
+            <a:avLst/>
+          </a:prstGeom>
+          <a:noFill/>
+        </p:spPr>
+        <p:txBody>
+          <a:bodyPr wrap="square" anchor="ctr" lIns="0" rIns="0" tIns="0" bIns="0">
+            <a:spAutoFit/>
+          </a:bodyPr>
+          <a:lstStyle/>
+          <a:p>
+            <a:pPr algn="ctr">
+              <a:lnSpc>
+                <a:spcPct val="100000"/>
+              </a:lnSpc>
+              <a:spcAft>
+                <a:spcPts val="400"/>
+              </a:spcAft>
+            </a:pPr>
+            <a:r>
+              <a:rPr sz="1200" b="1" i="0">
+                <a:solidFill>
+                  <a:srgbClr val="FFFFFF"/>
+                </a:solidFill>
+                <a:latin typeface="Segoe UI"/>
+                <a:ea typeface="微软雅黑"/>
+                <a:cs typeface="微软雅黑"/>
+              </a:rPr>
+              <a:t>2</a:t>
+            </a:r>
+          </a:p>
+        </p:txBody>
+      </p:sp>
+      <p:sp>
+        <p:nvSpPr>
+          <p:cNvPr id="13" name="TextBox 12"/>
+          <p:cNvSpPr txBox="1"/>
+          <p:nvPr/>
+        </p:nvSpPr>
+        <p:spPr>
+          <a:xfrm>
+            <a:off x="1828800" y="2926080"/>
+            <a:ext cx="3657600" cy="365760"/>
+          </a:xfrm>
+          <a:prstGeom prst="rect">
+            <a:avLst/>
+          </a:prstGeom>
+          <a:noFill/>
+        </p:spPr>
+        <p:txBody>
+          <a:bodyPr wrap="square" anchor="t" lIns="0" rIns="0" tIns="0" bIns="0">
+            <a:spAutoFit/>
+          </a:bodyPr>
+          <a:lstStyle/>
+          <a:p>
+            <a:pPr algn="l">
+              <a:lnSpc>
+                <a:spcPct val="100000"/>
+              </a:lnSpc>
+              <a:spcAft>
+                <a:spcPts val="400"/>
+              </a:spcAft>
+            </a:pPr>
+            <a:r>
+              <a:rPr sz="1500" b="1" i="0">
+                <a:solidFill>
+                  <a:srgbClr val="F4F4F8"/>
+                </a:solidFill>
+                <a:latin typeface="Consolas"/>
+                <a:ea typeface="等线"/>
+                <a:cs typeface="等线"/>
+              </a:rPr>
+              <a:t>代表作品</a:t>
+            </a:r>
+          </a:p>
+        </p:txBody>
+      </p:sp>
+      <p:sp>
+        <p:nvSpPr>
+          <p:cNvPr id="14" name="TextBox 13"/>
+          <p:cNvSpPr txBox="1"/>
+          <p:nvPr/>
+        </p:nvSpPr>
+        <p:spPr>
+          <a:xfrm>
+            <a:off x="1828800" y="3264408"/>
+            <a:ext cx="8961120" cy="365760"/>
+          </a:xfrm>
+          <a:prstGeom prst="rect">
+            <a:avLst/>
+          </a:prstGeom>
+          <a:noFill/>
+        </p:spPr>
+        <p:txBody>
+          <a:bodyPr wrap="square" anchor="t" lIns="0" rIns="0" tIns="0" bIns="0">
+            <a:spAutoFit/>
+          </a:bodyPr>
+          <a:lstStyle/>
+          <a:p>
+            <a:pPr algn="l">
+              <a:lnSpc>
+                <a:spcPct val="100000"/>
+              </a:lnSpc>
+              <a:spcAft>
+                <a:spcPts val="400"/>
+              </a:spcAft>
+            </a:pPr>
+            <a:r>
+              <a:rPr sz="1250" b="0" i="0">
+                <a:solidFill>
+                  <a:srgbClr val="A6A6C9"/>
+                </a:solidFill>
+                <a:latin typeface="Segoe UI"/>
+                <a:ea typeface="微软雅黑"/>
+                <a:cs typeface="微软雅黑"/>
+              </a:rPr>
+              <a:t>在此输入步骤说明（占位）</a:t>
+            </a:r>
+          </a:p>
+        </p:txBody>
+      </p:sp>
+      <p:sp>
+        <p:nvSpPr>
+          <p:cNvPr id="15" name="Oval 14"/>
+          <p:cNvSpPr/>
+          <p:nvPr/>
+        </p:nvSpPr>
+        <p:spPr>
+          <a:xfrm>
+            <a:off x="1197864" y="3767327"/>
+            <a:ext cx="347472" cy="347472"/>
+          </a:xfrm>
+          <a:prstGeom prst="ellipse">
+            <a:avLst/>
+          </a:prstGeom>
+          <a:solidFill>
+            <a:srgbClr val="FF6B6B"/>
+          </a:solidFill>
+          <a:ln>
+            <a:noFill/>
+          </a:ln>
+          <a:effectLst/>
+        </p:spPr>
+        <p:style>
+          <a:lnRef idx="1">
+            <a:schemeClr val="accent1"/>
+          </a:lnRef>
+          <a:fillRef idx="3">
+            <a:schemeClr val="accent1"/>
+          </a:fillRef>
+          <a:effectRef idx="2">
+            <a:schemeClr val="accent1"/>
+          </a:effectRef>
+          <a:fontRef idx="minor">
+            <a:schemeClr val="lt1"/>
+          </a:fontRef>
+        </p:style>
+        <p:txBody>
+          <a:bodyPr rtlCol="0" anchor="ctr"/>
+          <a:lstStyle/>
+          <a:p>
+            <a:pPr algn="ctr"/>
+          </a:p>
+        </p:txBody>
+      </p:sp>
+      <p:sp>
+        <p:nvSpPr>
+          <p:cNvPr id="16" name="TextBox 15"/>
+          <p:cNvSpPr txBox="1"/>
+          <p:nvPr/>
+        </p:nvSpPr>
+        <p:spPr>
+          <a:xfrm>
+            <a:off x="1197864" y="3767327"/>
+            <a:ext cx="347472" cy="347472"/>
+          </a:xfrm>
+          <a:prstGeom prst="rect">
+            <a:avLst/>
+          </a:prstGeom>
+          <a:noFill/>
+        </p:spPr>
+        <p:txBody>
+          <a:bodyPr wrap="square" anchor="ctr" lIns="0" rIns="0" tIns="0" bIns="0">
+            <a:spAutoFit/>
+          </a:bodyPr>
+          <a:lstStyle/>
+          <a:p>
+            <a:pPr algn="ctr">
+              <a:lnSpc>
+                <a:spcPct val="100000"/>
+              </a:lnSpc>
+              <a:spcAft>
+                <a:spcPts val="400"/>
+              </a:spcAft>
+            </a:pPr>
+            <a:r>
+              <a:rPr sz="1200" b="1" i="0">
+                <a:solidFill>
+                  <a:srgbClr val="FFFFFF"/>
+                </a:solidFill>
+                <a:latin typeface="Segoe UI"/>
+                <a:ea typeface="微软雅黑"/>
+                <a:cs typeface="微软雅黑"/>
+              </a:rPr>
+              <a:t>3</a:t>
+            </a:r>
+          </a:p>
+        </p:txBody>
+      </p:sp>
+      <p:sp>
+        <p:nvSpPr>
+          <p:cNvPr id="17" name="TextBox 16"/>
+          <p:cNvSpPr txBox="1"/>
+          <p:nvPr/>
+        </p:nvSpPr>
+        <p:spPr>
+          <a:xfrm>
+            <a:off x="1828800" y="3703320"/>
+            <a:ext cx="3657600" cy="365760"/>
+          </a:xfrm>
+          <a:prstGeom prst="rect">
+            <a:avLst/>
+          </a:prstGeom>
+          <a:noFill/>
+        </p:spPr>
+        <p:txBody>
+          <a:bodyPr wrap="square" anchor="t" lIns="0" rIns="0" tIns="0" bIns="0">
+            <a:spAutoFit/>
+          </a:bodyPr>
+          <a:lstStyle/>
+          <a:p>
+            <a:pPr algn="l">
+              <a:lnSpc>
+                <a:spcPct val="100000"/>
+              </a:lnSpc>
+              <a:spcAft>
+                <a:spcPts val="400"/>
+              </a:spcAft>
+            </a:pPr>
+            <a:r>
+              <a:rPr sz="1500" b="1" i="0">
+                <a:solidFill>
+                  <a:srgbClr val="F4F4F8"/>
+                </a:solidFill>
+                <a:latin typeface="Consolas"/>
+                <a:ea typeface="等线"/>
+                <a:cs typeface="等线"/>
+              </a:rPr>
+              <a:t>创作流程</a:t>
+            </a:r>
+          </a:p>
+        </p:txBody>
+      </p:sp>
+      <p:sp>
+        <p:nvSpPr>
+          <p:cNvPr id="18" name="TextBox 17"/>
+          <p:cNvSpPr txBox="1"/>
+          <p:nvPr/>
+        </p:nvSpPr>
+        <p:spPr>
+          <a:xfrm>
+            <a:off x="1828800" y="4041648"/>
+            <a:ext cx="8961120" cy="365760"/>
+          </a:xfrm>
+          <a:prstGeom prst="rect">
+            <a:avLst/>
+          </a:prstGeom>
+          <a:noFill/>
+        </p:spPr>
+        <p:txBody>
+          <a:bodyPr wrap="square" anchor="t" lIns="0" rIns="0" tIns="0" bIns="0">
+            <a:spAutoFit/>
+          </a:bodyPr>
+          <a:lstStyle/>
+          <a:p>
+            <a:pPr algn="l">
+              <a:lnSpc>
+                <a:spcPct val="100000"/>
+              </a:lnSpc>
+              <a:spcAft>
+                <a:spcPts val="400"/>
+              </a:spcAft>
+            </a:pPr>
+            <a:r>
+              <a:rPr sz="1250" b="0" i="0">
+                <a:solidFill>
+                  <a:srgbClr val="A6A6C9"/>
+                </a:solidFill>
+                <a:latin typeface="Segoe UI"/>
+                <a:ea typeface="微软雅黑"/>
+                <a:cs typeface="微软雅黑"/>
+              </a:rPr>
+              <a:t>在此输入步骤说明（占位）</a:t>
+            </a:r>
+          </a:p>
+        </p:txBody>
+      </p:sp>
+      <p:sp>
+        <p:nvSpPr>
+          <p:cNvPr id="19" name="Oval 18"/>
+          <p:cNvSpPr/>
+          <p:nvPr/>
+        </p:nvSpPr>
+        <p:spPr>
+          <a:xfrm>
+            <a:off x="1197864" y="4544567"/>
+            <a:ext cx="347472" cy="347472"/>
+          </a:xfrm>
+          <a:prstGeom prst="ellipse">
+            <a:avLst/>
+          </a:prstGeom>
+          <a:solidFill>
+            <a:srgbClr val="FF6B6B"/>
+          </a:solidFill>
+          <a:ln>
+            <a:noFill/>
+          </a:ln>
+          <a:effectLst/>
+        </p:spPr>
+        <p:style>
+          <a:lnRef idx="1">
+            <a:schemeClr val="accent1"/>
+          </a:lnRef>
+          <a:fillRef idx="3">
+            <a:schemeClr val="accent1"/>
+          </a:fillRef>
+          <a:effectRef idx="2">
+            <a:schemeClr val="accent1"/>
+          </a:effectRef>
+          <a:fontRef idx="minor">
+            <a:schemeClr val="lt1"/>
+          </a:fontRef>
+        </p:style>
+        <p:txBody>
+          <a:bodyPr rtlCol="0" anchor="ctr"/>
+          <a:lstStyle/>
+          <a:p>
+            <a:pPr algn="ctr"/>
+          </a:p>
+        </p:txBody>
+      </p:sp>
+      <p:sp>
+        <p:nvSpPr>
+          <p:cNvPr id="20" name="TextBox 19"/>
+          <p:cNvSpPr txBox="1"/>
+          <p:nvPr/>
+        </p:nvSpPr>
+        <p:spPr>
+          <a:xfrm>
+            <a:off x="1197864" y="4544567"/>
+            <a:ext cx="347472" cy="347472"/>
+          </a:xfrm>
+          <a:prstGeom prst="rect">
+            <a:avLst/>
+          </a:prstGeom>
+          <a:noFill/>
+        </p:spPr>
+        <p:txBody>
+          <a:bodyPr wrap="square" anchor="ctr" lIns="0" rIns="0" tIns="0" bIns="0">
+            <a:spAutoFit/>
+          </a:bodyPr>
+          <a:lstStyle/>
+          <a:p>
+            <a:pPr algn="ctr">
+              <a:lnSpc>
+                <a:spcPct val="100000"/>
+              </a:lnSpc>
+              <a:spcAft>
+                <a:spcPts val="400"/>
+              </a:spcAft>
+            </a:pPr>
+            <a:r>
+              <a:rPr sz="1200" b="1" i="0">
+                <a:solidFill>
+                  <a:srgbClr val="FFFFFF"/>
+                </a:solidFill>
+                <a:latin typeface="Segoe UI"/>
+                <a:ea typeface="微软雅黑"/>
+                <a:cs typeface="微软雅黑"/>
+              </a:rPr>
+              <a:t>4</a:t>
+            </a:r>
+          </a:p>
+        </p:txBody>
+      </p:sp>
+      <p:sp>
+        <p:nvSpPr>
+          <p:cNvPr id="21" name="TextBox 20"/>
+          <p:cNvSpPr txBox="1"/>
+          <p:nvPr/>
+        </p:nvSpPr>
+        <p:spPr>
+          <a:xfrm>
+            <a:off x="1828800" y="4480559"/>
+            <a:ext cx="3657600" cy="365760"/>
+          </a:xfrm>
+          <a:prstGeom prst="rect">
+            <a:avLst/>
+          </a:prstGeom>
+          <a:noFill/>
+        </p:spPr>
+        <p:txBody>
+          <a:bodyPr wrap="square" anchor="t" lIns="0" rIns="0" tIns="0" bIns="0">
+            <a:spAutoFit/>
+          </a:bodyPr>
+          <a:lstStyle/>
+          <a:p>
+            <a:pPr algn="l">
+              <a:lnSpc>
+                <a:spcPct val="100000"/>
+              </a:lnSpc>
+              <a:spcAft>
+                <a:spcPts val="400"/>
+              </a:spcAft>
+            </a:pPr>
+            <a:r>
+              <a:rPr sz="1500" b="1" i="0">
+                <a:solidFill>
+                  <a:srgbClr val="F4F4F8"/>
+                </a:solidFill>
+                <a:latin typeface="Consolas"/>
+                <a:ea typeface="等线"/>
+                <a:cs typeface="等线"/>
+              </a:rPr>
+              <a:t>联系方式</a:t>
+            </a:r>
+          </a:p>
+        </p:txBody>
+      </p:sp>
+      <p:sp>
+        <p:nvSpPr>
+          <p:cNvPr id="22" name="TextBox 21"/>
+          <p:cNvSpPr txBox="1"/>
+          <p:nvPr/>
+        </p:nvSpPr>
+        <p:spPr>
+          <a:xfrm>
+            <a:off x="1828800" y="4818888"/>
+            <a:ext cx="8961120" cy="365760"/>
+          </a:xfrm>
+          <a:prstGeom prst="rect">
+            <a:avLst/>
+          </a:prstGeom>
+          <a:noFill/>
+        </p:spPr>
+        <p:txBody>
+          <a:bodyPr wrap="square" anchor="t" lIns="0" rIns="0" tIns="0" bIns="0">
+            <a:spAutoFit/>
+          </a:bodyPr>
+          <a:lstStyle/>
+          <a:p>
+            <a:pPr algn="l">
+              <a:lnSpc>
+                <a:spcPct val="100000"/>
+              </a:lnSpc>
+              <a:spcAft>
+                <a:spcPts val="400"/>
+              </a:spcAft>
+            </a:pPr>
+            <a:r>
+              <a:rPr sz="1250" b="0" i="0">
+                <a:solidFill>
+                  <a:srgbClr val="A6A6C9"/>
+                </a:solidFill>
+                <a:latin typeface="Segoe UI"/>
+                <a:ea typeface="微软雅黑"/>
+                <a:cs typeface="微软雅黑"/>
+              </a:rPr>
+              <a:t>在此输入步骤说明（占位）</a:t>
+            </a:r>
+          </a:p>
+        </p:txBody>
+      </p:sp>
+      <p:sp>
+        <p:nvSpPr>
+          <p:cNvPr id="23" name="Rectangle 22"/>
+          <p:cNvSpPr/>
+          <p:nvPr/>
+        </p:nvSpPr>
+        <p:spPr>
+          <a:xfrm>
+            <a:off x="822960" y="6291072"/>
+            <a:ext cx="10545775" cy="7315"/>
+          </a:xfrm>
+          <a:prstGeom prst="rect">
+            <a:avLst/>
+          </a:prstGeom>
+          <a:solidFill>
+            <a:srgbClr val="3B3B63"/>
+          </a:solidFill>
+          <a:ln>
+            <a:noFill/>
+          </a:ln>
+          <a:effectLst/>
+        </p:spPr>
+        <p:style>
+          <a:lnRef idx="1">
+            <a:schemeClr val="accent1"/>
+          </a:lnRef>
+          <a:fillRef idx="3">
+            <a:schemeClr val="accent1"/>
+          </a:fillRef>
+          <a:effectRef idx="2">
+            <a:schemeClr val="accent1"/>
+          </a:effectRef>
+          <a:fontRef idx="minor">
+            <a:schemeClr val="lt1"/>
+          </a:fontRef>
+        </p:style>
+        <p:txBody>
+          <a:bodyPr rtlCol="0" anchor="ctr"/>
+          <a:lstStyle/>
+          <a:p>
+            <a:pPr algn="ctr"/>
+          </a:p>
+        </p:txBody>
+      </p:sp>
+      <p:sp>
+        <p:nvSpPr>
+          <p:cNvPr id="24" name="TextBox 23"/>
+          <p:cNvSpPr txBox="1"/>
+          <p:nvPr/>
+        </p:nvSpPr>
+        <p:spPr>
+          <a:xfrm>
+            <a:off x="822960" y="6355080"/>
+            <a:ext cx="6583680" cy="274320"/>
+          </a:xfrm>
+          <a:prstGeom prst="rect">
+            <a:avLst/>
+          </a:prstGeom>
+          <a:noFill/>
+        </p:spPr>
+        <p:txBody>
+          <a:bodyPr wrap="square" anchor="t" lIns="0" rIns="0" tIns="0" bIns="0">
+            <a:spAutoFit/>
+          </a:bodyPr>
+          <a:lstStyle/>
+          <a:p>
+            <a:pPr algn="l">
+              <a:lnSpc>
+                <a:spcPct val="100000"/>
+              </a:lnSpc>
+              <a:spcAft>
+                <a:spcPts val="400"/>
+              </a:spcAft>
+            </a:pPr>
+            <a:r>
+              <a:rPr sz="900" b="0" i="0">
+                <a:solidFill>
+                  <a:srgbClr val="A6A6C9"/>
+                </a:solidFill>
+                <a:latin typeface="Segoe UI"/>
+                <a:ea typeface="微软雅黑"/>
+                <a:cs typeface="微软雅黑"/>
+              </a:rPr>
+              <a:t>复古像素  ·  Retro Pixel</a:t>
+            </a:r>
+          </a:p>
+        </p:txBody>
+      </p:sp>
+    </p:spTree>
+  </p:cSld>
+  <p:clrMapOvr>
+    <a:masterClrMapping/>
+  </p:clrMapOvr>
+  <p:transition spd="med">
+    <p:push/>
+  </p:transition>
+</p:sld>
+</file>
+
+<file path=ppt/slides/slide16.xml><?xml version="1.0" encoding="utf-8"?>
+<p:sld xmlns:a="http://schemas.openxmlformats.org/drawingml/2006/main" xmlns:p="http://schemas.openxmlformats.org/presentationml/2006/main" xmlns:r="http://schemas.openxmlformats.org/officeDocument/2006/relationships">
+  <p:cSld>
+    <p:spTree>
+      <p:nvGrpSpPr>
+        <p:cNvPr id="1" name=""/>
+        <p:cNvGrpSpPr/>
+        <p:nvPr/>
+      </p:nvGrpSpPr>
+      <p:grpSpPr/>
+      <p:sp>
+        <p:nvSpPr>
+          <p:cNvPr id="2" name="Rectangle 1"/>
+          <p:cNvSpPr/>
+          <p:nvPr/>
+        </p:nvSpPr>
+        <p:spPr>
+          <a:xfrm>
+            <a:off x="0" y="0"/>
+            <a:ext cx="12191695" cy="6858000"/>
+          </a:xfrm>
+          <a:prstGeom prst="rect">
+            <a:avLst/>
+          </a:prstGeom>
+          <a:solidFill>
+            <a:srgbClr val="1B1B2F"/>
+          </a:solidFill>
+          <a:ln>
+            <a:noFill/>
+          </a:ln>
+          <a:effectLst/>
+        </p:spPr>
+        <p:style>
+          <a:lnRef idx="1">
+            <a:schemeClr val="accent1"/>
+          </a:lnRef>
+          <a:fillRef idx="3">
+            <a:schemeClr val="accent1"/>
+          </a:fillRef>
+          <a:effectRef idx="2">
+            <a:schemeClr val="accent1"/>
+          </a:effectRef>
+          <a:fontRef idx="minor">
+            <a:schemeClr val="lt1"/>
+          </a:fontRef>
+        </p:style>
+        <p:txBody>
+          <a:bodyPr rtlCol="0" anchor="ctr"/>
+          <a:lstStyle/>
+          <a:p>
+            <a:pPr algn="ctr"/>
+          </a:p>
+        </p:txBody>
+      </p:sp>
+      <p:sp>
+        <p:nvSpPr>
+          <p:cNvPr id="3" name="TextBox 2"/>
+          <p:cNvSpPr txBox="1"/>
+          <p:nvPr/>
+        </p:nvSpPr>
+        <p:spPr>
+          <a:xfrm>
+            <a:off x="822960" y="566928"/>
+            <a:ext cx="7772400" cy="274320"/>
+          </a:xfrm>
+          <a:prstGeom prst="rect">
+            <a:avLst/>
+          </a:prstGeom>
+          <a:noFill/>
+        </p:spPr>
+        <p:txBody>
+          <a:bodyPr wrap="square" anchor="t" lIns="0" rIns="0" tIns="0" bIns="0">
+            <a:spAutoFit/>
+          </a:bodyPr>
+          <a:lstStyle/>
+          <a:p>
+            <a:pPr algn="l">
+              <a:lnSpc>
+                <a:spcPct val="100000"/>
+              </a:lnSpc>
+              <a:spcAft>
+                <a:spcPts val="400"/>
+              </a:spcAft>
+            </a:pPr>
+            <a:r>
+              <a:rPr sz="1150" b="1" i="0">
+                <a:solidFill>
+                  <a:srgbClr val="FF6B6B"/>
+                </a:solidFill>
+                <a:latin typeface="Segoe UI"/>
+                <a:ea typeface="微软雅黑"/>
+                <a:cs typeface="微软雅黑"/>
+              </a:rPr>
+              <a:t>GLOSSARY</a:t>
+            </a:r>
+          </a:p>
+        </p:txBody>
+      </p:sp>
+      <p:sp>
+        <p:nvSpPr>
+          <p:cNvPr id="4" name="TextBox 3"/>
+          <p:cNvSpPr txBox="1"/>
+          <p:nvPr/>
+        </p:nvSpPr>
+        <p:spPr>
+          <a:xfrm>
+            <a:off x="822960" y="868680"/>
+            <a:ext cx="10607040" cy="548640"/>
+          </a:xfrm>
+          <a:prstGeom prst="rect">
+            <a:avLst/>
+          </a:prstGeom>
+          <a:noFill/>
+        </p:spPr>
+        <p:txBody>
+          <a:bodyPr wrap="square" anchor="t" lIns="0" rIns="0" tIns="0" bIns="0">
+            <a:spAutoFit/>
+          </a:bodyPr>
+          <a:lstStyle/>
+          <a:p>
+            <a:pPr algn="l">
+              <a:lnSpc>
+                <a:spcPct val="100000"/>
+              </a:lnSpc>
+              <a:spcAft>
+                <a:spcPts val="400"/>
+              </a:spcAft>
+            </a:pPr>
+            <a:r>
+              <a:rPr sz="2800" b="1" i="0">
+                <a:solidFill>
+                  <a:srgbClr val="F4F4F8"/>
+                </a:solidFill>
+                <a:latin typeface="Consolas"/>
+                <a:ea typeface="等线"/>
+                <a:cs typeface="等线"/>
+              </a:rPr>
+              <a:t>术语表</a:t>
+            </a:r>
+          </a:p>
+        </p:txBody>
+      </p:sp>
+      <p:sp>
+        <p:nvSpPr>
+          <p:cNvPr id="5" name="Rectangle 4"/>
+          <p:cNvSpPr/>
+          <p:nvPr/>
+        </p:nvSpPr>
+        <p:spPr>
+          <a:xfrm>
+            <a:off x="822960" y="1572768"/>
+            <a:ext cx="566928" cy="50292"/>
+          </a:xfrm>
+          <a:prstGeom prst="rect">
+            <a:avLst/>
+          </a:prstGeom>
+          <a:solidFill>
+            <a:srgbClr val="FF6B6B"/>
+          </a:solidFill>
+          <a:ln>
+            <a:noFill/>
+          </a:ln>
+          <a:effectLst/>
+        </p:spPr>
+        <p:style>
+          <a:lnRef idx="1">
+            <a:schemeClr val="accent1"/>
+          </a:lnRef>
+          <a:fillRef idx="3">
+            <a:schemeClr val="accent1"/>
+          </a:fillRef>
+          <a:effectRef idx="2">
+            <a:schemeClr val="accent1"/>
+          </a:effectRef>
+          <a:fontRef idx="minor">
+            <a:schemeClr val="lt1"/>
+          </a:fontRef>
+        </p:style>
+        <p:txBody>
+          <a:bodyPr rtlCol="0" anchor="ctr"/>
+          <a:lstStyle/>
+          <a:p>
+            <a:pPr algn="ctr"/>
+          </a:p>
+        </p:txBody>
+      </p:sp>
+      <p:sp>
+        <p:nvSpPr>
+          <p:cNvPr id="6" name="TextBox 5"/>
+          <p:cNvSpPr txBox="1"/>
+          <p:nvPr/>
+        </p:nvSpPr>
+        <p:spPr>
+          <a:xfrm>
+            <a:off x="822960" y="2103120"/>
+            <a:ext cx="2926080" cy="457200"/>
+          </a:xfrm>
+          <a:prstGeom prst="rect">
+            <a:avLst/>
+          </a:prstGeom>
+          <a:noFill/>
+        </p:spPr>
+        <p:txBody>
+          <a:bodyPr wrap="square" anchor="t" lIns="0" rIns="0" tIns="0" bIns="0">
+            <a:spAutoFit/>
+          </a:bodyPr>
+          <a:lstStyle/>
+          <a:p>
+            <a:pPr algn="l">
+              <a:lnSpc>
+                <a:spcPct val="100000"/>
+              </a:lnSpc>
+              <a:spcAft>
+                <a:spcPts val="400"/>
+              </a:spcAft>
+            </a:pPr>
+            <a:r>
+              <a:rPr sz="1500" b="1" i="0">
+                <a:solidFill>
+                  <a:srgbClr val="FF6B6B"/>
+                </a:solidFill>
+                <a:latin typeface="Consolas"/>
+                <a:ea typeface="等线"/>
+                <a:cs typeface="等线"/>
+              </a:rPr>
+              <a:t>术语一</a:t>
+            </a:r>
+          </a:p>
+        </p:txBody>
+      </p:sp>
+      <p:sp>
+        <p:nvSpPr>
+          <p:cNvPr id="7" name="TextBox 6"/>
+          <p:cNvSpPr txBox="1"/>
+          <p:nvPr/>
+        </p:nvSpPr>
+        <p:spPr>
+          <a:xfrm>
+            <a:off x="3931920" y="2103120"/>
+            <a:ext cx="7498079" cy="457200"/>
+          </a:xfrm>
+          <a:prstGeom prst="rect">
+            <a:avLst/>
+          </a:prstGeom>
+          <a:noFill/>
+        </p:spPr>
+        <p:txBody>
+          <a:bodyPr wrap="square" anchor="t" lIns="0" rIns="0" tIns="0" bIns="0">
+            <a:spAutoFit/>
+          </a:bodyPr>
+          <a:lstStyle/>
+          <a:p>
+            <a:pPr algn="l">
+              <a:lnSpc>
+                <a:spcPct val="100000"/>
+              </a:lnSpc>
+              <a:spcAft>
+                <a:spcPts val="400"/>
+              </a:spcAft>
+            </a:pPr>
+            <a:r>
+              <a:rPr sz="1300" b="0" i="0">
+                <a:solidFill>
+                  <a:srgbClr val="F4F4F8"/>
+                </a:solidFill>
+                <a:latin typeface="Segoe UI"/>
+                <a:ea typeface="微软雅黑"/>
+                <a:cs typeface="微软雅黑"/>
+              </a:rPr>
+              <a:t>在此输入释义（占位）</a:t>
+            </a:r>
+          </a:p>
+        </p:txBody>
+      </p:sp>
+      <p:cxnSp>
+        <p:nvCxnSpPr>
+          <p:cNvPr id="8" name="Connector 7"/>
+          <p:cNvCxnSpPr/>
+          <p:nvPr/>
+        </p:nvCxnSpPr>
+        <p:spPr>
+          <a:xfrm>
+            <a:off x="822960" y="2633472"/>
+            <a:ext cx="10515600" cy="0"/>
+          </a:xfrm>
+          <a:prstGeom prst="line">
+            <a:avLst/>
+          </a:prstGeom>
+          <a:ln w="7620">
+            <a:solidFill>
+              <a:srgbClr val="3B3B63"/>
+            </a:solidFill>
+          </a:ln>
+          <a:effectLst/>
+        </p:spPr>
+        <p:style>
+          <a:lnRef idx="2">
+            <a:schemeClr val="accent1"/>
+          </a:lnRef>
+          <a:fillRef idx="0">
+            <a:schemeClr val="accent1"/>
+          </a:fillRef>
+          <a:effectRef idx="1">
+            <a:schemeClr val="accent1"/>
+          </a:effectRef>
+          <a:fontRef idx="minor">
+            <a:schemeClr val="tx1"/>
+          </a:fontRef>
+        </p:style>
+      </p:cxnSp>
+      <p:sp>
+        <p:nvSpPr>
+          <p:cNvPr id="9" name="TextBox 8"/>
+          <p:cNvSpPr txBox="1"/>
+          <p:nvPr/>
+        </p:nvSpPr>
+        <p:spPr>
+          <a:xfrm>
+            <a:off x="822960" y="2761487"/>
+            <a:ext cx="2926080" cy="457200"/>
+          </a:xfrm>
+          <a:prstGeom prst="rect">
+            <a:avLst/>
+          </a:prstGeom>
+          <a:noFill/>
+        </p:spPr>
+        <p:txBody>
+          <a:bodyPr wrap="square" anchor="t" lIns="0" rIns="0" tIns="0" bIns="0">
+            <a:spAutoFit/>
+          </a:bodyPr>
+          <a:lstStyle/>
+          <a:p>
+            <a:pPr algn="l">
+              <a:lnSpc>
+                <a:spcPct val="100000"/>
+              </a:lnSpc>
+              <a:spcAft>
+                <a:spcPts val="400"/>
+              </a:spcAft>
+            </a:pPr>
+            <a:r>
+              <a:rPr sz="1500" b="1" i="0">
+                <a:solidFill>
+                  <a:srgbClr val="FF6B6B"/>
+                </a:solidFill>
+                <a:latin typeface="Consolas"/>
+                <a:ea typeface="等线"/>
+                <a:cs typeface="等线"/>
+              </a:rPr>
+              <a:t>术语二</a:t>
+            </a:r>
+          </a:p>
+        </p:txBody>
+      </p:sp>
+      <p:sp>
+        <p:nvSpPr>
+          <p:cNvPr id="10" name="TextBox 9"/>
+          <p:cNvSpPr txBox="1"/>
+          <p:nvPr/>
+        </p:nvSpPr>
+        <p:spPr>
+          <a:xfrm>
+            <a:off x="3931920" y="2761487"/>
+            <a:ext cx="7498079" cy="457200"/>
+          </a:xfrm>
+          <a:prstGeom prst="rect">
+            <a:avLst/>
+          </a:prstGeom>
+          <a:noFill/>
+        </p:spPr>
+        <p:txBody>
+          <a:bodyPr wrap="square" anchor="t" lIns="0" rIns="0" tIns="0" bIns="0">
+            <a:spAutoFit/>
+          </a:bodyPr>
+          <a:lstStyle/>
+          <a:p>
+            <a:pPr algn="l">
+              <a:lnSpc>
+                <a:spcPct val="100000"/>
+              </a:lnSpc>
+              <a:spcAft>
+                <a:spcPts val="400"/>
+              </a:spcAft>
+            </a:pPr>
+            <a:r>
+              <a:rPr sz="1300" b="0" i="0">
+                <a:solidFill>
+                  <a:srgbClr val="F4F4F8"/>
+                </a:solidFill>
+                <a:latin typeface="Segoe UI"/>
+                <a:ea typeface="微软雅黑"/>
+                <a:cs typeface="微软雅黑"/>
+              </a:rPr>
+              <a:t>在此输入释义（占位）</a:t>
+            </a:r>
+          </a:p>
+        </p:txBody>
+      </p:sp>
+      <p:cxnSp>
+        <p:nvCxnSpPr>
+          <p:cNvPr id="11" name="Connector 10"/>
+          <p:cNvCxnSpPr/>
+          <p:nvPr/>
+        </p:nvCxnSpPr>
+        <p:spPr>
+          <a:xfrm>
+            <a:off x="822960" y="3291839"/>
+            <a:ext cx="10515600" cy="0"/>
+          </a:xfrm>
+          <a:prstGeom prst="line">
+            <a:avLst/>
+          </a:prstGeom>
+          <a:ln w="7620">
+            <a:solidFill>
+              <a:srgbClr val="3B3B63"/>
+            </a:solidFill>
+          </a:ln>
+          <a:effectLst/>
+        </p:spPr>
+        <p:style>
+          <a:lnRef idx="2">
+            <a:schemeClr val="accent1"/>
+          </a:lnRef>
+          <a:fillRef idx="0">
+            <a:schemeClr val="accent1"/>
+          </a:fillRef>
+          <a:effectRef idx="1">
+            <a:schemeClr val="accent1"/>
+          </a:effectRef>
+          <a:fontRef idx="minor">
+            <a:schemeClr val="tx1"/>
+          </a:fontRef>
+        </p:style>
+      </p:cxnSp>
+      <p:sp>
+        <p:nvSpPr>
+          <p:cNvPr id="12" name="TextBox 11"/>
+          <p:cNvSpPr txBox="1"/>
+          <p:nvPr/>
+        </p:nvSpPr>
+        <p:spPr>
+          <a:xfrm>
+            <a:off x="822960" y="3419856"/>
+            <a:ext cx="2926080" cy="457200"/>
+          </a:xfrm>
+          <a:prstGeom prst="rect">
+            <a:avLst/>
+          </a:prstGeom>
+          <a:noFill/>
+        </p:spPr>
+        <p:txBody>
+          <a:bodyPr wrap="square" anchor="t" lIns="0" rIns="0" tIns="0" bIns="0">
+            <a:spAutoFit/>
+          </a:bodyPr>
+          <a:lstStyle/>
+          <a:p>
+            <a:pPr algn="l">
+              <a:lnSpc>
+                <a:spcPct val="100000"/>
+              </a:lnSpc>
+              <a:spcAft>
+                <a:spcPts val="400"/>
+              </a:spcAft>
+            </a:pPr>
+            <a:r>
+              <a:rPr sz="1500" b="1" i="0">
+                <a:solidFill>
+                  <a:srgbClr val="FF6B6B"/>
+                </a:solidFill>
+                <a:latin typeface="Consolas"/>
+                <a:ea typeface="等线"/>
+                <a:cs typeface="等线"/>
+              </a:rPr>
+              <a:t>术语三</a:t>
+            </a:r>
+          </a:p>
+        </p:txBody>
+      </p:sp>
+      <p:sp>
+        <p:nvSpPr>
+          <p:cNvPr id="13" name="TextBox 12"/>
+          <p:cNvSpPr txBox="1"/>
+          <p:nvPr/>
+        </p:nvSpPr>
+        <p:spPr>
+          <a:xfrm>
+            <a:off x="3931920" y="3419856"/>
+            <a:ext cx="7498079" cy="457200"/>
+          </a:xfrm>
+          <a:prstGeom prst="rect">
+            <a:avLst/>
+          </a:prstGeom>
+          <a:noFill/>
+        </p:spPr>
+        <p:txBody>
+          <a:bodyPr wrap="square" anchor="t" lIns="0" rIns="0" tIns="0" bIns="0">
+            <a:spAutoFit/>
+          </a:bodyPr>
+          <a:lstStyle/>
+          <a:p>
+            <a:pPr algn="l">
+              <a:lnSpc>
+                <a:spcPct val="100000"/>
+              </a:lnSpc>
+              <a:spcAft>
+                <a:spcPts val="400"/>
+              </a:spcAft>
+            </a:pPr>
+            <a:r>
+              <a:rPr sz="1300" b="0" i="0">
+                <a:solidFill>
+                  <a:srgbClr val="F4F4F8"/>
+                </a:solidFill>
+                <a:latin typeface="Segoe UI"/>
+                <a:ea typeface="微软雅黑"/>
+                <a:cs typeface="微软雅黑"/>
+              </a:rPr>
+              <a:t>在此输入释义（占位）</a:t>
+            </a:r>
+          </a:p>
+        </p:txBody>
+      </p:sp>
+      <p:cxnSp>
+        <p:nvCxnSpPr>
+          <p:cNvPr id="14" name="Connector 13"/>
+          <p:cNvCxnSpPr/>
+          <p:nvPr/>
+        </p:nvCxnSpPr>
+        <p:spPr>
+          <a:xfrm>
+            <a:off x="822960" y="3950207"/>
+            <a:ext cx="10515600" cy="0"/>
+          </a:xfrm>
+          <a:prstGeom prst="line">
+            <a:avLst/>
+          </a:prstGeom>
+          <a:ln w="7620">
+            <a:solidFill>
+              <a:srgbClr val="3B3B63"/>
+            </a:solidFill>
+          </a:ln>
+          <a:effectLst/>
+        </p:spPr>
+        <p:style>
+          <a:lnRef idx="2">
+            <a:schemeClr val="accent1"/>
+          </a:lnRef>
+          <a:fillRef idx="0">
+            <a:schemeClr val="accent1"/>
+          </a:fillRef>
+          <a:effectRef idx="1">
+            <a:schemeClr val="accent1"/>
+          </a:effectRef>
+          <a:fontRef idx="minor">
+            <a:schemeClr val="tx1"/>
+          </a:fontRef>
+        </p:style>
+      </p:cxnSp>
+      <p:sp>
+        <p:nvSpPr>
+          <p:cNvPr id="15" name="TextBox 14"/>
+          <p:cNvSpPr txBox="1"/>
+          <p:nvPr/>
+        </p:nvSpPr>
+        <p:spPr>
+          <a:xfrm>
+            <a:off x="822960" y="4078224"/>
+            <a:ext cx="2926080" cy="457200"/>
+          </a:xfrm>
+          <a:prstGeom prst="rect">
+            <a:avLst/>
+          </a:prstGeom>
+          <a:noFill/>
+        </p:spPr>
+        <p:txBody>
+          <a:bodyPr wrap="square" anchor="t" lIns="0" rIns="0" tIns="0" bIns="0">
+            <a:spAutoFit/>
+          </a:bodyPr>
+          <a:lstStyle/>
+          <a:p>
+            <a:pPr algn="l">
+              <a:lnSpc>
+                <a:spcPct val="100000"/>
+              </a:lnSpc>
+              <a:spcAft>
+                <a:spcPts val="400"/>
+              </a:spcAft>
+            </a:pPr>
+            <a:r>
+              <a:rPr sz="1500" b="1" i="0">
+                <a:solidFill>
+                  <a:srgbClr val="FF6B6B"/>
+                </a:solidFill>
+                <a:latin typeface="Consolas"/>
+                <a:ea typeface="等线"/>
+                <a:cs typeface="等线"/>
+              </a:rPr>
+              <a:t>术语四</a:t>
+            </a:r>
+          </a:p>
+        </p:txBody>
+      </p:sp>
+      <p:sp>
+        <p:nvSpPr>
+          <p:cNvPr id="16" name="TextBox 15"/>
+          <p:cNvSpPr txBox="1"/>
+          <p:nvPr/>
+        </p:nvSpPr>
+        <p:spPr>
+          <a:xfrm>
+            <a:off x="3931920" y="4078224"/>
+            <a:ext cx="7498079" cy="457200"/>
+          </a:xfrm>
+          <a:prstGeom prst="rect">
+            <a:avLst/>
+          </a:prstGeom>
+          <a:noFill/>
+        </p:spPr>
+        <p:txBody>
+          <a:bodyPr wrap="square" anchor="t" lIns="0" rIns="0" tIns="0" bIns="0">
+            <a:spAutoFit/>
+          </a:bodyPr>
+          <a:lstStyle/>
+          <a:p>
+            <a:pPr algn="l">
+              <a:lnSpc>
+                <a:spcPct val="100000"/>
+              </a:lnSpc>
+              <a:spcAft>
+                <a:spcPts val="400"/>
+              </a:spcAft>
+            </a:pPr>
+            <a:r>
+              <a:rPr sz="1300" b="0" i="0">
+                <a:solidFill>
+                  <a:srgbClr val="F4F4F8"/>
+                </a:solidFill>
+                <a:latin typeface="Segoe UI"/>
+                <a:ea typeface="微软雅黑"/>
+                <a:cs typeface="微软雅黑"/>
+              </a:rPr>
+              <a:t>在此输入释义（占位）</a:t>
+            </a:r>
+          </a:p>
+        </p:txBody>
+      </p:sp>
+      <p:cxnSp>
+        <p:nvCxnSpPr>
+          <p:cNvPr id="17" name="Connector 16"/>
+          <p:cNvCxnSpPr/>
+          <p:nvPr/>
+        </p:nvCxnSpPr>
+        <p:spPr>
+          <a:xfrm>
+            <a:off x="822960" y="4608576"/>
+            <a:ext cx="10515600" cy="0"/>
+          </a:xfrm>
+          <a:prstGeom prst="line">
+            <a:avLst/>
+          </a:prstGeom>
+          <a:ln w="7620">
+            <a:solidFill>
+              <a:srgbClr val="3B3B63"/>
+            </a:solidFill>
+          </a:ln>
+          <a:effectLst/>
+        </p:spPr>
+        <p:style>
+          <a:lnRef idx="2">
+            <a:schemeClr val="accent1"/>
+          </a:lnRef>
+          <a:fillRef idx="0">
+            <a:schemeClr val="accent1"/>
+          </a:fillRef>
+          <a:effectRef idx="1">
+            <a:schemeClr val="accent1"/>
+          </a:effectRef>
+          <a:fontRef idx="minor">
+            <a:schemeClr val="tx1"/>
+          </a:fontRef>
+        </p:style>
+      </p:cxnSp>
+      <p:sp>
+        <p:nvSpPr>
+          <p:cNvPr id="18" name="Rectangle 17"/>
+          <p:cNvSpPr/>
+          <p:nvPr/>
+        </p:nvSpPr>
+        <p:spPr>
+          <a:xfrm>
+            <a:off x="822960" y="6291072"/>
+            <a:ext cx="10545775" cy="7315"/>
+          </a:xfrm>
+          <a:prstGeom prst="rect">
+            <a:avLst/>
+          </a:prstGeom>
+          <a:solidFill>
+            <a:srgbClr val="3B3B63"/>
+          </a:solidFill>
+          <a:ln>
+            <a:noFill/>
+          </a:ln>
+          <a:effectLst/>
+        </p:spPr>
+        <p:style>
+          <a:lnRef idx="1">
+            <a:schemeClr val="accent1"/>
+          </a:lnRef>
+          <a:fillRef idx="3">
+            <a:schemeClr val="accent1"/>
+          </a:fillRef>
+          <a:effectRef idx="2">
+            <a:schemeClr val="accent1"/>
+          </a:effectRef>
+          <a:fontRef idx="minor">
+            <a:schemeClr val="lt1"/>
+          </a:fontRef>
+        </p:style>
+        <p:txBody>
+          <a:bodyPr rtlCol="0" anchor="ctr"/>
+          <a:lstStyle/>
+          <a:p>
+            <a:pPr algn="ctr"/>
+          </a:p>
+        </p:txBody>
+      </p:sp>
+      <p:sp>
+        <p:nvSpPr>
+          <p:cNvPr id="19" name="TextBox 18"/>
+          <p:cNvSpPr txBox="1"/>
+          <p:nvPr/>
+        </p:nvSpPr>
+        <p:spPr>
+          <a:xfrm>
+            <a:off x="822960" y="6355080"/>
+            <a:ext cx="6583680" cy="274320"/>
+          </a:xfrm>
+          <a:prstGeom prst="rect">
+            <a:avLst/>
+          </a:prstGeom>
+          <a:noFill/>
+        </p:spPr>
+        <p:txBody>
+          <a:bodyPr wrap="square" anchor="t" lIns="0" rIns="0" tIns="0" bIns="0">
+            <a:spAutoFit/>
+          </a:bodyPr>
+          <a:lstStyle/>
+          <a:p>
+            <a:pPr algn="l">
+              <a:lnSpc>
+                <a:spcPct val="100000"/>
+              </a:lnSpc>
+              <a:spcAft>
+                <a:spcPts val="400"/>
+              </a:spcAft>
+            </a:pPr>
+            <a:r>
+              <a:rPr sz="900" b="0" i="0">
+                <a:solidFill>
+                  <a:srgbClr val="A6A6C9"/>
+                </a:solidFill>
+                <a:latin typeface="Segoe UI"/>
+                <a:ea typeface="微软雅黑"/>
+                <a:cs typeface="微软雅黑"/>
+              </a:rPr>
+              <a:t>复古像素  ·  Retro Pixel</a:t>
+            </a:r>
+          </a:p>
+        </p:txBody>
+      </p:sp>
+    </p:spTree>
+  </p:cSld>
+  <p:clrMapOvr>
+    <a:masterClrMapping/>
+  </p:clrMapOvr>
+  <p:transition spd="med">
+    <p:push/>
+  </p:transition>
+</p:sld>
+</file>
+
+<file path=ppt/slides/slide17.xml><?xml version="1.0" encoding="utf-8"?>
+<p:sld xmlns:a="http://schemas.openxmlformats.org/drawingml/2006/main" xmlns:p="http://schemas.openxmlformats.org/presentationml/2006/main" xmlns:r="http://schemas.openxmlformats.org/officeDocument/2006/relationships">
+  <p:cSld>
+    <p:spTree>
+      <p:nvGrpSpPr>
+        <p:cNvPr id="1" name=""/>
+        <p:cNvGrpSpPr/>
+        <p:nvPr/>
+      </p:nvGrpSpPr>
+      <p:grpSpPr/>
+      <p:sp>
+        <p:nvSpPr>
+          <p:cNvPr id="2" name="Rectangle 1"/>
+          <p:cNvSpPr/>
+          <p:nvPr/>
+        </p:nvSpPr>
+        <p:spPr>
+          <a:xfrm>
+            <a:off x="0" y="0"/>
+            <a:ext cx="12191695" cy="6858000"/>
+          </a:xfrm>
+          <a:prstGeom prst="rect">
+            <a:avLst/>
+          </a:prstGeom>
+          <a:solidFill>
+            <a:srgbClr val="1B1B2F"/>
+          </a:solidFill>
+          <a:ln>
+            <a:noFill/>
+          </a:ln>
+          <a:effectLst/>
+        </p:spPr>
+        <p:style>
+          <a:lnRef idx="1">
+            <a:schemeClr val="accent1"/>
+          </a:lnRef>
+          <a:fillRef idx="3">
+            <a:schemeClr val="accent1"/>
+          </a:fillRef>
+          <a:effectRef idx="2">
+            <a:schemeClr val="accent1"/>
+          </a:effectRef>
+          <a:fontRef idx="minor">
+            <a:schemeClr val="lt1"/>
+          </a:fontRef>
+        </p:style>
+        <p:txBody>
+          <a:bodyPr rtlCol="0" anchor="ctr"/>
+          <a:lstStyle/>
+          <a:p>
+            <a:pPr algn="ctr"/>
+          </a:p>
+        </p:txBody>
+      </p:sp>
+      <p:sp>
+        <p:nvSpPr>
+          <p:cNvPr id="3" name="TextBox 2"/>
+          <p:cNvSpPr txBox="1"/>
+          <p:nvPr/>
+        </p:nvSpPr>
+        <p:spPr>
+          <a:xfrm>
+            <a:off x="822960" y="566928"/>
+            <a:ext cx="7772400" cy="274320"/>
+          </a:xfrm>
+          <a:prstGeom prst="rect">
+            <a:avLst/>
+          </a:prstGeom>
+          <a:noFill/>
+        </p:spPr>
+        <p:txBody>
+          <a:bodyPr wrap="square" anchor="t" lIns="0" rIns="0" tIns="0" bIns="0">
+            <a:spAutoFit/>
+          </a:bodyPr>
+          <a:lstStyle/>
+          <a:p>
+            <a:pPr algn="l">
+              <a:lnSpc>
+                <a:spcPct val="100000"/>
+              </a:lnSpc>
+              <a:spcAft>
+                <a:spcPts val="400"/>
+              </a:spcAft>
+            </a:pPr>
+            <a:r>
+              <a:rPr sz="1150" b="1" i="0">
+                <a:solidFill>
+                  <a:srgbClr val="FF6B6B"/>
+                </a:solidFill>
+                <a:latin typeface="Segoe UI"/>
+                <a:ea typeface="微软雅黑"/>
+                <a:cs typeface="微软雅黑"/>
+              </a:rPr>
+              <a:t>HIGHLIGHT</a:t>
+            </a:r>
+          </a:p>
+        </p:txBody>
+      </p:sp>
+      <p:sp>
+        <p:nvSpPr>
+          <p:cNvPr id="4" name="TextBox 3"/>
+          <p:cNvSpPr txBox="1"/>
+          <p:nvPr/>
+        </p:nvSpPr>
+        <p:spPr>
+          <a:xfrm>
+            <a:off x="822960" y="868680"/>
+            <a:ext cx="10607040" cy="548640"/>
+          </a:xfrm>
+          <a:prstGeom prst="rect">
+            <a:avLst/>
+          </a:prstGeom>
+          <a:noFill/>
+        </p:spPr>
+        <p:txBody>
+          <a:bodyPr wrap="square" anchor="t" lIns="0" rIns="0" tIns="0" bIns="0">
+            <a:spAutoFit/>
+          </a:bodyPr>
+          <a:lstStyle/>
+          <a:p>
+            <a:pPr algn="l">
+              <a:lnSpc>
+                <a:spcPct val="100000"/>
+              </a:lnSpc>
+              <a:spcAft>
+                <a:spcPts val="400"/>
+              </a:spcAft>
+            </a:pPr>
+            <a:r>
+              <a:rPr sz="2800" b="1" i="0">
+                <a:solidFill>
+                  <a:srgbClr val="F4F4F8"/>
+                </a:solidFill>
+                <a:latin typeface="Consolas"/>
+                <a:ea typeface="等线"/>
+                <a:cs typeface="等线"/>
+              </a:rPr>
+              <a:t>关键指标</a:t>
+            </a:r>
+          </a:p>
+        </p:txBody>
+      </p:sp>
+      <p:sp>
+        <p:nvSpPr>
+          <p:cNvPr id="5" name="Rectangle 4"/>
+          <p:cNvSpPr/>
+          <p:nvPr/>
+        </p:nvSpPr>
+        <p:spPr>
+          <a:xfrm>
+            <a:off x="822960" y="1572768"/>
+            <a:ext cx="566928" cy="50292"/>
+          </a:xfrm>
+          <a:prstGeom prst="rect">
+            <a:avLst/>
+          </a:prstGeom>
+          <a:solidFill>
+            <a:srgbClr val="FF6B6B"/>
+          </a:solidFill>
+          <a:ln>
+            <a:noFill/>
+          </a:ln>
+          <a:effectLst/>
+        </p:spPr>
+        <p:style>
+          <a:lnRef idx="1">
+            <a:schemeClr val="accent1"/>
+          </a:lnRef>
+          <a:fillRef idx="3">
+            <a:schemeClr val="accent1"/>
+          </a:fillRef>
+          <a:effectRef idx="2">
+            <a:schemeClr val="accent1"/>
+          </a:effectRef>
+          <a:fontRef idx="minor">
+            <a:schemeClr val="lt1"/>
+          </a:fontRef>
+        </p:style>
+        <p:txBody>
+          <a:bodyPr rtlCol="0" anchor="ctr"/>
+          <a:lstStyle/>
+          <a:p>
+            <a:pPr algn="ctr"/>
+          </a:p>
+        </p:txBody>
+      </p:sp>
+      <p:sp>
+        <p:nvSpPr>
+          <p:cNvPr id="6" name="TextBox 5"/>
+          <p:cNvSpPr txBox="1"/>
+          <p:nvPr/>
+        </p:nvSpPr>
+        <p:spPr>
+          <a:xfrm>
+            <a:off x="822960" y="2194560"/>
+            <a:ext cx="4572000" cy="1463040"/>
+          </a:xfrm>
+          <a:prstGeom prst="rect">
+            <a:avLst/>
+          </a:prstGeom>
+          <a:noFill/>
+        </p:spPr>
+        <p:txBody>
+          <a:bodyPr wrap="square" anchor="t" lIns="0" rIns="0" tIns="0" bIns="0">
+            <a:spAutoFit/>
+          </a:bodyPr>
+          <a:lstStyle/>
+          <a:p>
+            <a:pPr algn="l">
+              <a:lnSpc>
+                <a:spcPct val="100000"/>
+              </a:lnSpc>
+              <a:spcAft>
+                <a:spcPts val="400"/>
+              </a:spcAft>
+            </a:pPr>
+            <a:r>
+              <a:rPr sz="7200" b="1" i="0">
+                <a:solidFill>
+                  <a:srgbClr val="FF6B6B"/>
+                </a:solidFill>
+                <a:latin typeface="Consolas"/>
+                <a:ea typeface="等线"/>
+                <a:cs typeface="等线"/>
+              </a:rPr>
+              <a:t>00%</a:t>
+            </a:r>
+          </a:p>
+        </p:txBody>
+      </p:sp>
+      <p:sp>
+        <p:nvSpPr>
+          <p:cNvPr id="7" name="TextBox 6"/>
+          <p:cNvSpPr txBox="1"/>
+          <p:nvPr/>
+        </p:nvSpPr>
+        <p:spPr>
+          <a:xfrm>
+            <a:off x="868680" y="3749039"/>
+            <a:ext cx="4572000" cy="731520"/>
+          </a:xfrm>
+          <a:prstGeom prst="rect">
+            <a:avLst/>
+          </a:prstGeom>
+          <a:noFill/>
+        </p:spPr>
+        <p:txBody>
+          <a:bodyPr wrap="square" anchor="t" lIns="0" rIns="0" tIns="0" bIns="0">
+            <a:spAutoFit/>
+          </a:bodyPr>
+          <a:lstStyle/>
+          <a:p>
+            <a:pPr algn="l">
+              <a:lnSpc>
+                <a:spcPct val="115000"/>
+              </a:lnSpc>
+              <a:spcAft>
+                <a:spcPts val="400"/>
+              </a:spcAft>
+            </a:pPr>
+            <a:r>
+              <a:rPr sz="1500" b="0" i="0">
+                <a:solidFill>
+                  <a:srgbClr val="A6A6C9"/>
+                </a:solidFill>
+                <a:latin typeface="Segoe UI"/>
+                <a:ea typeface="微软雅黑"/>
+                <a:cs typeface="微软雅黑"/>
+              </a:rPr>
+              <a:t>在此输入指标说明 · 占位文本</a:t>
+            </a:r>
+          </a:p>
+        </p:txBody>
+      </p:sp>
+      <p:sp>
+        <p:nvSpPr>
+          <p:cNvPr id="8" name="Rounded Rectangle 7"/>
+          <p:cNvSpPr/>
+          <p:nvPr/>
+        </p:nvSpPr>
+        <p:spPr>
+          <a:xfrm>
+            <a:off x="5852160" y="2194560"/>
+            <a:ext cx="5394960" cy="3566160"/>
+          </a:xfrm>
+          <a:prstGeom prst="roundRect">
+            <a:avLst>
+              <a:gd name="adj" fmla="val 5000"/>
+            </a:avLst>
+          </a:prstGeom>
+          <a:solidFill>
+            <a:srgbClr val="262647"/>
+          </a:solidFill>
+          <a:ln w="9525">
+            <a:solidFill>
+              <a:srgbClr val="3B3B63"/>
+            </a:solidFill>
+          </a:ln>
+          <a:effectLst/>
+        </p:spPr>
+        <p:style>
+          <a:lnRef idx="1">
+            <a:schemeClr val="accent1"/>
+          </a:lnRef>
+          <a:fillRef idx="3">
+            <a:schemeClr val="accent1"/>
+          </a:fillRef>
+          <a:effectRef idx="2">
+            <a:schemeClr val="accent1"/>
+          </a:effectRef>
+          <a:fontRef idx="minor">
+            <a:schemeClr val="lt1"/>
+          </a:fontRef>
+        </p:style>
+        <p:txBody>
+          <a:bodyPr rtlCol="0" anchor="ctr"/>
+          <a:lstStyle/>
+          <a:p>
+            <a:pPr algn="ctr"/>
+          </a:p>
+        </p:txBody>
+      </p:sp>
+      <p:sp>
+        <p:nvSpPr>
+          <p:cNvPr id="9" name="Rectangle 8"/>
+          <p:cNvSpPr/>
+          <p:nvPr/>
+        </p:nvSpPr>
+        <p:spPr>
+          <a:xfrm>
+            <a:off x="6309360" y="4370832"/>
+            <a:ext cx="438912" cy="1024127"/>
+          </a:xfrm>
+          <a:prstGeom prst="rect">
+            <a:avLst/>
+          </a:prstGeom>
+          <a:solidFill>
+            <a:srgbClr val="FF6B6B">
+              <a:alpha val="90000"/>
+            </a:srgbClr>
+          </a:solidFill>
+          <a:ln>
+            <a:noFill/>
+          </a:ln>
+          <a:effectLst/>
+        </p:spPr>
+        <p:style>
+          <a:lnRef idx="1">
+            <a:schemeClr val="accent1"/>
+          </a:lnRef>
+          <a:fillRef idx="3">
+            <a:schemeClr val="accent1"/>
+          </a:fillRef>
+          <a:effectRef idx="2">
+            <a:schemeClr val="accent1"/>
+          </a:effectRef>
+          <a:fontRef idx="minor">
+            <a:schemeClr val="lt1"/>
+          </a:fontRef>
+        </p:style>
+        <p:txBody>
+          <a:bodyPr rtlCol="0" anchor="ctr"/>
+          <a:lstStyle/>
+          <a:p>
+            <a:pPr algn="ctr"/>
+          </a:p>
+        </p:txBody>
+      </p:sp>
+      <p:sp>
+        <p:nvSpPr>
+          <p:cNvPr id="10" name="Rectangle 9"/>
+          <p:cNvSpPr/>
+          <p:nvPr/>
+        </p:nvSpPr>
+        <p:spPr>
+          <a:xfrm>
+            <a:off x="7004304" y="3730752"/>
+            <a:ext cx="438912" cy="1664207"/>
+          </a:xfrm>
+          <a:prstGeom prst="rect">
+            <a:avLst/>
+          </a:prstGeom>
+          <a:solidFill>
+            <a:srgbClr val="FFD93D">
+              <a:alpha val="90000"/>
+            </a:srgbClr>
+          </a:solidFill>
+          <a:ln>
+            <a:noFill/>
+          </a:ln>
+          <a:effectLst/>
+        </p:spPr>
+        <p:style>
+          <a:lnRef idx="1">
+            <a:schemeClr val="accent1"/>
+          </a:lnRef>
+          <a:fillRef idx="3">
+            <a:schemeClr val="accent1"/>
+          </a:fillRef>
+          <a:effectRef idx="2">
+            <a:schemeClr val="accent1"/>
+          </a:effectRef>
+          <a:fontRef idx="minor">
+            <a:schemeClr val="lt1"/>
+          </a:fontRef>
+        </p:style>
+        <p:txBody>
+          <a:bodyPr rtlCol="0" anchor="ctr"/>
+          <a:lstStyle/>
+          <a:p>
+            <a:pPr algn="ctr"/>
+          </a:p>
+        </p:txBody>
+      </p:sp>
+      <p:sp>
+        <p:nvSpPr>
+          <p:cNvPr id="11" name="Rectangle 10"/>
+          <p:cNvSpPr/>
+          <p:nvPr/>
+        </p:nvSpPr>
+        <p:spPr>
+          <a:xfrm>
+            <a:off x="7699248" y="4114800"/>
+            <a:ext cx="438912" cy="1280160"/>
+          </a:xfrm>
+          <a:prstGeom prst="rect">
+            <a:avLst/>
+          </a:prstGeom>
+          <a:solidFill>
+            <a:srgbClr val="FF6B6B">
+              <a:alpha val="90000"/>
+            </a:srgbClr>
+          </a:solidFill>
+          <a:ln>
+            <a:noFill/>
+          </a:ln>
+          <a:effectLst/>
+        </p:spPr>
+        <p:style>
+          <a:lnRef idx="1">
+            <a:schemeClr val="accent1"/>
+          </a:lnRef>
+          <a:fillRef idx="3">
+            <a:schemeClr val="accent1"/>
+          </a:fillRef>
+          <a:effectRef idx="2">
+            <a:schemeClr val="accent1"/>
+          </a:effectRef>
+          <a:fontRef idx="minor">
+            <a:schemeClr val="lt1"/>
+          </a:fontRef>
+        </p:style>
+        <p:txBody>
+          <a:bodyPr rtlCol="0" anchor="ctr"/>
+          <a:lstStyle/>
+          <a:p>
+            <a:pPr algn="ctr"/>
+          </a:p>
+        </p:txBody>
+      </p:sp>
+      <p:sp>
+        <p:nvSpPr>
+          <p:cNvPr id="12" name="Rectangle 11"/>
+          <p:cNvSpPr/>
+          <p:nvPr/>
+        </p:nvSpPr>
+        <p:spPr>
+          <a:xfrm>
+            <a:off x="8394192" y="3218688"/>
+            <a:ext cx="438912" cy="2176272"/>
+          </a:xfrm>
+          <a:prstGeom prst="rect">
+            <a:avLst/>
+          </a:prstGeom>
+          <a:solidFill>
+            <a:srgbClr val="FFD93D">
+              <a:alpha val="90000"/>
+            </a:srgbClr>
+          </a:solidFill>
+          <a:ln>
+            <a:noFill/>
+          </a:ln>
+          <a:effectLst/>
+        </p:spPr>
+        <p:style>
+          <a:lnRef idx="1">
+            <a:schemeClr val="accent1"/>
+          </a:lnRef>
+          <a:fillRef idx="3">
+            <a:schemeClr val="accent1"/>
+          </a:fillRef>
+          <a:effectRef idx="2">
+            <a:schemeClr val="accent1"/>
+          </a:effectRef>
+          <a:fontRef idx="minor">
+            <a:schemeClr val="lt1"/>
+          </a:fontRef>
+        </p:style>
+        <p:txBody>
+          <a:bodyPr rtlCol="0" anchor="ctr"/>
+          <a:lstStyle/>
+          <a:p>
+            <a:pPr algn="ctr"/>
+          </a:p>
+        </p:txBody>
+      </p:sp>
+      <p:sp>
+        <p:nvSpPr>
+          <p:cNvPr id="13" name="Rectangle 12"/>
+          <p:cNvSpPr/>
+          <p:nvPr/>
+        </p:nvSpPr>
+        <p:spPr>
+          <a:xfrm>
+            <a:off x="9089136" y="3858768"/>
+            <a:ext cx="438912" cy="1536192"/>
+          </a:xfrm>
+          <a:prstGeom prst="rect">
+            <a:avLst/>
+          </a:prstGeom>
+          <a:solidFill>
+            <a:srgbClr val="FF6B6B">
+              <a:alpha val="90000"/>
+            </a:srgbClr>
+          </a:solidFill>
+          <a:ln>
+            <a:noFill/>
+          </a:ln>
+          <a:effectLst/>
+        </p:spPr>
+        <p:style>
+          <a:lnRef idx="1">
+            <a:schemeClr val="accent1"/>
+          </a:lnRef>
+          <a:fillRef idx="3">
+            <a:schemeClr val="accent1"/>
+          </a:fillRef>
+          <a:effectRef idx="2">
+            <a:schemeClr val="accent1"/>
+          </a:effectRef>
+          <a:fontRef idx="minor">
+            <a:schemeClr val="lt1"/>
+          </a:fontRef>
+        </p:style>
+        <p:txBody>
+          <a:bodyPr rtlCol="0" anchor="ctr"/>
+          <a:lstStyle/>
+          <a:p>
+            <a:pPr algn="ctr"/>
+          </a:p>
+        </p:txBody>
+      </p:sp>
+      <p:sp>
+        <p:nvSpPr>
+          <p:cNvPr id="14" name="Rectangle 13"/>
+          <p:cNvSpPr/>
+          <p:nvPr/>
+        </p:nvSpPr>
+        <p:spPr>
+          <a:xfrm>
+            <a:off x="9784080" y="2962656"/>
+            <a:ext cx="438912" cy="2432303"/>
+          </a:xfrm>
+          <a:prstGeom prst="rect">
+            <a:avLst/>
+          </a:prstGeom>
+          <a:solidFill>
+            <a:srgbClr val="FFD93D">
+              <a:alpha val="90000"/>
+            </a:srgbClr>
+          </a:solidFill>
+          <a:ln>
+            <a:noFill/>
+          </a:ln>
+          <a:effectLst/>
+        </p:spPr>
+        <p:style>
+          <a:lnRef idx="1">
+            <a:schemeClr val="accent1"/>
+          </a:lnRef>
+          <a:fillRef idx="3">
+            <a:schemeClr val="accent1"/>
+          </a:fillRef>
+          <a:effectRef idx="2">
+            <a:schemeClr val="accent1"/>
+          </a:effectRef>
+          <a:fontRef idx="minor">
+            <a:schemeClr val="lt1"/>
+          </a:fontRef>
+        </p:style>
+        <p:txBody>
+          <a:bodyPr rtlCol="0" anchor="ctr"/>
+          <a:lstStyle/>
+          <a:p>
+            <a:pPr algn="ctr"/>
+          </a:p>
+        </p:txBody>
+      </p:sp>
+      <p:sp>
+        <p:nvSpPr>
+          <p:cNvPr id="15" name="Rectangle 14"/>
+          <p:cNvSpPr/>
+          <p:nvPr/>
+        </p:nvSpPr>
+        <p:spPr>
+          <a:xfrm>
+            <a:off x="10479024" y="3602736"/>
+            <a:ext cx="438912" cy="1792223"/>
+          </a:xfrm>
+          <a:prstGeom prst="rect">
+            <a:avLst/>
+          </a:prstGeom>
+          <a:solidFill>
+            <a:srgbClr val="FF6B6B">
+              <a:alpha val="90000"/>
+            </a:srgbClr>
+          </a:solidFill>
+          <a:ln>
+            <a:noFill/>
+          </a:ln>
+          <a:effectLst/>
+        </p:spPr>
+        <p:style>
+          <a:lnRef idx="1">
+            <a:schemeClr val="accent1"/>
+          </a:lnRef>
+          <a:fillRef idx="3">
+            <a:schemeClr val="accent1"/>
+          </a:fillRef>
+          <a:effectRef idx="2">
+            <a:schemeClr val="accent1"/>
+          </a:effectRef>
+          <a:fontRef idx="minor">
+            <a:schemeClr val="lt1"/>
+          </a:fontRef>
+        </p:style>
+        <p:txBody>
+          <a:bodyPr rtlCol="0" anchor="ctr"/>
+          <a:lstStyle/>
+          <a:p>
+            <a:pPr algn="ctr"/>
+          </a:p>
+        </p:txBody>
+      </p:sp>
+      <p:sp>
+        <p:nvSpPr>
+          <p:cNvPr id="16" name="Rectangle 15"/>
+          <p:cNvSpPr/>
+          <p:nvPr/>
+        </p:nvSpPr>
+        <p:spPr>
+          <a:xfrm>
+            <a:off x="822960" y="6291072"/>
+            <a:ext cx="10545775" cy="7315"/>
+          </a:xfrm>
+          <a:prstGeom prst="rect">
+            <a:avLst/>
+          </a:prstGeom>
+          <a:solidFill>
+            <a:srgbClr val="3B3B63"/>
+          </a:solidFill>
+          <a:ln>
+            <a:noFill/>
+          </a:ln>
+          <a:effectLst/>
+        </p:spPr>
+        <p:style>
+          <a:lnRef idx="1">
+            <a:schemeClr val="accent1"/>
+          </a:lnRef>
+          <a:fillRef idx="3">
+            <a:schemeClr val="accent1"/>
+          </a:fillRef>
+          <a:effectRef idx="2">
+            <a:schemeClr val="accent1"/>
+          </a:effectRef>
+          <a:fontRef idx="minor">
+            <a:schemeClr val="lt1"/>
+          </a:fontRef>
+        </p:style>
+        <p:txBody>
+          <a:bodyPr rtlCol="0" anchor="ctr"/>
+          <a:lstStyle/>
+          <a:p>
+            <a:pPr algn="ctr"/>
+          </a:p>
+        </p:txBody>
+      </p:sp>
+      <p:sp>
+        <p:nvSpPr>
+          <p:cNvPr id="17" name="TextBox 16"/>
+          <p:cNvSpPr txBox="1"/>
+          <p:nvPr/>
+        </p:nvSpPr>
+        <p:spPr>
+          <a:xfrm>
+            <a:off x="822960" y="6355080"/>
+            <a:ext cx="6583680" cy="274320"/>
+          </a:xfrm>
+          <a:prstGeom prst="rect">
+            <a:avLst/>
+          </a:prstGeom>
+          <a:noFill/>
+        </p:spPr>
+        <p:txBody>
+          <a:bodyPr wrap="square" anchor="t" lIns="0" rIns="0" tIns="0" bIns="0">
+            <a:spAutoFit/>
+          </a:bodyPr>
+          <a:lstStyle/>
+          <a:p>
+            <a:pPr algn="l">
+              <a:lnSpc>
+                <a:spcPct val="100000"/>
+              </a:lnSpc>
+              <a:spcAft>
+                <a:spcPts val="400"/>
+              </a:spcAft>
+            </a:pPr>
+            <a:r>
+              <a:rPr sz="900" b="0" i="0">
+                <a:solidFill>
+                  <a:srgbClr val="A6A6C9"/>
+                </a:solidFill>
+                <a:latin typeface="Segoe UI"/>
+                <a:ea typeface="微软雅黑"/>
+                <a:cs typeface="微软雅黑"/>
+              </a:rPr>
+              <a:t>复古像素  ·  Retro Pixel</a:t>
+            </a:r>
+          </a:p>
+        </p:txBody>
+      </p:sp>
+    </p:spTree>
+  </p:cSld>
+  <p:clrMapOvr>
+    <a:masterClrMapping/>
+  </p:clrMapOvr>
+  <p:transition spd="med">
+    <p:push/>
+  </p:transition>
+</p:sld>
+</file>
+
+<file path=ppt/slides/slide18.xml><?xml version="1.0" encoding="utf-8"?>
+<p:sld xmlns:a="http://schemas.openxmlformats.org/drawingml/2006/main" xmlns:p="http://schemas.openxmlformats.org/presentationml/2006/main" xmlns:r="http://schemas.openxmlformats.org/officeDocument/2006/relationships">
+  <p:cSld>
+    <p:spTree>
+      <p:nvGrpSpPr>
+        <p:cNvPr id="1" name=""/>
+        <p:cNvGrpSpPr/>
+        <p:nvPr/>
+      </p:nvGrpSpPr>
+      <p:grpSpPr/>
+      <p:sp>
+        <p:nvSpPr>
+          <p:cNvPr id="2" name="Rectangle 1"/>
+          <p:cNvSpPr/>
+          <p:nvPr/>
+        </p:nvSpPr>
+        <p:spPr>
+          <a:xfrm>
+            <a:off x="0" y="0"/>
+            <a:ext cx="12191695" cy="6858000"/>
+          </a:xfrm>
+          <a:prstGeom prst="rect">
+            <a:avLst/>
+          </a:prstGeom>
+          <a:solidFill>
+            <a:srgbClr val="1B1B2F"/>
+          </a:solidFill>
+          <a:ln>
+            <a:noFill/>
+          </a:ln>
+          <a:effectLst/>
+        </p:spPr>
+        <p:style>
+          <a:lnRef idx="1">
+            <a:schemeClr val="accent1"/>
+          </a:lnRef>
+          <a:fillRef idx="3">
+            <a:schemeClr val="accent1"/>
+          </a:fillRef>
+          <a:effectRef idx="2">
+            <a:schemeClr val="accent1"/>
+          </a:effectRef>
+          <a:fontRef idx="minor">
+            <a:schemeClr val="lt1"/>
+          </a:fontRef>
+        </p:style>
+        <p:txBody>
+          <a:bodyPr rtlCol="0" anchor="ctr"/>
+          <a:lstStyle/>
+          <a:p>
+            <a:pPr algn="ctr"/>
+          </a:p>
+        </p:txBody>
+      </p:sp>
+      <p:sp>
+        <p:nvSpPr>
           <p:cNvPr id="3" name="Rectangle 2"/>
           <p:cNvSpPr/>
           <p:nvPr/>
@@ -8157,7 +10727,7 @@
         <p:spPr>
           <a:xfrm>
             <a:off x="822960" y="6355080"/>
-            <a:ext cx="6400800" cy="274320"/>
+            <a:ext cx="6583680" cy="274320"/>
           </a:xfrm>
           <a:prstGeom prst="rect">
             <a:avLst/>
@@ -8197,6 +10767,9 @@
   <p:clrMapOvr>
     <a:masterClrMapping/>
   </p:clrMapOvr>
+  <p:transition spd="med">
+    <p:push/>
+  </p:transition>
 </p:sld>
 </file>
 
@@ -8307,7 +10880,7 @@
         <p:spPr>
           <a:xfrm>
             <a:off x="822960" y="868680"/>
-            <a:ext cx="10515600" cy="548640"/>
+            <a:ext cx="10607040" cy="548640"/>
           </a:xfrm>
           <a:prstGeom prst="rect">
             <a:avLst/>
@@ -8388,14 +10961,62 @@
       </p:sp>
       <p:sp>
         <p:nvSpPr>
-          <p:cNvPr id="6" name="TextBox 5"/>
+          <p:cNvPr id="6" name="Rounded Rectangle 5"/>
+          <p:cNvSpPr/>
+          <p:nvPr/>
+        </p:nvSpPr>
+        <p:spPr>
+          <a:xfrm>
+            <a:off x="822960" y="2377440"/>
+            <a:ext cx="2430703" cy="2194560"/>
+          </a:xfrm>
+          <a:prstGeom prst="roundRect">
+            <a:avLst>
+              <a:gd name="adj" fmla="val 6000"/>
+            </a:avLst>
+          </a:prstGeom>
+          <a:solidFill>
+            <a:srgbClr val="262647"/>
+          </a:solidFill>
+          <a:ln w="9525">
+            <a:solidFill>
+              <a:srgbClr val="3B3B63"/>
+            </a:solidFill>
+          </a:ln>
+          <a:effectLst/>
+        </p:spPr>
+        <p:style>
+          <a:lnRef idx="1">
+            <a:schemeClr val="accent1"/>
+          </a:lnRef>
+          <a:fillRef idx="3">
+            <a:schemeClr val="accent1"/>
+          </a:fillRef>
+          <a:effectRef idx="2">
+            <a:schemeClr val="accent1"/>
+          </a:effectRef>
+          <a:fontRef idx="minor">
+            <a:schemeClr val="lt1"/>
+          </a:fontRef>
+        </p:style>
+        <p:txBody>
+          <a:bodyPr rtlCol="0" anchor="ctr"/>
+          <a:lstStyle/>
+          <a:p>
+            <a:pPr algn="ctr"/>
+          </a:p>
+        </p:txBody>
+      </p:sp>
+      <p:sp>
+        <p:nvSpPr>
+          <p:cNvPr id="7" name="TextBox 6"/>
           <p:cNvSpPr txBox="1"/>
           <p:nvPr/>
         </p:nvSpPr>
         <p:spPr>
           <a:xfrm>
-            <a:off x="822960" y="2148840"/>
-            <a:ext cx="731520" cy="457200"/>
+            <a:off x="1143000" y="2606040"/>
+            <a:ext cx="1790623" cy="457200"/>
           </a:xfrm>
           <a:prstGeom prst="rect">
             <a:avLst/>
@@ -8417,13 +11038,13 @@
               </a:spcAft>
             </a:pPr>
             <a:r>
-              <a:rPr sz="1800" b="1" i="0">
+              <a:rPr sz="2600" b="1" i="0">
                 <a:solidFill>
                   <a:srgbClr val="FF6B6B"/>
                 </a:solidFill>
-                <a:latin typeface="Segoe UI"/>
-                <a:ea typeface="微软雅黑"/>
-                <a:cs typeface="微软雅黑"/>
+                <a:latin typeface="Consolas"/>
+                <a:ea typeface="等线"/>
+                <a:cs typeface="等线"/>
               </a:rPr>
               <a:t>01</a:t>
             </a:r>
@@ -8432,14 +11053,106 @@
       </p:sp>
       <p:sp>
         <p:nvSpPr>
-          <p:cNvPr id="7" name="TextBox 6"/>
+          <p:cNvPr id="8" name="TextBox 7"/>
           <p:cNvSpPr txBox="1"/>
           <p:nvPr/>
         </p:nvSpPr>
         <p:spPr>
           <a:xfrm>
-            <a:off x="1783080" y="2130552"/>
-            <a:ext cx="4206240" cy="457200"/>
+            <a:off x="1143000" y="3383280"/>
+            <a:ext cx="1790623" cy="914400"/>
+          </a:xfrm>
+          <a:prstGeom prst="rect">
+            <a:avLst/>
+          </a:prstGeom>
+          <a:noFill/>
+        </p:spPr>
+        <p:txBody>
+          <a:bodyPr wrap="square" anchor="t" lIns="0" rIns="0" tIns="0" bIns="0">
+            <a:spAutoFit/>
+          </a:bodyPr>
+          <a:lstStyle/>
+          <a:p>
+            <a:pPr algn="l">
+              <a:lnSpc>
+                <a:spcPct val="110000"/>
+              </a:lnSpc>
+              <a:spcAft>
+                <a:spcPts val="400"/>
+              </a:spcAft>
+            </a:pPr>
+            <a:r>
+              <a:rPr sz="1500" b="0" i="0">
+                <a:solidFill>
+                  <a:srgbClr val="F4F4F8"/>
+                </a:solidFill>
+                <a:latin typeface="Consolas"/>
+                <a:ea typeface="等线"/>
+                <a:cs typeface="等线"/>
+              </a:rPr>
+              <a:t>作者简介</a:t>
+            </a:r>
+          </a:p>
+        </p:txBody>
+      </p:sp>
+      <p:sp>
+        <p:nvSpPr>
+          <p:cNvPr id="9" name="Rounded Rectangle 8"/>
+          <p:cNvSpPr/>
+          <p:nvPr/>
+        </p:nvSpPr>
+        <p:spPr>
+          <a:xfrm>
+            <a:off x="3527983" y="2377440"/>
+            <a:ext cx="2430703" cy="2194560"/>
+          </a:xfrm>
+          <a:prstGeom prst="roundRect">
+            <a:avLst>
+              <a:gd name="adj" fmla="val 6000"/>
+            </a:avLst>
+          </a:prstGeom>
+          <a:solidFill>
+            <a:srgbClr val="262647"/>
+          </a:solidFill>
+          <a:ln w="9525">
+            <a:solidFill>
+              <a:srgbClr val="3B3B63"/>
+            </a:solidFill>
+          </a:ln>
+          <a:effectLst/>
+        </p:spPr>
+        <p:style>
+          <a:lnRef idx="1">
+            <a:schemeClr val="accent1"/>
+          </a:lnRef>
+          <a:fillRef idx="3">
+            <a:schemeClr val="accent1"/>
+          </a:fillRef>
+          <a:effectRef idx="2">
+            <a:schemeClr val="accent1"/>
+          </a:effectRef>
+          <a:fontRef idx="minor">
+            <a:schemeClr val="lt1"/>
+          </a:fontRef>
+        </p:style>
+        <p:txBody>
+          <a:bodyPr rtlCol="0" anchor="ctr"/>
+          <a:lstStyle/>
+          <a:p>
+            <a:pPr algn="ctr"/>
+          </a:p>
+        </p:txBody>
+      </p:sp>
+      <p:sp>
+        <p:nvSpPr>
+          <p:cNvPr id="10" name="TextBox 9"/>
+          <p:cNvSpPr txBox="1"/>
+          <p:nvPr/>
+        </p:nvSpPr>
+        <p:spPr>
+          <a:xfrm>
+            <a:off x="3848023" y="2606040"/>
+            <a:ext cx="1790623" cy="457200"/>
           </a:xfrm>
           <a:prstGeom prst="rect">
             <a:avLst/>
@@ -8461,33 +11174,82 @@
               </a:spcAft>
             </a:pPr>
             <a:r>
-              <a:rPr sz="1800" b="0" i="0">
-                <a:solidFill>
-                  <a:srgbClr val="F4F4F8"/>
+              <a:rPr sz="2600" b="1" i="0">
+                <a:solidFill>
+                  <a:srgbClr val="FF6B6B"/>
                 </a:solidFill>
                 <a:latin typeface="Consolas"/>
                 <a:ea typeface="等线"/>
                 <a:cs typeface="等线"/>
               </a:rPr>
-              <a:t>作者简介</a:t>
-            </a:r>
-          </a:p>
-        </p:txBody>
-      </p:sp>
-      <p:cxnSp>
-        <p:nvCxnSpPr>
-          <p:cNvPr id="8" name="Connector 7"/>
-          <p:cNvCxnSpPr/>
-          <p:nvPr/>
-        </p:nvCxnSpPr>
-        <p:spPr>
-          <a:xfrm>
-            <a:off x="1783080" y="2660904"/>
-            <a:ext cx="4160520" cy="0"/>
-          </a:xfrm>
-          <a:prstGeom prst="line">
-            <a:avLst/>
-          </a:prstGeom>
+              <a:t>02</a:t>
+            </a:r>
+          </a:p>
+        </p:txBody>
+      </p:sp>
+      <p:sp>
+        <p:nvSpPr>
+          <p:cNvPr id="11" name="TextBox 10"/>
+          <p:cNvSpPr txBox="1"/>
+          <p:nvPr/>
+        </p:nvSpPr>
+        <p:spPr>
+          <a:xfrm>
+            <a:off x="3848023" y="3383280"/>
+            <a:ext cx="1790623" cy="914400"/>
+          </a:xfrm>
+          <a:prstGeom prst="rect">
+            <a:avLst/>
+          </a:prstGeom>
+          <a:noFill/>
+        </p:spPr>
+        <p:txBody>
+          <a:bodyPr wrap="square" anchor="t" lIns="0" rIns="0" tIns="0" bIns="0">
+            <a:spAutoFit/>
+          </a:bodyPr>
+          <a:lstStyle/>
+          <a:p>
+            <a:pPr algn="l">
+              <a:lnSpc>
+                <a:spcPct val="110000"/>
+              </a:lnSpc>
+              <a:spcAft>
+                <a:spcPts val="400"/>
+              </a:spcAft>
+            </a:pPr>
+            <a:r>
+              <a:rPr sz="1500" b="0" i="0">
+                <a:solidFill>
+                  <a:srgbClr val="F4F4F8"/>
+                </a:solidFill>
+                <a:latin typeface="Consolas"/>
+                <a:ea typeface="等线"/>
+                <a:cs typeface="等线"/>
+              </a:rPr>
+              <a:t>代表作品</a:t>
+            </a:r>
+          </a:p>
+        </p:txBody>
+      </p:sp>
+      <p:sp>
+        <p:nvSpPr>
+          <p:cNvPr id="12" name="Rounded Rectangle 11"/>
+          <p:cNvSpPr/>
+          <p:nvPr/>
+        </p:nvSpPr>
+        <p:spPr>
+          <a:xfrm>
+            <a:off x="6233007" y="2377440"/>
+            <a:ext cx="2430703" cy="2194560"/>
+          </a:xfrm>
+          <a:prstGeom prst="roundRect">
+            <a:avLst>
+              <a:gd name="adj" fmla="val 6000"/>
+            </a:avLst>
+          </a:prstGeom>
+          <a:solidFill>
+            <a:srgbClr val="262647"/>
+          </a:solidFill>
           <a:ln w="9525">
             <a:solidFill>
               <a:srgbClr val="3B3B63"/>
@@ -8496,30 +11258,37 @@
           <a:effectLst/>
         </p:spPr>
         <p:style>
-          <a:lnRef idx="2">
+          <a:lnRef idx="1">
             <a:schemeClr val="accent1"/>
           </a:lnRef>
-          <a:fillRef idx="0">
+          <a:fillRef idx="3">
             <a:schemeClr val="accent1"/>
           </a:fillRef>
-          <a:effectRef idx="1">
+          <a:effectRef idx="2">
             <a:schemeClr val="accent1"/>
           </a:effectRef>
           <a:fontRef idx="minor">
-            <a:schemeClr val="tx1"/>
+            <a:schemeClr val="lt1"/>
           </a:fontRef>
         </p:style>
-      </p:cxnSp>
-      <p:sp>
-        <p:nvSpPr>
-          <p:cNvPr id="9" name="TextBox 8"/>
+        <p:txBody>
+          <a:bodyPr rtlCol="0" anchor="ctr"/>
+          <a:lstStyle/>
+          <a:p>
+            <a:pPr algn="ctr"/>
+          </a:p>
+        </p:txBody>
+      </p:sp>
+      <p:sp>
+        <p:nvSpPr>
+          <p:cNvPr id="13" name="TextBox 12"/>
           <p:cNvSpPr txBox="1"/>
           <p:nvPr/>
         </p:nvSpPr>
         <p:spPr>
           <a:xfrm>
-            <a:off x="6309360" y="2148840"/>
-            <a:ext cx="731520" cy="457200"/>
+            <a:off x="6553047" y="2606040"/>
+            <a:ext cx="1790623" cy="457200"/>
           </a:xfrm>
           <a:prstGeom prst="rect">
             <a:avLst/>
@@ -8541,29 +11310,121 @@
               </a:spcAft>
             </a:pPr>
             <a:r>
-              <a:rPr sz="1800" b="1" i="0">
+              <a:rPr sz="2600" b="1" i="0">
                 <a:solidFill>
                   <a:srgbClr val="FF6B6B"/>
                 </a:solidFill>
-                <a:latin typeface="Segoe UI"/>
-                <a:ea typeface="微软雅黑"/>
-                <a:cs typeface="微软雅黑"/>
+                <a:latin typeface="Consolas"/>
+                <a:ea typeface="等线"/>
+                <a:cs typeface="等线"/>
               </a:rPr>
-              <a:t>02</a:t>
-            </a:r>
-          </a:p>
-        </p:txBody>
-      </p:sp>
-      <p:sp>
-        <p:nvSpPr>
-          <p:cNvPr id="10" name="TextBox 9"/>
+              <a:t>03</a:t>
+            </a:r>
+          </a:p>
+        </p:txBody>
+      </p:sp>
+      <p:sp>
+        <p:nvSpPr>
+          <p:cNvPr id="14" name="TextBox 13"/>
           <p:cNvSpPr txBox="1"/>
           <p:nvPr/>
         </p:nvSpPr>
         <p:spPr>
           <a:xfrm>
-            <a:off x="7269480" y="2130552"/>
-            <a:ext cx="4206240" cy="457200"/>
+            <a:off x="6553047" y="3383280"/>
+            <a:ext cx="1790623" cy="914400"/>
+          </a:xfrm>
+          <a:prstGeom prst="rect">
+            <a:avLst/>
+          </a:prstGeom>
+          <a:noFill/>
+        </p:spPr>
+        <p:txBody>
+          <a:bodyPr wrap="square" anchor="t" lIns="0" rIns="0" tIns="0" bIns="0">
+            <a:spAutoFit/>
+          </a:bodyPr>
+          <a:lstStyle/>
+          <a:p>
+            <a:pPr algn="l">
+              <a:lnSpc>
+                <a:spcPct val="110000"/>
+              </a:lnSpc>
+              <a:spcAft>
+                <a:spcPts val="400"/>
+              </a:spcAft>
+            </a:pPr>
+            <a:r>
+              <a:rPr sz="1500" b="0" i="0">
+                <a:solidFill>
+                  <a:srgbClr val="F4F4F8"/>
+                </a:solidFill>
+                <a:latin typeface="Consolas"/>
+                <a:ea typeface="等线"/>
+                <a:cs typeface="等线"/>
+              </a:rPr>
+              <a:t>创作流程</a:t>
+            </a:r>
+          </a:p>
+        </p:txBody>
+      </p:sp>
+      <p:sp>
+        <p:nvSpPr>
+          <p:cNvPr id="15" name="Rounded Rectangle 14"/>
+          <p:cNvSpPr/>
+          <p:nvPr/>
+        </p:nvSpPr>
+        <p:spPr>
+          <a:xfrm>
+            <a:off x="8938031" y="2377440"/>
+            <a:ext cx="2430703" cy="2194560"/>
+          </a:xfrm>
+          <a:prstGeom prst="roundRect">
+            <a:avLst>
+              <a:gd name="adj" fmla="val 6000"/>
+            </a:avLst>
+          </a:prstGeom>
+          <a:solidFill>
+            <a:srgbClr val="262647"/>
+          </a:solidFill>
+          <a:ln w="9525">
+            <a:solidFill>
+              <a:srgbClr val="3B3B63"/>
+            </a:solidFill>
+          </a:ln>
+          <a:effectLst/>
+        </p:spPr>
+        <p:style>
+          <a:lnRef idx="1">
+            <a:schemeClr val="accent1"/>
+          </a:lnRef>
+          <a:fillRef idx="3">
+            <a:schemeClr val="accent1"/>
+          </a:fillRef>
+          <a:effectRef idx="2">
+            <a:schemeClr val="accent1"/>
+          </a:effectRef>
+          <a:fontRef idx="minor">
+            <a:schemeClr val="lt1"/>
+          </a:fontRef>
+        </p:style>
+        <p:txBody>
+          <a:bodyPr rtlCol="0" anchor="ctr"/>
+          <a:lstStyle/>
+          <a:p>
+            <a:pPr algn="ctr"/>
+          </a:p>
+        </p:txBody>
+      </p:sp>
+      <p:sp>
+        <p:nvSpPr>
+          <p:cNvPr id="16" name="TextBox 15"/>
+          <p:cNvSpPr txBox="1"/>
+          <p:nvPr/>
+        </p:nvSpPr>
+        <p:spPr>
+          <a:xfrm>
+            <a:off x="9258071" y="2606040"/>
+            <a:ext cx="1790623" cy="457200"/>
           </a:xfrm>
           <a:prstGeom prst="rect">
             <a:avLst/>
@@ -8585,65 +11446,117 @@
               </a:spcAft>
             </a:pPr>
             <a:r>
-              <a:rPr sz="1800" b="0" i="0">
-                <a:solidFill>
-                  <a:srgbClr val="F4F4F8"/>
+              <a:rPr sz="2600" b="1" i="0">
+                <a:solidFill>
+                  <a:srgbClr val="FF6B6B"/>
                 </a:solidFill>
                 <a:latin typeface="Consolas"/>
                 <a:ea typeface="等线"/>
                 <a:cs typeface="等线"/>
               </a:rPr>
-              <a:t>代表作品</a:t>
-            </a:r>
-          </a:p>
-        </p:txBody>
-      </p:sp>
-      <p:cxnSp>
-        <p:nvCxnSpPr>
-          <p:cNvPr id="11" name="Connector 10"/>
-          <p:cNvCxnSpPr/>
-          <p:nvPr/>
-        </p:nvCxnSpPr>
-        <p:spPr>
-          <a:xfrm>
-            <a:off x="7269480" y="2660904"/>
-            <a:ext cx="4160520" cy="0"/>
-          </a:xfrm>
-          <a:prstGeom prst="line">
-            <a:avLst/>
-          </a:prstGeom>
-          <a:ln w="9525">
-            <a:solidFill>
-              <a:srgbClr val="3B3B63"/>
-            </a:solidFill>
+              <a:t>04</a:t>
+            </a:r>
+          </a:p>
+        </p:txBody>
+      </p:sp>
+      <p:sp>
+        <p:nvSpPr>
+          <p:cNvPr id="17" name="TextBox 16"/>
+          <p:cNvSpPr txBox="1"/>
+          <p:nvPr/>
+        </p:nvSpPr>
+        <p:spPr>
+          <a:xfrm>
+            <a:off x="9258071" y="3383280"/>
+            <a:ext cx="1790623" cy="914400"/>
+          </a:xfrm>
+          <a:prstGeom prst="rect">
+            <a:avLst/>
+          </a:prstGeom>
+          <a:noFill/>
+        </p:spPr>
+        <p:txBody>
+          <a:bodyPr wrap="square" anchor="t" lIns="0" rIns="0" tIns="0" bIns="0">
+            <a:spAutoFit/>
+          </a:bodyPr>
+          <a:lstStyle/>
+          <a:p>
+            <a:pPr algn="l">
+              <a:lnSpc>
+                <a:spcPct val="110000"/>
+              </a:lnSpc>
+              <a:spcAft>
+                <a:spcPts val="400"/>
+              </a:spcAft>
+            </a:pPr>
+            <a:r>
+              <a:rPr sz="1500" b="0" i="0">
+                <a:solidFill>
+                  <a:srgbClr val="F4F4F8"/>
+                </a:solidFill>
+                <a:latin typeface="Consolas"/>
+                <a:ea typeface="等线"/>
+                <a:cs typeface="等线"/>
+              </a:rPr>
+              <a:t>联系方式</a:t>
+            </a:r>
+          </a:p>
+        </p:txBody>
+      </p:sp>
+      <p:sp>
+        <p:nvSpPr>
+          <p:cNvPr id="18" name="Rectangle 17"/>
+          <p:cNvSpPr/>
+          <p:nvPr/>
+        </p:nvSpPr>
+        <p:spPr>
+          <a:xfrm>
+            <a:off x="822960" y="6291072"/>
+            <a:ext cx="10545775" cy="7315"/>
+          </a:xfrm>
+          <a:prstGeom prst="rect">
+            <a:avLst/>
+          </a:prstGeom>
+          <a:solidFill>
+            <a:srgbClr val="3B3B63"/>
+          </a:solidFill>
+          <a:ln>
+            <a:noFill/>
           </a:ln>
           <a:effectLst/>
         </p:spPr>
         <p:style>
-          <a:lnRef idx="2">
+          <a:lnRef idx="1">
             <a:schemeClr val="accent1"/>
           </a:lnRef>
-          <a:fillRef idx="0">
+          <a:fillRef idx="3">
             <a:schemeClr val="accent1"/>
           </a:fillRef>
-          <a:effectRef idx="1">
+          <a:effectRef idx="2">
             <a:schemeClr val="accent1"/>
           </a:effectRef>
           <a:fontRef idx="minor">
-            <a:schemeClr val="tx1"/>
+            <a:schemeClr val="lt1"/>
           </a:fontRef>
         </p:style>
-      </p:cxnSp>
-      <p:sp>
-        <p:nvSpPr>
-          <p:cNvPr id="12" name="TextBox 11"/>
+        <p:txBody>
+          <a:bodyPr rtlCol="0" anchor="ctr"/>
+          <a:lstStyle/>
+          <a:p>
+            <a:pPr algn="ctr"/>
+          </a:p>
+        </p:txBody>
+      </p:sp>
+      <p:sp>
+        <p:nvSpPr>
+          <p:cNvPr id="19" name="TextBox 18"/>
           <p:cNvSpPr txBox="1"/>
           <p:nvPr/>
         </p:nvSpPr>
         <p:spPr>
           <a:xfrm>
-            <a:off x="822960" y="3063240"/>
-            <a:ext cx="731520" cy="457200"/>
+            <a:off x="822960" y="6355080"/>
+            <a:ext cx="6583680" cy="274320"/>
           </a:xfrm>
           <a:prstGeom prst="rect">
             <a:avLst/>
@@ -8665,298 +11578,6 @@
               </a:spcAft>
             </a:pPr>
             <a:r>
-              <a:rPr sz="1800" b="1" i="0">
-                <a:solidFill>
-                  <a:srgbClr val="FF6B6B"/>
-                </a:solidFill>
-                <a:latin typeface="Segoe UI"/>
-                <a:ea typeface="微软雅黑"/>
-                <a:cs typeface="微软雅黑"/>
-              </a:rPr>
-              <a:t>03</a:t>
-            </a:r>
-          </a:p>
-        </p:txBody>
-      </p:sp>
-      <p:sp>
-        <p:nvSpPr>
-          <p:cNvPr id="13" name="TextBox 12"/>
-          <p:cNvSpPr txBox="1"/>
-          <p:nvPr/>
-        </p:nvSpPr>
-        <p:spPr>
-          <a:xfrm>
-            <a:off x="1783080" y="3044952"/>
-            <a:ext cx="4206240" cy="457200"/>
-          </a:xfrm>
-          <a:prstGeom prst="rect">
-            <a:avLst/>
-          </a:prstGeom>
-          <a:noFill/>
-        </p:spPr>
-        <p:txBody>
-          <a:bodyPr wrap="square" anchor="t" lIns="0" rIns="0" tIns="0" bIns="0">
-            <a:spAutoFit/>
-          </a:bodyPr>
-          <a:lstStyle/>
-          <a:p>
-            <a:pPr algn="l">
-              <a:lnSpc>
-                <a:spcPct val="100000"/>
-              </a:lnSpc>
-              <a:spcAft>
-                <a:spcPts val="400"/>
-              </a:spcAft>
-            </a:pPr>
-            <a:r>
-              <a:rPr sz="1800" b="0" i="0">
-                <a:solidFill>
-                  <a:srgbClr val="F4F4F8"/>
-                </a:solidFill>
-                <a:latin typeface="Consolas"/>
-                <a:ea typeface="等线"/>
-                <a:cs typeface="等线"/>
-              </a:rPr>
-              <a:t>创作流程</a:t>
-            </a:r>
-          </a:p>
-        </p:txBody>
-      </p:sp>
-      <p:cxnSp>
-        <p:nvCxnSpPr>
-          <p:cNvPr id="14" name="Connector 13"/>
-          <p:cNvCxnSpPr/>
-          <p:nvPr/>
-        </p:nvCxnSpPr>
-        <p:spPr>
-          <a:xfrm>
-            <a:off x="1783080" y="3575304"/>
-            <a:ext cx="4160520" cy="0"/>
-          </a:xfrm>
-          <a:prstGeom prst="line">
-            <a:avLst/>
-          </a:prstGeom>
-          <a:ln w="9525">
-            <a:solidFill>
-              <a:srgbClr val="3B3B63"/>
-            </a:solidFill>
-          </a:ln>
-          <a:effectLst/>
-        </p:spPr>
-        <p:style>
-          <a:lnRef idx="2">
-            <a:schemeClr val="accent1"/>
-          </a:lnRef>
-          <a:fillRef idx="0">
-            <a:schemeClr val="accent1"/>
-          </a:fillRef>
-          <a:effectRef idx="1">
-            <a:schemeClr val="accent1"/>
-          </a:effectRef>
-          <a:fontRef idx="minor">
-            <a:schemeClr val="tx1"/>
-          </a:fontRef>
-        </p:style>
-      </p:cxnSp>
-      <p:sp>
-        <p:nvSpPr>
-          <p:cNvPr id="15" name="TextBox 14"/>
-          <p:cNvSpPr txBox="1"/>
-          <p:nvPr/>
-        </p:nvSpPr>
-        <p:spPr>
-          <a:xfrm>
-            <a:off x="6309360" y="3063240"/>
-            <a:ext cx="731520" cy="457200"/>
-          </a:xfrm>
-          <a:prstGeom prst="rect">
-            <a:avLst/>
-          </a:prstGeom>
-          <a:noFill/>
-        </p:spPr>
-        <p:txBody>
-          <a:bodyPr wrap="square" anchor="t" lIns="0" rIns="0" tIns="0" bIns="0">
-            <a:spAutoFit/>
-          </a:bodyPr>
-          <a:lstStyle/>
-          <a:p>
-            <a:pPr algn="l">
-              <a:lnSpc>
-                <a:spcPct val="100000"/>
-              </a:lnSpc>
-              <a:spcAft>
-                <a:spcPts val="400"/>
-              </a:spcAft>
-            </a:pPr>
-            <a:r>
-              <a:rPr sz="1800" b="1" i="0">
-                <a:solidFill>
-                  <a:srgbClr val="FF6B6B"/>
-                </a:solidFill>
-                <a:latin typeface="Segoe UI"/>
-                <a:ea typeface="微软雅黑"/>
-                <a:cs typeface="微软雅黑"/>
-              </a:rPr>
-              <a:t>04</a:t>
-            </a:r>
-          </a:p>
-        </p:txBody>
-      </p:sp>
-      <p:sp>
-        <p:nvSpPr>
-          <p:cNvPr id="16" name="TextBox 15"/>
-          <p:cNvSpPr txBox="1"/>
-          <p:nvPr/>
-        </p:nvSpPr>
-        <p:spPr>
-          <a:xfrm>
-            <a:off x="7269480" y="3044952"/>
-            <a:ext cx="4206240" cy="457200"/>
-          </a:xfrm>
-          <a:prstGeom prst="rect">
-            <a:avLst/>
-          </a:prstGeom>
-          <a:noFill/>
-        </p:spPr>
-        <p:txBody>
-          <a:bodyPr wrap="square" anchor="t" lIns="0" rIns="0" tIns="0" bIns="0">
-            <a:spAutoFit/>
-          </a:bodyPr>
-          <a:lstStyle/>
-          <a:p>
-            <a:pPr algn="l">
-              <a:lnSpc>
-                <a:spcPct val="100000"/>
-              </a:lnSpc>
-              <a:spcAft>
-                <a:spcPts val="400"/>
-              </a:spcAft>
-            </a:pPr>
-            <a:r>
-              <a:rPr sz="1800" b="0" i="0">
-                <a:solidFill>
-                  <a:srgbClr val="F4F4F8"/>
-                </a:solidFill>
-                <a:latin typeface="Consolas"/>
-                <a:ea typeface="等线"/>
-                <a:cs typeface="等线"/>
-              </a:rPr>
-              <a:t>联系方式</a:t>
-            </a:r>
-          </a:p>
-        </p:txBody>
-      </p:sp>
-      <p:cxnSp>
-        <p:nvCxnSpPr>
-          <p:cNvPr id="17" name="Connector 16"/>
-          <p:cNvCxnSpPr/>
-          <p:nvPr/>
-        </p:nvCxnSpPr>
-        <p:spPr>
-          <a:xfrm>
-            <a:off x="7269480" y="3575304"/>
-            <a:ext cx="4160520" cy="0"/>
-          </a:xfrm>
-          <a:prstGeom prst="line">
-            <a:avLst/>
-          </a:prstGeom>
-          <a:ln w="9525">
-            <a:solidFill>
-              <a:srgbClr val="3B3B63"/>
-            </a:solidFill>
-          </a:ln>
-          <a:effectLst/>
-        </p:spPr>
-        <p:style>
-          <a:lnRef idx="2">
-            <a:schemeClr val="accent1"/>
-          </a:lnRef>
-          <a:fillRef idx="0">
-            <a:schemeClr val="accent1"/>
-          </a:fillRef>
-          <a:effectRef idx="1">
-            <a:schemeClr val="accent1"/>
-          </a:effectRef>
-          <a:fontRef idx="minor">
-            <a:schemeClr val="tx1"/>
-          </a:fontRef>
-        </p:style>
-      </p:cxnSp>
-      <p:sp>
-        <p:nvSpPr>
-          <p:cNvPr id="18" name="Rectangle 17"/>
-          <p:cNvSpPr/>
-          <p:nvPr/>
-        </p:nvSpPr>
-        <p:spPr>
-          <a:xfrm>
-            <a:off x="822960" y="6291072"/>
-            <a:ext cx="10545775" cy="7315"/>
-          </a:xfrm>
-          <a:prstGeom prst="rect">
-            <a:avLst/>
-          </a:prstGeom>
-          <a:solidFill>
-            <a:srgbClr val="3B3B63"/>
-          </a:solidFill>
-          <a:ln>
-            <a:noFill/>
-          </a:ln>
-          <a:effectLst/>
-        </p:spPr>
-        <p:style>
-          <a:lnRef idx="1">
-            <a:schemeClr val="accent1"/>
-          </a:lnRef>
-          <a:fillRef idx="3">
-            <a:schemeClr val="accent1"/>
-          </a:fillRef>
-          <a:effectRef idx="2">
-            <a:schemeClr val="accent1"/>
-          </a:effectRef>
-          <a:fontRef idx="minor">
-            <a:schemeClr val="lt1"/>
-          </a:fontRef>
-        </p:style>
-        <p:txBody>
-          <a:bodyPr rtlCol="0" anchor="ctr"/>
-          <a:lstStyle/>
-          <a:p>
-            <a:pPr algn="ctr"/>
-          </a:p>
-        </p:txBody>
-      </p:sp>
-      <p:sp>
-        <p:nvSpPr>
-          <p:cNvPr id="19" name="TextBox 18"/>
-          <p:cNvSpPr txBox="1"/>
-          <p:nvPr/>
-        </p:nvSpPr>
-        <p:spPr>
-          <a:xfrm>
-            <a:off x="822960" y="6355080"/>
-            <a:ext cx="6400800" cy="274320"/>
-          </a:xfrm>
-          <a:prstGeom prst="rect">
-            <a:avLst/>
-          </a:prstGeom>
-          <a:noFill/>
-        </p:spPr>
-        <p:txBody>
-          <a:bodyPr wrap="square" anchor="t" lIns="0" rIns="0" tIns="0" bIns="0">
-            <a:spAutoFit/>
-          </a:bodyPr>
-          <a:lstStyle/>
-          <a:p>
-            <a:pPr algn="l">
-              <a:lnSpc>
-                <a:spcPct val="100000"/>
-              </a:lnSpc>
-              <a:spcAft>
-                <a:spcPts val="400"/>
-              </a:spcAft>
-            </a:pPr>
-            <a:r>
               <a:rPr sz="900" b="0" i="0">
                 <a:solidFill>
                   <a:srgbClr val="A6A6C9"/>
@@ -8975,6 +11596,9 @@
   <p:clrMapOvr>
     <a:masterClrMapping/>
   </p:clrMapOvr>
+  <p:transition spd="med">
+    <p:push/>
+  </p:transition>
 </p:sld>
 </file>
 
@@ -9537,7 +12161,7 @@
         <p:spPr>
           <a:xfrm>
             <a:off x="822960" y="6355080"/>
-            <a:ext cx="6400800" cy="274320"/>
+            <a:ext cx="6583680" cy="274320"/>
           </a:xfrm>
           <a:prstGeom prst="rect">
             <a:avLst/>
@@ -9577,6 +12201,9 @@
   <p:clrMapOvr>
     <a:masterClrMapping/>
   </p:clrMapOvr>
+  <p:transition spd="med">
+    <p:push/>
+  </p:transition>
 </p:sld>
 </file>
 
@@ -9673,7 +12300,7 @@
                 <a:ea typeface="微软雅黑"/>
                 <a:cs typeface="微软雅黑"/>
               </a:rPr>
-              <a:t>ABOUT</a:t>
+              <a:t>OVERVIEW</a:t>
             </a:r>
           </a:p>
         </p:txBody>
@@ -9687,7 +12314,7 @@
         <p:spPr>
           <a:xfrm>
             <a:off x="822960" y="868680"/>
-            <a:ext cx="10515600" cy="548640"/>
+            <a:ext cx="10607040" cy="548640"/>
           </a:xfrm>
           <a:prstGeom prst="rect">
             <a:avLst/>
@@ -9768,174 +12395,27 @@
       </p:sp>
       <p:sp>
         <p:nvSpPr>
-          <p:cNvPr id="6" name="TextBox 5"/>
-          <p:cNvSpPr txBox="1"/>
-          <p:nvPr/>
-        </p:nvSpPr>
-        <p:spPr>
-          <a:xfrm>
-            <a:off x="822960" y="2148840"/>
-            <a:ext cx="10424160" cy="3840480"/>
-          </a:xfrm>
-          <a:prstGeom prst="rect">
-            <a:avLst/>
-          </a:prstGeom>
-          <a:noFill/>
-        </p:spPr>
-        <p:txBody>
-          <a:bodyPr wrap="square">
-            <a:spAutoFit/>
-          </a:bodyPr>
-          <a:lstStyle/>
-          <a:p>
-            <a:pPr>
-              <a:lnSpc>
-                <a:spcPct val="115000"/>
-              </a:lnSpc>
-              <a:spcAft>
-                <a:spcPts val="1400"/>
-              </a:spcAft>
-            </a:pPr>
-            <a:r>
-              <a:rPr sz="1189">
-                <a:solidFill>
-                  <a:srgbClr val="FF6B6B"/>
-                </a:solidFill>
-                <a:latin typeface="Segoe UI"/>
-                <a:ea typeface="微软雅黑"/>
-                <a:cs typeface="微软雅黑"/>
-              </a:rPr>
-              <a:t>●  </a:t>
-            </a:r>
-            <a:r>
-              <a:rPr sz="1700">
-                <a:solidFill>
-                  <a:srgbClr val="A6A6C9"/>
-                </a:solidFill>
-                <a:latin typeface="Segoe UI"/>
-                <a:ea typeface="微软雅黑"/>
-                <a:cs typeface="微软雅黑"/>
-              </a:rPr>
-              <a:t>在此输入作品亮点一</a:t>
-            </a:r>
-          </a:p>
-          <a:p>
-            <a:pPr>
-              <a:lnSpc>
-                <a:spcPct val="115000"/>
-              </a:lnSpc>
-              <a:spcAft>
-                <a:spcPts val="1400"/>
-              </a:spcAft>
-            </a:pPr>
-            <a:r>
-              <a:rPr sz="1189">
-                <a:solidFill>
-                  <a:srgbClr val="FF6B6B"/>
-                </a:solidFill>
-                <a:latin typeface="Segoe UI"/>
-                <a:ea typeface="微软雅黑"/>
-                <a:cs typeface="微软雅黑"/>
-              </a:rPr>
-              <a:t>●  </a:t>
-            </a:r>
-            <a:r>
-              <a:rPr sz="1700">
-                <a:solidFill>
-                  <a:srgbClr val="A6A6C9"/>
-                </a:solidFill>
-                <a:latin typeface="Segoe UI"/>
-                <a:ea typeface="微软雅黑"/>
-                <a:cs typeface="微软雅黑"/>
-              </a:rPr>
-              <a:t>在此输入作品亮点二</a:t>
-            </a:r>
-          </a:p>
-          <a:p>
-            <a:pPr>
-              <a:lnSpc>
-                <a:spcPct val="115000"/>
-              </a:lnSpc>
-              <a:spcAft>
-                <a:spcPts val="1400"/>
-              </a:spcAft>
-            </a:pPr>
-            <a:r>
-              <a:rPr sz="1189">
-                <a:solidFill>
-                  <a:srgbClr val="FF6B6B"/>
-                </a:solidFill>
-                <a:latin typeface="Segoe UI"/>
-                <a:ea typeface="微软雅黑"/>
-                <a:cs typeface="微软雅黑"/>
-              </a:rPr>
-              <a:t>●  </a:t>
-            </a:r>
-            <a:r>
-              <a:rPr sz="1700">
-                <a:solidFill>
-                  <a:srgbClr val="A6A6C9"/>
-                </a:solidFill>
-                <a:latin typeface="Segoe UI"/>
-                <a:ea typeface="微软雅黑"/>
-                <a:cs typeface="微软雅黑"/>
-              </a:rPr>
-              <a:t>在此输入作品亮点三</a:t>
-            </a:r>
-          </a:p>
-          <a:p>
-            <a:pPr>
-              <a:lnSpc>
-                <a:spcPct val="115000"/>
-              </a:lnSpc>
-              <a:spcAft>
-                <a:spcPts val="1400"/>
-              </a:spcAft>
-            </a:pPr>
-            <a:r>
-              <a:rPr sz="1189">
-                <a:solidFill>
-                  <a:srgbClr val="FF6B6B"/>
-                </a:solidFill>
-                <a:latin typeface="Segoe UI"/>
-                <a:ea typeface="微软雅黑"/>
-                <a:cs typeface="微软雅黑"/>
-              </a:rPr>
-              <a:t>●  </a:t>
-            </a:r>
-            <a:r>
-              <a:rPr sz="1700">
-                <a:solidFill>
-                  <a:srgbClr val="A6A6C9"/>
-                </a:solidFill>
-                <a:latin typeface="Segoe UI"/>
-                <a:ea typeface="微软雅黑"/>
-                <a:cs typeface="微软雅黑"/>
-              </a:rPr>
-              <a:t>在此输入作品亮点四</a:t>
-            </a:r>
-          </a:p>
-        </p:txBody>
-      </p:sp>
-      <p:sp>
-        <p:nvSpPr>
-          <p:cNvPr id="7" name="Rectangle 6"/>
+          <p:cNvPr id="6" name="Rounded Rectangle 5"/>
           <p:cNvSpPr/>
           <p:nvPr/>
         </p:nvSpPr>
         <p:spPr>
           <a:xfrm>
-            <a:off x="822960" y="6291072"/>
-            <a:ext cx="10545775" cy="7315"/>
-          </a:xfrm>
-          <a:prstGeom prst="rect">
-            <a:avLst/>
+            <a:off x="822960" y="2103120"/>
+            <a:ext cx="10424160" cy="640080"/>
+          </a:xfrm>
+          <a:prstGeom prst="roundRect">
+            <a:avLst>
+              <a:gd name="adj" fmla="val 5000"/>
+            </a:avLst>
           </a:prstGeom>
           <a:solidFill>
-            <a:srgbClr val="3B3B63"/>
+            <a:srgbClr val="262647"/>
           </a:solidFill>
-          <a:ln>
-            <a:noFill/>
+          <a:ln w="9525">
+            <a:solidFill>
+              <a:srgbClr val="3B3B63"/>
+            </a:solidFill>
           </a:ln>
           <a:effectLst/>
         </p:spPr>
@@ -9963,14 +12443,14 @@
       </p:sp>
       <p:sp>
         <p:nvSpPr>
-          <p:cNvPr id="8" name="TextBox 7"/>
+          <p:cNvPr id="7" name="TextBox 6"/>
           <p:cNvSpPr txBox="1"/>
           <p:nvPr/>
         </p:nvSpPr>
         <p:spPr>
           <a:xfrm>
-            <a:off x="822960" y="6355080"/>
-            <a:ext cx="6400800" cy="274320"/>
+            <a:off x="1051560" y="2249424"/>
+            <a:ext cx="640080" cy="365760"/>
           </a:xfrm>
           <a:prstGeom prst="rect">
             <a:avLst/>
@@ -9992,6 +12472,546 @@
               </a:spcAft>
             </a:pPr>
             <a:r>
+              <a:rPr sz="1300" b="1" i="0">
+                <a:solidFill>
+                  <a:srgbClr val="FF6B6B"/>
+                </a:solidFill>
+                <a:latin typeface="Consolas"/>
+                <a:ea typeface="等线"/>
+                <a:cs typeface="等线"/>
+              </a:rPr>
+              <a:t>01</a:t>
+            </a:r>
+          </a:p>
+        </p:txBody>
+      </p:sp>
+      <p:sp>
+        <p:nvSpPr>
+          <p:cNvPr id="8" name="TextBox 7"/>
+          <p:cNvSpPr txBox="1"/>
+          <p:nvPr/>
+        </p:nvSpPr>
+        <p:spPr>
+          <a:xfrm>
+            <a:off x="1828800" y="2231136"/>
+            <a:ext cx="9144000" cy="411480"/>
+          </a:xfrm>
+          <a:prstGeom prst="rect">
+            <a:avLst/>
+          </a:prstGeom>
+          <a:noFill/>
+        </p:spPr>
+        <p:txBody>
+          <a:bodyPr wrap="square" anchor="t" lIns="0" rIns="0" tIns="0" bIns="0">
+            <a:spAutoFit/>
+          </a:bodyPr>
+          <a:lstStyle/>
+          <a:p>
+            <a:pPr algn="l">
+              <a:lnSpc>
+                <a:spcPct val="100000"/>
+              </a:lnSpc>
+              <a:spcAft>
+                <a:spcPts val="400"/>
+              </a:spcAft>
+            </a:pPr>
+            <a:r>
+              <a:rPr sz="1500" b="0" i="0">
+                <a:solidFill>
+                  <a:srgbClr val="F4F4F8"/>
+                </a:solidFill>
+                <a:latin typeface="Consolas"/>
+                <a:ea typeface="等线"/>
+                <a:cs typeface="等线"/>
+              </a:rPr>
+              <a:t>在此输入「作者简介」的要点一</a:t>
+            </a:r>
+          </a:p>
+        </p:txBody>
+      </p:sp>
+      <p:sp>
+        <p:nvSpPr>
+          <p:cNvPr id="9" name="Rounded Rectangle 8"/>
+          <p:cNvSpPr/>
+          <p:nvPr/>
+        </p:nvSpPr>
+        <p:spPr>
+          <a:xfrm>
+            <a:off x="822960" y="2889503"/>
+            <a:ext cx="10424160" cy="640080"/>
+          </a:xfrm>
+          <a:prstGeom prst="roundRect">
+            <a:avLst>
+              <a:gd name="adj" fmla="val 5000"/>
+            </a:avLst>
+          </a:prstGeom>
+          <a:solidFill>
+            <a:srgbClr val="262647"/>
+          </a:solidFill>
+          <a:ln w="9525">
+            <a:solidFill>
+              <a:srgbClr val="3B3B63"/>
+            </a:solidFill>
+          </a:ln>
+          <a:effectLst/>
+        </p:spPr>
+        <p:style>
+          <a:lnRef idx="1">
+            <a:schemeClr val="accent1"/>
+          </a:lnRef>
+          <a:fillRef idx="3">
+            <a:schemeClr val="accent1"/>
+          </a:fillRef>
+          <a:effectRef idx="2">
+            <a:schemeClr val="accent1"/>
+          </a:effectRef>
+          <a:fontRef idx="minor">
+            <a:schemeClr val="lt1"/>
+          </a:fontRef>
+        </p:style>
+        <p:txBody>
+          <a:bodyPr rtlCol="0" anchor="ctr"/>
+          <a:lstStyle/>
+          <a:p>
+            <a:pPr algn="ctr"/>
+          </a:p>
+        </p:txBody>
+      </p:sp>
+      <p:sp>
+        <p:nvSpPr>
+          <p:cNvPr id="10" name="TextBox 9"/>
+          <p:cNvSpPr txBox="1"/>
+          <p:nvPr/>
+        </p:nvSpPr>
+        <p:spPr>
+          <a:xfrm>
+            <a:off x="1051560" y="3035808"/>
+            <a:ext cx="640080" cy="365760"/>
+          </a:xfrm>
+          <a:prstGeom prst="rect">
+            <a:avLst/>
+          </a:prstGeom>
+          <a:noFill/>
+        </p:spPr>
+        <p:txBody>
+          <a:bodyPr wrap="square" anchor="t" lIns="0" rIns="0" tIns="0" bIns="0">
+            <a:spAutoFit/>
+          </a:bodyPr>
+          <a:lstStyle/>
+          <a:p>
+            <a:pPr algn="l">
+              <a:lnSpc>
+                <a:spcPct val="100000"/>
+              </a:lnSpc>
+              <a:spcAft>
+                <a:spcPts val="400"/>
+              </a:spcAft>
+            </a:pPr>
+            <a:r>
+              <a:rPr sz="1300" b="1" i="0">
+                <a:solidFill>
+                  <a:srgbClr val="FF6B6B"/>
+                </a:solidFill>
+                <a:latin typeface="Consolas"/>
+                <a:ea typeface="等线"/>
+                <a:cs typeface="等线"/>
+              </a:rPr>
+              <a:t>02</a:t>
+            </a:r>
+          </a:p>
+        </p:txBody>
+      </p:sp>
+      <p:sp>
+        <p:nvSpPr>
+          <p:cNvPr id="11" name="TextBox 10"/>
+          <p:cNvSpPr txBox="1"/>
+          <p:nvPr/>
+        </p:nvSpPr>
+        <p:spPr>
+          <a:xfrm>
+            <a:off x="1828800" y="3017520"/>
+            <a:ext cx="9144000" cy="411480"/>
+          </a:xfrm>
+          <a:prstGeom prst="rect">
+            <a:avLst/>
+          </a:prstGeom>
+          <a:noFill/>
+        </p:spPr>
+        <p:txBody>
+          <a:bodyPr wrap="square" anchor="t" lIns="0" rIns="0" tIns="0" bIns="0">
+            <a:spAutoFit/>
+          </a:bodyPr>
+          <a:lstStyle/>
+          <a:p>
+            <a:pPr algn="l">
+              <a:lnSpc>
+                <a:spcPct val="100000"/>
+              </a:lnSpc>
+              <a:spcAft>
+                <a:spcPts val="400"/>
+              </a:spcAft>
+            </a:pPr>
+            <a:r>
+              <a:rPr sz="1500" b="0" i="0">
+                <a:solidFill>
+                  <a:srgbClr val="F4F4F8"/>
+                </a:solidFill>
+                <a:latin typeface="Consolas"/>
+                <a:ea typeface="等线"/>
+                <a:cs typeface="等线"/>
+              </a:rPr>
+              <a:t>在此输入「作者简介」的要点二</a:t>
+            </a:r>
+          </a:p>
+        </p:txBody>
+      </p:sp>
+      <p:sp>
+        <p:nvSpPr>
+          <p:cNvPr id="12" name="Rounded Rectangle 11"/>
+          <p:cNvSpPr/>
+          <p:nvPr/>
+        </p:nvSpPr>
+        <p:spPr>
+          <a:xfrm>
+            <a:off x="822960" y="3675887"/>
+            <a:ext cx="10424160" cy="640080"/>
+          </a:xfrm>
+          <a:prstGeom prst="roundRect">
+            <a:avLst>
+              <a:gd name="adj" fmla="val 5000"/>
+            </a:avLst>
+          </a:prstGeom>
+          <a:solidFill>
+            <a:srgbClr val="262647"/>
+          </a:solidFill>
+          <a:ln w="9525">
+            <a:solidFill>
+              <a:srgbClr val="3B3B63"/>
+            </a:solidFill>
+          </a:ln>
+          <a:effectLst/>
+        </p:spPr>
+        <p:style>
+          <a:lnRef idx="1">
+            <a:schemeClr val="accent1"/>
+          </a:lnRef>
+          <a:fillRef idx="3">
+            <a:schemeClr val="accent1"/>
+          </a:fillRef>
+          <a:effectRef idx="2">
+            <a:schemeClr val="accent1"/>
+          </a:effectRef>
+          <a:fontRef idx="minor">
+            <a:schemeClr val="lt1"/>
+          </a:fontRef>
+        </p:style>
+        <p:txBody>
+          <a:bodyPr rtlCol="0" anchor="ctr"/>
+          <a:lstStyle/>
+          <a:p>
+            <a:pPr algn="ctr"/>
+          </a:p>
+        </p:txBody>
+      </p:sp>
+      <p:sp>
+        <p:nvSpPr>
+          <p:cNvPr id="13" name="TextBox 12"/>
+          <p:cNvSpPr txBox="1"/>
+          <p:nvPr/>
+        </p:nvSpPr>
+        <p:spPr>
+          <a:xfrm>
+            <a:off x="1051560" y="3822191"/>
+            <a:ext cx="640080" cy="365760"/>
+          </a:xfrm>
+          <a:prstGeom prst="rect">
+            <a:avLst/>
+          </a:prstGeom>
+          <a:noFill/>
+        </p:spPr>
+        <p:txBody>
+          <a:bodyPr wrap="square" anchor="t" lIns="0" rIns="0" tIns="0" bIns="0">
+            <a:spAutoFit/>
+          </a:bodyPr>
+          <a:lstStyle/>
+          <a:p>
+            <a:pPr algn="l">
+              <a:lnSpc>
+                <a:spcPct val="100000"/>
+              </a:lnSpc>
+              <a:spcAft>
+                <a:spcPts val="400"/>
+              </a:spcAft>
+            </a:pPr>
+            <a:r>
+              <a:rPr sz="1300" b="1" i="0">
+                <a:solidFill>
+                  <a:srgbClr val="FF6B6B"/>
+                </a:solidFill>
+                <a:latin typeface="Consolas"/>
+                <a:ea typeface="等线"/>
+                <a:cs typeface="等线"/>
+              </a:rPr>
+              <a:t>03</a:t>
+            </a:r>
+          </a:p>
+        </p:txBody>
+      </p:sp>
+      <p:sp>
+        <p:nvSpPr>
+          <p:cNvPr id="14" name="TextBox 13"/>
+          <p:cNvSpPr txBox="1"/>
+          <p:nvPr/>
+        </p:nvSpPr>
+        <p:spPr>
+          <a:xfrm>
+            <a:off x="1828800" y="3803903"/>
+            <a:ext cx="9144000" cy="411480"/>
+          </a:xfrm>
+          <a:prstGeom prst="rect">
+            <a:avLst/>
+          </a:prstGeom>
+          <a:noFill/>
+        </p:spPr>
+        <p:txBody>
+          <a:bodyPr wrap="square" anchor="t" lIns="0" rIns="0" tIns="0" bIns="0">
+            <a:spAutoFit/>
+          </a:bodyPr>
+          <a:lstStyle/>
+          <a:p>
+            <a:pPr algn="l">
+              <a:lnSpc>
+                <a:spcPct val="100000"/>
+              </a:lnSpc>
+              <a:spcAft>
+                <a:spcPts val="400"/>
+              </a:spcAft>
+            </a:pPr>
+            <a:r>
+              <a:rPr sz="1500" b="0" i="0">
+                <a:solidFill>
+                  <a:srgbClr val="F4F4F8"/>
+                </a:solidFill>
+                <a:latin typeface="Consolas"/>
+                <a:ea typeface="等线"/>
+                <a:cs typeface="等线"/>
+              </a:rPr>
+              <a:t>在此输入「作者简介」的要点三</a:t>
+            </a:r>
+          </a:p>
+        </p:txBody>
+      </p:sp>
+      <p:sp>
+        <p:nvSpPr>
+          <p:cNvPr id="15" name="Rounded Rectangle 14"/>
+          <p:cNvSpPr/>
+          <p:nvPr/>
+        </p:nvSpPr>
+        <p:spPr>
+          <a:xfrm>
+            <a:off x="822960" y="4462272"/>
+            <a:ext cx="10424160" cy="640080"/>
+          </a:xfrm>
+          <a:prstGeom prst="roundRect">
+            <a:avLst>
+              <a:gd name="adj" fmla="val 5000"/>
+            </a:avLst>
+          </a:prstGeom>
+          <a:solidFill>
+            <a:srgbClr val="262647"/>
+          </a:solidFill>
+          <a:ln w="9525">
+            <a:solidFill>
+              <a:srgbClr val="3B3B63"/>
+            </a:solidFill>
+          </a:ln>
+          <a:effectLst/>
+        </p:spPr>
+        <p:style>
+          <a:lnRef idx="1">
+            <a:schemeClr val="accent1"/>
+          </a:lnRef>
+          <a:fillRef idx="3">
+            <a:schemeClr val="accent1"/>
+          </a:fillRef>
+          <a:effectRef idx="2">
+            <a:schemeClr val="accent1"/>
+          </a:effectRef>
+          <a:fontRef idx="minor">
+            <a:schemeClr val="lt1"/>
+          </a:fontRef>
+        </p:style>
+        <p:txBody>
+          <a:bodyPr rtlCol="0" anchor="ctr"/>
+          <a:lstStyle/>
+          <a:p>
+            <a:pPr algn="ctr"/>
+          </a:p>
+        </p:txBody>
+      </p:sp>
+      <p:sp>
+        <p:nvSpPr>
+          <p:cNvPr id="16" name="TextBox 15"/>
+          <p:cNvSpPr txBox="1"/>
+          <p:nvPr/>
+        </p:nvSpPr>
+        <p:spPr>
+          <a:xfrm>
+            <a:off x="1051560" y="4608576"/>
+            <a:ext cx="640080" cy="365760"/>
+          </a:xfrm>
+          <a:prstGeom prst="rect">
+            <a:avLst/>
+          </a:prstGeom>
+          <a:noFill/>
+        </p:spPr>
+        <p:txBody>
+          <a:bodyPr wrap="square" anchor="t" lIns="0" rIns="0" tIns="0" bIns="0">
+            <a:spAutoFit/>
+          </a:bodyPr>
+          <a:lstStyle/>
+          <a:p>
+            <a:pPr algn="l">
+              <a:lnSpc>
+                <a:spcPct val="100000"/>
+              </a:lnSpc>
+              <a:spcAft>
+                <a:spcPts val="400"/>
+              </a:spcAft>
+            </a:pPr>
+            <a:r>
+              <a:rPr sz="1300" b="1" i="0">
+                <a:solidFill>
+                  <a:srgbClr val="FF6B6B"/>
+                </a:solidFill>
+                <a:latin typeface="Consolas"/>
+                <a:ea typeface="等线"/>
+                <a:cs typeface="等线"/>
+              </a:rPr>
+              <a:t>04</a:t>
+            </a:r>
+          </a:p>
+        </p:txBody>
+      </p:sp>
+      <p:sp>
+        <p:nvSpPr>
+          <p:cNvPr id="17" name="TextBox 16"/>
+          <p:cNvSpPr txBox="1"/>
+          <p:nvPr/>
+        </p:nvSpPr>
+        <p:spPr>
+          <a:xfrm>
+            <a:off x="1828800" y="4590288"/>
+            <a:ext cx="9144000" cy="411480"/>
+          </a:xfrm>
+          <a:prstGeom prst="rect">
+            <a:avLst/>
+          </a:prstGeom>
+          <a:noFill/>
+        </p:spPr>
+        <p:txBody>
+          <a:bodyPr wrap="square" anchor="t" lIns="0" rIns="0" tIns="0" bIns="0">
+            <a:spAutoFit/>
+          </a:bodyPr>
+          <a:lstStyle/>
+          <a:p>
+            <a:pPr algn="l">
+              <a:lnSpc>
+                <a:spcPct val="100000"/>
+              </a:lnSpc>
+              <a:spcAft>
+                <a:spcPts val="400"/>
+              </a:spcAft>
+            </a:pPr>
+            <a:r>
+              <a:rPr sz="1500" b="0" i="0">
+                <a:solidFill>
+                  <a:srgbClr val="F4F4F8"/>
+                </a:solidFill>
+                <a:latin typeface="Consolas"/>
+                <a:ea typeface="等线"/>
+                <a:cs typeface="等线"/>
+              </a:rPr>
+              <a:t>在此输入「作者简介」的要点四</a:t>
+            </a:r>
+          </a:p>
+        </p:txBody>
+      </p:sp>
+      <p:sp>
+        <p:nvSpPr>
+          <p:cNvPr id="18" name="Rectangle 17"/>
+          <p:cNvSpPr/>
+          <p:nvPr/>
+        </p:nvSpPr>
+        <p:spPr>
+          <a:xfrm>
+            <a:off x="822960" y="6291072"/>
+            <a:ext cx="10545775" cy="7315"/>
+          </a:xfrm>
+          <a:prstGeom prst="rect">
+            <a:avLst/>
+          </a:prstGeom>
+          <a:solidFill>
+            <a:srgbClr val="3B3B63"/>
+          </a:solidFill>
+          <a:ln>
+            <a:noFill/>
+          </a:ln>
+          <a:effectLst/>
+        </p:spPr>
+        <p:style>
+          <a:lnRef idx="1">
+            <a:schemeClr val="accent1"/>
+          </a:lnRef>
+          <a:fillRef idx="3">
+            <a:schemeClr val="accent1"/>
+          </a:fillRef>
+          <a:effectRef idx="2">
+            <a:schemeClr val="accent1"/>
+          </a:effectRef>
+          <a:fontRef idx="minor">
+            <a:schemeClr val="lt1"/>
+          </a:fontRef>
+        </p:style>
+        <p:txBody>
+          <a:bodyPr rtlCol="0" anchor="ctr"/>
+          <a:lstStyle/>
+          <a:p>
+            <a:pPr algn="ctr"/>
+          </a:p>
+        </p:txBody>
+      </p:sp>
+      <p:sp>
+        <p:nvSpPr>
+          <p:cNvPr id="19" name="TextBox 18"/>
+          <p:cNvSpPr txBox="1"/>
+          <p:nvPr/>
+        </p:nvSpPr>
+        <p:spPr>
+          <a:xfrm>
+            <a:off x="822960" y="6355080"/>
+            <a:ext cx="6583680" cy="274320"/>
+          </a:xfrm>
+          <a:prstGeom prst="rect">
+            <a:avLst/>
+          </a:prstGeom>
+          <a:noFill/>
+        </p:spPr>
+        <p:txBody>
+          <a:bodyPr wrap="square" anchor="t" lIns="0" rIns="0" tIns="0" bIns="0">
+            <a:spAutoFit/>
+          </a:bodyPr>
+          <a:lstStyle/>
+          <a:p>
+            <a:pPr algn="l">
+              <a:lnSpc>
+                <a:spcPct val="100000"/>
+              </a:lnSpc>
+              <a:spcAft>
+                <a:spcPts val="400"/>
+              </a:spcAft>
+            </a:pPr>
+            <a:r>
               <a:rPr sz="900" b="0" i="0">
                 <a:solidFill>
                   <a:srgbClr val="A6A6C9"/>
@@ -10010,6 +13030,9 @@
   <p:clrMapOvr>
     <a:masterClrMapping/>
   </p:clrMapOvr>
+  <p:transition spd="med">
+    <p:push/>
+  </p:transition>
 </p:sld>
 </file>
 
@@ -10106,7 +13129,7 @@
                 <a:ea typeface="微软雅黑"/>
                 <a:cs typeface="微软雅黑"/>
               </a:rPr>
-              <a:t>ABOUT</a:t>
+              <a:t>KEY POINTS</a:t>
             </a:r>
           </a:p>
         </p:txBody>
@@ -10120,7 +13143,7 @@
         <p:spPr>
           <a:xfrm>
             <a:off x="822960" y="868680"/>
-            <a:ext cx="10515600" cy="548640"/>
+            <a:ext cx="10607040" cy="548640"/>
           </a:xfrm>
           <a:prstGeom prst="rect">
             <a:avLst/>
@@ -10150,7 +13173,7 @@
                 <a:ea typeface="等线"/>
                 <a:cs typeface="等线"/>
               </a:rPr>
-              <a:t>作品 A / 作品 B</a:t>
+              <a:t>代表作品</a:t>
             </a:r>
           </a:p>
         </p:txBody>
@@ -10330,7 +13353,7 @@
                 <a:ea typeface="等线"/>
                 <a:cs typeface="等线"/>
               </a:rPr>
-              <a:t>A · 作品 A</a:t>
+              <a:t>A · 作者简介</a:t>
             </a:r>
           </a:p>
         </p:txBody>
@@ -10385,7 +13408,7 @@
                 <a:ea typeface="微软雅黑"/>
                 <a:cs typeface="微软雅黑"/>
               </a:rPr>
-              <a:t>亮点一</a:t>
+              <a:t>在此输入要点一</a:t>
             </a:r>
           </a:p>
           <a:p>
@@ -10417,7 +13440,7 @@
                 <a:ea typeface="微软雅黑"/>
                 <a:cs typeface="微软雅黑"/>
               </a:rPr>
-              <a:t>亮点二</a:t>
+              <a:t>在此输入要点二</a:t>
             </a:r>
           </a:p>
           <a:p>
@@ -10449,7 +13472,7 @@
                 <a:ea typeface="微软雅黑"/>
                 <a:cs typeface="微软雅黑"/>
               </a:rPr>
-              <a:t>亮点三</a:t>
+              <a:t>在此输入要点三</a:t>
             </a:r>
           </a:p>
         </p:txBody>
@@ -10585,7 +13608,7 @@
                 <a:ea typeface="等线"/>
                 <a:cs typeface="等线"/>
               </a:rPr>
-              <a:t>B · 作品 B</a:t>
+              <a:t>B · 代表作品</a:t>
             </a:r>
           </a:p>
         </p:txBody>
@@ -10640,7 +13663,7 @@
                 <a:ea typeface="微软雅黑"/>
                 <a:cs typeface="微软雅黑"/>
               </a:rPr>
-              <a:t>亮点一</a:t>
+              <a:t>在此输入要点一</a:t>
             </a:r>
           </a:p>
           <a:p>
@@ -10672,7 +13695,7 @@
                 <a:ea typeface="微软雅黑"/>
                 <a:cs typeface="微软雅黑"/>
               </a:rPr>
-              <a:t>亮点二</a:t>
+              <a:t>在此输入要点二</a:t>
             </a:r>
           </a:p>
           <a:p>
@@ -10704,7 +13727,7 @@
                 <a:ea typeface="微软雅黑"/>
                 <a:cs typeface="微软雅黑"/>
               </a:rPr>
-              <a:t>亮点三</a:t>
+              <a:t>在此输入要点三</a:t>
             </a:r>
           </a:p>
         </p:txBody>
@@ -10850,7 +13873,7 @@
         <p:spPr>
           <a:xfrm>
             <a:off x="822960" y="6355080"/>
-            <a:ext cx="6400800" cy="274320"/>
+            <a:ext cx="6583680" cy="274320"/>
           </a:xfrm>
           <a:prstGeom prst="rect">
             <a:avLst/>
@@ -10890,6 +13913,9 @@
   <p:clrMapOvr>
     <a:masterClrMapping/>
   </p:clrMapOvr>
+  <p:transition spd="med">
+    <p:push/>
+  </p:transition>
 </p:sld>
 </file>
 
@@ -11000,7 +14026,7 @@
         <p:spPr>
           <a:xfrm>
             <a:off x="822960" y="868680"/>
-            <a:ext cx="10515600" cy="548640"/>
+            <a:ext cx="10607040" cy="548640"/>
           </a:xfrm>
           <a:prstGeom prst="rect">
             <a:avLst/>
@@ -11179,8 +14205,8 @@
         </p:nvSpPr>
         <p:spPr>
           <a:xfrm>
-            <a:off x="1143000" y="2670048"/>
-            <a:ext cx="1790623" cy="1632204"/>
+            <a:off x="1143000" y="2651760"/>
+            <a:ext cx="1790623" cy="1554480"/>
           </a:xfrm>
           <a:prstGeom prst="rect">
             <a:avLst/>
@@ -11202,7 +14228,7 @@
               </a:spcAft>
             </a:pPr>
             <a:r>
-              <a:rPr sz="3000" b="1" i="0">
+              <a:rPr sz="2800" b="1" i="0">
                 <a:solidFill>
                   <a:srgbClr val="FF6B6B"/>
                 </a:solidFill>
@@ -11210,7 +14236,7 @@
                 <a:ea typeface="等线"/>
                 <a:cs typeface="等线"/>
               </a:rPr>
-              <a:t>年份</a:t>
+              <a:t>00</a:t>
             </a:r>
           </a:p>
         </p:txBody>
@@ -11223,7 +14249,7 @@
         </p:nvSpPr>
         <p:spPr>
           <a:xfrm>
-            <a:off x="1143000" y="4668012"/>
+            <a:off x="1143000" y="4590288"/>
             <a:ext cx="1790623" cy="365760"/>
           </a:xfrm>
           <a:prstGeom prst="rect">
@@ -11254,7 +14280,7 @@
                 <a:ea typeface="等线"/>
                 <a:cs typeface="等线"/>
               </a:rPr>
-              <a:t>起始</a:t>
+              <a:t>指标一</a:t>
             </a:r>
           </a:p>
         </p:txBody>
@@ -11267,7 +14293,7 @@
         </p:nvSpPr>
         <p:spPr>
           <a:xfrm>
-            <a:off x="1143000" y="5289804"/>
+            <a:off x="1143000" y="5212080"/>
             <a:ext cx="1790623" cy="1165860"/>
           </a:xfrm>
           <a:prstGeom prst="rect">
@@ -11403,8 +14429,8 @@
         </p:nvSpPr>
         <p:spPr>
           <a:xfrm>
-            <a:off x="3848023" y="2670048"/>
-            <a:ext cx="1790623" cy="1632204"/>
+            <a:off x="3848023" y="2651760"/>
+            <a:ext cx="1790623" cy="1554480"/>
           </a:xfrm>
           <a:prstGeom prst="rect">
             <a:avLst/>
@@ -11426,7 +14452,7 @@
               </a:spcAft>
             </a:pPr>
             <a:r>
-              <a:rPr sz="3000" b="1" i="0">
+              <a:rPr sz="2800" b="1" i="0">
                 <a:solidFill>
                   <a:srgbClr val="FF6B6B"/>
                 </a:solidFill>
@@ -11434,7 +14460,7 @@
                 <a:ea typeface="等线"/>
                 <a:cs typeface="等线"/>
               </a:rPr>
-              <a:t>张数</a:t>
+              <a:t>00</a:t>
             </a:r>
           </a:p>
         </p:txBody>
@@ -11447,7 +14473,7 @@
         </p:nvSpPr>
         <p:spPr>
           <a:xfrm>
-            <a:off x="3848023" y="4668012"/>
+            <a:off x="3848023" y="4590288"/>
             <a:ext cx="1790623" cy="365760"/>
           </a:xfrm>
           <a:prstGeom prst="rect">
@@ -11478,7 +14504,7 @@
                 <a:ea typeface="等线"/>
                 <a:cs typeface="等线"/>
               </a:rPr>
-              <a:t>产出</a:t>
+              <a:t>指标二</a:t>
             </a:r>
           </a:p>
         </p:txBody>
@@ -11491,7 +14517,7 @@
         </p:nvSpPr>
         <p:spPr>
           <a:xfrm>
-            <a:off x="3848023" y="5289804"/>
+            <a:off x="3848023" y="5212080"/>
             <a:ext cx="1790623" cy="1165860"/>
           </a:xfrm>
           <a:prstGeom prst="rect">
@@ -11627,8 +14653,8 @@
         </p:nvSpPr>
         <p:spPr>
           <a:xfrm>
-            <a:off x="6553047" y="2670048"/>
-            <a:ext cx="1790623" cy="1632204"/>
+            <a:off x="6553047" y="2651760"/>
+            <a:ext cx="1790623" cy="1554480"/>
           </a:xfrm>
           <a:prstGeom prst="rect">
             <a:avLst/>
@@ -11650,7 +14676,7 @@
               </a:spcAft>
             </a:pPr>
             <a:r>
-              <a:rPr sz="3000" b="1" i="0">
+              <a:rPr sz="2800" b="1" i="0">
                 <a:solidFill>
                   <a:srgbClr val="FF6B6B"/>
                 </a:solidFill>
@@ -11658,7 +14684,7 @@
                 <a:ea typeface="等线"/>
                 <a:cs typeface="等线"/>
               </a:rPr>
-              <a:t>工具</a:t>
+              <a:t>00</a:t>
             </a:r>
           </a:p>
         </p:txBody>
@@ -11671,7 +14697,7 @@
         </p:nvSpPr>
         <p:spPr>
           <a:xfrm>
-            <a:off x="6553047" y="4668012"/>
+            <a:off x="6553047" y="4590288"/>
             <a:ext cx="1790623" cy="365760"/>
           </a:xfrm>
           <a:prstGeom prst="rect">
@@ -11702,7 +14728,7 @@
                 <a:ea typeface="等线"/>
                 <a:cs typeface="等线"/>
               </a:rPr>
-              <a:t>软件</a:t>
+              <a:t>指标三</a:t>
             </a:r>
           </a:p>
         </p:txBody>
@@ -11715,7 +14741,7 @@
         </p:nvSpPr>
         <p:spPr>
           <a:xfrm>
-            <a:off x="6553047" y="5289804"/>
+            <a:off x="6553047" y="5212080"/>
             <a:ext cx="1790623" cy="1165860"/>
           </a:xfrm>
           <a:prstGeom prst="rect">
@@ -11851,8 +14877,8 @@
         </p:nvSpPr>
         <p:spPr>
           <a:xfrm>
-            <a:off x="9258071" y="2670048"/>
-            <a:ext cx="1790623" cy="1632204"/>
+            <a:off x="9258071" y="2651760"/>
+            <a:ext cx="1790623" cy="1554480"/>
           </a:xfrm>
           <a:prstGeom prst="rect">
             <a:avLst/>
@@ -11874,7 +14900,7 @@
               </a:spcAft>
             </a:pPr>
             <a:r>
-              <a:rPr sz="3000" b="1" i="0">
+              <a:rPr sz="2800" b="1" i="0">
                 <a:solidFill>
                   <a:srgbClr val="FF6B6B"/>
                 </a:solidFill>
@@ -11882,7 +14908,7 @@
                 <a:ea typeface="等线"/>
                 <a:cs typeface="等线"/>
               </a:rPr>
-              <a:t>尺寸</a:t>
+              <a:t>00</a:t>
             </a:r>
           </a:p>
         </p:txBody>
@@ -11895,7 +14921,7 @@
         </p:nvSpPr>
         <p:spPr>
           <a:xfrm>
-            <a:off x="9258071" y="4668012"/>
+            <a:off x="9258071" y="4590288"/>
             <a:ext cx="1790623" cy="365760"/>
           </a:xfrm>
           <a:prstGeom prst="rect">
@@ -11926,7 +14952,7 @@
                 <a:ea typeface="等线"/>
                 <a:cs typeface="等线"/>
               </a:rPr>
-              <a:t>规格</a:t>
+              <a:t>指标四</a:t>
             </a:r>
           </a:p>
         </p:txBody>
@@ -11939,7 +14965,7 @@
         </p:nvSpPr>
         <p:spPr>
           <a:xfrm>
-            <a:off x="9258071" y="5289804"/>
+            <a:off x="9258071" y="5212080"/>
             <a:ext cx="1790623" cy="1165860"/>
           </a:xfrm>
           <a:prstGeom prst="rect">
@@ -12028,7 +15054,7 @@
         <p:spPr>
           <a:xfrm>
             <a:off x="822960" y="6355080"/>
-            <a:ext cx="6400800" cy="274320"/>
+            <a:ext cx="6583680" cy="274320"/>
           </a:xfrm>
           <a:prstGeom prst="rect">
             <a:avLst/>
@@ -12068,6 +15094,9 @@
   <p:clrMapOvr>
     <a:masterClrMapping/>
   </p:clrMapOvr>
+  <p:transition spd="med">
+    <p:push/>
+  </p:transition>
 </p:sld>
 </file>
 
@@ -12178,7 +15207,7 @@
         <p:spPr>
           <a:xfrm>
             <a:off x="822960" y="868680"/>
-            <a:ext cx="10515600" cy="548640"/>
+            <a:ext cx="10607040" cy="548640"/>
           </a:xfrm>
           <a:prstGeom prst="rect">
             <a:avLst/>
@@ -12420,7 +15449,7 @@
                 <a:ea typeface="等线"/>
                 <a:cs typeface="等线"/>
               </a:rPr>
-              <a:t>构思</a:t>
+              <a:t>作者简介</a:t>
             </a:r>
           </a:p>
         </p:txBody>
@@ -12596,7 +15625,7 @@
                 <a:ea typeface="等线"/>
                 <a:cs typeface="等线"/>
               </a:rPr>
-              <a:t>草图</a:t>
+              <a:t>代表作品</a:t>
             </a:r>
           </a:p>
         </p:txBody>
@@ -12772,7 +15801,7 @@
                 <a:ea typeface="等线"/>
                 <a:cs typeface="等线"/>
               </a:rPr>
-              <a:t>细化</a:t>
+              <a:t>创作流程</a:t>
             </a:r>
           </a:p>
         </p:txBody>
@@ -12948,7 +15977,7 @@
                 <a:ea typeface="等线"/>
                 <a:cs typeface="等线"/>
               </a:rPr>
-              <a:t>导出</a:t>
+              <a:t>联系方式</a:t>
             </a:r>
           </a:p>
         </p:txBody>
@@ -13050,7 +16079,7 @@
         <p:spPr>
           <a:xfrm>
             <a:off x="822960" y="6355080"/>
-            <a:ext cx="6400800" cy="274320"/>
+            <a:ext cx="6583680" cy="274320"/>
           </a:xfrm>
           <a:prstGeom prst="rect">
             <a:avLst/>
@@ -13090,6 +16119,9 @@
   <p:clrMapOvr>
     <a:masterClrMapping/>
   </p:clrMapOvr>
+  <p:transition spd="med">
+    <p:push/>
+  </p:transition>
 </p:sld>
 </file>
 
@@ -13200,7 +16232,7 @@
         <p:spPr>
           <a:xfrm>
             <a:off x="822960" y="868680"/>
-            <a:ext cx="10515600" cy="548640"/>
+            <a:ext cx="10607040" cy="548640"/>
           </a:xfrm>
           <a:prstGeom prst="rect">
             <a:avLst/>
@@ -13281,7 +16313,7 @@
       </p:sp>
       <p:sp>
         <p:nvSpPr>
-          <p:cNvPr id="6" name="Chevron 5"/>
+          <p:cNvPr id="6" name="Rounded Rectangle 5"/>
           <p:cNvSpPr/>
           <p:nvPr/>
         </p:nvSpPr>
@@ -13290,8 +16322,10 @@
             <a:off x="822960" y="2743200"/>
             <a:ext cx="2464993" cy="1371600"/>
           </a:xfrm>
-          <a:prstGeom prst="chevron">
-            <a:avLst/>
+          <a:prstGeom prst="roundRect">
+            <a:avLst>
+              <a:gd name="adj" fmla="val 12000"/>
+            </a:avLst>
           </a:prstGeom>
           <a:solidFill>
             <a:srgbClr val="FF6B6B"/>
@@ -13333,8 +16367,8 @@
         </p:nvSpPr>
         <p:spPr>
           <a:xfrm>
-            <a:off x="1051560" y="3246120"/>
-            <a:ext cx="2007793" cy="457200"/>
+            <a:off x="1024128" y="3246120"/>
+            <a:ext cx="2062657" cy="457200"/>
           </a:xfrm>
           <a:prstGeom prst="rect">
             <a:avLst/>
@@ -13356,7 +16390,7 @@
               </a:spcAft>
             </a:pPr>
             <a:r>
-              <a:rPr sz="1450" b="1" i="0">
+              <a:rPr sz="1400" b="1" i="0">
                 <a:solidFill>
                   <a:srgbClr val="FFFFFF"/>
                 </a:solidFill>
@@ -13415,7 +16449,7 @@
       </p:sp>
       <p:sp>
         <p:nvSpPr>
-          <p:cNvPr id="9" name="Chevron 8"/>
+          <p:cNvPr id="9" name="Rounded Rectangle 8"/>
           <p:cNvSpPr/>
           <p:nvPr/>
         </p:nvSpPr>
@@ -13424,8 +16458,10 @@
             <a:off x="3516553" y="2743200"/>
             <a:ext cx="2464993" cy="1371600"/>
           </a:xfrm>
-          <a:prstGeom prst="chevron">
-            <a:avLst/>
+          <a:prstGeom prst="roundRect">
+            <a:avLst>
+              <a:gd name="adj" fmla="val 12000"/>
+            </a:avLst>
           </a:prstGeom>
           <a:solidFill>
             <a:srgbClr val="262647"/>
@@ -13467,8 +16503,8 @@
         </p:nvSpPr>
         <p:spPr>
           <a:xfrm>
-            <a:off x="3745153" y="3246120"/>
-            <a:ext cx="2007793" cy="457200"/>
+            <a:off x="3717721" y="3246120"/>
+            <a:ext cx="2062657" cy="457200"/>
           </a:xfrm>
           <a:prstGeom prst="rect">
             <a:avLst/>
@@ -13490,7 +16526,7 @@
               </a:spcAft>
             </a:pPr>
             <a:r>
-              <a:rPr sz="1450" b="1" i="0">
+              <a:rPr sz="1400" b="1" i="0">
                 <a:solidFill>
                   <a:srgbClr val="F4F4F8"/>
                 </a:solidFill>
@@ -13549,7 +16585,7 @@
       </p:sp>
       <p:sp>
         <p:nvSpPr>
-          <p:cNvPr id="12" name="Chevron 11"/>
+          <p:cNvPr id="12" name="Rounded Rectangle 11"/>
           <p:cNvSpPr/>
           <p:nvPr/>
         </p:nvSpPr>
@@ -13558,8 +16594,10 @@
             <a:off x="6210147" y="2743200"/>
             <a:ext cx="2464993" cy="1371600"/>
           </a:xfrm>
-          <a:prstGeom prst="chevron">
-            <a:avLst/>
+          <a:prstGeom prst="roundRect">
+            <a:avLst>
+              <a:gd name="adj" fmla="val 12000"/>
+            </a:avLst>
           </a:prstGeom>
           <a:solidFill>
             <a:srgbClr val="FF6B6B"/>
@@ -13601,8 +16639,8 @@
         </p:nvSpPr>
         <p:spPr>
           <a:xfrm>
-            <a:off x="6438747" y="3246120"/>
-            <a:ext cx="2007793" cy="457200"/>
+            <a:off x="6411315" y="3246120"/>
+            <a:ext cx="2062657" cy="457200"/>
           </a:xfrm>
           <a:prstGeom prst="rect">
             <a:avLst/>
@@ -13624,7 +16662,7 @@
               </a:spcAft>
             </a:pPr>
             <a:r>
-              <a:rPr sz="1450" b="1" i="0">
+              <a:rPr sz="1400" b="1" i="0">
                 <a:solidFill>
                   <a:srgbClr val="FFFFFF"/>
                 </a:solidFill>
@@ -13683,7 +16721,7 @@
       </p:sp>
       <p:sp>
         <p:nvSpPr>
-          <p:cNvPr id="15" name="Chevron 14"/>
+          <p:cNvPr id="15" name="Rounded Rectangle 14"/>
           <p:cNvSpPr/>
           <p:nvPr/>
         </p:nvSpPr>
@@ -13692,8 +16730,10 @@
             <a:off x="8903741" y="2743200"/>
             <a:ext cx="2464993" cy="1371600"/>
           </a:xfrm>
-          <a:prstGeom prst="chevron">
-            <a:avLst/>
+          <a:prstGeom prst="roundRect">
+            <a:avLst>
+              <a:gd name="adj" fmla="val 12000"/>
+            </a:avLst>
           </a:prstGeom>
           <a:solidFill>
             <a:srgbClr val="262647"/>
@@ -13735,8 +16775,8 @@
         </p:nvSpPr>
         <p:spPr>
           <a:xfrm>
-            <a:off x="9132341" y="3246120"/>
-            <a:ext cx="2007793" cy="457200"/>
+            <a:off x="9104909" y="3246120"/>
+            <a:ext cx="2062657" cy="457200"/>
           </a:xfrm>
           <a:prstGeom prst="rect">
             <a:avLst/>
@@ -13758,7 +16798,7 @@
               </a:spcAft>
             </a:pPr>
             <a:r>
-              <a:rPr sz="1450" b="1" i="0">
+              <a:rPr sz="1400" b="1" i="0">
                 <a:solidFill>
                   <a:srgbClr val="F4F4F8"/>
                 </a:solidFill>
@@ -13824,7 +16864,7 @@
         <p:spPr>
           <a:xfrm>
             <a:off x="822960" y="6355080"/>
-            <a:ext cx="6400800" cy="274320"/>
+            <a:ext cx="6583680" cy="274320"/>
           </a:xfrm>
           <a:prstGeom prst="rect">
             <a:avLst/>
@@ -13864,6 +16904,9 @@
   <p:clrMapOvr>
     <a:masterClrMapping/>
   </p:clrMapOvr>
+  <p:transition spd="med">
+    <p:push/>
+  </p:transition>
 </p:sld>
 </file>
 
@@ -13960,7 +17003,7 @@
                 <a:ea typeface="微软雅黑"/>
                 <a:cs typeface="微软雅黑"/>
               </a:rPr>
-              <a:t>PROCESS</a:t>
+              <a:t>DATA</a:t>
             </a:r>
           </a:p>
         </p:txBody>
@@ -13974,7 +17017,7 @@
         <p:spPr>
           <a:xfrm>
             <a:off x="822960" y="868680"/>
-            <a:ext cx="10515600" cy="548640"/>
+            <a:ext cx="10607040" cy="548640"/>
           </a:xfrm>
           <a:prstGeom prst="rect">
             <a:avLst/>
@@ -14101,24 +17144,202 @@
           </a:p>
         </p:txBody>
       </p:sp>
-      <p:sp>
-        <p:nvSpPr>
-          <p:cNvPr id="7" name="Rectangle 6"/>
+      <p:cxnSp>
+        <p:nvCxnSpPr>
+          <p:cNvPr id="7" name="Connector 6"/>
+          <p:cNvCxnSpPr/>
+          <p:nvPr/>
+        </p:nvCxnSpPr>
+        <p:spPr>
+          <a:xfrm flipV="1">
+            <a:off x="1463040" y="3840480"/>
+            <a:ext cx="1280160" cy="914400"/>
+          </a:xfrm>
+          <a:prstGeom prst="line">
+            <a:avLst/>
+          </a:prstGeom>
+          <a:ln w="31750">
+            <a:solidFill>
+              <a:srgbClr val="FF6B6B"/>
+            </a:solidFill>
+          </a:ln>
+          <a:effectLst/>
+        </p:spPr>
+        <p:style>
+          <a:lnRef idx="2">
+            <a:schemeClr val="accent1"/>
+          </a:lnRef>
+          <a:fillRef idx="0">
+            <a:schemeClr val="accent1"/>
+          </a:fillRef>
+          <a:effectRef idx="1">
+            <a:schemeClr val="accent1"/>
+          </a:effectRef>
+          <a:fontRef idx="minor">
+            <a:schemeClr val="tx1"/>
+          </a:fontRef>
+        </p:style>
+      </p:cxnSp>
+      <p:cxnSp>
+        <p:nvCxnSpPr>
+          <p:cNvPr id="8" name="Connector 7"/>
+          <p:cNvCxnSpPr/>
+          <p:nvPr/>
+        </p:nvCxnSpPr>
+        <p:spPr>
+          <a:xfrm>
+            <a:off x="2743200" y="3840480"/>
+            <a:ext cx="1280160" cy="457200"/>
+          </a:xfrm>
+          <a:prstGeom prst="line">
+            <a:avLst/>
+          </a:prstGeom>
+          <a:ln w="31750">
+            <a:solidFill>
+              <a:srgbClr val="FF6B6B"/>
+            </a:solidFill>
+          </a:ln>
+          <a:effectLst/>
+        </p:spPr>
+        <p:style>
+          <a:lnRef idx="2">
+            <a:schemeClr val="accent1"/>
+          </a:lnRef>
+          <a:fillRef idx="0">
+            <a:schemeClr val="accent1"/>
+          </a:fillRef>
+          <a:effectRef idx="1">
+            <a:schemeClr val="accent1"/>
+          </a:effectRef>
+          <a:fontRef idx="minor">
+            <a:schemeClr val="tx1"/>
+          </a:fontRef>
+        </p:style>
+      </p:cxnSp>
+      <p:cxnSp>
+        <p:nvCxnSpPr>
+          <p:cNvPr id="9" name="Connector 8"/>
+          <p:cNvCxnSpPr/>
+          <p:nvPr/>
+        </p:nvCxnSpPr>
+        <p:spPr>
+          <a:xfrm flipV="1">
+            <a:off x="4023360" y="3108960"/>
+            <a:ext cx="1280160" cy="1188720"/>
+          </a:xfrm>
+          <a:prstGeom prst="line">
+            <a:avLst/>
+          </a:prstGeom>
+          <a:ln w="31750">
+            <a:solidFill>
+              <a:srgbClr val="FF6B6B"/>
+            </a:solidFill>
+          </a:ln>
+          <a:effectLst/>
+        </p:spPr>
+        <p:style>
+          <a:lnRef idx="2">
+            <a:schemeClr val="accent1"/>
+          </a:lnRef>
+          <a:fillRef idx="0">
+            <a:schemeClr val="accent1"/>
+          </a:fillRef>
+          <a:effectRef idx="1">
+            <a:schemeClr val="accent1"/>
+          </a:effectRef>
+          <a:fontRef idx="minor">
+            <a:schemeClr val="tx1"/>
+          </a:fontRef>
+        </p:style>
+      </p:cxnSp>
+      <p:cxnSp>
+        <p:nvCxnSpPr>
+          <p:cNvPr id="10" name="Connector 9"/>
+          <p:cNvCxnSpPr/>
+          <p:nvPr/>
+        </p:nvCxnSpPr>
+        <p:spPr>
+          <a:xfrm>
+            <a:off x="5303520" y="3108960"/>
+            <a:ext cx="1280160" cy="457200"/>
+          </a:xfrm>
+          <a:prstGeom prst="line">
+            <a:avLst/>
+          </a:prstGeom>
+          <a:ln w="31750">
+            <a:solidFill>
+              <a:srgbClr val="FF6B6B"/>
+            </a:solidFill>
+          </a:ln>
+          <a:effectLst/>
+        </p:spPr>
+        <p:style>
+          <a:lnRef idx="2">
+            <a:schemeClr val="accent1"/>
+          </a:lnRef>
+          <a:fillRef idx="0">
+            <a:schemeClr val="accent1"/>
+          </a:fillRef>
+          <a:effectRef idx="1">
+            <a:schemeClr val="accent1"/>
+          </a:effectRef>
+          <a:fontRef idx="minor">
+            <a:schemeClr val="tx1"/>
+          </a:fontRef>
+        </p:style>
+      </p:cxnSp>
+      <p:cxnSp>
+        <p:nvCxnSpPr>
+          <p:cNvPr id="11" name="Connector 10"/>
+          <p:cNvCxnSpPr/>
+          <p:nvPr/>
+        </p:nvCxnSpPr>
+        <p:spPr>
+          <a:xfrm flipV="1">
+            <a:off x="6583680" y="2743200"/>
+            <a:ext cx="1280160" cy="822960"/>
+          </a:xfrm>
+          <a:prstGeom prst="line">
+            <a:avLst/>
+          </a:prstGeom>
+          <a:ln w="31750">
+            <a:solidFill>
+              <a:srgbClr val="FF6B6B"/>
+            </a:solidFill>
+          </a:ln>
+          <a:effectLst/>
+        </p:spPr>
+        <p:style>
+          <a:lnRef idx="2">
+            <a:schemeClr val="accent1"/>
+          </a:lnRef>
+          <a:fillRef idx="0">
+            <a:schemeClr val="accent1"/>
+          </a:fillRef>
+          <a:effectRef idx="1">
+            <a:schemeClr val="accent1"/>
+          </a:effectRef>
+          <a:fontRef idx="minor">
+            <a:schemeClr val="tx1"/>
+          </a:fontRef>
+        </p:style>
+      </p:cxnSp>
+      <p:sp>
+        <p:nvSpPr>
+          <p:cNvPr id="12" name="Oval 11"/>
           <p:cNvSpPr/>
           <p:nvPr/>
         </p:nvSpPr>
         <p:spPr>
           <a:xfrm>
-            <a:off x="1371600" y="3877056"/>
-            <a:ext cx="685800" cy="1609344"/>
-          </a:xfrm>
-          <a:prstGeom prst="rect">
+            <a:off x="1399032" y="4690872"/>
+            <a:ext cx="128016" cy="128016"/>
+          </a:xfrm>
+          <a:prstGeom prst="ellipse">
             <a:avLst/>
           </a:prstGeom>
           <a:solidFill>
-            <a:srgbClr val="FF6B6B">
-              <a:alpha val="90000"/>
-            </a:srgbClr>
+            <a:srgbClr val="FF6B6B"/>
           </a:solidFill>
           <a:ln>
             <a:noFill/>
@@ -14149,22 +17370,20 @@
       </p:sp>
       <p:sp>
         <p:nvSpPr>
-          <p:cNvPr id="8" name="Rectangle 7"/>
+          <p:cNvPr id="13" name="Oval 12"/>
           <p:cNvSpPr/>
           <p:nvPr/>
         </p:nvSpPr>
         <p:spPr>
           <a:xfrm>
-            <a:off x="2514600" y="3145535"/>
-            <a:ext cx="685800" cy="2340864"/>
-          </a:xfrm>
-          <a:prstGeom prst="rect">
+            <a:off x="2679192" y="3776472"/>
+            <a:ext cx="128016" cy="128016"/>
+          </a:xfrm>
+          <a:prstGeom prst="ellipse">
             <a:avLst/>
           </a:prstGeom>
           <a:solidFill>
-            <a:srgbClr val="FFD93D">
-              <a:alpha val="90000"/>
-            </a:srgbClr>
+            <a:srgbClr val="FF6B6B"/>
           </a:solidFill>
           <a:ln>
             <a:noFill/>
@@ -14195,22 +17414,20 @@
       </p:sp>
       <p:sp>
         <p:nvSpPr>
-          <p:cNvPr id="9" name="Rectangle 8"/>
+          <p:cNvPr id="14" name="Oval 13"/>
           <p:cNvSpPr/>
           <p:nvPr/>
         </p:nvSpPr>
         <p:spPr>
           <a:xfrm>
-            <a:off x="3657600" y="4169663"/>
-            <a:ext cx="685800" cy="1316736"/>
-          </a:xfrm>
-          <a:prstGeom prst="rect">
+            <a:off x="3959352" y="4233672"/>
+            <a:ext cx="128016" cy="128016"/>
+          </a:xfrm>
+          <a:prstGeom prst="ellipse">
             <a:avLst/>
           </a:prstGeom>
           <a:solidFill>
-            <a:srgbClr val="FF6B6B">
-              <a:alpha val="90000"/>
-            </a:srgbClr>
+            <a:srgbClr val="FF6B6B"/>
           </a:solidFill>
           <a:ln>
             <a:noFill/>
@@ -14241,22 +17458,20 @@
       </p:sp>
       <p:sp>
         <p:nvSpPr>
-          <p:cNvPr id="10" name="Rectangle 9"/>
+          <p:cNvPr id="15" name="Oval 14"/>
           <p:cNvSpPr/>
           <p:nvPr/>
         </p:nvSpPr>
         <p:spPr>
           <a:xfrm>
-            <a:off x="4800600" y="2706624"/>
-            <a:ext cx="685800" cy="2779776"/>
-          </a:xfrm>
-          <a:prstGeom prst="rect">
+            <a:off x="5239512" y="3044952"/>
+            <a:ext cx="128016" cy="128016"/>
+          </a:xfrm>
+          <a:prstGeom prst="ellipse">
             <a:avLst/>
           </a:prstGeom>
           <a:solidFill>
-            <a:srgbClr val="FFD93D">
-              <a:alpha val="90000"/>
-            </a:srgbClr>
+            <a:srgbClr val="FF6B6B"/>
           </a:solidFill>
           <a:ln>
             <a:noFill/>
@@ -14287,22 +17502,20 @@
       </p:sp>
       <p:sp>
         <p:nvSpPr>
-          <p:cNvPr id="11" name="Rectangle 10"/>
+          <p:cNvPr id="16" name="Oval 15"/>
           <p:cNvSpPr/>
           <p:nvPr/>
         </p:nvSpPr>
         <p:spPr>
           <a:xfrm>
-            <a:off x="5943600" y="3438144"/>
-            <a:ext cx="685800" cy="2048255"/>
-          </a:xfrm>
-          <a:prstGeom prst="rect">
+            <a:off x="6519672" y="3502152"/>
+            <a:ext cx="128016" cy="128016"/>
+          </a:xfrm>
+          <a:prstGeom prst="ellipse">
             <a:avLst/>
           </a:prstGeom>
           <a:solidFill>
-            <a:srgbClr val="FF6B6B">
-              <a:alpha val="90000"/>
-            </a:srgbClr>
+            <a:srgbClr val="FF6B6B"/>
           </a:solidFill>
           <a:ln>
             <a:noFill/>
@@ -14333,22 +17546,20 @@
       </p:sp>
       <p:sp>
         <p:nvSpPr>
-          <p:cNvPr id="12" name="Rectangle 11"/>
+          <p:cNvPr id="17" name="Oval 16"/>
           <p:cNvSpPr/>
           <p:nvPr/>
         </p:nvSpPr>
         <p:spPr>
           <a:xfrm>
-            <a:off x="7086600" y="3730752"/>
-            <a:ext cx="685800" cy="1755648"/>
-          </a:xfrm>
-          <a:prstGeom prst="rect">
+            <a:off x="7799831" y="2679192"/>
+            <a:ext cx="128016" cy="128016"/>
+          </a:xfrm>
+          <a:prstGeom prst="ellipse">
             <a:avLst/>
           </a:prstGeom>
           <a:solidFill>
-            <a:srgbClr val="FFD93D">
-              <a:alpha val="90000"/>
-            </a:srgbClr>
+            <a:srgbClr val="FF6B6B"/>
           </a:solidFill>
           <a:ln>
             <a:noFill/>
@@ -14379,14 +17590,14 @@
       </p:sp>
       <p:sp>
         <p:nvSpPr>
-          <p:cNvPr id="13" name="TextBox 12"/>
+          <p:cNvPr id="18" name="TextBox 17"/>
           <p:cNvSpPr txBox="1"/>
           <p:nvPr/>
         </p:nvSpPr>
         <p:spPr>
           <a:xfrm>
             <a:off x="1280160" y="5623560"/>
-            <a:ext cx="5486400" cy="274320"/>
+            <a:ext cx="5852160" cy="274320"/>
           </a:xfrm>
           <a:prstGeom prst="rect">
             <a:avLst/>
@@ -14423,7 +17634,7 @@
       </p:sp>
       <p:sp>
         <p:nvSpPr>
-          <p:cNvPr id="14" name="TextBox 13"/>
+          <p:cNvPr id="19" name="TextBox 18"/>
           <p:cNvSpPr txBox="1"/>
           <p:nvPr/>
         </p:nvSpPr>
@@ -14467,7 +17678,7 @@
       </p:sp>
       <p:sp>
         <p:nvSpPr>
-          <p:cNvPr id="15" name="TextBox 14"/>
+          <p:cNvPr id="20" name="TextBox 19"/>
           <p:cNvSpPr txBox="1"/>
           <p:nvPr/>
         </p:nvSpPr>
@@ -14586,7 +17797,7 @@
       </p:sp>
       <p:sp>
         <p:nvSpPr>
-          <p:cNvPr id="16" name="Rectangle 15"/>
+          <p:cNvPr id="21" name="Rectangle 20"/>
           <p:cNvSpPr/>
           <p:nvPr/>
         </p:nvSpPr>
@@ -14630,14 +17841,14 @@
       </p:sp>
       <p:sp>
         <p:nvSpPr>
-          <p:cNvPr id="17" name="TextBox 16"/>
+          <p:cNvPr id="22" name="TextBox 21"/>
           <p:cNvSpPr txBox="1"/>
           <p:nvPr/>
         </p:nvSpPr>
         <p:spPr>
           <a:xfrm>
             <a:off x="822960" y="6355080"/>
-            <a:ext cx="6400800" cy="274320"/>
+            <a:ext cx="6583680" cy="274320"/>
           </a:xfrm>
           <a:prstGeom prst="rect">
             <a:avLst/>
@@ -14677,6 +17888,9 @@
   <p:clrMapOvr>
     <a:masterClrMapping/>
   </p:clrMapOvr>
+  <p:transition spd="med">
+    <p:push/>
+  </p:transition>
 </p:sld>
 </file>
 

--- a/templates/03-portfolio-pixel-art-portfolio/03__retropixel.pptx
+++ b/templates/03-portfolio-pixel-art-portfolio/03__retropixel.pptx
@@ -3607,8 +3607,397 @@
     <a:masterClrMapping/>
   </p:clrMapOvr>
   <p:transition spd="med">
-    <p:push/>
+    <p:circle dir="in"/>
   </p:transition>
+  <p:timing>
+    <p:tnLst>
+      <p:par>
+        <p:cTn id="1" dur="indefinite" restart="never" nodeType="tmRoot">
+          <p:childTnLst>
+            <p:seq concurrent="1" nextAc="seek">
+              <p:cTn id="2" dur="indefinite" nodeType="mainSeq">
+                <p:childTnLst>
+                  <p:par>
+                    <p:cTn id="3" fill="hold">
+                      <p:stCondLst>
+                        <p:cond delay="indefinite"/>
+                      </p:stCondLst>
+                      <p:childTnLst>
+                        <p:par>
+                          <p:cTn id="5" dur="810" fill="hold" nodeType="clickEffect" grpId="0" presetID="42" presetClass="entr" presetSubtype="10">
+                            <p:stCondLst>
+                              <p:cond delay="0"/>
+                            </p:stCondLst>
+                            <p:childTnLst>
+                              <p:set>
+                                <p:cBhvr>
+                                  <p:cTn id="6" dur="1" fill="hold">
+                                    <p:stCondLst>
+                                      <p:cond delay="0"/>
+                                    </p:stCondLst>
+                                  </p:cTn>
+                                  <p:tgtEl>
+                                    <p:spTgt spid="3"/>
+                                  </p:tgtEl>
+                                  <p:attrNameLst>
+                                    <p:attrName>style.visibility</p:attrName>
+                                  </p:attrNameLst>
+                                </p:cBhvr>
+                                <p:to>
+                                  <p:strVal val="visible"/>
+                                </p:to>
+                              </p:set>
+                              <p:animEffect transition="in" filter="blinds(horizontal)">
+                                <p:cBhvr>
+                                  <p:cTn id="51" dur="810"/>
+                                  <p:tgtEl>
+                                    <p:spTgt spid="3"/>
+                                  </p:tgtEl>
+                                </p:cBhvr>
+                              </p:animEffect>
+                            </p:childTnLst>
+                          </p:cTn>
+                        </p:par>
+                        <p:par>
+                          <p:cTn id="7" dur="450" fill="hold" nodeType="afterEffect" grpId="0" presetID="43" presetClass="entr" presetSubtype="0">
+                            <p:stCondLst>
+                              <p:cond delay="130"/>
+                            </p:stCondLst>
+                            <p:childTnLst>
+                              <p:set>
+                                <p:cBhvr>
+                                  <p:cTn id="8" dur="1" fill="hold">
+                                    <p:stCondLst>
+                                      <p:cond delay="0"/>
+                                    </p:stCondLst>
+                                  </p:cTn>
+                                  <p:tgtEl>
+                                    <p:spTgt spid="4"/>
+                                  </p:tgtEl>
+                                  <p:attrNameLst>
+                                    <p:attrName>style.visibility</p:attrName>
+                                  </p:attrNameLst>
+                                </p:cBhvr>
+                                <p:to>
+                                  <p:strVal val="visible"/>
+                                </p:to>
+                              </p:set>
+                              <p:animEffect transition="in" filter="checkerboard(across)">
+                                <p:cBhvr>
+                                  <p:cTn id="71" dur="450"/>
+                                  <p:tgtEl>
+                                    <p:spTgt spid="4"/>
+                                  </p:tgtEl>
+                                </p:cBhvr>
+                              </p:animEffect>
+                            </p:childTnLst>
+                          </p:cTn>
+                        </p:par>
+                        <p:par>
+                          <p:cTn id="9" dur="570" fill="hold" nodeType="afterEffect" grpId="0" presetID="21" presetClass="entr" presetSubtype="2">
+                            <p:stCondLst>
+                              <p:cond delay="260"/>
+                            </p:stCondLst>
+                            <p:childTnLst>
+                              <p:set>
+                                <p:cBhvr>
+                                  <p:cTn id="10" dur="1" fill="hold">
+                                    <p:stCondLst>
+                                      <p:cond delay="0"/>
+                                    </p:stCondLst>
+                                  </p:cTn>
+                                  <p:tgtEl>
+                                    <p:spTgt spid="5"/>
+                                  </p:tgtEl>
+                                  <p:attrNameLst>
+                                    <p:attrName>style.visibility</p:attrName>
+                                  </p:attrNameLst>
+                                </p:cBhvr>
+                                <p:to>
+                                  <p:strVal val="visible"/>
+                                </p:to>
+                              </p:set>
+                              <p:animEffect transition="in" filter="wheel(2)">
+                                <p:cBhvr>
+                                  <p:cTn id="91" dur="570"/>
+                                  <p:tgtEl>
+                                    <p:spTgt spid="5"/>
+                                  </p:tgtEl>
+                                </p:cBhvr>
+                              </p:animEffect>
+                            </p:childTnLst>
+                          </p:cTn>
+                        </p:par>
+                        <p:par>
+                          <p:cTn id="11" dur="690" fill="hold" nodeType="afterEffect" grpId="0" presetID="10" presetClass="entr" presetSubtype="0">
+                            <p:stCondLst>
+                              <p:cond delay="390"/>
+                            </p:stCondLst>
+                            <p:childTnLst>
+                              <p:set>
+                                <p:cBhvr>
+                                  <p:cTn id="12" dur="1" fill="hold">
+                                    <p:stCondLst>
+                                      <p:cond delay="0"/>
+                                    </p:stCondLst>
+                                  </p:cTn>
+                                  <p:tgtEl>
+                                    <p:spTgt spid="6"/>
+                                  </p:tgtEl>
+                                  <p:attrNameLst>
+                                    <p:attrName>style.visibility</p:attrName>
+                                  </p:attrNameLst>
+                                </p:cBhvr>
+                                <p:to>
+                                  <p:strVal val="visible"/>
+                                </p:to>
+                              </p:set>
+                              <p:animEffect transition="in" filter="dissolve">
+                                <p:cBhvr>
+                                  <p:cTn id="111" dur="690"/>
+                                  <p:tgtEl>
+                                    <p:spTgt spid="6"/>
+                                  </p:tgtEl>
+                                </p:cBhvr>
+                              </p:animEffect>
+                            </p:childTnLst>
+                          </p:cTn>
+                        </p:par>
+                        <p:par>
+                          <p:cTn id="13" dur="810" fill="hold" nodeType="afterEffect" grpId="0" presetID="25" presetClass="entr" presetSubtype="1">
+                            <p:stCondLst>
+                              <p:cond delay="520"/>
+                            </p:stCondLst>
+                            <p:childTnLst>
+                              <p:set>
+                                <p:cBhvr>
+                                  <p:cTn id="14" dur="1" fill="hold">
+                                    <p:stCondLst>
+                                      <p:cond delay="0"/>
+                                    </p:stCondLst>
+                                  </p:cTn>
+                                  <p:tgtEl>
+                                    <p:spTgt spid="7"/>
+                                  </p:tgtEl>
+                                  <p:attrNameLst>
+                                    <p:attrName>style.visibility</p:attrName>
+                                  </p:attrNameLst>
+                                </p:cBhvr>
+                                <p:to>
+                                  <p:strVal val="visible"/>
+                                </p:to>
+                              </p:set>
+                              <p:animEffect transition="in" filter="strips(downRight)">
+                                <p:cBhvr>
+                                  <p:cTn id="131" dur="810"/>
+                                  <p:tgtEl>
+                                    <p:spTgt spid="7"/>
+                                  </p:tgtEl>
+                                </p:cBhvr>
+                              </p:animEffect>
+                            </p:childTnLst>
+                          </p:cTn>
+                        </p:par>
+                        <p:par>
+                          <p:cTn id="15" dur="450" fill="hold" nodeType="afterEffect" grpId="0" presetID="45" presetClass="entr" presetSubtype="1">
+                            <p:stCondLst>
+                              <p:cond delay="650"/>
+                            </p:stCondLst>
+                            <p:childTnLst>
+                              <p:set>
+                                <p:cBhvr>
+                                  <p:cTn id="16" dur="1" fill="hold">
+                                    <p:stCondLst>
+                                      <p:cond delay="0"/>
+                                    </p:stCondLst>
+                                  </p:cTn>
+                                  <p:tgtEl>
+                                    <p:spTgt spid="8"/>
+                                  </p:tgtEl>
+                                  <p:attrNameLst>
+                                    <p:attrName>style.visibility</p:attrName>
+                                  </p:attrNameLst>
+                                </p:cBhvr>
+                                <p:to>
+                                  <p:strVal val="visible"/>
+                                </p:to>
+                              </p:set>
+                              <p:animEffect transition="in" filter="barn(inHorizontal)">
+                                <p:cBhvr>
+                                  <p:cTn id="151" dur="450"/>
+                                  <p:tgtEl>
+                                    <p:spTgt spid="8"/>
+                                  </p:tgtEl>
+                                </p:cBhvr>
+                              </p:animEffect>
+                            </p:childTnLst>
+                          </p:cTn>
+                        </p:par>
+                        <p:par>
+                          <p:cTn id="17" dur="570" fill="hold" nodeType="afterEffect" grpId="0" presetID="22" presetClass="entr" presetSubtype="8">
+                            <p:stCondLst>
+                              <p:cond delay="780"/>
+                            </p:stCondLst>
+                            <p:childTnLst>
+                              <p:set>
+                                <p:cBhvr>
+                                  <p:cTn id="18" dur="1" fill="hold">
+                                    <p:stCondLst>
+                                      <p:cond delay="0"/>
+                                    </p:stCondLst>
+                                  </p:cTn>
+                                  <p:tgtEl>
+                                    <p:spTgt spid="9"/>
+                                  </p:tgtEl>
+                                  <p:attrNameLst>
+                                    <p:attrName>style.visibility</p:attrName>
+                                  </p:attrNameLst>
+                                </p:cBhvr>
+                                <p:to>
+                                  <p:strVal val="visible"/>
+                                </p:to>
+                              </p:set>
+                              <p:animEffect transition="in" filter="wipe(left)">
+                                <p:cBhvr>
+                                  <p:cTn id="171" dur="570"/>
+                                  <p:tgtEl>
+                                    <p:spTgt spid="9"/>
+                                  </p:tgtEl>
+                                </p:cBhvr>
+                              </p:animEffect>
+                            </p:childTnLst>
+                          </p:cTn>
+                        </p:par>
+                        <p:par>
+                          <p:cTn id="19" dur="690" fill="hold" nodeType="afterEffect" grpId="0" presetID="37" presetClass="entr" presetSubtype="0">
+                            <p:stCondLst>
+                              <p:cond delay="910"/>
+                            </p:stCondLst>
+                            <p:childTnLst>
+                              <p:set>
+                                <p:cBhvr>
+                                  <p:cTn id="20" dur="1" fill="hold">
+                                    <p:stCondLst>
+                                      <p:cond delay="0"/>
+                                    </p:stCondLst>
+                                  </p:cTn>
+                                  <p:tgtEl>
+                                    <p:spTgt spid="10"/>
+                                  </p:tgtEl>
+                                  <p:attrNameLst>
+                                    <p:attrName>style.visibility</p:attrName>
+                                  </p:attrNameLst>
+                                </p:cBhvr>
+                                <p:to>
+                                  <p:strVal val="visible"/>
+                                </p:to>
+                              </p:set>
+                              <p:animEffect transition="in" filter="wedge">
+                                <p:cBhvr>
+                                  <p:cTn id="191" dur="690"/>
+                                  <p:tgtEl>
+                                    <p:spTgt spid="10"/>
+                                  </p:tgtEl>
+                                </p:cBhvr>
+                              </p:animEffect>
+                            </p:childTnLst>
+                          </p:cTn>
+                        </p:par>
+                        <p:par>
+                          <p:cTn id="21" dur="810" fill="hold" nodeType="afterEffect" grpId="0" presetID="52" presetClass="entr" presetSubtype="0">
+                            <p:stCondLst>
+                              <p:cond delay="1040"/>
+                            </p:stCondLst>
+                            <p:childTnLst>
+                              <p:set>
+                                <p:cBhvr>
+                                  <p:cTn id="22" dur="1" fill="hold">
+                                    <p:stCondLst>
+                                      <p:cond delay="0"/>
+                                    </p:stCondLst>
+                                  </p:cTn>
+                                  <p:tgtEl>
+                                    <p:spTgt spid="11"/>
+                                  </p:tgtEl>
+                                  <p:attrNameLst>
+                                    <p:attrName>style.visibility</p:attrName>
+                                  </p:attrNameLst>
+                                </p:cBhvr>
+                                <p:to>
+                                  <p:strVal val="visible"/>
+                                </p:to>
+                              </p:set>
+                              <p:animEffect transition="in" filter="randombar(horizontal)">
+                                <p:cBhvr>
+                                  <p:cTn id="211" dur="810"/>
+                                  <p:tgtEl>
+                                    <p:spTgt spid="11"/>
+                                  </p:tgtEl>
+                                </p:cBhvr>
+                              </p:animEffect>
+                            </p:childTnLst>
+                          </p:cTn>
+                        </p:par>
+                        <p:par>
+                          <p:cTn id="23" dur="450" fill="hold" nodeType="afterEffect" grpId="0" presetID="21" presetClass="entr" presetSubtype="1">
+                            <p:stCondLst>
+                              <p:cond delay="1170"/>
+                            </p:stCondLst>
+                            <p:childTnLst>
+                              <p:set>
+                                <p:cBhvr>
+                                  <p:cTn id="24" dur="1" fill="hold">
+                                    <p:stCondLst>
+                                      <p:cond delay="0"/>
+                                    </p:stCondLst>
+                                  </p:cTn>
+                                  <p:tgtEl>
+                                    <p:spTgt spid="12"/>
+                                  </p:tgtEl>
+                                  <p:attrNameLst>
+                                    <p:attrName>style.visibility</p:attrName>
+                                  </p:attrNameLst>
+                                </p:cBhvr>
+                                <p:to>
+                                  <p:strVal val="visible"/>
+                                </p:to>
+                              </p:set>
+                              <p:animEffect transition="in" filter="wheel(1)">
+                                <p:cBhvr>
+                                  <p:cTn id="231" dur="450"/>
+                                  <p:tgtEl>
+                                    <p:spTgt spid="12"/>
+                                  </p:tgtEl>
+                                </p:cBhvr>
+                              </p:animEffect>
+                            </p:childTnLst>
+                          </p:cTn>
+                        </p:par>
+                      </p:childTnLst>
+                    </p:cTn>
+                  </p:par>
+                </p:childTnLst>
+              </p:cTn>
+              <p:prevCondLst>
+                <p:cond evt="onPrev" delay="0">
+                  <p:tgtEl>
+                    <p:sldTgt/>
+                  </p:tgtEl>
+                </p:cond>
+              </p:prevCondLst>
+              <p:nextCondLst>
+                <p:cond evt="onNext" delay="0">
+                  <p:tgtEl>
+                    <p:sldTgt/>
+                  </p:tgtEl>
+                </p:cond>
+              </p:nextCondLst>
+            </p:seq>
+          </p:childTnLst>
+        </p:cTn>
+      </p:par>
+    </p:tnLst>
+  </p:timing>
 </p:sld>
 </file>
 
@@ -4660,8 +5049,537 @@
     <a:masterClrMapping/>
   </p:clrMapOvr>
   <p:transition spd="med">
-    <p:push/>
+    <p:fade/>
   </p:transition>
+  <p:timing>
+    <p:tnLst>
+      <p:par>
+        <p:cTn id="1" dur="indefinite" restart="never" nodeType="tmRoot">
+          <p:childTnLst>
+            <p:seq concurrent="1" nextAc="seek">
+              <p:cTn id="2" dur="indefinite" nodeType="mainSeq">
+                <p:childTnLst>
+                  <p:par>
+                    <p:cTn id="3" fill="hold">
+                      <p:stCondLst>
+                        <p:cond delay="indefinite"/>
+                      </p:stCondLst>
+                      <p:childTnLst>
+                        <p:par>
+                          <p:cTn id="5" dur="450" fill="hold" nodeType="clickEffect" grpId="0" presetID="21" presetClass="entr" presetSubtype="1">
+                            <p:stCondLst>
+                              <p:cond delay="0"/>
+                            </p:stCondLst>
+                            <p:childTnLst>
+                              <p:set>
+                                <p:cBhvr>
+                                  <p:cTn id="6" dur="1" fill="hold">
+                                    <p:stCondLst>
+                                      <p:cond delay="0"/>
+                                    </p:stCondLst>
+                                  </p:cTn>
+                                  <p:tgtEl>
+                                    <p:spTgt spid="3"/>
+                                  </p:tgtEl>
+                                  <p:attrNameLst>
+                                    <p:attrName>style.visibility</p:attrName>
+                                  </p:attrNameLst>
+                                </p:cBhvr>
+                                <p:to>
+                                  <p:strVal val="visible"/>
+                                </p:to>
+                              </p:set>
+                              <p:animEffect transition="in" filter="wheel(1)">
+                                <p:cBhvr>
+                                  <p:cTn id="51" dur="450"/>
+                                  <p:tgtEl>
+                                    <p:spTgt spid="3"/>
+                                  </p:tgtEl>
+                                </p:cBhvr>
+                              </p:animEffect>
+                            </p:childTnLst>
+                          </p:cTn>
+                        </p:par>
+                        <p:par>
+                          <p:cTn id="7" dur="570" fill="hold" nodeType="afterEffect" grpId="0" presetID="22" presetClass="entr" presetSubtype="4">
+                            <p:stCondLst>
+                              <p:cond delay="130"/>
+                            </p:stCondLst>
+                            <p:childTnLst>
+                              <p:set>
+                                <p:cBhvr>
+                                  <p:cTn id="8" dur="1" fill="hold">
+                                    <p:stCondLst>
+                                      <p:cond delay="0"/>
+                                    </p:stCondLst>
+                                  </p:cTn>
+                                  <p:tgtEl>
+                                    <p:spTgt spid="4"/>
+                                  </p:tgtEl>
+                                  <p:attrNameLst>
+                                    <p:attrName>style.visibility</p:attrName>
+                                  </p:attrNameLst>
+                                </p:cBhvr>
+                                <p:to>
+                                  <p:strVal val="visible"/>
+                                </p:to>
+                              </p:set>
+                              <p:animEffect transition="in" filter="wipe(down)">
+                                <p:cBhvr>
+                                  <p:cTn id="71" dur="570"/>
+                                  <p:tgtEl>
+                                    <p:spTgt spid="4"/>
+                                  </p:tgtEl>
+                                </p:cBhvr>
+                              </p:animEffect>
+                            </p:childTnLst>
+                          </p:cTn>
+                        </p:par>
+                        <p:par>
+                          <p:cTn id="9" dur="690" fill="hold" nodeType="afterEffect" grpId="0" presetID="9" presetClass="entr" presetSubtype="0">
+                            <p:stCondLst>
+                              <p:cond delay="260"/>
+                            </p:stCondLst>
+                            <p:childTnLst>
+                              <p:set>
+                                <p:cBhvr>
+                                  <p:cTn id="10" dur="1" fill="hold">
+                                    <p:stCondLst>
+                                      <p:cond delay="0"/>
+                                    </p:stCondLst>
+                                  </p:cTn>
+                                  <p:tgtEl>
+                                    <p:spTgt spid="5"/>
+                                  </p:tgtEl>
+                                  <p:attrNameLst>
+                                    <p:attrName>style.visibility</p:attrName>
+                                  </p:attrNameLst>
+                                </p:cBhvr>
+                                <p:to>
+                                  <p:strVal val="visible"/>
+                                </p:to>
+                              </p:set>
+                              <p:animEffect transition="in" filter="fade">
+                                <p:cBhvr>
+                                  <p:cTn id="91" dur="690"/>
+                                  <p:tgtEl>
+                                    <p:spTgt spid="5"/>
+                                  </p:tgtEl>
+                                </p:cBhvr>
+                              </p:animEffect>
+                            </p:childTnLst>
+                          </p:cTn>
+                        </p:par>
+                        <p:par>
+                          <p:cTn id="11" dur="810" fill="hold" nodeType="afterEffect" grpId="0" presetID="22" presetClass="entr" presetSubtype="2">
+                            <p:stCondLst>
+                              <p:cond delay="390"/>
+                            </p:stCondLst>
+                            <p:childTnLst>
+                              <p:set>
+                                <p:cBhvr>
+                                  <p:cTn id="12" dur="1" fill="hold">
+                                    <p:stCondLst>
+                                      <p:cond delay="0"/>
+                                    </p:stCondLst>
+                                  </p:cTn>
+                                  <p:tgtEl>
+                                    <p:spTgt spid="6"/>
+                                  </p:tgtEl>
+                                  <p:attrNameLst>
+                                    <p:attrName>style.visibility</p:attrName>
+                                  </p:attrNameLst>
+                                </p:cBhvr>
+                                <p:to>
+                                  <p:strVal val="visible"/>
+                                </p:to>
+                              </p:set>
+                              <p:animEffect transition="in" filter="wipe(right)">
+                                <p:cBhvr>
+                                  <p:cTn id="111" dur="810"/>
+                                  <p:tgtEl>
+                                    <p:spTgt spid="6"/>
+                                  </p:tgtEl>
+                                </p:cBhvr>
+                              </p:animEffect>
+                            </p:childTnLst>
+                          </p:cTn>
+                        </p:par>
+                        <p:par>
+                          <p:cTn id="13" dur="450" fill="hold" nodeType="afterEffect" grpId="0" presetID="18" presetClass="entr" presetSubtype="12">
+                            <p:stCondLst>
+                              <p:cond delay="520"/>
+                            </p:stCondLst>
+                            <p:childTnLst>
+                              <p:set>
+                                <p:cBhvr>
+                                  <p:cTn id="14" dur="1" fill="hold">
+                                    <p:stCondLst>
+                                      <p:cond delay="0"/>
+                                    </p:stCondLst>
+                                  </p:cTn>
+                                  <p:tgtEl>
+                                    <p:spTgt spid="7"/>
+                                  </p:tgtEl>
+                                  <p:attrNameLst>
+                                    <p:attrName>style.visibility</p:attrName>
+                                  </p:attrNameLst>
+                                </p:cBhvr>
+                                <p:to>
+                                  <p:strVal val="visible"/>
+                                </p:to>
+                              </p:set>
+                              <p:animEffect transition="in" filter="circle(in)">
+                                <p:cBhvr>
+                                  <p:cTn id="131" dur="450"/>
+                                  <p:tgtEl>
+                                    <p:spTgt spid="7"/>
+                                  </p:tgtEl>
+                                </p:cBhvr>
+                              </p:animEffect>
+                            </p:childTnLst>
+                          </p:cTn>
+                        </p:par>
+                        <p:par>
+                          <p:cTn id="15" dur="570" fill="hold" nodeType="afterEffect" grpId="0" presetID="22" presetClass="entr" presetSubtype="1">
+                            <p:stCondLst>
+                              <p:cond delay="650"/>
+                            </p:stCondLst>
+                            <p:childTnLst>
+                              <p:set>
+                                <p:cBhvr>
+                                  <p:cTn id="16" dur="1" fill="hold">
+                                    <p:stCondLst>
+                                      <p:cond delay="0"/>
+                                    </p:stCondLst>
+                                  </p:cTn>
+                                  <p:tgtEl>
+                                    <p:spTgt spid="8"/>
+                                  </p:tgtEl>
+                                  <p:attrNameLst>
+                                    <p:attrName>style.visibility</p:attrName>
+                                  </p:attrNameLst>
+                                </p:cBhvr>
+                                <p:to>
+                                  <p:strVal val="visible"/>
+                                </p:to>
+                              </p:set>
+                              <p:animEffect transition="in" filter="wipe(up)">
+                                <p:cBhvr>
+                                  <p:cTn id="151" dur="570"/>
+                                  <p:tgtEl>
+                                    <p:spTgt spid="8"/>
+                                  </p:tgtEl>
+                                </p:cBhvr>
+                              </p:animEffect>
+                            </p:childTnLst>
+                          </p:cTn>
+                        </p:par>
+                        <p:par>
+                          <p:cTn id="17" dur="690" fill="hold" nodeType="afterEffect" grpId="0" presetID="42" presetClass="entr" presetSubtype="10">
+                            <p:stCondLst>
+                              <p:cond delay="780"/>
+                            </p:stCondLst>
+                            <p:childTnLst>
+                              <p:set>
+                                <p:cBhvr>
+                                  <p:cTn id="18" dur="1" fill="hold">
+                                    <p:stCondLst>
+                                      <p:cond delay="0"/>
+                                    </p:stCondLst>
+                                  </p:cTn>
+                                  <p:tgtEl>
+                                    <p:spTgt spid="9"/>
+                                  </p:tgtEl>
+                                  <p:attrNameLst>
+                                    <p:attrName>style.visibility</p:attrName>
+                                  </p:attrNameLst>
+                                </p:cBhvr>
+                                <p:to>
+                                  <p:strVal val="visible"/>
+                                </p:to>
+                              </p:set>
+                              <p:animEffect transition="in" filter="blinds(horizontal)">
+                                <p:cBhvr>
+                                  <p:cTn id="171" dur="690"/>
+                                  <p:tgtEl>
+                                    <p:spTgt spid="9"/>
+                                  </p:tgtEl>
+                                </p:cBhvr>
+                              </p:animEffect>
+                            </p:childTnLst>
+                          </p:cTn>
+                        </p:par>
+                        <p:par>
+                          <p:cTn id="19" dur="810" fill="hold" nodeType="afterEffect" grpId="0" presetID="43" presetClass="entr" presetSubtype="0">
+                            <p:stCondLst>
+                              <p:cond delay="910"/>
+                            </p:stCondLst>
+                            <p:childTnLst>
+                              <p:set>
+                                <p:cBhvr>
+                                  <p:cTn id="20" dur="1" fill="hold">
+                                    <p:stCondLst>
+                                      <p:cond delay="0"/>
+                                    </p:stCondLst>
+                                  </p:cTn>
+                                  <p:tgtEl>
+                                    <p:spTgt spid="10"/>
+                                  </p:tgtEl>
+                                  <p:attrNameLst>
+                                    <p:attrName>style.visibility</p:attrName>
+                                  </p:attrNameLst>
+                                </p:cBhvr>
+                                <p:to>
+                                  <p:strVal val="visible"/>
+                                </p:to>
+                              </p:set>
+                              <p:animEffect transition="in" filter="checkerboard(across)">
+                                <p:cBhvr>
+                                  <p:cTn id="191" dur="810"/>
+                                  <p:tgtEl>
+                                    <p:spTgt spid="10"/>
+                                  </p:tgtEl>
+                                </p:cBhvr>
+                              </p:animEffect>
+                            </p:childTnLst>
+                          </p:cTn>
+                        </p:par>
+                        <p:par>
+                          <p:cTn id="21" dur="450" fill="hold" nodeType="afterEffect" grpId="0" presetID="21" presetClass="entr" presetSubtype="2">
+                            <p:stCondLst>
+                              <p:cond delay="1040"/>
+                            </p:stCondLst>
+                            <p:childTnLst>
+                              <p:set>
+                                <p:cBhvr>
+                                  <p:cTn id="22" dur="1" fill="hold">
+                                    <p:stCondLst>
+                                      <p:cond delay="0"/>
+                                    </p:stCondLst>
+                                  </p:cTn>
+                                  <p:tgtEl>
+                                    <p:spTgt spid="11"/>
+                                  </p:tgtEl>
+                                  <p:attrNameLst>
+                                    <p:attrName>style.visibility</p:attrName>
+                                  </p:attrNameLst>
+                                </p:cBhvr>
+                                <p:to>
+                                  <p:strVal val="visible"/>
+                                </p:to>
+                              </p:set>
+                              <p:animEffect transition="in" filter="wheel(2)">
+                                <p:cBhvr>
+                                  <p:cTn id="211" dur="450"/>
+                                  <p:tgtEl>
+                                    <p:spTgt spid="11"/>
+                                  </p:tgtEl>
+                                </p:cBhvr>
+                              </p:animEffect>
+                            </p:childTnLst>
+                          </p:cTn>
+                        </p:par>
+                        <p:par>
+                          <p:cTn id="23" dur="570" fill="hold" nodeType="afterEffect" grpId="0" presetID="10" presetClass="entr" presetSubtype="0">
+                            <p:stCondLst>
+                              <p:cond delay="1170"/>
+                            </p:stCondLst>
+                            <p:childTnLst>
+                              <p:set>
+                                <p:cBhvr>
+                                  <p:cTn id="24" dur="1" fill="hold">
+                                    <p:stCondLst>
+                                      <p:cond delay="0"/>
+                                    </p:stCondLst>
+                                  </p:cTn>
+                                  <p:tgtEl>
+                                    <p:spTgt spid="12"/>
+                                  </p:tgtEl>
+                                  <p:attrNameLst>
+                                    <p:attrName>style.visibility</p:attrName>
+                                  </p:attrNameLst>
+                                </p:cBhvr>
+                                <p:to>
+                                  <p:strVal val="visible"/>
+                                </p:to>
+                              </p:set>
+                              <p:animEffect transition="in" filter="dissolve">
+                                <p:cBhvr>
+                                  <p:cTn id="231" dur="570"/>
+                                  <p:tgtEl>
+                                    <p:spTgt spid="12"/>
+                                  </p:tgtEl>
+                                </p:cBhvr>
+                              </p:animEffect>
+                            </p:childTnLst>
+                          </p:cTn>
+                        </p:par>
+                        <p:par>
+                          <p:cTn id="25" dur="690" fill="hold" nodeType="afterEffect" grpId="0" presetID="25" presetClass="entr" presetSubtype="1">
+                            <p:stCondLst>
+                              <p:cond delay="1300"/>
+                            </p:stCondLst>
+                            <p:childTnLst>
+                              <p:set>
+                                <p:cBhvr>
+                                  <p:cTn id="26" dur="1" fill="hold">
+                                    <p:stCondLst>
+                                      <p:cond delay="0"/>
+                                    </p:stCondLst>
+                                  </p:cTn>
+                                  <p:tgtEl>
+                                    <p:spTgt spid="13"/>
+                                  </p:tgtEl>
+                                  <p:attrNameLst>
+                                    <p:attrName>style.visibility</p:attrName>
+                                  </p:attrNameLst>
+                                </p:cBhvr>
+                                <p:to>
+                                  <p:strVal val="visible"/>
+                                </p:to>
+                              </p:set>
+                              <p:animEffect transition="in" filter="strips(downRight)">
+                                <p:cBhvr>
+                                  <p:cTn id="251" dur="690"/>
+                                  <p:tgtEl>
+                                    <p:spTgt spid="13"/>
+                                  </p:tgtEl>
+                                </p:cBhvr>
+                              </p:animEffect>
+                            </p:childTnLst>
+                          </p:cTn>
+                        </p:par>
+                        <p:par>
+                          <p:cTn id="27" dur="810" fill="hold" nodeType="afterEffect" grpId="0" presetID="45" presetClass="entr" presetSubtype="1">
+                            <p:stCondLst>
+                              <p:cond delay="1430"/>
+                            </p:stCondLst>
+                            <p:childTnLst>
+                              <p:set>
+                                <p:cBhvr>
+                                  <p:cTn id="28" dur="1" fill="hold">
+                                    <p:stCondLst>
+                                      <p:cond delay="0"/>
+                                    </p:stCondLst>
+                                  </p:cTn>
+                                  <p:tgtEl>
+                                    <p:spTgt spid="14"/>
+                                  </p:tgtEl>
+                                  <p:attrNameLst>
+                                    <p:attrName>style.visibility</p:attrName>
+                                  </p:attrNameLst>
+                                </p:cBhvr>
+                                <p:to>
+                                  <p:strVal val="visible"/>
+                                </p:to>
+                              </p:set>
+                              <p:animEffect transition="in" filter="barn(inHorizontal)">
+                                <p:cBhvr>
+                                  <p:cTn id="271" dur="810"/>
+                                  <p:tgtEl>
+                                    <p:spTgt spid="14"/>
+                                  </p:tgtEl>
+                                </p:cBhvr>
+                              </p:animEffect>
+                            </p:childTnLst>
+                          </p:cTn>
+                        </p:par>
+                        <p:par>
+                          <p:cTn id="29" dur="450" fill="hold" nodeType="afterEffect" grpId="0" presetID="22" presetClass="entr" presetSubtype="8">
+                            <p:stCondLst>
+                              <p:cond delay="1560"/>
+                            </p:stCondLst>
+                            <p:childTnLst>
+                              <p:set>
+                                <p:cBhvr>
+                                  <p:cTn id="30" dur="1" fill="hold">
+                                    <p:stCondLst>
+                                      <p:cond delay="0"/>
+                                    </p:stCondLst>
+                                  </p:cTn>
+                                  <p:tgtEl>
+                                    <p:spTgt spid="15"/>
+                                  </p:tgtEl>
+                                  <p:attrNameLst>
+                                    <p:attrName>style.visibility</p:attrName>
+                                  </p:attrNameLst>
+                                </p:cBhvr>
+                                <p:to>
+                                  <p:strVal val="visible"/>
+                                </p:to>
+                              </p:set>
+                              <p:animEffect transition="in" filter="wipe(left)">
+                                <p:cBhvr>
+                                  <p:cTn id="291" dur="450"/>
+                                  <p:tgtEl>
+                                    <p:spTgt spid="15"/>
+                                  </p:tgtEl>
+                                </p:cBhvr>
+                              </p:animEffect>
+                            </p:childTnLst>
+                          </p:cTn>
+                        </p:par>
+                        <p:par>
+                          <p:cTn id="31" dur="570" fill="hold" nodeType="afterEffect" grpId="0" presetID="37" presetClass="entr" presetSubtype="0">
+                            <p:stCondLst>
+                              <p:cond delay="1690"/>
+                            </p:stCondLst>
+                            <p:childTnLst>
+                              <p:set>
+                                <p:cBhvr>
+                                  <p:cTn id="32" dur="1" fill="hold">
+                                    <p:stCondLst>
+                                      <p:cond delay="0"/>
+                                    </p:stCondLst>
+                                  </p:cTn>
+                                  <p:tgtEl>
+                                    <p:spTgt spid="16"/>
+                                  </p:tgtEl>
+                                  <p:attrNameLst>
+                                    <p:attrName>style.visibility</p:attrName>
+                                  </p:attrNameLst>
+                                </p:cBhvr>
+                                <p:to>
+                                  <p:strVal val="visible"/>
+                                </p:to>
+                              </p:set>
+                              <p:animEffect transition="in" filter="wedge">
+                                <p:cBhvr>
+                                  <p:cTn id="311" dur="570"/>
+                                  <p:tgtEl>
+                                    <p:spTgt spid="16"/>
+                                  </p:tgtEl>
+                                </p:cBhvr>
+                              </p:animEffect>
+                            </p:childTnLst>
+                          </p:cTn>
+                        </p:par>
+                      </p:childTnLst>
+                    </p:cTn>
+                  </p:par>
+                </p:childTnLst>
+              </p:cTn>
+              <p:prevCondLst>
+                <p:cond evt="onPrev" delay="0">
+                  <p:tgtEl>
+                    <p:sldTgt/>
+                  </p:tgtEl>
+                </p:cond>
+              </p:prevCondLst>
+              <p:nextCondLst>
+                <p:cond evt="onNext" delay="0">
+                  <p:tgtEl>
+                    <p:sldTgt/>
+                  </p:tgtEl>
+                </p:cond>
+              </p:nextCondLst>
+            </p:seq>
+          </p:childTnLst>
+        </p:cTn>
+      </p:par>
+    </p:tnLst>
+  </p:timing>
 </p:sld>
 </file>
 
@@ -5491,8 +6409,537 @@
     <a:masterClrMapping/>
   </p:clrMapOvr>
   <p:transition spd="med">
-    <p:push/>
+    <p:push dir="l"/>
   </p:transition>
+  <p:timing>
+    <p:tnLst>
+      <p:par>
+        <p:cTn id="1" dur="indefinite" restart="never" nodeType="tmRoot">
+          <p:childTnLst>
+            <p:seq concurrent="1" nextAc="seek">
+              <p:cTn id="2" dur="indefinite" nodeType="mainSeq">
+                <p:childTnLst>
+                  <p:par>
+                    <p:cTn id="3" fill="hold">
+                      <p:stCondLst>
+                        <p:cond delay="indefinite"/>
+                      </p:stCondLst>
+                      <p:childTnLst>
+                        <p:par>
+                          <p:cTn id="5" dur="570" fill="hold" nodeType="clickEffect" grpId="0" presetID="22" presetClass="entr" presetSubtype="4">
+                            <p:stCondLst>
+                              <p:cond delay="0"/>
+                            </p:stCondLst>
+                            <p:childTnLst>
+                              <p:set>
+                                <p:cBhvr>
+                                  <p:cTn id="6" dur="1" fill="hold">
+                                    <p:stCondLst>
+                                      <p:cond delay="0"/>
+                                    </p:stCondLst>
+                                  </p:cTn>
+                                  <p:tgtEl>
+                                    <p:spTgt spid="3"/>
+                                  </p:tgtEl>
+                                  <p:attrNameLst>
+                                    <p:attrName>style.visibility</p:attrName>
+                                  </p:attrNameLst>
+                                </p:cBhvr>
+                                <p:to>
+                                  <p:strVal val="visible"/>
+                                </p:to>
+                              </p:set>
+                              <p:animEffect transition="in" filter="wipe(down)">
+                                <p:cBhvr>
+                                  <p:cTn id="51" dur="570"/>
+                                  <p:tgtEl>
+                                    <p:spTgt spid="3"/>
+                                  </p:tgtEl>
+                                </p:cBhvr>
+                              </p:animEffect>
+                            </p:childTnLst>
+                          </p:cTn>
+                        </p:par>
+                        <p:par>
+                          <p:cTn id="7" dur="690" fill="hold" nodeType="afterEffect" grpId="0" presetID="9" presetClass="entr" presetSubtype="0">
+                            <p:stCondLst>
+                              <p:cond delay="130"/>
+                            </p:stCondLst>
+                            <p:childTnLst>
+                              <p:set>
+                                <p:cBhvr>
+                                  <p:cTn id="8" dur="1" fill="hold">
+                                    <p:stCondLst>
+                                      <p:cond delay="0"/>
+                                    </p:stCondLst>
+                                  </p:cTn>
+                                  <p:tgtEl>
+                                    <p:spTgt spid="4"/>
+                                  </p:tgtEl>
+                                  <p:attrNameLst>
+                                    <p:attrName>style.visibility</p:attrName>
+                                  </p:attrNameLst>
+                                </p:cBhvr>
+                                <p:to>
+                                  <p:strVal val="visible"/>
+                                </p:to>
+                              </p:set>
+                              <p:animEffect transition="in" filter="fade">
+                                <p:cBhvr>
+                                  <p:cTn id="71" dur="690"/>
+                                  <p:tgtEl>
+                                    <p:spTgt spid="4"/>
+                                  </p:tgtEl>
+                                </p:cBhvr>
+                              </p:animEffect>
+                            </p:childTnLst>
+                          </p:cTn>
+                        </p:par>
+                        <p:par>
+                          <p:cTn id="9" dur="810" fill="hold" nodeType="afterEffect" grpId="0" presetID="22" presetClass="entr" presetSubtype="2">
+                            <p:stCondLst>
+                              <p:cond delay="260"/>
+                            </p:stCondLst>
+                            <p:childTnLst>
+                              <p:set>
+                                <p:cBhvr>
+                                  <p:cTn id="10" dur="1" fill="hold">
+                                    <p:stCondLst>
+                                      <p:cond delay="0"/>
+                                    </p:stCondLst>
+                                  </p:cTn>
+                                  <p:tgtEl>
+                                    <p:spTgt spid="5"/>
+                                  </p:tgtEl>
+                                  <p:attrNameLst>
+                                    <p:attrName>style.visibility</p:attrName>
+                                  </p:attrNameLst>
+                                </p:cBhvr>
+                                <p:to>
+                                  <p:strVal val="visible"/>
+                                </p:to>
+                              </p:set>
+                              <p:animEffect transition="in" filter="wipe(right)">
+                                <p:cBhvr>
+                                  <p:cTn id="91" dur="810"/>
+                                  <p:tgtEl>
+                                    <p:spTgt spid="5"/>
+                                  </p:tgtEl>
+                                </p:cBhvr>
+                              </p:animEffect>
+                            </p:childTnLst>
+                          </p:cTn>
+                        </p:par>
+                        <p:par>
+                          <p:cTn id="11" dur="450" fill="hold" nodeType="afterEffect" grpId="0" presetID="18" presetClass="entr" presetSubtype="12">
+                            <p:stCondLst>
+                              <p:cond delay="390"/>
+                            </p:stCondLst>
+                            <p:childTnLst>
+                              <p:set>
+                                <p:cBhvr>
+                                  <p:cTn id="12" dur="1" fill="hold">
+                                    <p:stCondLst>
+                                      <p:cond delay="0"/>
+                                    </p:stCondLst>
+                                  </p:cTn>
+                                  <p:tgtEl>
+                                    <p:spTgt spid="6"/>
+                                  </p:tgtEl>
+                                  <p:attrNameLst>
+                                    <p:attrName>style.visibility</p:attrName>
+                                  </p:attrNameLst>
+                                </p:cBhvr>
+                                <p:to>
+                                  <p:strVal val="visible"/>
+                                </p:to>
+                              </p:set>
+                              <p:animEffect transition="in" filter="circle(in)">
+                                <p:cBhvr>
+                                  <p:cTn id="111" dur="450"/>
+                                  <p:tgtEl>
+                                    <p:spTgt spid="6"/>
+                                  </p:tgtEl>
+                                </p:cBhvr>
+                              </p:animEffect>
+                            </p:childTnLst>
+                          </p:cTn>
+                        </p:par>
+                        <p:par>
+                          <p:cTn id="13" dur="570" fill="hold" nodeType="afterEffect" grpId="0" presetID="22" presetClass="entr" presetSubtype="1">
+                            <p:stCondLst>
+                              <p:cond delay="520"/>
+                            </p:stCondLst>
+                            <p:childTnLst>
+                              <p:set>
+                                <p:cBhvr>
+                                  <p:cTn id="14" dur="1" fill="hold">
+                                    <p:stCondLst>
+                                      <p:cond delay="0"/>
+                                    </p:stCondLst>
+                                  </p:cTn>
+                                  <p:tgtEl>
+                                    <p:spTgt spid="8"/>
+                                  </p:tgtEl>
+                                  <p:attrNameLst>
+                                    <p:attrName>style.visibility</p:attrName>
+                                  </p:attrNameLst>
+                                </p:cBhvr>
+                                <p:to>
+                                  <p:strVal val="visible"/>
+                                </p:to>
+                              </p:set>
+                              <p:animEffect transition="in" filter="wipe(up)">
+                                <p:cBhvr>
+                                  <p:cTn id="131" dur="570"/>
+                                  <p:tgtEl>
+                                    <p:spTgt spid="8"/>
+                                  </p:tgtEl>
+                                </p:cBhvr>
+                              </p:animEffect>
+                            </p:childTnLst>
+                          </p:cTn>
+                        </p:par>
+                        <p:par>
+                          <p:cTn id="15" dur="690" fill="hold" nodeType="afterEffect" grpId="0" presetID="42" presetClass="entr" presetSubtype="10">
+                            <p:stCondLst>
+                              <p:cond delay="650"/>
+                            </p:stCondLst>
+                            <p:childTnLst>
+                              <p:set>
+                                <p:cBhvr>
+                                  <p:cTn id="16" dur="1" fill="hold">
+                                    <p:stCondLst>
+                                      <p:cond delay="0"/>
+                                    </p:stCondLst>
+                                  </p:cTn>
+                                  <p:tgtEl>
+                                    <p:spTgt spid="10"/>
+                                  </p:tgtEl>
+                                  <p:attrNameLst>
+                                    <p:attrName>style.visibility</p:attrName>
+                                  </p:attrNameLst>
+                                </p:cBhvr>
+                                <p:to>
+                                  <p:strVal val="visible"/>
+                                </p:to>
+                              </p:set>
+                              <p:animEffect transition="in" filter="blinds(horizontal)">
+                                <p:cBhvr>
+                                  <p:cTn id="151" dur="690"/>
+                                  <p:tgtEl>
+                                    <p:spTgt spid="10"/>
+                                  </p:tgtEl>
+                                </p:cBhvr>
+                              </p:animEffect>
+                            </p:childTnLst>
+                          </p:cTn>
+                        </p:par>
+                        <p:par>
+                          <p:cTn id="17" dur="810" fill="hold" nodeType="afterEffect" grpId="0" presetID="43" presetClass="entr" presetSubtype="0">
+                            <p:stCondLst>
+                              <p:cond delay="780"/>
+                            </p:stCondLst>
+                            <p:childTnLst>
+                              <p:set>
+                                <p:cBhvr>
+                                  <p:cTn id="18" dur="1" fill="hold">
+                                    <p:stCondLst>
+                                      <p:cond delay="0"/>
+                                    </p:stCondLst>
+                                  </p:cTn>
+                                  <p:tgtEl>
+                                    <p:spTgt spid="7"/>
+                                  </p:tgtEl>
+                                  <p:attrNameLst>
+                                    <p:attrName>style.visibility</p:attrName>
+                                  </p:attrNameLst>
+                                </p:cBhvr>
+                                <p:to>
+                                  <p:strVal val="visible"/>
+                                </p:to>
+                              </p:set>
+                              <p:animEffect transition="in" filter="checkerboard(across)">
+                                <p:cBhvr>
+                                  <p:cTn id="171" dur="810"/>
+                                  <p:tgtEl>
+                                    <p:spTgt spid="7"/>
+                                  </p:tgtEl>
+                                </p:cBhvr>
+                              </p:animEffect>
+                            </p:childTnLst>
+                          </p:cTn>
+                        </p:par>
+                        <p:par>
+                          <p:cTn id="19" dur="450" fill="hold" nodeType="afterEffect" grpId="0" presetID="21" presetClass="entr" presetSubtype="2">
+                            <p:stCondLst>
+                              <p:cond delay="910"/>
+                            </p:stCondLst>
+                            <p:childTnLst>
+                              <p:set>
+                                <p:cBhvr>
+                                  <p:cTn id="20" dur="1" fill="hold">
+                                    <p:stCondLst>
+                                      <p:cond delay="0"/>
+                                    </p:stCondLst>
+                                  </p:cTn>
+                                  <p:tgtEl>
+                                    <p:spTgt spid="9"/>
+                                  </p:tgtEl>
+                                  <p:attrNameLst>
+                                    <p:attrName>style.visibility</p:attrName>
+                                  </p:attrNameLst>
+                                </p:cBhvr>
+                                <p:to>
+                                  <p:strVal val="visible"/>
+                                </p:to>
+                              </p:set>
+                              <p:animEffect transition="in" filter="wheel(2)">
+                                <p:cBhvr>
+                                  <p:cTn id="191" dur="450"/>
+                                  <p:tgtEl>
+                                    <p:spTgt spid="9"/>
+                                  </p:tgtEl>
+                                </p:cBhvr>
+                              </p:animEffect>
+                            </p:childTnLst>
+                          </p:cTn>
+                        </p:par>
+                        <p:par>
+                          <p:cTn id="21" dur="570" fill="hold" nodeType="afterEffect" grpId="0" presetID="10" presetClass="entr" presetSubtype="0">
+                            <p:stCondLst>
+                              <p:cond delay="1040"/>
+                            </p:stCondLst>
+                            <p:childTnLst>
+                              <p:set>
+                                <p:cBhvr>
+                                  <p:cTn id="22" dur="1" fill="hold">
+                                    <p:stCondLst>
+                                      <p:cond delay="0"/>
+                                    </p:stCondLst>
+                                  </p:cTn>
+                                  <p:tgtEl>
+                                    <p:spTgt spid="11"/>
+                                  </p:tgtEl>
+                                  <p:attrNameLst>
+                                    <p:attrName>style.visibility</p:attrName>
+                                  </p:attrNameLst>
+                                </p:cBhvr>
+                                <p:to>
+                                  <p:strVal val="visible"/>
+                                </p:to>
+                              </p:set>
+                              <p:animEffect transition="in" filter="dissolve">
+                                <p:cBhvr>
+                                  <p:cTn id="211" dur="570"/>
+                                  <p:tgtEl>
+                                    <p:spTgt spid="11"/>
+                                  </p:tgtEl>
+                                </p:cBhvr>
+                              </p:animEffect>
+                            </p:childTnLst>
+                          </p:cTn>
+                        </p:par>
+                        <p:par>
+                          <p:cTn id="23" dur="690" fill="hold" nodeType="afterEffect" grpId="0" presetID="25" presetClass="entr" presetSubtype="1">
+                            <p:stCondLst>
+                              <p:cond delay="1170"/>
+                            </p:stCondLst>
+                            <p:childTnLst>
+                              <p:set>
+                                <p:cBhvr>
+                                  <p:cTn id="24" dur="1" fill="hold">
+                                    <p:stCondLst>
+                                      <p:cond delay="0"/>
+                                    </p:stCondLst>
+                                  </p:cTn>
+                                  <p:tgtEl>
+                                    <p:spTgt spid="12"/>
+                                  </p:tgtEl>
+                                  <p:attrNameLst>
+                                    <p:attrName>style.visibility</p:attrName>
+                                  </p:attrNameLst>
+                                </p:cBhvr>
+                                <p:to>
+                                  <p:strVal val="visible"/>
+                                </p:to>
+                              </p:set>
+                              <p:animEffect transition="in" filter="strips(downRight)">
+                                <p:cBhvr>
+                                  <p:cTn id="231" dur="690"/>
+                                  <p:tgtEl>
+                                    <p:spTgt spid="12"/>
+                                  </p:tgtEl>
+                                </p:cBhvr>
+                              </p:animEffect>
+                            </p:childTnLst>
+                          </p:cTn>
+                        </p:par>
+                        <p:par>
+                          <p:cTn id="25" dur="810" fill="hold" nodeType="afterEffect" grpId="0" presetID="45" presetClass="entr" presetSubtype="1">
+                            <p:stCondLst>
+                              <p:cond delay="1300"/>
+                            </p:stCondLst>
+                            <p:childTnLst>
+                              <p:set>
+                                <p:cBhvr>
+                                  <p:cTn id="26" dur="1" fill="hold">
+                                    <p:stCondLst>
+                                      <p:cond delay="0"/>
+                                    </p:stCondLst>
+                                  </p:cTn>
+                                  <p:tgtEl>
+                                    <p:spTgt spid="14"/>
+                                  </p:tgtEl>
+                                  <p:attrNameLst>
+                                    <p:attrName>style.visibility</p:attrName>
+                                  </p:attrNameLst>
+                                </p:cBhvr>
+                                <p:to>
+                                  <p:strVal val="visible"/>
+                                </p:to>
+                              </p:set>
+                              <p:animEffect transition="in" filter="barn(inHorizontal)">
+                                <p:cBhvr>
+                                  <p:cTn id="251" dur="810"/>
+                                  <p:tgtEl>
+                                    <p:spTgt spid="14"/>
+                                  </p:tgtEl>
+                                </p:cBhvr>
+                              </p:animEffect>
+                            </p:childTnLst>
+                          </p:cTn>
+                        </p:par>
+                        <p:par>
+                          <p:cTn id="27" dur="450" fill="hold" nodeType="afterEffect" grpId="0" presetID="22" presetClass="entr" presetSubtype="8">
+                            <p:stCondLst>
+                              <p:cond delay="1430"/>
+                            </p:stCondLst>
+                            <p:childTnLst>
+                              <p:set>
+                                <p:cBhvr>
+                                  <p:cTn id="28" dur="1" fill="hold">
+                                    <p:stCondLst>
+                                      <p:cond delay="0"/>
+                                    </p:stCondLst>
+                                  </p:cTn>
+                                  <p:tgtEl>
+                                    <p:spTgt spid="16"/>
+                                  </p:tgtEl>
+                                  <p:attrNameLst>
+                                    <p:attrName>style.visibility</p:attrName>
+                                  </p:attrNameLst>
+                                </p:cBhvr>
+                                <p:to>
+                                  <p:strVal val="visible"/>
+                                </p:to>
+                              </p:set>
+                              <p:animEffect transition="in" filter="wipe(left)">
+                                <p:cBhvr>
+                                  <p:cTn id="271" dur="450"/>
+                                  <p:tgtEl>
+                                    <p:spTgt spid="16"/>
+                                  </p:tgtEl>
+                                </p:cBhvr>
+                              </p:animEffect>
+                            </p:childTnLst>
+                          </p:cTn>
+                        </p:par>
+                        <p:par>
+                          <p:cTn id="29" dur="570" fill="hold" nodeType="afterEffect" grpId="0" presetID="37" presetClass="entr" presetSubtype="0">
+                            <p:stCondLst>
+                              <p:cond delay="1560"/>
+                            </p:stCondLst>
+                            <p:childTnLst>
+                              <p:set>
+                                <p:cBhvr>
+                                  <p:cTn id="30" dur="1" fill="hold">
+                                    <p:stCondLst>
+                                      <p:cond delay="0"/>
+                                    </p:stCondLst>
+                                  </p:cTn>
+                                  <p:tgtEl>
+                                    <p:spTgt spid="13"/>
+                                  </p:tgtEl>
+                                  <p:attrNameLst>
+                                    <p:attrName>style.visibility</p:attrName>
+                                  </p:attrNameLst>
+                                </p:cBhvr>
+                                <p:to>
+                                  <p:strVal val="visible"/>
+                                </p:to>
+                              </p:set>
+                              <p:animEffect transition="in" filter="wedge">
+                                <p:cBhvr>
+                                  <p:cTn id="291" dur="570"/>
+                                  <p:tgtEl>
+                                    <p:spTgt spid="13"/>
+                                  </p:tgtEl>
+                                </p:cBhvr>
+                              </p:animEffect>
+                            </p:childTnLst>
+                          </p:cTn>
+                        </p:par>
+                        <p:par>
+                          <p:cTn id="31" dur="690" fill="hold" nodeType="afterEffect" grpId="0" presetID="52" presetClass="entr" presetSubtype="0">
+                            <p:stCondLst>
+                              <p:cond delay="1690"/>
+                            </p:stCondLst>
+                            <p:childTnLst>
+                              <p:set>
+                                <p:cBhvr>
+                                  <p:cTn id="32" dur="1" fill="hold">
+                                    <p:stCondLst>
+                                      <p:cond delay="0"/>
+                                    </p:stCondLst>
+                                  </p:cTn>
+                                  <p:tgtEl>
+                                    <p:spTgt spid="15"/>
+                                  </p:tgtEl>
+                                  <p:attrNameLst>
+                                    <p:attrName>style.visibility</p:attrName>
+                                  </p:attrNameLst>
+                                </p:cBhvr>
+                                <p:to>
+                                  <p:strVal val="visible"/>
+                                </p:to>
+                              </p:set>
+                              <p:animEffect transition="in" filter="randombar(horizontal)">
+                                <p:cBhvr>
+                                  <p:cTn id="311" dur="690"/>
+                                  <p:tgtEl>
+                                    <p:spTgt spid="15"/>
+                                  </p:tgtEl>
+                                </p:cBhvr>
+                              </p:animEffect>
+                            </p:childTnLst>
+                          </p:cTn>
+                        </p:par>
+                      </p:childTnLst>
+                    </p:cTn>
+                  </p:par>
+                </p:childTnLst>
+              </p:cTn>
+              <p:prevCondLst>
+                <p:cond evt="onPrev" delay="0">
+                  <p:tgtEl>
+                    <p:sldTgt/>
+                  </p:tgtEl>
+                </p:cond>
+              </p:prevCondLst>
+              <p:nextCondLst>
+                <p:cond evt="onNext" delay="0">
+                  <p:tgtEl>
+                    <p:sldTgt/>
+                  </p:tgtEl>
+                </p:cond>
+              </p:nextCondLst>
+            </p:seq>
+          </p:childTnLst>
+        </p:cTn>
+      </p:par>
+    </p:tnLst>
+  </p:timing>
 </p:sld>
 </file>
 
@@ -6096,8 +7543,467 @@
     <a:masterClrMapping/>
   </p:clrMapOvr>
   <p:transition spd="med">
-    <p:push/>
+    <p:wipe dir="u"/>
   </p:transition>
+  <p:timing>
+    <p:tnLst>
+      <p:par>
+        <p:cTn id="1" dur="indefinite" restart="never" nodeType="tmRoot">
+          <p:childTnLst>
+            <p:seq concurrent="1" nextAc="seek">
+              <p:cTn id="2" dur="indefinite" nodeType="mainSeq">
+                <p:childTnLst>
+                  <p:par>
+                    <p:cTn id="3" fill="hold">
+                      <p:stCondLst>
+                        <p:cond delay="indefinite"/>
+                      </p:stCondLst>
+                      <p:childTnLst>
+                        <p:par>
+                          <p:cTn id="5" dur="690" fill="hold" nodeType="clickEffect" grpId="0" presetID="9" presetClass="entr" presetSubtype="0">
+                            <p:stCondLst>
+                              <p:cond delay="0"/>
+                            </p:stCondLst>
+                            <p:childTnLst>
+                              <p:set>
+                                <p:cBhvr>
+                                  <p:cTn id="6" dur="1" fill="hold">
+                                    <p:stCondLst>
+                                      <p:cond delay="0"/>
+                                    </p:stCondLst>
+                                  </p:cTn>
+                                  <p:tgtEl>
+                                    <p:spTgt spid="3"/>
+                                  </p:tgtEl>
+                                  <p:attrNameLst>
+                                    <p:attrName>style.visibility</p:attrName>
+                                  </p:attrNameLst>
+                                </p:cBhvr>
+                                <p:to>
+                                  <p:strVal val="visible"/>
+                                </p:to>
+                              </p:set>
+                              <p:animEffect transition="in" filter="fade">
+                                <p:cBhvr>
+                                  <p:cTn id="51" dur="690"/>
+                                  <p:tgtEl>
+                                    <p:spTgt spid="3"/>
+                                  </p:tgtEl>
+                                </p:cBhvr>
+                              </p:animEffect>
+                            </p:childTnLst>
+                          </p:cTn>
+                        </p:par>
+                        <p:par>
+                          <p:cTn id="7" dur="810" fill="hold" nodeType="afterEffect" grpId="0" presetID="22" presetClass="entr" presetSubtype="2">
+                            <p:stCondLst>
+                              <p:cond delay="130"/>
+                            </p:stCondLst>
+                            <p:childTnLst>
+                              <p:set>
+                                <p:cBhvr>
+                                  <p:cTn id="8" dur="1" fill="hold">
+                                    <p:stCondLst>
+                                      <p:cond delay="0"/>
+                                    </p:stCondLst>
+                                  </p:cTn>
+                                  <p:tgtEl>
+                                    <p:spTgt spid="4"/>
+                                  </p:tgtEl>
+                                  <p:attrNameLst>
+                                    <p:attrName>style.visibility</p:attrName>
+                                  </p:attrNameLst>
+                                </p:cBhvr>
+                                <p:to>
+                                  <p:strVal val="visible"/>
+                                </p:to>
+                              </p:set>
+                              <p:animEffect transition="in" filter="wipe(right)">
+                                <p:cBhvr>
+                                  <p:cTn id="71" dur="810"/>
+                                  <p:tgtEl>
+                                    <p:spTgt spid="4"/>
+                                  </p:tgtEl>
+                                </p:cBhvr>
+                              </p:animEffect>
+                            </p:childTnLst>
+                          </p:cTn>
+                        </p:par>
+                        <p:par>
+                          <p:cTn id="9" dur="450" fill="hold" nodeType="afterEffect" grpId="0" presetID="18" presetClass="entr" presetSubtype="12">
+                            <p:stCondLst>
+                              <p:cond delay="260"/>
+                            </p:stCondLst>
+                            <p:childTnLst>
+                              <p:set>
+                                <p:cBhvr>
+                                  <p:cTn id="10" dur="1" fill="hold">
+                                    <p:stCondLst>
+                                      <p:cond delay="0"/>
+                                    </p:stCondLst>
+                                  </p:cTn>
+                                  <p:tgtEl>
+                                    <p:spTgt spid="5"/>
+                                  </p:tgtEl>
+                                  <p:attrNameLst>
+                                    <p:attrName>style.visibility</p:attrName>
+                                  </p:attrNameLst>
+                                </p:cBhvr>
+                                <p:to>
+                                  <p:strVal val="visible"/>
+                                </p:to>
+                              </p:set>
+                              <p:animEffect transition="in" filter="circle(in)">
+                                <p:cBhvr>
+                                  <p:cTn id="91" dur="450"/>
+                                  <p:tgtEl>
+                                    <p:spTgt spid="5"/>
+                                  </p:tgtEl>
+                                </p:cBhvr>
+                              </p:animEffect>
+                            </p:childTnLst>
+                          </p:cTn>
+                        </p:par>
+                        <p:par>
+                          <p:cTn id="11" dur="570" fill="hold" nodeType="afterEffect" grpId="0" presetID="22" presetClass="entr" presetSubtype="1">
+                            <p:stCondLst>
+                              <p:cond delay="390"/>
+                            </p:stCondLst>
+                            <p:childTnLst>
+                              <p:set>
+                                <p:cBhvr>
+                                  <p:cTn id="12" dur="1" fill="hold">
+                                    <p:stCondLst>
+                                      <p:cond delay="0"/>
+                                    </p:stCondLst>
+                                  </p:cTn>
+                                  <p:tgtEl>
+                                    <p:spTgt spid="6"/>
+                                  </p:tgtEl>
+                                  <p:attrNameLst>
+                                    <p:attrName>style.visibility</p:attrName>
+                                  </p:attrNameLst>
+                                </p:cBhvr>
+                                <p:to>
+                                  <p:strVal val="visible"/>
+                                </p:to>
+                              </p:set>
+                              <p:animEffect transition="in" filter="wipe(up)">
+                                <p:cBhvr>
+                                  <p:cTn id="111" dur="570"/>
+                                  <p:tgtEl>
+                                    <p:spTgt spid="6"/>
+                                  </p:tgtEl>
+                                </p:cBhvr>
+                              </p:animEffect>
+                            </p:childTnLst>
+                          </p:cTn>
+                        </p:par>
+                        <p:par>
+                          <p:cTn id="13" dur="690" fill="hold" nodeType="afterEffect" grpId="0" presetID="42" presetClass="entr" presetSubtype="10">
+                            <p:stCondLst>
+                              <p:cond delay="520"/>
+                            </p:stCondLst>
+                            <p:childTnLst>
+                              <p:set>
+                                <p:cBhvr>
+                                  <p:cTn id="14" dur="1" fill="hold">
+                                    <p:stCondLst>
+                                      <p:cond delay="0"/>
+                                    </p:stCondLst>
+                                  </p:cTn>
+                                  <p:tgtEl>
+                                    <p:spTgt spid="7"/>
+                                  </p:tgtEl>
+                                  <p:attrNameLst>
+                                    <p:attrName>style.visibility</p:attrName>
+                                  </p:attrNameLst>
+                                </p:cBhvr>
+                                <p:to>
+                                  <p:strVal val="visible"/>
+                                </p:to>
+                              </p:set>
+                              <p:animEffect transition="in" filter="blinds(horizontal)">
+                                <p:cBhvr>
+                                  <p:cTn id="131" dur="690"/>
+                                  <p:tgtEl>
+                                    <p:spTgt spid="7"/>
+                                  </p:tgtEl>
+                                </p:cBhvr>
+                              </p:animEffect>
+                            </p:childTnLst>
+                          </p:cTn>
+                        </p:par>
+                        <p:par>
+                          <p:cTn id="15" dur="810" fill="hold" nodeType="afterEffect" grpId="0" presetID="43" presetClass="entr" presetSubtype="0">
+                            <p:stCondLst>
+                              <p:cond delay="650"/>
+                            </p:stCondLst>
+                            <p:childTnLst>
+                              <p:set>
+                                <p:cBhvr>
+                                  <p:cTn id="16" dur="1" fill="hold">
+                                    <p:stCondLst>
+                                      <p:cond delay="0"/>
+                                    </p:stCondLst>
+                                  </p:cTn>
+                                  <p:tgtEl>
+                                    <p:spTgt spid="8"/>
+                                  </p:tgtEl>
+                                  <p:attrNameLst>
+                                    <p:attrName>style.visibility</p:attrName>
+                                  </p:attrNameLst>
+                                </p:cBhvr>
+                                <p:to>
+                                  <p:strVal val="visible"/>
+                                </p:to>
+                              </p:set>
+                              <p:animEffect transition="in" filter="checkerboard(across)">
+                                <p:cBhvr>
+                                  <p:cTn id="151" dur="810"/>
+                                  <p:tgtEl>
+                                    <p:spTgt spid="8"/>
+                                  </p:tgtEl>
+                                </p:cBhvr>
+                              </p:animEffect>
+                            </p:childTnLst>
+                          </p:cTn>
+                        </p:par>
+                        <p:par>
+                          <p:cTn id="17" dur="450" fill="hold" nodeType="afterEffect" grpId="0" presetID="21" presetClass="entr" presetSubtype="2">
+                            <p:stCondLst>
+                              <p:cond delay="780"/>
+                            </p:stCondLst>
+                            <p:childTnLst>
+                              <p:set>
+                                <p:cBhvr>
+                                  <p:cTn id="18" dur="1" fill="hold">
+                                    <p:stCondLst>
+                                      <p:cond delay="0"/>
+                                    </p:stCondLst>
+                                  </p:cTn>
+                                  <p:tgtEl>
+                                    <p:spTgt spid="9"/>
+                                  </p:tgtEl>
+                                  <p:attrNameLst>
+                                    <p:attrName>style.visibility</p:attrName>
+                                  </p:attrNameLst>
+                                </p:cBhvr>
+                                <p:to>
+                                  <p:strVal val="visible"/>
+                                </p:to>
+                              </p:set>
+                              <p:animEffect transition="in" filter="wheel(2)">
+                                <p:cBhvr>
+                                  <p:cTn id="171" dur="450"/>
+                                  <p:tgtEl>
+                                    <p:spTgt spid="9"/>
+                                  </p:tgtEl>
+                                </p:cBhvr>
+                              </p:animEffect>
+                            </p:childTnLst>
+                          </p:cTn>
+                        </p:par>
+                        <p:par>
+                          <p:cTn id="19" dur="570" fill="hold" nodeType="afterEffect" grpId="0" presetID="10" presetClass="entr" presetSubtype="0">
+                            <p:stCondLst>
+                              <p:cond delay="910"/>
+                            </p:stCondLst>
+                            <p:childTnLst>
+                              <p:set>
+                                <p:cBhvr>
+                                  <p:cTn id="20" dur="1" fill="hold">
+                                    <p:stCondLst>
+                                      <p:cond delay="0"/>
+                                    </p:stCondLst>
+                                  </p:cTn>
+                                  <p:tgtEl>
+                                    <p:spTgt spid="10"/>
+                                  </p:tgtEl>
+                                  <p:attrNameLst>
+                                    <p:attrName>style.visibility</p:attrName>
+                                  </p:attrNameLst>
+                                </p:cBhvr>
+                                <p:to>
+                                  <p:strVal val="visible"/>
+                                </p:to>
+                              </p:set>
+                              <p:animEffect transition="in" filter="dissolve">
+                                <p:cBhvr>
+                                  <p:cTn id="191" dur="570"/>
+                                  <p:tgtEl>
+                                    <p:spTgt spid="10"/>
+                                  </p:tgtEl>
+                                </p:cBhvr>
+                              </p:animEffect>
+                            </p:childTnLst>
+                          </p:cTn>
+                        </p:par>
+                        <p:par>
+                          <p:cTn id="21" dur="690" fill="hold" nodeType="afterEffect" grpId="0" presetID="25" presetClass="entr" presetSubtype="1">
+                            <p:stCondLst>
+                              <p:cond delay="1040"/>
+                            </p:stCondLst>
+                            <p:childTnLst>
+                              <p:set>
+                                <p:cBhvr>
+                                  <p:cTn id="22" dur="1" fill="hold">
+                                    <p:stCondLst>
+                                      <p:cond delay="0"/>
+                                    </p:stCondLst>
+                                  </p:cTn>
+                                  <p:tgtEl>
+                                    <p:spTgt spid="11"/>
+                                  </p:tgtEl>
+                                  <p:attrNameLst>
+                                    <p:attrName>style.visibility</p:attrName>
+                                  </p:attrNameLst>
+                                </p:cBhvr>
+                                <p:to>
+                                  <p:strVal val="visible"/>
+                                </p:to>
+                              </p:set>
+                              <p:animEffect transition="in" filter="strips(downRight)">
+                                <p:cBhvr>
+                                  <p:cTn id="211" dur="690"/>
+                                  <p:tgtEl>
+                                    <p:spTgt spid="11"/>
+                                  </p:tgtEl>
+                                </p:cBhvr>
+                              </p:animEffect>
+                            </p:childTnLst>
+                          </p:cTn>
+                        </p:par>
+                        <p:par>
+                          <p:cTn id="23" dur="810" fill="hold" nodeType="afterEffect" grpId="0" presetID="45" presetClass="entr" presetSubtype="1">
+                            <p:stCondLst>
+                              <p:cond delay="1170"/>
+                            </p:stCondLst>
+                            <p:childTnLst>
+                              <p:set>
+                                <p:cBhvr>
+                                  <p:cTn id="24" dur="1" fill="hold">
+                                    <p:stCondLst>
+                                      <p:cond delay="0"/>
+                                    </p:stCondLst>
+                                  </p:cTn>
+                                  <p:tgtEl>
+                                    <p:spTgt spid="12"/>
+                                  </p:tgtEl>
+                                  <p:attrNameLst>
+                                    <p:attrName>style.visibility</p:attrName>
+                                  </p:attrNameLst>
+                                </p:cBhvr>
+                                <p:to>
+                                  <p:strVal val="visible"/>
+                                </p:to>
+                              </p:set>
+                              <p:animEffect transition="in" filter="barn(inHorizontal)">
+                                <p:cBhvr>
+                                  <p:cTn id="231" dur="810"/>
+                                  <p:tgtEl>
+                                    <p:spTgt spid="12"/>
+                                  </p:tgtEl>
+                                </p:cBhvr>
+                              </p:animEffect>
+                            </p:childTnLst>
+                          </p:cTn>
+                        </p:par>
+                        <p:par>
+                          <p:cTn id="25" dur="450" fill="hold" nodeType="afterEffect" grpId="0" presetID="22" presetClass="entr" presetSubtype="8">
+                            <p:stCondLst>
+                              <p:cond delay="1300"/>
+                            </p:stCondLst>
+                            <p:childTnLst>
+                              <p:set>
+                                <p:cBhvr>
+                                  <p:cTn id="26" dur="1" fill="hold">
+                                    <p:stCondLst>
+                                      <p:cond delay="0"/>
+                                    </p:stCondLst>
+                                  </p:cTn>
+                                  <p:tgtEl>
+                                    <p:spTgt spid="13"/>
+                                  </p:tgtEl>
+                                  <p:attrNameLst>
+                                    <p:attrName>style.visibility</p:attrName>
+                                  </p:attrNameLst>
+                                </p:cBhvr>
+                                <p:to>
+                                  <p:strVal val="visible"/>
+                                </p:to>
+                              </p:set>
+                              <p:animEffect transition="in" filter="wipe(left)">
+                                <p:cBhvr>
+                                  <p:cTn id="251" dur="450"/>
+                                  <p:tgtEl>
+                                    <p:spTgt spid="13"/>
+                                  </p:tgtEl>
+                                </p:cBhvr>
+                              </p:animEffect>
+                            </p:childTnLst>
+                          </p:cTn>
+                        </p:par>
+                        <p:par>
+                          <p:cTn id="27" dur="570" fill="hold" nodeType="afterEffect" grpId="0" presetID="37" presetClass="entr" presetSubtype="0">
+                            <p:stCondLst>
+                              <p:cond delay="1430"/>
+                            </p:stCondLst>
+                            <p:childTnLst>
+                              <p:set>
+                                <p:cBhvr>
+                                  <p:cTn id="28" dur="1" fill="hold">
+                                    <p:stCondLst>
+                                      <p:cond delay="0"/>
+                                    </p:stCondLst>
+                                  </p:cTn>
+                                  <p:tgtEl>
+                                    <p:spTgt spid="14"/>
+                                  </p:tgtEl>
+                                  <p:attrNameLst>
+                                    <p:attrName>style.visibility</p:attrName>
+                                  </p:attrNameLst>
+                                </p:cBhvr>
+                                <p:to>
+                                  <p:strVal val="visible"/>
+                                </p:to>
+                              </p:set>
+                              <p:animEffect transition="in" filter="wedge">
+                                <p:cBhvr>
+                                  <p:cTn id="271" dur="570"/>
+                                  <p:tgtEl>
+                                    <p:spTgt spid="14"/>
+                                  </p:tgtEl>
+                                </p:cBhvr>
+                              </p:animEffect>
+                            </p:childTnLst>
+                          </p:cTn>
+                        </p:par>
+                      </p:childTnLst>
+                    </p:cTn>
+                  </p:par>
+                </p:childTnLst>
+              </p:cTn>
+              <p:prevCondLst>
+                <p:cond evt="onPrev" delay="0">
+                  <p:tgtEl>
+                    <p:sldTgt/>
+                  </p:tgtEl>
+                </p:cond>
+              </p:prevCondLst>
+              <p:nextCondLst>
+                <p:cond evt="onNext" delay="0">
+                  <p:tgtEl>
+                    <p:sldTgt/>
+                  </p:tgtEl>
+                </p:cond>
+              </p:nextCondLst>
+            </p:seq>
+          </p:childTnLst>
+        </p:cTn>
+      </p:par>
+    </p:tnLst>
+  </p:timing>
 </p:sld>
 </file>
 
@@ -6701,8 +8607,467 @@
     <a:masterClrMapping/>
   </p:clrMapOvr>
   <p:transition spd="med">
-    <p:push/>
+    <p:split orient="horz"/>
   </p:transition>
+  <p:timing>
+    <p:tnLst>
+      <p:par>
+        <p:cTn id="1" dur="indefinite" restart="never" nodeType="tmRoot">
+          <p:childTnLst>
+            <p:seq concurrent="1" nextAc="seek">
+              <p:cTn id="2" dur="indefinite" nodeType="mainSeq">
+                <p:childTnLst>
+                  <p:par>
+                    <p:cTn id="3" fill="hold">
+                      <p:stCondLst>
+                        <p:cond delay="indefinite"/>
+                      </p:stCondLst>
+                      <p:childTnLst>
+                        <p:par>
+                          <p:cTn id="5" dur="810" fill="hold" nodeType="clickEffect" grpId="0" presetID="22" presetClass="entr" presetSubtype="2">
+                            <p:stCondLst>
+                              <p:cond delay="0"/>
+                            </p:stCondLst>
+                            <p:childTnLst>
+                              <p:set>
+                                <p:cBhvr>
+                                  <p:cTn id="6" dur="1" fill="hold">
+                                    <p:stCondLst>
+                                      <p:cond delay="0"/>
+                                    </p:stCondLst>
+                                  </p:cTn>
+                                  <p:tgtEl>
+                                    <p:spTgt spid="3"/>
+                                  </p:tgtEl>
+                                  <p:attrNameLst>
+                                    <p:attrName>style.visibility</p:attrName>
+                                  </p:attrNameLst>
+                                </p:cBhvr>
+                                <p:to>
+                                  <p:strVal val="visible"/>
+                                </p:to>
+                              </p:set>
+                              <p:animEffect transition="in" filter="wipe(right)">
+                                <p:cBhvr>
+                                  <p:cTn id="51" dur="810"/>
+                                  <p:tgtEl>
+                                    <p:spTgt spid="3"/>
+                                  </p:tgtEl>
+                                </p:cBhvr>
+                              </p:animEffect>
+                            </p:childTnLst>
+                          </p:cTn>
+                        </p:par>
+                        <p:par>
+                          <p:cTn id="7" dur="450" fill="hold" nodeType="afterEffect" grpId="0" presetID="18" presetClass="entr" presetSubtype="12">
+                            <p:stCondLst>
+                              <p:cond delay="130"/>
+                            </p:stCondLst>
+                            <p:childTnLst>
+                              <p:set>
+                                <p:cBhvr>
+                                  <p:cTn id="8" dur="1" fill="hold">
+                                    <p:stCondLst>
+                                      <p:cond delay="0"/>
+                                    </p:stCondLst>
+                                  </p:cTn>
+                                  <p:tgtEl>
+                                    <p:spTgt spid="4"/>
+                                  </p:tgtEl>
+                                  <p:attrNameLst>
+                                    <p:attrName>style.visibility</p:attrName>
+                                  </p:attrNameLst>
+                                </p:cBhvr>
+                                <p:to>
+                                  <p:strVal val="visible"/>
+                                </p:to>
+                              </p:set>
+                              <p:animEffect transition="in" filter="circle(in)">
+                                <p:cBhvr>
+                                  <p:cTn id="71" dur="450"/>
+                                  <p:tgtEl>
+                                    <p:spTgt spid="4"/>
+                                  </p:tgtEl>
+                                </p:cBhvr>
+                              </p:animEffect>
+                            </p:childTnLst>
+                          </p:cTn>
+                        </p:par>
+                        <p:par>
+                          <p:cTn id="9" dur="570" fill="hold" nodeType="afterEffect" grpId="0" presetID="22" presetClass="entr" presetSubtype="1">
+                            <p:stCondLst>
+                              <p:cond delay="260"/>
+                            </p:stCondLst>
+                            <p:childTnLst>
+                              <p:set>
+                                <p:cBhvr>
+                                  <p:cTn id="10" dur="1" fill="hold">
+                                    <p:stCondLst>
+                                      <p:cond delay="0"/>
+                                    </p:stCondLst>
+                                  </p:cTn>
+                                  <p:tgtEl>
+                                    <p:spTgt spid="5"/>
+                                  </p:tgtEl>
+                                  <p:attrNameLst>
+                                    <p:attrName>style.visibility</p:attrName>
+                                  </p:attrNameLst>
+                                </p:cBhvr>
+                                <p:to>
+                                  <p:strVal val="visible"/>
+                                </p:to>
+                              </p:set>
+                              <p:animEffect transition="in" filter="wipe(up)">
+                                <p:cBhvr>
+                                  <p:cTn id="91" dur="570"/>
+                                  <p:tgtEl>
+                                    <p:spTgt spid="5"/>
+                                  </p:tgtEl>
+                                </p:cBhvr>
+                              </p:animEffect>
+                            </p:childTnLst>
+                          </p:cTn>
+                        </p:par>
+                        <p:par>
+                          <p:cTn id="11" dur="690" fill="hold" nodeType="afterEffect" grpId="0" presetID="42" presetClass="entr" presetSubtype="10">
+                            <p:stCondLst>
+                              <p:cond delay="390"/>
+                            </p:stCondLst>
+                            <p:childTnLst>
+                              <p:set>
+                                <p:cBhvr>
+                                  <p:cTn id="12" dur="1" fill="hold">
+                                    <p:stCondLst>
+                                      <p:cond delay="0"/>
+                                    </p:stCondLst>
+                                  </p:cTn>
+                                  <p:tgtEl>
+                                    <p:spTgt spid="6"/>
+                                  </p:tgtEl>
+                                  <p:attrNameLst>
+                                    <p:attrName>style.visibility</p:attrName>
+                                  </p:attrNameLst>
+                                </p:cBhvr>
+                                <p:to>
+                                  <p:strVal val="visible"/>
+                                </p:to>
+                              </p:set>
+                              <p:animEffect transition="in" filter="blinds(horizontal)">
+                                <p:cBhvr>
+                                  <p:cTn id="111" dur="690"/>
+                                  <p:tgtEl>
+                                    <p:spTgt spid="6"/>
+                                  </p:tgtEl>
+                                </p:cBhvr>
+                              </p:animEffect>
+                            </p:childTnLst>
+                          </p:cTn>
+                        </p:par>
+                        <p:par>
+                          <p:cTn id="13" dur="810" fill="hold" nodeType="afterEffect" grpId="0" presetID="43" presetClass="entr" presetSubtype="0">
+                            <p:stCondLst>
+                              <p:cond delay="520"/>
+                            </p:stCondLst>
+                            <p:childTnLst>
+                              <p:set>
+                                <p:cBhvr>
+                                  <p:cTn id="14" dur="1" fill="hold">
+                                    <p:stCondLst>
+                                      <p:cond delay="0"/>
+                                    </p:stCondLst>
+                                  </p:cTn>
+                                  <p:tgtEl>
+                                    <p:spTgt spid="7"/>
+                                  </p:tgtEl>
+                                  <p:attrNameLst>
+                                    <p:attrName>style.visibility</p:attrName>
+                                  </p:attrNameLst>
+                                </p:cBhvr>
+                                <p:to>
+                                  <p:strVal val="visible"/>
+                                </p:to>
+                              </p:set>
+                              <p:animEffect transition="in" filter="checkerboard(across)">
+                                <p:cBhvr>
+                                  <p:cTn id="131" dur="810"/>
+                                  <p:tgtEl>
+                                    <p:spTgt spid="7"/>
+                                  </p:tgtEl>
+                                </p:cBhvr>
+                              </p:animEffect>
+                            </p:childTnLst>
+                          </p:cTn>
+                        </p:par>
+                        <p:par>
+                          <p:cTn id="15" dur="450" fill="hold" nodeType="afterEffect" grpId="0" presetID="21" presetClass="entr" presetSubtype="2">
+                            <p:stCondLst>
+                              <p:cond delay="650"/>
+                            </p:stCondLst>
+                            <p:childTnLst>
+                              <p:set>
+                                <p:cBhvr>
+                                  <p:cTn id="16" dur="1" fill="hold">
+                                    <p:stCondLst>
+                                      <p:cond delay="0"/>
+                                    </p:stCondLst>
+                                  </p:cTn>
+                                  <p:tgtEl>
+                                    <p:spTgt spid="8"/>
+                                  </p:tgtEl>
+                                  <p:attrNameLst>
+                                    <p:attrName>style.visibility</p:attrName>
+                                  </p:attrNameLst>
+                                </p:cBhvr>
+                                <p:to>
+                                  <p:strVal val="visible"/>
+                                </p:to>
+                              </p:set>
+                              <p:animEffect transition="in" filter="wheel(2)">
+                                <p:cBhvr>
+                                  <p:cTn id="151" dur="450"/>
+                                  <p:tgtEl>
+                                    <p:spTgt spid="8"/>
+                                  </p:tgtEl>
+                                </p:cBhvr>
+                              </p:animEffect>
+                            </p:childTnLst>
+                          </p:cTn>
+                        </p:par>
+                        <p:par>
+                          <p:cTn id="17" dur="570" fill="hold" nodeType="afterEffect" grpId="0" presetID="10" presetClass="entr" presetSubtype="0">
+                            <p:stCondLst>
+                              <p:cond delay="780"/>
+                            </p:stCondLst>
+                            <p:childTnLst>
+                              <p:set>
+                                <p:cBhvr>
+                                  <p:cTn id="18" dur="1" fill="hold">
+                                    <p:stCondLst>
+                                      <p:cond delay="0"/>
+                                    </p:stCondLst>
+                                  </p:cTn>
+                                  <p:tgtEl>
+                                    <p:spTgt spid="9"/>
+                                  </p:tgtEl>
+                                  <p:attrNameLst>
+                                    <p:attrName>style.visibility</p:attrName>
+                                  </p:attrNameLst>
+                                </p:cBhvr>
+                                <p:to>
+                                  <p:strVal val="visible"/>
+                                </p:to>
+                              </p:set>
+                              <p:animEffect transition="in" filter="dissolve">
+                                <p:cBhvr>
+                                  <p:cTn id="171" dur="570"/>
+                                  <p:tgtEl>
+                                    <p:spTgt spid="9"/>
+                                  </p:tgtEl>
+                                </p:cBhvr>
+                              </p:animEffect>
+                            </p:childTnLst>
+                          </p:cTn>
+                        </p:par>
+                        <p:par>
+                          <p:cTn id="19" dur="690" fill="hold" nodeType="afterEffect" grpId="0" presetID="25" presetClass="entr" presetSubtype="1">
+                            <p:stCondLst>
+                              <p:cond delay="910"/>
+                            </p:stCondLst>
+                            <p:childTnLst>
+                              <p:set>
+                                <p:cBhvr>
+                                  <p:cTn id="20" dur="1" fill="hold">
+                                    <p:stCondLst>
+                                      <p:cond delay="0"/>
+                                    </p:stCondLst>
+                                  </p:cTn>
+                                  <p:tgtEl>
+                                    <p:spTgt spid="10"/>
+                                  </p:tgtEl>
+                                  <p:attrNameLst>
+                                    <p:attrName>style.visibility</p:attrName>
+                                  </p:attrNameLst>
+                                </p:cBhvr>
+                                <p:to>
+                                  <p:strVal val="visible"/>
+                                </p:to>
+                              </p:set>
+                              <p:animEffect transition="in" filter="strips(downRight)">
+                                <p:cBhvr>
+                                  <p:cTn id="191" dur="690"/>
+                                  <p:tgtEl>
+                                    <p:spTgt spid="10"/>
+                                  </p:tgtEl>
+                                </p:cBhvr>
+                              </p:animEffect>
+                            </p:childTnLst>
+                          </p:cTn>
+                        </p:par>
+                        <p:par>
+                          <p:cTn id="21" dur="810" fill="hold" nodeType="afterEffect" grpId="0" presetID="45" presetClass="entr" presetSubtype="1">
+                            <p:stCondLst>
+                              <p:cond delay="1040"/>
+                            </p:stCondLst>
+                            <p:childTnLst>
+                              <p:set>
+                                <p:cBhvr>
+                                  <p:cTn id="22" dur="1" fill="hold">
+                                    <p:stCondLst>
+                                      <p:cond delay="0"/>
+                                    </p:stCondLst>
+                                  </p:cTn>
+                                  <p:tgtEl>
+                                    <p:spTgt spid="11"/>
+                                  </p:tgtEl>
+                                  <p:attrNameLst>
+                                    <p:attrName>style.visibility</p:attrName>
+                                  </p:attrNameLst>
+                                </p:cBhvr>
+                                <p:to>
+                                  <p:strVal val="visible"/>
+                                </p:to>
+                              </p:set>
+                              <p:animEffect transition="in" filter="barn(inHorizontal)">
+                                <p:cBhvr>
+                                  <p:cTn id="211" dur="810"/>
+                                  <p:tgtEl>
+                                    <p:spTgt spid="11"/>
+                                  </p:tgtEl>
+                                </p:cBhvr>
+                              </p:animEffect>
+                            </p:childTnLst>
+                          </p:cTn>
+                        </p:par>
+                        <p:par>
+                          <p:cTn id="23" dur="450" fill="hold" nodeType="afterEffect" grpId="0" presetID="22" presetClass="entr" presetSubtype="8">
+                            <p:stCondLst>
+                              <p:cond delay="1170"/>
+                            </p:stCondLst>
+                            <p:childTnLst>
+                              <p:set>
+                                <p:cBhvr>
+                                  <p:cTn id="24" dur="1" fill="hold">
+                                    <p:stCondLst>
+                                      <p:cond delay="0"/>
+                                    </p:stCondLst>
+                                  </p:cTn>
+                                  <p:tgtEl>
+                                    <p:spTgt spid="12"/>
+                                  </p:tgtEl>
+                                  <p:attrNameLst>
+                                    <p:attrName>style.visibility</p:attrName>
+                                  </p:attrNameLst>
+                                </p:cBhvr>
+                                <p:to>
+                                  <p:strVal val="visible"/>
+                                </p:to>
+                              </p:set>
+                              <p:animEffect transition="in" filter="wipe(left)">
+                                <p:cBhvr>
+                                  <p:cTn id="231" dur="450"/>
+                                  <p:tgtEl>
+                                    <p:spTgt spid="12"/>
+                                  </p:tgtEl>
+                                </p:cBhvr>
+                              </p:animEffect>
+                            </p:childTnLst>
+                          </p:cTn>
+                        </p:par>
+                        <p:par>
+                          <p:cTn id="25" dur="570" fill="hold" nodeType="afterEffect" grpId="0" presetID="37" presetClass="entr" presetSubtype="0">
+                            <p:stCondLst>
+                              <p:cond delay="1300"/>
+                            </p:stCondLst>
+                            <p:childTnLst>
+                              <p:set>
+                                <p:cBhvr>
+                                  <p:cTn id="26" dur="1" fill="hold">
+                                    <p:stCondLst>
+                                      <p:cond delay="0"/>
+                                    </p:stCondLst>
+                                  </p:cTn>
+                                  <p:tgtEl>
+                                    <p:spTgt spid="13"/>
+                                  </p:tgtEl>
+                                  <p:attrNameLst>
+                                    <p:attrName>style.visibility</p:attrName>
+                                  </p:attrNameLst>
+                                </p:cBhvr>
+                                <p:to>
+                                  <p:strVal val="visible"/>
+                                </p:to>
+                              </p:set>
+                              <p:animEffect transition="in" filter="wedge">
+                                <p:cBhvr>
+                                  <p:cTn id="251" dur="570"/>
+                                  <p:tgtEl>
+                                    <p:spTgt spid="13"/>
+                                  </p:tgtEl>
+                                </p:cBhvr>
+                              </p:animEffect>
+                            </p:childTnLst>
+                          </p:cTn>
+                        </p:par>
+                        <p:par>
+                          <p:cTn id="27" dur="690" fill="hold" nodeType="afterEffect" grpId="0" presetID="52" presetClass="entr" presetSubtype="0">
+                            <p:stCondLst>
+                              <p:cond delay="1430"/>
+                            </p:stCondLst>
+                            <p:childTnLst>
+                              <p:set>
+                                <p:cBhvr>
+                                  <p:cTn id="28" dur="1" fill="hold">
+                                    <p:stCondLst>
+                                      <p:cond delay="0"/>
+                                    </p:stCondLst>
+                                  </p:cTn>
+                                  <p:tgtEl>
+                                    <p:spTgt spid="14"/>
+                                  </p:tgtEl>
+                                  <p:attrNameLst>
+                                    <p:attrName>style.visibility</p:attrName>
+                                  </p:attrNameLst>
+                                </p:cBhvr>
+                                <p:to>
+                                  <p:strVal val="visible"/>
+                                </p:to>
+                              </p:set>
+                              <p:animEffect transition="in" filter="randombar(horizontal)">
+                                <p:cBhvr>
+                                  <p:cTn id="271" dur="690"/>
+                                  <p:tgtEl>
+                                    <p:spTgt spid="14"/>
+                                  </p:tgtEl>
+                                </p:cBhvr>
+                              </p:animEffect>
+                            </p:childTnLst>
+                          </p:cTn>
+                        </p:par>
+                      </p:childTnLst>
+                    </p:cTn>
+                  </p:par>
+                </p:childTnLst>
+              </p:cTn>
+              <p:prevCondLst>
+                <p:cond evt="onPrev" delay="0">
+                  <p:tgtEl>
+                    <p:sldTgt/>
+                  </p:tgtEl>
+                </p:cond>
+              </p:prevCondLst>
+              <p:nextCondLst>
+                <p:cond evt="onNext" delay="0">
+                  <p:tgtEl>
+                    <p:sldTgt/>
+                  </p:tgtEl>
+                </p:cond>
+              </p:nextCondLst>
+            </p:seq>
+          </p:childTnLst>
+        </p:cTn>
+      </p:par>
+    </p:tnLst>
+  </p:timing>
 </p:sld>
 </file>
 
@@ -7658,8 +10023,537 @@
     <a:masterClrMapping/>
   </p:clrMapOvr>
   <p:transition spd="med">
-    <p:push/>
+    <p:blinds dir="horz"/>
   </p:transition>
+  <p:timing>
+    <p:tnLst>
+      <p:par>
+        <p:cTn id="1" dur="indefinite" restart="never" nodeType="tmRoot">
+          <p:childTnLst>
+            <p:seq concurrent="1" nextAc="seek">
+              <p:cTn id="2" dur="indefinite" nodeType="mainSeq">
+                <p:childTnLst>
+                  <p:par>
+                    <p:cTn id="3" fill="hold">
+                      <p:stCondLst>
+                        <p:cond delay="indefinite"/>
+                      </p:stCondLst>
+                      <p:childTnLst>
+                        <p:par>
+                          <p:cTn id="5" dur="450" fill="hold" nodeType="clickEffect" grpId="0" presetID="18" presetClass="entr" presetSubtype="12">
+                            <p:stCondLst>
+                              <p:cond delay="0"/>
+                            </p:stCondLst>
+                            <p:childTnLst>
+                              <p:set>
+                                <p:cBhvr>
+                                  <p:cTn id="6" dur="1" fill="hold">
+                                    <p:stCondLst>
+                                      <p:cond delay="0"/>
+                                    </p:stCondLst>
+                                  </p:cTn>
+                                  <p:tgtEl>
+                                    <p:spTgt spid="3"/>
+                                  </p:tgtEl>
+                                  <p:attrNameLst>
+                                    <p:attrName>style.visibility</p:attrName>
+                                  </p:attrNameLst>
+                                </p:cBhvr>
+                                <p:to>
+                                  <p:strVal val="visible"/>
+                                </p:to>
+                              </p:set>
+                              <p:animEffect transition="in" filter="circle(in)">
+                                <p:cBhvr>
+                                  <p:cTn id="51" dur="450"/>
+                                  <p:tgtEl>
+                                    <p:spTgt spid="3"/>
+                                  </p:tgtEl>
+                                </p:cBhvr>
+                              </p:animEffect>
+                            </p:childTnLst>
+                          </p:cTn>
+                        </p:par>
+                        <p:par>
+                          <p:cTn id="7" dur="570" fill="hold" nodeType="afterEffect" grpId="0" presetID="22" presetClass="entr" presetSubtype="1">
+                            <p:stCondLst>
+                              <p:cond delay="130"/>
+                            </p:stCondLst>
+                            <p:childTnLst>
+                              <p:set>
+                                <p:cBhvr>
+                                  <p:cTn id="8" dur="1" fill="hold">
+                                    <p:stCondLst>
+                                      <p:cond delay="0"/>
+                                    </p:stCondLst>
+                                  </p:cTn>
+                                  <p:tgtEl>
+                                    <p:spTgt spid="4"/>
+                                  </p:tgtEl>
+                                  <p:attrNameLst>
+                                    <p:attrName>style.visibility</p:attrName>
+                                  </p:attrNameLst>
+                                </p:cBhvr>
+                                <p:to>
+                                  <p:strVal val="visible"/>
+                                </p:to>
+                              </p:set>
+                              <p:animEffect transition="in" filter="wipe(up)">
+                                <p:cBhvr>
+                                  <p:cTn id="71" dur="570"/>
+                                  <p:tgtEl>
+                                    <p:spTgt spid="4"/>
+                                  </p:tgtEl>
+                                </p:cBhvr>
+                              </p:animEffect>
+                            </p:childTnLst>
+                          </p:cTn>
+                        </p:par>
+                        <p:par>
+                          <p:cTn id="9" dur="690" fill="hold" nodeType="afterEffect" grpId="0" presetID="42" presetClass="entr" presetSubtype="10">
+                            <p:stCondLst>
+                              <p:cond delay="260"/>
+                            </p:stCondLst>
+                            <p:childTnLst>
+                              <p:set>
+                                <p:cBhvr>
+                                  <p:cTn id="10" dur="1" fill="hold">
+                                    <p:stCondLst>
+                                      <p:cond delay="0"/>
+                                    </p:stCondLst>
+                                  </p:cTn>
+                                  <p:tgtEl>
+                                    <p:spTgt spid="5"/>
+                                  </p:tgtEl>
+                                  <p:attrNameLst>
+                                    <p:attrName>style.visibility</p:attrName>
+                                  </p:attrNameLst>
+                                </p:cBhvr>
+                                <p:to>
+                                  <p:strVal val="visible"/>
+                                </p:to>
+                              </p:set>
+                              <p:animEffect transition="in" filter="blinds(horizontal)">
+                                <p:cBhvr>
+                                  <p:cTn id="91" dur="690"/>
+                                  <p:tgtEl>
+                                    <p:spTgt spid="5"/>
+                                  </p:tgtEl>
+                                </p:cBhvr>
+                              </p:animEffect>
+                            </p:childTnLst>
+                          </p:cTn>
+                        </p:par>
+                        <p:par>
+                          <p:cTn id="11" dur="810" fill="hold" nodeType="afterEffect" grpId="0" presetID="43" presetClass="entr" presetSubtype="0">
+                            <p:stCondLst>
+                              <p:cond delay="390"/>
+                            </p:stCondLst>
+                            <p:childTnLst>
+                              <p:set>
+                                <p:cBhvr>
+                                  <p:cTn id="12" dur="1" fill="hold">
+                                    <p:stCondLst>
+                                      <p:cond delay="0"/>
+                                    </p:stCondLst>
+                                  </p:cTn>
+                                  <p:tgtEl>
+                                    <p:spTgt spid="6"/>
+                                  </p:tgtEl>
+                                  <p:attrNameLst>
+                                    <p:attrName>style.visibility</p:attrName>
+                                  </p:attrNameLst>
+                                </p:cBhvr>
+                                <p:to>
+                                  <p:strVal val="visible"/>
+                                </p:to>
+                              </p:set>
+                              <p:animEffect transition="in" filter="checkerboard(across)">
+                                <p:cBhvr>
+                                  <p:cTn id="111" dur="810"/>
+                                  <p:tgtEl>
+                                    <p:spTgt spid="6"/>
+                                  </p:tgtEl>
+                                </p:cBhvr>
+                              </p:animEffect>
+                            </p:childTnLst>
+                          </p:cTn>
+                        </p:par>
+                        <p:par>
+                          <p:cTn id="13" dur="450" fill="hold" nodeType="afterEffect" grpId="0" presetID="21" presetClass="entr" presetSubtype="2">
+                            <p:stCondLst>
+                              <p:cond delay="520"/>
+                            </p:stCondLst>
+                            <p:childTnLst>
+                              <p:set>
+                                <p:cBhvr>
+                                  <p:cTn id="14" dur="1" fill="hold">
+                                    <p:stCondLst>
+                                      <p:cond delay="0"/>
+                                    </p:stCondLst>
+                                  </p:cTn>
+                                  <p:tgtEl>
+                                    <p:spTgt spid="11"/>
+                                  </p:tgtEl>
+                                  <p:attrNameLst>
+                                    <p:attrName>style.visibility</p:attrName>
+                                  </p:attrNameLst>
+                                </p:cBhvr>
+                                <p:to>
+                                  <p:strVal val="visible"/>
+                                </p:to>
+                              </p:set>
+                              <p:animEffect transition="in" filter="wheel(2)">
+                                <p:cBhvr>
+                                  <p:cTn id="131" dur="450"/>
+                                  <p:tgtEl>
+                                    <p:spTgt spid="11"/>
+                                  </p:tgtEl>
+                                </p:cBhvr>
+                              </p:animEffect>
+                            </p:childTnLst>
+                          </p:cTn>
+                        </p:par>
+                        <p:par>
+                          <p:cTn id="15" dur="570" fill="hold" nodeType="afterEffect" grpId="0" presetID="10" presetClass="entr" presetSubtype="0">
+                            <p:stCondLst>
+                              <p:cond delay="650"/>
+                            </p:stCondLst>
+                            <p:childTnLst>
+                              <p:set>
+                                <p:cBhvr>
+                                  <p:cTn id="16" dur="1" fill="hold">
+                                    <p:stCondLst>
+                                      <p:cond delay="0"/>
+                                    </p:stCondLst>
+                                  </p:cTn>
+                                  <p:tgtEl>
+                                    <p:spTgt spid="16"/>
+                                  </p:tgtEl>
+                                  <p:attrNameLst>
+                                    <p:attrName>style.visibility</p:attrName>
+                                  </p:attrNameLst>
+                                </p:cBhvr>
+                                <p:to>
+                                  <p:strVal val="visible"/>
+                                </p:to>
+                              </p:set>
+                              <p:animEffect transition="in" filter="dissolve">
+                                <p:cBhvr>
+                                  <p:cTn id="151" dur="570"/>
+                                  <p:tgtEl>
+                                    <p:spTgt spid="16"/>
+                                  </p:tgtEl>
+                                </p:cBhvr>
+                              </p:animEffect>
+                            </p:childTnLst>
+                          </p:cTn>
+                        </p:par>
+                        <p:par>
+                          <p:cTn id="17" dur="690" fill="hold" nodeType="afterEffect" grpId="0" presetID="25" presetClass="entr" presetSubtype="1">
+                            <p:stCondLst>
+                              <p:cond delay="780"/>
+                            </p:stCondLst>
+                            <p:childTnLst>
+                              <p:set>
+                                <p:cBhvr>
+                                  <p:cTn id="18" dur="1" fill="hold">
+                                    <p:stCondLst>
+                                      <p:cond delay="0"/>
+                                    </p:stCondLst>
+                                  </p:cTn>
+                                  <p:tgtEl>
+                                    <p:spTgt spid="7"/>
+                                  </p:tgtEl>
+                                  <p:attrNameLst>
+                                    <p:attrName>style.visibility</p:attrName>
+                                  </p:attrNameLst>
+                                </p:cBhvr>
+                                <p:to>
+                                  <p:strVal val="visible"/>
+                                </p:to>
+                              </p:set>
+                              <p:animEffect transition="in" filter="strips(downRight)">
+                                <p:cBhvr>
+                                  <p:cTn id="171" dur="690"/>
+                                  <p:tgtEl>
+                                    <p:spTgt spid="7"/>
+                                  </p:tgtEl>
+                                </p:cBhvr>
+                              </p:animEffect>
+                            </p:childTnLst>
+                          </p:cTn>
+                        </p:par>
+                        <p:par>
+                          <p:cTn id="19" dur="810" fill="hold" nodeType="afterEffect" grpId="0" presetID="45" presetClass="entr" presetSubtype="1">
+                            <p:stCondLst>
+                              <p:cond delay="910"/>
+                            </p:stCondLst>
+                            <p:childTnLst>
+                              <p:set>
+                                <p:cBhvr>
+                                  <p:cTn id="20" dur="1" fill="hold">
+                                    <p:stCondLst>
+                                      <p:cond delay="0"/>
+                                    </p:stCondLst>
+                                  </p:cTn>
+                                  <p:tgtEl>
+                                    <p:spTgt spid="8"/>
+                                  </p:tgtEl>
+                                  <p:attrNameLst>
+                                    <p:attrName>style.visibility</p:attrName>
+                                  </p:attrNameLst>
+                                </p:cBhvr>
+                                <p:to>
+                                  <p:strVal val="visible"/>
+                                </p:to>
+                              </p:set>
+                              <p:animEffect transition="in" filter="barn(inHorizontal)">
+                                <p:cBhvr>
+                                  <p:cTn id="191" dur="810"/>
+                                  <p:tgtEl>
+                                    <p:spTgt spid="8"/>
+                                  </p:tgtEl>
+                                </p:cBhvr>
+                              </p:animEffect>
+                            </p:childTnLst>
+                          </p:cTn>
+                        </p:par>
+                        <p:par>
+                          <p:cTn id="21" dur="450" fill="hold" nodeType="afterEffect" grpId="0" presetID="22" presetClass="entr" presetSubtype="8">
+                            <p:stCondLst>
+                              <p:cond delay="1040"/>
+                            </p:stCondLst>
+                            <p:childTnLst>
+                              <p:set>
+                                <p:cBhvr>
+                                  <p:cTn id="22" dur="1" fill="hold">
+                                    <p:stCondLst>
+                                      <p:cond delay="0"/>
+                                    </p:stCondLst>
+                                  </p:cTn>
+                                  <p:tgtEl>
+                                    <p:spTgt spid="12"/>
+                                  </p:tgtEl>
+                                  <p:attrNameLst>
+                                    <p:attrName>style.visibility</p:attrName>
+                                  </p:attrNameLst>
+                                </p:cBhvr>
+                                <p:to>
+                                  <p:strVal val="visible"/>
+                                </p:to>
+                              </p:set>
+                              <p:animEffect transition="in" filter="wipe(left)">
+                                <p:cBhvr>
+                                  <p:cTn id="211" dur="450"/>
+                                  <p:tgtEl>
+                                    <p:spTgt spid="12"/>
+                                  </p:tgtEl>
+                                </p:cBhvr>
+                              </p:animEffect>
+                            </p:childTnLst>
+                          </p:cTn>
+                        </p:par>
+                        <p:par>
+                          <p:cTn id="23" dur="570" fill="hold" nodeType="afterEffect" grpId="0" presetID="37" presetClass="entr" presetSubtype="0">
+                            <p:stCondLst>
+                              <p:cond delay="1170"/>
+                            </p:stCondLst>
+                            <p:childTnLst>
+                              <p:set>
+                                <p:cBhvr>
+                                  <p:cTn id="24" dur="1" fill="hold">
+                                    <p:stCondLst>
+                                      <p:cond delay="0"/>
+                                    </p:stCondLst>
+                                  </p:cTn>
+                                  <p:tgtEl>
+                                    <p:spTgt spid="13"/>
+                                  </p:tgtEl>
+                                  <p:attrNameLst>
+                                    <p:attrName>style.visibility</p:attrName>
+                                  </p:attrNameLst>
+                                </p:cBhvr>
+                                <p:to>
+                                  <p:strVal val="visible"/>
+                                </p:to>
+                              </p:set>
+                              <p:animEffect transition="in" filter="wedge">
+                                <p:cBhvr>
+                                  <p:cTn id="231" dur="570"/>
+                                  <p:tgtEl>
+                                    <p:spTgt spid="13"/>
+                                  </p:tgtEl>
+                                </p:cBhvr>
+                              </p:animEffect>
+                            </p:childTnLst>
+                          </p:cTn>
+                        </p:par>
+                        <p:par>
+                          <p:cTn id="25" dur="690" fill="hold" nodeType="afterEffect" grpId="0" presetID="52" presetClass="entr" presetSubtype="0">
+                            <p:stCondLst>
+                              <p:cond delay="1300"/>
+                            </p:stCondLst>
+                            <p:childTnLst>
+                              <p:set>
+                                <p:cBhvr>
+                                  <p:cTn id="26" dur="1" fill="hold">
+                                    <p:stCondLst>
+                                      <p:cond delay="0"/>
+                                    </p:stCondLst>
+                                  </p:cTn>
+                                  <p:tgtEl>
+                                    <p:spTgt spid="17"/>
+                                  </p:tgtEl>
+                                  <p:attrNameLst>
+                                    <p:attrName>style.visibility</p:attrName>
+                                  </p:attrNameLst>
+                                </p:cBhvr>
+                                <p:to>
+                                  <p:strVal val="visible"/>
+                                </p:to>
+                              </p:set>
+                              <p:animEffect transition="in" filter="randombar(horizontal)">
+                                <p:cBhvr>
+                                  <p:cTn id="251" dur="690"/>
+                                  <p:tgtEl>
+                                    <p:spTgt spid="17"/>
+                                  </p:tgtEl>
+                                </p:cBhvr>
+                              </p:animEffect>
+                            </p:childTnLst>
+                          </p:cTn>
+                        </p:par>
+                        <p:par>
+                          <p:cTn id="27" dur="810" fill="hold" nodeType="afterEffect" grpId="0" presetID="21" presetClass="entr" presetSubtype="1">
+                            <p:stCondLst>
+                              <p:cond delay="1430"/>
+                            </p:stCondLst>
+                            <p:childTnLst>
+                              <p:set>
+                                <p:cBhvr>
+                                  <p:cTn id="28" dur="1" fill="hold">
+                                    <p:stCondLst>
+                                      <p:cond delay="0"/>
+                                    </p:stCondLst>
+                                  </p:cTn>
+                                  <p:tgtEl>
+                                    <p:spTgt spid="18"/>
+                                  </p:tgtEl>
+                                  <p:attrNameLst>
+                                    <p:attrName>style.visibility</p:attrName>
+                                  </p:attrNameLst>
+                                </p:cBhvr>
+                                <p:to>
+                                  <p:strVal val="visible"/>
+                                </p:to>
+                              </p:set>
+                              <p:animEffect transition="in" filter="wheel(1)">
+                                <p:cBhvr>
+                                  <p:cTn id="271" dur="810"/>
+                                  <p:tgtEl>
+                                    <p:spTgt spid="18"/>
+                                  </p:tgtEl>
+                                </p:cBhvr>
+                              </p:animEffect>
+                            </p:childTnLst>
+                          </p:cTn>
+                        </p:par>
+                        <p:par>
+                          <p:cTn id="29" dur="450" fill="hold" nodeType="afterEffect" grpId="0" presetID="22" presetClass="entr" presetSubtype="4">
+                            <p:stCondLst>
+                              <p:cond delay="1560"/>
+                            </p:stCondLst>
+                            <p:childTnLst>
+                              <p:set>
+                                <p:cBhvr>
+                                  <p:cTn id="30" dur="1" fill="hold">
+                                    <p:stCondLst>
+                                      <p:cond delay="0"/>
+                                    </p:stCondLst>
+                                  </p:cTn>
+                                  <p:tgtEl>
+                                    <p:spTgt spid="9"/>
+                                  </p:tgtEl>
+                                  <p:attrNameLst>
+                                    <p:attrName>style.visibility</p:attrName>
+                                  </p:attrNameLst>
+                                </p:cBhvr>
+                                <p:to>
+                                  <p:strVal val="visible"/>
+                                </p:to>
+                              </p:set>
+                              <p:animEffect transition="in" filter="wipe(down)">
+                                <p:cBhvr>
+                                  <p:cTn id="291" dur="450"/>
+                                  <p:tgtEl>
+                                    <p:spTgt spid="9"/>
+                                  </p:tgtEl>
+                                </p:cBhvr>
+                              </p:animEffect>
+                            </p:childTnLst>
+                          </p:cTn>
+                        </p:par>
+                        <p:par>
+                          <p:cTn id="31" dur="570" fill="hold" nodeType="afterEffect" grpId="0" presetID="9" presetClass="entr" presetSubtype="0">
+                            <p:stCondLst>
+                              <p:cond delay="1690"/>
+                            </p:stCondLst>
+                            <p:childTnLst>
+                              <p:set>
+                                <p:cBhvr>
+                                  <p:cTn id="32" dur="1" fill="hold">
+                                    <p:stCondLst>
+                                      <p:cond delay="0"/>
+                                    </p:stCondLst>
+                                  </p:cTn>
+                                  <p:tgtEl>
+                                    <p:spTgt spid="14"/>
+                                  </p:tgtEl>
+                                  <p:attrNameLst>
+                                    <p:attrName>style.visibility</p:attrName>
+                                  </p:attrNameLst>
+                                </p:cBhvr>
+                                <p:to>
+                                  <p:strVal val="visible"/>
+                                </p:to>
+                              </p:set>
+                              <p:animEffect transition="in" filter="fade">
+                                <p:cBhvr>
+                                  <p:cTn id="311" dur="570"/>
+                                  <p:tgtEl>
+                                    <p:spTgt spid="14"/>
+                                  </p:tgtEl>
+                                </p:cBhvr>
+                              </p:animEffect>
+                            </p:childTnLst>
+                          </p:cTn>
+                        </p:par>
+                      </p:childTnLst>
+                    </p:cTn>
+                  </p:par>
+                </p:childTnLst>
+              </p:cTn>
+              <p:prevCondLst>
+                <p:cond evt="onPrev" delay="0">
+                  <p:tgtEl>
+                    <p:sldTgt/>
+                  </p:tgtEl>
+                </p:cond>
+              </p:prevCondLst>
+              <p:nextCondLst>
+                <p:cond evt="onNext" delay="0">
+                  <p:tgtEl>
+                    <p:sldTgt/>
+                  </p:tgtEl>
+                </p:cond>
+              </p:nextCondLst>
+            </p:seq>
+          </p:childTnLst>
+        </p:cTn>
+      </p:par>
+    </p:tnLst>
+  </p:timing>
 </p:sld>
 </file>
 
@@ -8683,8 +11577,537 @@
     <a:masterClrMapping/>
   </p:clrMapOvr>
   <p:transition spd="med">
-    <p:push/>
+    <p:circle dir="in"/>
   </p:transition>
+  <p:timing>
+    <p:tnLst>
+      <p:par>
+        <p:cTn id="1" dur="indefinite" restart="never" nodeType="tmRoot">
+          <p:childTnLst>
+            <p:seq concurrent="1" nextAc="seek">
+              <p:cTn id="2" dur="indefinite" nodeType="mainSeq">
+                <p:childTnLst>
+                  <p:par>
+                    <p:cTn id="3" fill="hold">
+                      <p:stCondLst>
+                        <p:cond delay="indefinite"/>
+                      </p:stCondLst>
+                      <p:childTnLst>
+                        <p:par>
+                          <p:cTn id="5" dur="570" fill="hold" nodeType="clickEffect" grpId="0" presetID="22" presetClass="entr" presetSubtype="1">
+                            <p:stCondLst>
+                              <p:cond delay="0"/>
+                            </p:stCondLst>
+                            <p:childTnLst>
+                              <p:set>
+                                <p:cBhvr>
+                                  <p:cTn id="6" dur="1" fill="hold">
+                                    <p:stCondLst>
+                                      <p:cond delay="0"/>
+                                    </p:stCondLst>
+                                  </p:cTn>
+                                  <p:tgtEl>
+                                    <p:spTgt spid="3"/>
+                                  </p:tgtEl>
+                                  <p:attrNameLst>
+                                    <p:attrName>style.visibility</p:attrName>
+                                  </p:attrNameLst>
+                                </p:cBhvr>
+                                <p:to>
+                                  <p:strVal val="visible"/>
+                                </p:to>
+                              </p:set>
+                              <p:animEffect transition="in" filter="wipe(up)">
+                                <p:cBhvr>
+                                  <p:cTn id="51" dur="570"/>
+                                  <p:tgtEl>
+                                    <p:spTgt spid="3"/>
+                                  </p:tgtEl>
+                                </p:cBhvr>
+                              </p:animEffect>
+                            </p:childTnLst>
+                          </p:cTn>
+                        </p:par>
+                        <p:par>
+                          <p:cTn id="7" dur="690" fill="hold" nodeType="afterEffect" grpId="0" presetID="42" presetClass="entr" presetSubtype="10">
+                            <p:stCondLst>
+                              <p:cond delay="130"/>
+                            </p:stCondLst>
+                            <p:childTnLst>
+                              <p:set>
+                                <p:cBhvr>
+                                  <p:cTn id="8" dur="1" fill="hold">
+                                    <p:stCondLst>
+                                      <p:cond delay="0"/>
+                                    </p:stCondLst>
+                                  </p:cTn>
+                                  <p:tgtEl>
+                                    <p:spTgt spid="4"/>
+                                  </p:tgtEl>
+                                  <p:attrNameLst>
+                                    <p:attrName>style.visibility</p:attrName>
+                                  </p:attrNameLst>
+                                </p:cBhvr>
+                                <p:to>
+                                  <p:strVal val="visible"/>
+                                </p:to>
+                              </p:set>
+                              <p:animEffect transition="in" filter="blinds(horizontal)">
+                                <p:cBhvr>
+                                  <p:cTn id="71" dur="690"/>
+                                  <p:tgtEl>
+                                    <p:spTgt spid="4"/>
+                                  </p:tgtEl>
+                                </p:cBhvr>
+                              </p:animEffect>
+                            </p:childTnLst>
+                          </p:cTn>
+                        </p:par>
+                        <p:par>
+                          <p:cTn id="9" dur="810" fill="hold" nodeType="afterEffect" grpId="0" presetID="43" presetClass="entr" presetSubtype="0">
+                            <p:stCondLst>
+                              <p:cond delay="260"/>
+                            </p:stCondLst>
+                            <p:childTnLst>
+                              <p:set>
+                                <p:cBhvr>
+                                  <p:cTn id="10" dur="1" fill="hold">
+                                    <p:stCondLst>
+                                      <p:cond delay="0"/>
+                                    </p:stCondLst>
+                                  </p:cTn>
+                                  <p:tgtEl>
+                                    <p:spTgt spid="5"/>
+                                  </p:tgtEl>
+                                  <p:attrNameLst>
+                                    <p:attrName>style.visibility</p:attrName>
+                                  </p:attrNameLst>
+                                </p:cBhvr>
+                                <p:to>
+                                  <p:strVal val="visible"/>
+                                </p:to>
+                              </p:set>
+                              <p:animEffect transition="in" filter="checkerboard(across)">
+                                <p:cBhvr>
+                                  <p:cTn id="91" dur="810"/>
+                                  <p:tgtEl>
+                                    <p:spTgt spid="5"/>
+                                  </p:tgtEl>
+                                </p:cBhvr>
+                              </p:animEffect>
+                            </p:childTnLst>
+                          </p:cTn>
+                        </p:par>
+                        <p:par>
+                          <p:cTn id="11" dur="450" fill="hold" nodeType="afterEffect" grpId="0" presetID="21" presetClass="entr" presetSubtype="2">
+                            <p:stCondLst>
+                              <p:cond delay="390"/>
+                            </p:stCondLst>
+                            <p:childTnLst>
+                              <p:set>
+                                <p:cBhvr>
+                                  <p:cTn id="12" dur="1" fill="hold">
+                                    <p:stCondLst>
+                                      <p:cond delay="0"/>
+                                    </p:stCondLst>
+                                  </p:cTn>
+                                  <p:tgtEl>
+                                    <p:spTgt spid="9"/>
+                                  </p:tgtEl>
+                                  <p:attrNameLst>
+                                    <p:attrName>style.visibility</p:attrName>
+                                  </p:attrNameLst>
+                                </p:cBhvr>
+                                <p:to>
+                                  <p:strVal val="visible"/>
+                                </p:to>
+                              </p:set>
+                              <p:animEffect transition="in" filter="wheel(2)">
+                                <p:cBhvr>
+                                  <p:cTn id="111" dur="450"/>
+                                  <p:tgtEl>
+                                    <p:spTgt spid="9"/>
+                                  </p:tgtEl>
+                                </p:cBhvr>
+                              </p:animEffect>
+                            </p:childTnLst>
+                          </p:cTn>
+                        </p:par>
+                        <p:par>
+                          <p:cTn id="13" dur="570" fill="hold" nodeType="afterEffect" grpId="0" presetID="10" presetClass="entr" presetSubtype="0">
+                            <p:stCondLst>
+                              <p:cond delay="520"/>
+                            </p:stCondLst>
+                            <p:childTnLst>
+                              <p:set>
+                                <p:cBhvr>
+                                  <p:cTn id="14" dur="1" fill="hold">
+                                    <p:stCondLst>
+                                      <p:cond delay="0"/>
+                                    </p:stCondLst>
+                                  </p:cTn>
+                                  <p:tgtEl>
+                                    <p:spTgt spid="7"/>
+                                  </p:tgtEl>
+                                  <p:attrNameLst>
+                                    <p:attrName>style.visibility</p:attrName>
+                                  </p:attrNameLst>
+                                </p:cBhvr>
+                                <p:to>
+                                  <p:strVal val="visible"/>
+                                </p:to>
+                              </p:set>
+                              <p:animEffect transition="in" filter="dissolve">
+                                <p:cBhvr>
+                                  <p:cTn id="131" dur="570"/>
+                                  <p:tgtEl>
+                                    <p:spTgt spid="7"/>
+                                  </p:tgtEl>
+                                </p:cBhvr>
+                              </p:animEffect>
+                            </p:childTnLst>
+                          </p:cTn>
+                        </p:par>
+                        <p:par>
+                          <p:cTn id="15" dur="690" fill="hold" nodeType="afterEffect" grpId="0" presetID="25" presetClass="entr" presetSubtype="1">
+                            <p:stCondLst>
+                              <p:cond delay="650"/>
+                            </p:stCondLst>
+                            <p:childTnLst>
+                              <p:set>
+                                <p:cBhvr>
+                                  <p:cTn id="16" dur="1" fill="hold">
+                                    <p:stCondLst>
+                                      <p:cond delay="0"/>
+                                    </p:stCondLst>
+                                  </p:cTn>
+                                  <p:tgtEl>
+                                    <p:spTgt spid="8"/>
+                                  </p:tgtEl>
+                                  <p:attrNameLst>
+                                    <p:attrName>style.visibility</p:attrName>
+                                  </p:attrNameLst>
+                                </p:cBhvr>
+                                <p:to>
+                                  <p:strVal val="visible"/>
+                                </p:to>
+                              </p:set>
+                              <p:animEffect transition="in" filter="strips(downRight)">
+                                <p:cBhvr>
+                                  <p:cTn id="151" dur="690"/>
+                                  <p:tgtEl>
+                                    <p:spTgt spid="8"/>
+                                  </p:tgtEl>
+                                </p:cBhvr>
+                              </p:animEffect>
+                            </p:childTnLst>
+                          </p:cTn>
+                        </p:par>
+                        <p:par>
+                          <p:cTn id="17" dur="810" fill="hold" nodeType="afterEffect" grpId="0" presetID="45" presetClass="entr" presetSubtype="1">
+                            <p:stCondLst>
+                              <p:cond delay="780"/>
+                            </p:stCondLst>
+                            <p:childTnLst>
+                              <p:set>
+                                <p:cBhvr>
+                                  <p:cTn id="18" dur="1" fill="hold">
+                                    <p:stCondLst>
+                                      <p:cond delay="0"/>
+                                    </p:stCondLst>
+                                  </p:cTn>
+                                  <p:tgtEl>
+                                    <p:spTgt spid="6"/>
+                                  </p:tgtEl>
+                                  <p:attrNameLst>
+                                    <p:attrName>style.visibility</p:attrName>
+                                  </p:attrNameLst>
+                                </p:cBhvr>
+                                <p:to>
+                                  <p:strVal val="visible"/>
+                                </p:to>
+                              </p:set>
+                              <p:animEffect transition="in" filter="barn(inHorizontal)">
+                                <p:cBhvr>
+                                  <p:cTn id="171" dur="810"/>
+                                  <p:tgtEl>
+                                    <p:spTgt spid="6"/>
+                                  </p:tgtEl>
+                                </p:cBhvr>
+                              </p:animEffect>
+                            </p:childTnLst>
+                          </p:cTn>
+                        </p:par>
+                        <p:par>
+                          <p:cTn id="19" dur="450" fill="hold" nodeType="afterEffect" grpId="0" presetID="22" presetClass="entr" presetSubtype="8">
+                            <p:stCondLst>
+                              <p:cond delay="910"/>
+                            </p:stCondLst>
+                            <p:childTnLst>
+                              <p:set>
+                                <p:cBhvr>
+                                  <p:cTn id="20" dur="1" fill="hold">
+                                    <p:stCondLst>
+                                      <p:cond delay="0"/>
+                                    </p:stCondLst>
+                                  </p:cTn>
+                                  <p:tgtEl>
+                                    <p:spTgt spid="10"/>
+                                  </p:tgtEl>
+                                  <p:attrNameLst>
+                                    <p:attrName>style.visibility</p:attrName>
+                                  </p:attrNameLst>
+                                </p:cBhvr>
+                                <p:to>
+                                  <p:strVal val="visible"/>
+                                </p:to>
+                              </p:set>
+                              <p:animEffect transition="in" filter="wipe(left)">
+                                <p:cBhvr>
+                                  <p:cTn id="191" dur="450"/>
+                                  <p:tgtEl>
+                                    <p:spTgt spid="10"/>
+                                  </p:tgtEl>
+                                </p:cBhvr>
+                              </p:animEffect>
+                            </p:childTnLst>
+                          </p:cTn>
+                        </p:par>
+                        <p:par>
+                          <p:cTn id="21" dur="570" fill="hold" nodeType="afterEffect" grpId="0" presetID="37" presetClass="entr" presetSubtype="0">
+                            <p:stCondLst>
+                              <p:cond delay="1040"/>
+                            </p:stCondLst>
+                            <p:childTnLst>
+                              <p:set>
+                                <p:cBhvr>
+                                  <p:cTn id="22" dur="1" fill="hold">
+                                    <p:stCondLst>
+                                      <p:cond delay="0"/>
+                                    </p:stCondLst>
+                                  </p:cTn>
+                                  <p:tgtEl>
+                                    <p:spTgt spid="13"/>
+                                  </p:tgtEl>
+                                  <p:attrNameLst>
+                                    <p:attrName>style.visibility</p:attrName>
+                                  </p:attrNameLst>
+                                </p:cBhvr>
+                                <p:to>
+                                  <p:strVal val="visible"/>
+                                </p:to>
+                              </p:set>
+                              <p:animEffect transition="in" filter="wedge">
+                                <p:cBhvr>
+                                  <p:cTn id="211" dur="570"/>
+                                  <p:tgtEl>
+                                    <p:spTgt spid="13"/>
+                                  </p:tgtEl>
+                                </p:cBhvr>
+                              </p:animEffect>
+                            </p:childTnLst>
+                          </p:cTn>
+                        </p:par>
+                        <p:par>
+                          <p:cTn id="23" dur="690" fill="hold" nodeType="afterEffect" grpId="0" presetID="52" presetClass="entr" presetSubtype="0">
+                            <p:stCondLst>
+                              <p:cond delay="1170"/>
+                            </p:stCondLst>
+                            <p:childTnLst>
+                              <p:set>
+                                <p:cBhvr>
+                                  <p:cTn id="24" dur="1" fill="hold">
+                                    <p:stCondLst>
+                                      <p:cond delay="0"/>
+                                    </p:stCondLst>
+                                  </p:cTn>
+                                  <p:tgtEl>
+                                    <p:spTgt spid="11"/>
+                                  </p:tgtEl>
+                                  <p:attrNameLst>
+                                    <p:attrName>style.visibility</p:attrName>
+                                  </p:attrNameLst>
+                                </p:cBhvr>
+                                <p:to>
+                                  <p:strVal val="visible"/>
+                                </p:to>
+                              </p:set>
+                              <p:animEffect transition="in" filter="randombar(horizontal)">
+                                <p:cBhvr>
+                                  <p:cTn id="231" dur="690"/>
+                                  <p:tgtEl>
+                                    <p:spTgt spid="11"/>
+                                  </p:tgtEl>
+                                </p:cBhvr>
+                              </p:animEffect>
+                            </p:childTnLst>
+                          </p:cTn>
+                        </p:par>
+                        <p:par>
+                          <p:cTn id="25" dur="810" fill="hold" nodeType="afterEffect" grpId="0" presetID="21" presetClass="entr" presetSubtype="1">
+                            <p:stCondLst>
+                              <p:cond delay="1300"/>
+                            </p:stCondLst>
+                            <p:childTnLst>
+                              <p:set>
+                                <p:cBhvr>
+                                  <p:cTn id="26" dur="1" fill="hold">
+                                    <p:stCondLst>
+                                      <p:cond delay="0"/>
+                                    </p:stCondLst>
+                                  </p:cTn>
+                                  <p:tgtEl>
+                                    <p:spTgt spid="12"/>
+                                  </p:tgtEl>
+                                  <p:attrNameLst>
+                                    <p:attrName>style.visibility</p:attrName>
+                                  </p:attrNameLst>
+                                </p:cBhvr>
+                                <p:to>
+                                  <p:strVal val="visible"/>
+                                </p:to>
+                              </p:set>
+                              <p:animEffect transition="in" filter="wheel(1)">
+                                <p:cBhvr>
+                                  <p:cTn id="251" dur="810"/>
+                                  <p:tgtEl>
+                                    <p:spTgt spid="12"/>
+                                  </p:tgtEl>
+                                </p:cBhvr>
+                              </p:animEffect>
+                            </p:childTnLst>
+                          </p:cTn>
+                        </p:par>
+                        <p:par>
+                          <p:cTn id="27" dur="450" fill="hold" nodeType="afterEffect" grpId="0" presetID="22" presetClass="entr" presetSubtype="4">
+                            <p:stCondLst>
+                              <p:cond delay="1430"/>
+                            </p:stCondLst>
+                            <p:childTnLst>
+                              <p:set>
+                                <p:cBhvr>
+                                  <p:cTn id="28" dur="1" fill="hold">
+                                    <p:stCondLst>
+                                      <p:cond delay="0"/>
+                                    </p:stCondLst>
+                                  </p:cTn>
+                                  <p:tgtEl>
+                                    <p:spTgt spid="14"/>
+                                  </p:tgtEl>
+                                  <p:attrNameLst>
+                                    <p:attrName>style.visibility</p:attrName>
+                                  </p:attrNameLst>
+                                </p:cBhvr>
+                                <p:to>
+                                  <p:strVal val="visible"/>
+                                </p:to>
+                              </p:set>
+                              <p:animEffect transition="in" filter="wipe(down)">
+                                <p:cBhvr>
+                                  <p:cTn id="271" dur="450"/>
+                                  <p:tgtEl>
+                                    <p:spTgt spid="14"/>
+                                  </p:tgtEl>
+                                </p:cBhvr>
+                              </p:animEffect>
+                            </p:childTnLst>
+                          </p:cTn>
+                        </p:par>
+                        <p:par>
+                          <p:cTn id="29" dur="570" fill="hold" nodeType="afterEffect" grpId="0" presetID="9" presetClass="entr" presetSubtype="0">
+                            <p:stCondLst>
+                              <p:cond delay="1560"/>
+                            </p:stCondLst>
+                            <p:childTnLst>
+                              <p:set>
+                                <p:cBhvr>
+                                  <p:cTn id="30" dur="1" fill="hold">
+                                    <p:stCondLst>
+                                      <p:cond delay="0"/>
+                                    </p:stCondLst>
+                                  </p:cTn>
+                                  <p:tgtEl>
+                                    <p:spTgt spid="17"/>
+                                  </p:tgtEl>
+                                  <p:attrNameLst>
+                                    <p:attrName>style.visibility</p:attrName>
+                                  </p:attrNameLst>
+                                </p:cBhvr>
+                                <p:to>
+                                  <p:strVal val="visible"/>
+                                </p:to>
+                              </p:set>
+                              <p:animEffect transition="in" filter="fade">
+                                <p:cBhvr>
+                                  <p:cTn id="291" dur="570"/>
+                                  <p:tgtEl>
+                                    <p:spTgt spid="17"/>
+                                  </p:tgtEl>
+                                </p:cBhvr>
+                              </p:animEffect>
+                            </p:childTnLst>
+                          </p:cTn>
+                        </p:par>
+                        <p:par>
+                          <p:cTn id="31" dur="690" fill="hold" nodeType="afterEffect" grpId="0" presetID="22" presetClass="entr" presetSubtype="2">
+                            <p:stCondLst>
+                              <p:cond delay="1690"/>
+                            </p:stCondLst>
+                            <p:childTnLst>
+                              <p:set>
+                                <p:cBhvr>
+                                  <p:cTn id="32" dur="1" fill="hold">
+                                    <p:stCondLst>
+                                      <p:cond delay="0"/>
+                                    </p:stCondLst>
+                                  </p:cTn>
+                                  <p:tgtEl>
+                                    <p:spTgt spid="15"/>
+                                  </p:tgtEl>
+                                  <p:attrNameLst>
+                                    <p:attrName>style.visibility</p:attrName>
+                                  </p:attrNameLst>
+                                </p:cBhvr>
+                                <p:to>
+                                  <p:strVal val="visible"/>
+                                </p:to>
+                              </p:set>
+                              <p:animEffect transition="in" filter="wipe(right)">
+                                <p:cBhvr>
+                                  <p:cTn id="311" dur="690"/>
+                                  <p:tgtEl>
+                                    <p:spTgt spid="15"/>
+                                  </p:tgtEl>
+                                </p:cBhvr>
+                              </p:animEffect>
+                            </p:childTnLst>
+                          </p:cTn>
+                        </p:par>
+                      </p:childTnLst>
+                    </p:cTn>
+                  </p:par>
+                </p:childTnLst>
+              </p:cTn>
+              <p:prevCondLst>
+                <p:cond evt="onPrev" delay="0">
+                  <p:tgtEl>
+                    <p:sldTgt/>
+                  </p:tgtEl>
+                </p:cond>
+              </p:prevCondLst>
+              <p:nextCondLst>
+                <p:cond evt="onNext" delay="0">
+                  <p:tgtEl>
+                    <p:sldTgt/>
+                  </p:tgtEl>
+                </p:cond>
+              </p:nextCondLst>
+            </p:seq>
+          </p:childTnLst>
+        </p:cTn>
+      </p:par>
+    </p:tnLst>
+  </p:timing>
 </p:sld>
 </file>
 
@@ -9464,8 +12887,537 @@
     <a:masterClrMapping/>
   </p:clrMapOvr>
   <p:transition spd="med">
-    <p:push/>
+    <p:comb dir="horz"/>
   </p:transition>
+  <p:timing>
+    <p:tnLst>
+      <p:par>
+        <p:cTn id="1" dur="indefinite" restart="never" nodeType="tmRoot">
+          <p:childTnLst>
+            <p:seq concurrent="1" nextAc="seek">
+              <p:cTn id="2" dur="indefinite" nodeType="mainSeq">
+                <p:childTnLst>
+                  <p:par>
+                    <p:cTn id="3" fill="hold">
+                      <p:stCondLst>
+                        <p:cond delay="indefinite"/>
+                      </p:stCondLst>
+                      <p:childTnLst>
+                        <p:par>
+                          <p:cTn id="5" dur="690" fill="hold" nodeType="clickEffect" grpId="0" presetID="42" presetClass="entr" presetSubtype="10">
+                            <p:stCondLst>
+                              <p:cond delay="0"/>
+                            </p:stCondLst>
+                            <p:childTnLst>
+                              <p:set>
+                                <p:cBhvr>
+                                  <p:cTn id="6" dur="1" fill="hold">
+                                    <p:stCondLst>
+                                      <p:cond delay="0"/>
+                                    </p:stCondLst>
+                                  </p:cTn>
+                                  <p:tgtEl>
+                                    <p:spTgt spid="3"/>
+                                  </p:tgtEl>
+                                  <p:attrNameLst>
+                                    <p:attrName>style.visibility</p:attrName>
+                                  </p:attrNameLst>
+                                </p:cBhvr>
+                                <p:to>
+                                  <p:strVal val="visible"/>
+                                </p:to>
+                              </p:set>
+                              <p:animEffect transition="in" filter="blinds(horizontal)">
+                                <p:cBhvr>
+                                  <p:cTn id="51" dur="690"/>
+                                  <p:tgtEl>
+                                    <p:spTgt spid="3"/>
+                                  </p:tgtEl>
+                                </p:cBhvr>
+                              </p:animEffect>
+                            </p:childTnLst>
+                          </p:cTn>
+                        </p:par>
+                        <p:par>
+                          <p:cTn id="7" dur="810" fill="hold" nodeType="afterEffect" grpId="0" presetID="43" presetClass="entr" presetSubtype="0">
+                            <p:stCondLst>
+                              <p:cond delay="130"/>
+                            </p:stCondLst>
+                            <p:childTnLst>
+                              <p:set>
+                                <p:cBhvr>
+                                  <p:cTn id="8" dur="1" fill="hold">
+                                    <p:stCondLst>
+                                      <p:cond delay="0"/>
+                                    </p:stCondLst>
+                                  </p:cTn>
+                                  <p:tgtEl>
+                                    <p:spTgt spid="4"/>
+                                  </p:tgtEl>
+                                  <p:attrNameLst>
+                                    <p:attrName>style.visibility</p:attrName>
+                                  </p:attrNameLst>
+                                </p:cBhvr>
+                                <p:to>
+                                  <p:strVal val="visible"/>
+                                </p:to>
+                              </p:set>
+                              <p:animEffect transition="in" filter="checkerboard(across)">
+                                <p:cBhvr>
+                                  <p:cTn id="71" dur="810"/>
+                                  <p:tgtEl>
+                                    <p:spTgt spid="4"/>
+                                  </p:tgtEl>
+                                </p:cBhvr>
+                              </p:animEffect>
+                            </p:childTnLst>
+                          </p:cTn>
+                        </p:par>
+                        <p:par>
+                          <p:cTn id="9" dur="450" fill="hold" nodeType="afterEffect" grpId="0" presetID="21" presetClass="entr" presetSubtype="2">
+                            <p:stCondLst>
+                              <p:cond delay="260"/>
+                            </p:stCondLst>
+                            <p:childTnLst>
+                              <p:set>
+                                <p:cBhvr>
+                                  <p:cTn id="10" dur="1" fill="hold">
+                                    <p:stCondLst>
+                                      <p:cond delay="0"/>
+                                    </p:stCondLst>
+                                  </p:cTn>
+                                  <p:tgtEl>
+                                    <p:spTgt spid="5"/>
+                                  </p:tgtEl>
+                                  <p:attrNameLst>
+                                    <p:attrName>style.visibility</p:attrName>
+                                  </p:attrNameLst>
+                                </p:cBhvr>
+                                <p:to>
+                                  <p:strVal val="visible"/>
+                                </p:to>
+                              </p:set>
+                              <p:animEffect transition="in" filter="wheel(2)">
+                                <p:cBhvr>
+                                  <p:cTn id="91" dur="450"/>
+                                  <p:tgtEl>
+                                    <p:spTgt spid="5"/>
+                                  </p:tgtEl>
+                                </p:cBhvr>
+                              </p:animEffect>
+                            </p:childTnLst>
+                          </p:cTn>
+                        </p:par>
+                        <p:par>
+                          <p:cTn id="11" dur="570" fill="hold" nodeType="afterEffect" grpId="0" presetID="10" presetClass="entr" presetSubtype="0">
+                            <p:stCondLst>
+                              <p:cond delay="390"/>
+                            </p:stCondLst>
+                            <p:childTnLst>
+                              <p:set>
+                                <p:cBhvr>
+                                  <p:cTn id="12" dur="1" fill="hold">
+                                    <p:stCondLst>
+                                      <p:cond delay="0"/>
+                                    </p:stCondLst>
+                                  </p:cTn>
+                                  <p:tgtEl>
+                                    <p:spTgt spid="6"/>
+                                  </p:tgtEl>
+                                  <p:attrNameLst>
+                                    <p:attrName>style.visibility</p:attrName>
+                                  </p:attrNameLst>
+                                </p:cBhvr>
+                                <p:to>
+                                  <p:strVal val="visible"/>
+                                </p:to>
+                              </p:set>
+                              <p:animEffect transition="in" filter="dissolve">
+                                <p:cBhvr>
+                                  <p:cTn id="111" dur="570"/>
+                                  <p:tgtEl>
+                                    <p:spTgt spid="6"/>
+                                  </p:tgtEl>
+                                </p:cBhvr>
+                              </p:animEffect>
+                            </p:childTnLst>
+                          </p:cTn>
+                        </p:par>
+                        <p:par>
+                          <p:cTn id="13" dur="690" fill="hold" nodeType="afterEffect" grpId="0" presetID="25" presetClass="entr" presetSubtype="1">
+                            <p:stCondLst>
+                              <p:cond delay="520"/>
+                            </p:stCondLst>
+                            <p:childTnLst>
+                              <p:set>
+                                <p:cBhvr>
+                                  <p:cTn id="14" dur="1" fill="hold">
+                                    <p:stCondLst>
+                                      <p:cond delay="0"/>
+                                    </p:stCondLst>
+                                  </p:cTn>
+                                  <p:tgtEl>
+                                    <p:spTgt spid="7"/>
+                                  </p:tgtEl>
+                                  <p:attrNameLst>
+                                    <p:attrName>style.visibility</p:attrName>
+                                  </p:attrNameLst>
+                                </p:cBhvr>
+                                <p:to>
+                                  <p:strVal val="visible"/>
+                                </p:to>
+                              </p:set>
+                              <p:animEffect transition="in" filter="strips(downRight)">
+                                <p:cBhvr>
+                                  <p:cTn id="131" dur="690"/>
+                                  <p:tgtEl>
+                                    <p:spTgt spid="7"/>
+                                  </p:tgtEl>
+                                </p:cBhvr>
+                              </p:animEffect>
+                            </p:childTnLst>
+                          </p:cTn>
+                        </p:par>
+                        <p:par>
+                          <p:cTn id="15" dur="810" fill="hold" nodeType="afterEffect" grpId="0" presetID="45" presetClass="entr" presetSubtype="1">
+                            <p:stCondLst>
+                              <p:cond delay="650"/>
+                            </p:stCondLst>
+                            <p:childTnLst>
+                              <p:set>
+                                <p:cBhvr>
+                                  <p:cTn id="16" dur="1" fill="hold">
+                                    <p:stCondLst>
+                                      <p:cond delay="0"/>
+                                    </p:stCondLst>
+                                  </p:cTn>
+                                  <p:tgtEl>
+                                    <p:spTgt spid="8"/>
+                                  </p:tgtEl>
+                                  <p:attrNameLst>
+                                    <p:attrName>style.visibility</p:attrName>
+                                  </p:attrNameLst>
+                                </p:cBhvr>
+                                <p:to>
+                                  <p:strVal val="visible"/>
+                                </p:to>
+                              </p:set>
+                              <p:animEffect transition="in" filter="barn(inHorizontal)">
+                                <p:cBhvr>
+                                  <p:cTn id="151" dur="810"/>
+                                  <p:tgtEl>
+                                    <p:spTgt spid="8"/>
+                                  </p:tgtEl>
+                                </p:cBhvr>
+                              </p:animEffect>
+                            </p:childTnLst>
+                          </p:cTn>
+                        </p:par>
+                        <p:par>
+                          <p:cTn id="17" dur="450" fill="hold" nodeType="afterEffect" grpId="0" presetID="22" presetClass="entr" presetSubtype="8">
+                            <p:stCondLst>
+                              <p:cond delay="780"/>
+                            </p:stCondLst>
+                            <p:childTnLst>
+                              <p:set>
+                                <p:cBhvr>
+                                  <p:cTn id="18" dur="1" fill="hold">
+                                    <p:stCondLst>
+                                      <p:cond delay="0"/>
+                                    </p:stCondLst>
+                                  </p:cTn>
+                                  <p:tgtEl>
+                                    <p:spTgt spid="9"/>
+                                  </p:tgtEl>
+                                  <p:attrNameLst>
+                                    <p:attrName>style.visibility</p:attrName>
+                                  </p:attrNameLst>
+                                </p:cBhvr>
+                                <p:to>
+                                  <p:strVal val="visible"/>
+                                </p:to>
+                              </p:set>
+                              <p:animEffect transition="in" filter="wipe(left)">
+                                <p:cBhvr>
+                                  <p:cTn id="171" dur="450"/>
+                                  <p:tgtEl>
+                                    <p:spTgt spid="9"/>
+                                  </p:tgtEl>
+                                </p:cBhvr>
+                              </p:animEffect>
+                            </p:childTnLst>
+                          </p:cTn>
+                        </p:par>
+                        <p:par>
+                          <p:cTn id="19" dur="570" fill="hold" nodeType="afterEffect" grpId="0" presetID="37" presetClass="entr" presetSubtype="0">
+                            <p:stCondLst>
+                              <p:cond delay="910"/>
+                            </p:stCondLst>
+                            <p:childTnLst>
+                              <p:set>
+                                <p:cBhvr>
+                                  <p:cTn id="20" dur="1" fill="hold">
+                                    <p:stCondLst>
+                                      <p:cond delay="0"/>
+                                    </p:stCondLst>
+                                  </p:cTn>
+                                  <p:tgtEl>
+                                    <p:spTgt spid="10"/>
+                                  </p:tgtEl>
+                                  <p:attrNameLst>
+                                    <p:attrName>style.visibility</p:attrName>
+                                  </p:attrNameLst>
+                                </p:cBhvr>
+                                <p:to>
+                                  <p:strVal val="visible"/>
+                                </p:to>
+                              </p:set>
+                              <p:animEffect transition="in" filter="wedge">
+                                <p:cBhvr>
+                                  <p:cTn id="191" dur="570"/>
+                                  <p:tgtEl>
+                                    <p:spTgt spid="10"/>
+                                  </p:tgtEl>
+                                </p:cBhvr>
+                              </p:animEffect>
+                            </p:childTnLst>
+                          </p:cTn>
+                        </p:par>
+                        <p:par>
+                          <p:cTn id="21" dur="690" fill="hold" nodeType="afterEffect" grpId="0" presetID="52" presetClass="entr" presetSubtype="0">
+                            <p:stCondLst>
+                              <p:cond delay="1040"/>
+                            </p:stCondLst>
+                            <p:childTnLst>
+                              <p:set>
+                                <p:cBhvr>
+                                  <p:cTn id="22" dur="1" fill="hold">
+                                    <p:stCondLst>
+                                      <p:cond delay="0"/>
+                                    </p:stCondLst>
+                                  </p:cTn>
+                                  <p:tgtEl>
+                                    <p:spTgt spid="11"/>
+                                  </p:tgtEl>
+                                  <p:attrNameLst>
+                                    <p:attrName>style.visibility</p:attrName>
+                                  </p:attrNameLst>
+                                </p:cBhvr>
+                                <p:to>
+                                  <p:strVal val="visible"/>
+                                </p:to>
+                              </p:set>
+                              <p:animEffect transition="in" filter="randombar(horizontal)">
+                                <p:cBhvr>
+                                  <p:cTn id="211" dur="690"/>
+                                  <p:tgtEl>
+                                    <p:spTgt spid="11"/>
+                                  </p:tgtEl>
+                                </p:cBhvr>
+                              </p:animEffect>
+                            </p:childTnLst>
+                          </p:cTn>
+                        </p:par>
+                        <p:par>
+                          <p:cTn id="23" dur="810" fill="hold" nodeType="afterEffect" grpId="0" presetID="21" presetClass="entr" presetSubtype="1">
+                            <p:stCondLst>
+                              <p:cond delay="1170"/>
+                            </p:stCondLst>
+                            <p:childTnLst>
+                              <p:set>
+                                <p:cBhvr>
+                                  <p:cTn id="24" dur="1" fill="hold">
+                                    <p:stCondLst>
+                                      <p:cond delay="0"/>
+                                    </p:stCondLst>
+                                  </p:cTn>
+                                  <p:tgtEl>
+                                    <p:spTgt spid="12"/>
+                                  </p:tgtEl>
+                                  <p:attrNameLst>
+                                    <p:attrName>style.visibility</p:attrName>
+                                  </p:attrNameLst>
+                                </p:cBhvr>
+                                <p:to>
+                                  <p:strVal val="visible"/>
+                                </p:to>
+                              </p:set>
+                              <p:animEffect transition="in" filter="wheel(1)">
+                                <p:cBhvr>
+                                  <p:cTn id="231" dur="810"/>
+                                  <p:tgtEl>
+                                    <p:spTgt spid="12"/>
+                                  </p:tgtEl>
+                                </p:cBhvr>
+                              </p:animEffect>
+                            </p:childTnLst>
+                          </p:cTn>
+                        </p:par>
+                        <p:par>
+                          <p:cTn id="25" dur="450" fill="hold" nodeType="afterEffect" grpId="0" presetID="22" presetClass="entr" presetSubtype="4">
+                            <p:stCondLst>
+                              <p:cond delay="1300"/>
+                            </p:stCondLst>
+                            <p:childTnLst>
+                              <p:set>
+                                <p:cBhvr>
+                                  <p:cTn id="26" dur="1" fill="hold">
+                                    <p:stCondLst>
+                                      <p:cond delay="0"/>
+                                    </p:stCondLst>
+                                  </p:cTn>
+                                  <p:tgtEl>
+                                    <p:spTgt spid="13"/>
+                                  </p:tgtEl>
+                                  <p:attrNameLst>
+                                    <p:attrName>style.visibility</p:attrName>
+                                  </p:attrNameLst>
+                                </p:cBhvr>
+                                <p:to>
+                                  <p:strVal val="visible"/>
+                                </p:to>
+                              </p:set>
+                              <p:animEffect transition="in" filter="wipe(down)">
+                                <p:cBhvr>
+                                  <p:cTn id="251" dur="450"/>
+                                  <p:tgtEl>
+                                    <p:spTgt spid="13"/>
+                                  </p:tgtEl>
+                                </p:cBhvr>
+                              </p:animEffect>
+                            </p:childTnLst>
+                          </p:cTn>
+                        </p:par>
+                        <p:par>
+                          <p:cTn id="27" dur="570" fill="hold" nodeType="afterEffect" grpId="0" presetID="9" presetClass="entr" presetSubtype="0">
+                            <p:stCondLst>
+                              <p:cond delay="1430"/>
+                            </p:stCondLst>
+                            <p:childTnLst>
+                              <p:set>
+                                <p:cBhvr>
+                                  <p:cTn id="28" dur="1" fill="hold">
+                                    <p:stCondLst>
+                                      <p:cond delay="0"/>
+                                    </p:stCondLst>
+                                  </p:cTn>
+                                  <p:tgtEl>
+                                    <p:spTgt spid="14"/>
+                                  </p:tgtEl>
+                                  <p:attrNameLst>
+                                    <p:attrName>style.visibility</p:attrName>
+                                  </p:attrNameLst>
+                                </p:cBhvr>
+                                <p:to>
+                                  <p:strVal val="visible"/>
+                                </p:to>
+                              </p:set>
+                              <p:animEffect transition="in" filter="fade">
+                                <p:cBhvr>
+                                  <p:cTn id="271" dur="570"/>
+                                  <p:tgtEl>
+                                    <p:spTgt spid="14"/>
+                                  </p:tgtEl>
+                                </p:cBhvr>
+                              </p:animEffect>
+                            </p:childTnLst>
+                          </p:cTn>
+                        </p:par>
+                        <p:par>
+                          <p:cTn id="29" dur="690" fill="hold" nodeType="afterEffect" grpId="0" presetID="22" presetClass="entr" presetSubtype="2">
+                            <p:stCondLst>
+                              <p:cond delay="1560"/>
+                            </p:stCondLst>
+                            <p:childTnLst>
+                              <p:set>
+                                <p:cBhvr>
+                                  <p:cTn id="30" dur="1" fill="hold">
+                                    <p:stCondLst>
+                                      <p:cond delay="0"/>
+                                    </p:stCondLst>
+                                  </p:cTn>
+                                  <p:tgtEl>
+                                    <p:spTgt spid="15"/>
+                                  </p:tgtEl>
+                                  <p:attrNameLst>
+                                    <p:attrName>style.visibility</p:attrName>
+                                  </p:attrNameLst>
+                                </p:cBhvr>
+                                <p:to>
+                                  <p:strVal val="visible"/>
+                                </p:to>
+                              </p:set>
+                              <p:animEffect transition="in" filter="wipe(right)">
+                                <p:cBhvr>
+                                  <p:cTn id="291" dur="690"/>
+                                  <p:tgtEl>
+                                    <p:spTgt spid="15"/>
+                                  </p:tgtEl>
+                                </p:cBhvr>
+                              </p:animEffect>
+                            </p:childTnLst>
+                          </p:cTn>
+                        </p:par>
+                        <p:par>
+                          <p:cTn id="31" dur="810" fill="hold" nodeType="afterEffect" grpId="0" presetID="18" presetClass="entr" presetSubtype="12">
+                            <p:stCondLst>
+                              <p:cond delay="1690"/>
+                            </p:stCondLst>
+                            <p:childTnLst>
+                              <p:set>
+                                <p:cBhvr>
+                                  <p:cTn id="32" dur="1" fill="hold">
+                                    <p:stCondLst>
+                                      <p:cond delay="0"/>
+                                    </p:stCondLst>
+                                  </p:cTn>
+                                  <p:tgtEl>
+                                    <p:spTgt spid="16"/>
+                                  </p:tgtEl>
+                                  <p:attrNameLst>
+                                    <p:attrName>style.visibility</p:attrName>
+                                  </p:attrNameLst>
+                                </p:cBhvr>
+                                <p:to>
+                                  <p:strVal val="visible"/>
+                                </p:to>
+                              </p:set>
+                              <p:animEffect transition="in" filter="circle(in)">
+                                <p:cBhvr>
+                                  <p:cTn id="311" dur="810"/>
+                                  <p:tgtEl>
+                                    <p:spTgt spid="16"/>
+                                  </p:tgtEl>
+                                </p:cBhvr>
+                              </p:animEffect>
+                            </p:childTnLst>
+                          </p:cTn>
+                        </p:par>
+                      </p:childTnLst>
+                    </p:cTn>
+                  </p:par>
+                </p:childTnLst>
+              </p:cTn>
+              <p:prevCondLst>
+                <p:cond evt="onPrev" delay="0">
+                  <p:tgtEl>
+                    <p:sldTgt/>
+                  </p:tgtEl>
+                </p:cond>
+              </p:prevCondLst>
+              <p:nextCondLst>
+                <p:cond evt="onNext" delay="0">
+                  <p:tgtEl>
+                    <p:sldTgt/>
+                  </p:tgtEl>
+                </p:cond>
+              </p:nextCondLst>
+            </p:seq>
+          </p:childTnLst>
+        </p:cTn>
+      </p:par>
+    </p:tnLst>
+  </p:timing>
 </p:sld>
 </file>
 
@@ -10207,8 +14159,537 @@
     <a:masterClrMapping/>
   </p:clrMapOvr>
   <p:transition spd="med">
-    <p:push/>
+    <p:dissolve/>
   </p:transition>
+  <p:timing>
+    <p:tnLst>
+      <p:par>
+        <p:cTn id="1" dur="indefinite" restart="never" nodeType="tmRoot">
+          <p:childTnLst>
+            <p:seq concurrent="1" nextAc="seek">
+              <p:cTn id="2" dur="indefinite" nodeType="mainSeq">
+                <p:childTnLst>
+                  <p:par>
+                    <p:cTn id="3" fill="hold">
+                      <p:stCondLst>
+                        <p:cond delay="indefinite"/>
+                      </p:stCondLst>
+                      <p:childTnLst>
+                        <p:par>
+                          <p:cTn id="5" dur="810" fill="hold" nodeType="clickEffect" grpId="0" presetID="43" presetClass="entr" presetSubtype="0">
+                            <p:stCondLst>
+                              <p:cond delay="0"/>
+                            </p:stCondLst>
+                            <p:childTnLst>
+                              <p:set>
+                                <p:cBhvr>
+                                  <p:cTn id="6" dur="1" fill="hold">
+                                    <p:stCondLst>
+                                      <p:cond delay="0"/>
+                                    </p:stCondLst>
+                                  </p:cTn>
+                                  <p:tgtEl>
+                                    <p:spTgt spid="3"/>
+                                  </p:tgtEl>
+                                  <p:attrNameLst>
+                                    <p:attrName>style.visibility</p:attrName>
+                                  </p:attrNameLst>
+                                </p:cBhvr>
+                                <p:to>
+                                  <p:strVal val="visible"/>
+                                </p:to>
+                              </p:set>
+                              <p:animEffect transition="in" filter="checkerboard(across)">
+                                <p:cBhvr>
+                                  <p:cTn id="51" dur="810"/>
+                                  <p:tgtEl>
+                                    <p:spTgt spid="3"/>
+                                  </p:tgtEl>
+                                </p:cBhvr>
+                              </p:animEffect>
+                            </p:childTnLst>
+                          </p:cTn>
+                        </p:par>
+                        <p:par>
+                          <p:cTn id="7" dur="450" fill="hold" nodeType="afterEffect" grpId="0" presetID="21" presetClass="entr" presetSubtype="2">
+                            <p:stCondLst>
+                              <p:cond delay="130"/>
+                            </p:stCondLst>
+                            <p:childTnLst>
+                              <p:set>
+                                <p:cBhvr>
+                                  <p:cTn id="8" dur="1" fill="hold">
+                                    <p:stCondLst>
+                                      <p:cond delay="0"/>
+                                    </p:stCondLst>
+                                  </p:cTn>
+                                  <p:tgtEl>
+                                    <p:spTgt spid="4"/>
+                                  </p:tgtEl>
+                                  <p:attrNameLst>
+                                    <p:attrName>style.visibility</p:attrName>
+                                  </p:attrNameLst>
+                                </p:cBhvr>
+                                <p:to>
+                                  <p:strVal val="visible"/>
+                                </p:to>
+                              </p:set>
+                              <p:animEffect transition="in" filter="wheel(2)">
+                                <p:cBhvr>
+                                  <p:cTn id="71" dur="450"/>
+                                  <p:tgtEl>
+                                    <p:spTgt spid="4"/>
+                                  </p:tgtEl>
+                                </p:cBhvr>
+                              </p:animEffect>
+                            </p:childTnLst>
+                          </p:cTn>
+                        </p:par>
+                        <p:par>
+                          <p:cTn id="9" dur="570" fill="hold" nodeType="afterEffect" grpId="0" presetID="10" presetClass="entr" presetSubtype="0">
+                            <p:stCondLst>
+                              <p:cond delay="260"/>
+                            </p:stCondLst>
+                            <p:childTnLst>
+                              <p:set>
+                                <p:cBhvr>
+                                  <p:cTn id="10" dur="1" fill="hold">
+                                    <p:stCondLst>
+                                      <p:cond delay="0"/>
+                                    </p:stCondLst>
+                                  </p:cTn>
+                                  <p:tgtEl>
+                                    <p:spTgt spid="5"/>
+                                  </p:tgtEl>
+                                  <p:attrNameLst>
+                                    <p:attrName>style.visibility</p:attrName>
+                                  </p:attrNameLst>
+                                </p:cBhvr>
+                                <p:to>
+                                  <p:strVal val="visible"/>
+                                </p:to>
+                              </p:set>
+                              <p:animEffect transition="in" filter="dissolve">
+                                <p:cBhvr>
+                                  <p:cTn id="91" dur="570"/>
+                                  <p:tgtEl>
+                                    <p:spTgt spid="5"/>
+                                  </p:tgtEl>
+                                </p:cBhvr>
+                              </p:animEffect>
+                            </p:childTnLst>
+                          </p:cTn>
+                        </p:par>
+                        <p:par>
+                          <p:cTn id="11" dur="690" fill="hold" nodeType="afterEffect" grpId="0" presetID="25" presetClass="entr" presetSubtype="1">
+                            <p:stCondLst>
+                              <p:cond delay="390"/>
+                            </p:stCondLst>
+                            <p:childTnLst>
+                              <p:set>
+                                <p:cBhvr>
+                                  <p:cTn id="12" dur="1" fill="hold">
+                                    <p:stCondLst>
+                                      <p:cond delay="0"/>
+                                    </p:stCondLst>
+                                  </p:cTn>
+                                  <p:tgtEl>
+                                    <p:spTgt spid="6"/>
+                                  </p:tgtEl>
+                                  <p:attrNameLst>
+                                    <p:attrName>style.visibility</p:attrName>
+                                  </p:attrNameLst>
+                                </p:cBhvr>
+                                <p:to>
+                                  <p:strVal val="visible"/>
+                                </p:to>
+                              </p:set>
+                              <p:animEffect transition="in" filter="strips(downRight)">
+                                <p:cBhvr>
+                                  <p:cTn id="111" dur="690"/>
+                                  <p:tgtEl>
+                                    <p:spTgt spid="6"/>
+                                  </p:tgtEl>
+                                </p:cBhvr>
+                              </p:animEffect>
+                            </p:childTnLst>
+                          </p:cTn>
+                        </p:par>
+                        <p:par>
+                          <p:cTn id="13" dur="810" fill="hold" nodeType="afterEffect" grpId="0" presetID="45" presetClass="entr" presetSubtype="1">
+                            <p:stCondLst>
+                              <p:cond delay="520"/>
+                            </p:stCondLst>
+                            <p:childTnLst>
+                              <p:set>
+                                <p:cBhvr>
+                                  <p:cTn id="14" dur="1" fill="hold">
+                                    <p:stCondLst>
+                                      <p:cond delay="0"/>
+                                    </p:stCondLst>
+                                  </p:cTn>
+                                  <p:tgtEl>
+                                    <p:spTgt spid="8"/>
+                                  </p:tgtEl>
+                                  <p:attrNameLst>
+                                    <p:attrName>style.visibility</p:attrName>
+                                  </p:attrNameLst>
+                                </p:cBhvr>
+                                <p:to>
+                                  <p:strVal val="visible"/>
+                                </p:to>
+                              </p:set>
+                              <p:animEffect transition="in" filter="barn(inHorizontal)">
+                                <p:cBhvr>
+                                  <p:cTn id="131" dur="810"/>
+                                  <p:tgtEl>
+                                    <p:spTgt spid="8"/>
+                                  </p:tgtEl>
+                                </p:cBhvr>
+                              </p:animEffect>
+                            </p:childTnLst>
+                          </p:cTn>
+                        </p:par>
+                        <p:par>
+                          <p:cTn id="15" dur="450" fill="hold" nodeType="afterEffect" grpId="0" presetID="22" presetClass="entr" presetSubtype="8">
+                            <p:stCondLst>
+                              <p:cond delay="650"/>
+                            </p:stCondLst>
+                            <p:childTnLst>
+                              <p:set>
+                                <p:cBhvr>
+                                  <p:cTn id="16" dur="1" fill="hold">
+                                    <p:stCondLst>
+                                      <p:cond delay="0"/>
+                                    </p:stCondLst>
+                                  </p:cTn>
+                                  <p:tgtEl>
+                                    <p:spTgt spid="14"/>
+                                  </p:tgtEl>
+                                  <p:attrNameLst>
+                                    <p:attrName>style.visibility</p:attrName>
+                                  </p:attrNameLst>
+                                </p:cBhvr>
+                                <p:to>
+                                  <p:strVal val="visible"/>
+                                </p:to>
+                              </p:set>
+                              <p:animEffect transition="in" filter="wipe(left)">
+                                <p:cBhvr>
+                                  <p:cTn id="151" dur="450"/>
+                                  <p:tgtEl>
+                                    <p:spTgt spid="14"/>
+                                  </p:tgtEl>
+                                </p:cBhvr>
+                              </p:animEffect>
+                            </p:childTnLst>
+                          </p:cTn>
+                        </p:par>
+                        <p:par>
+                          <p:cTn id="17" dur="570" fill="hold" nodeType="afterEffect" grpId="0" presetID="37" presetClass="entr" presetSubtype="0">
+                            <p:stCondLst>
+                              <p:cond delay="780"/>
+                            </p:stCondLst>
+                            <p:childTnLst>
+                              <p:set>
+                                <p:cBhvr>
+                                  <p:cTn id="18" dur="1" fill="hold">
+                                    <p:stCondLst>
+                                      <p:cond delay="0"/>
+                                    </p:stCondLst>
+                                  </p:cTn>
+                                  <p:tgtEl>
+                                    <p:spTgt spid="12"/>
+                                  </p:tgtEl>
+                                  <p:attrNameLst>
+                                    <p:attrName>style.visibility</p:attrName>
+                                  </p:attrNameLst>
+                                </p:cBhvr>
+                                <p:to>
+                                  <p:strVal val="visible"/>
+                                </p:to>
+                              </p:set>
+                              <p:animEffect transition="in" filter="wedge">
+                                <p:cBhvr>
+                                  <p:cTn id="171" dur="570"/>
+                                  <p:tgtEl>
+                                    <p:spTgt spid="12"/>
+                                  </p:tgtEl>
+                                </p:cBhvr>
+                              </p:animEffect>
+                            </p:childTnLst>
+                          </p:cTn>
+                        </p:par>
+                        <p:par>
+                          <p:cTn id="19" dur="690" fill="hold" nodeType="afterEffect" grpId="0" presetID="52" presetClass="entr" presetSubtype="0">
+                            <p:stCondLst>
+                              <p:cond delay="910"/>
+                            </p:stCondLst>
+                            <p:childTnLst>
+                              <p:set>
+                                <p:cBhvr>
+                                  <p:cTn id="20" dur="1" fill="hold">
+                                    <p:stCondLst>
+                                      <p:cond delay="0"/>
+                                    </p:stCondLst>
+                                  </p:cTn>
+                                  <p:tgtEl>
+                                    <p:spTgt spid="15"/>
+                                  </p:tgtEl>
+                                  <p:attrNameLst>
+                                    <p:attrName>style.visibility</p:attrName>
+                                  </p:attrNameLst>
+                                </p:cBhvr>
+                                <p:to>
+                                  <p:strVal val="visible"/>
+                                </p:to>
+                              </p:set>
+                              <p:animEffect transition="in" filter="randombar(horizontal)">
+                                <p:cBhvr>
+                                  <p:cTn id="191" dur="690"/>
+                                  <p:tgtEl>
+                                    <p:spTgt spid="15"/>
+                                  </p:tgtEl>
+                                </p:cBhvr>
+                              </p:animEffect>
+                            </p:childTnLst>
+                          </p:cTn>
+                        </p:par>
+                        <p:par>
+                          <p:cTn id="21" dur="810" fill="hold" nodeType="afterEffect" grpId="0" presetID="21" presetClass="entr" presetSubtype="1">
+                            <p:stCondLst>
+                              <p:cond delay="1040"/>
+                            </p:stCondLst>
+                            <p:childTnLst>
+                              <p:set>
+                                <p:cBhvr>
+                                  <p:cTn id="22" dur="1" fill="hold">
+                                    <p:stCondLst>
+                                      <p:cond delay="0"/>
+                                    </p:stCondLst>
+                                  </p:cTn>
+                                  <p:tgtEl>
+                                    <p:spTgt spid="10"/>
+                                  </p:tgtEl>
+                                  <p:attrNameLst>
+                                    <p:attrName>style.visibility</p:attrName>
+                                  </p:attrNameLst>
+                                </p:cBhvr>
+                                <p:to>
+                                  <p:strVal val="visible"/>
+                                </p:to>
+                              </p:set>
+                              <p:animEffect transition="in" filter="wheel(1)">
+                                <p:cBhvr>
+                                  <p:cTn id="211" dur="810"/>
+                                  <p:tgtEl>
+                                    <p:spTgt spid="10"/>
+                                  </p:tgtEl>
+                                </p:cBhvr>
+                              </p:animEffect>
+                            </p:childTnLst>
+                          </p:cTn>
+                        </p:par>
+                        <p:par>
+                          <p:cTn id="23" dur="450" fill="hold" nodeType="afterEffect" grpId="0" presetID="22" presetClass="entr" presetSubtype="4">
+                            <p:stCondLst>
+                              <p:cond delay="1170"/>
+                            </p:stCondLst>
+                            <p:childTnLst>
+                              <p:set>
+                                <p:cBhvr>
+                                  <p:cTn id="24" dur="1" fill="hold">
+                                    <p:stCondLst>
+                                      <p:cond delay="0"/>
+                                    </p:stCondLst>
+                                  </p:cTn>
+                                  <p:tgtEl>
+                                    <p:spTgt spid="7"/>
+                                  </p:tgtEl>
+                                  <p:attrNameLst>
+                                    <p:attrName>style.visibility</p:attrName>
+                                  </p:attrNameLst>
+                                </p:cBhvr>
+                                <p:to>
+                                  <p:strVal val="visible"/>
+                                </p:to>
+                              </p:set>
+                              <p:animEffect transition="in" filter="wipe(down)">
+                                <p:cBhvr>
+                                  <p:cTn id="231" dur="450"/>
+                                  <p:tgtEl>
+                                    <p:spTgt spid="7"/>
+                                  </p:tgtEl>
+                                </p:cBhvr>
+                              </p:animEffect>
+                            </p:childTnLst>
+                          </p:cTn>
+                        </p:par>
+                        <p:par>
+                          <p:cTn id="25" dur="570" fill="hold" nodeType="afterEffect" grpId="0" presetID="9" presetClass="entr" presetSubtype="0">
+                            <p:stCondLst>
+                              <p:cond delay="1300"/>
+                            </p:stCondLst>
+                            <p:childTnLst>
+                              <p:set>
+                                <p:cBhvr>
+                                  <p:cTn id="26" dur="1" fill="hold">
+                                    <p:stCondLst>
+                                      <p:cond delay="0"/>
+                                    </p:stCondLst>
+                                  </p:cTn>
+                                  <p:tgtEl>
+                                    <p:spTgt spid="13"/>
+                                  </p:tgtEl>
+                                  <p:attrNameLst>
+                                    <p:attrName>style.visibility</p:attrName>
+                                  </p:attrNameLst>
+                                </p:cBhvr>
+                                <p:to>
+                                  <p:strVal val="visible"/>
+                                </p:to>
+                              </p:set>
+                              <p:animEffect transition="in" filter="fade">
+                                <p:cBhvr>
+                                  <p:cTn id="251" dur="570"/>
+                                  <p:tgtEl>
+                                    <p:spTgt spid="13"/>
+                                  </p:tgtEl>
+                                </p:cBhvr>
+                              </p:animEffect>
+                            </p:childTnLst>
+                          </p:cTn>
+                        </p:par>
+                        <p:par>
+                          <p:cTn id="27" dur="690" fill="hold" nodeType="afterEffect" grpId="0" presetID="22" presetClass="entr" presetSubtype="2">
+                            <p:stCondLst>
+                              <p:cond delay="1430"/>
+                            </p:stCondLst>
+                            <p:childTnLst>
+                              <p:set>
+                                <p:cBhvr>
+                                  <p:cTn id="28" dur="1" fill="hold">
+                                    <p:stCondLst>
+                                      <p:cond delay="0"/>
+                                    </p:stCondLst>
+                                  </p:cTn>
+                                  <p:tgtEl>
+                                    <p:spTgt spid="11"/>
+                                  </p:tgtEl>
+                                  <p:attrNameLst>
+                                    <p:attrName>style.visibility</p:attrName>
+                                  </p:attrNameLst>
+                                </p:cBhvr>
+                                <p:to>
+                                  <p:strVal val="visible"/>
+                                </p:to>
+                              </p:set>
+                              <p:animEffect transition="in" filter="wipe(right)">
+                                <p:cBhvr>
+                                  <p:cTn id="271" dur="690"/>
+                                  <p:tgtEl>
+                                    <p:spTgt spid="11"/>
+                                  </p:tgtEl>
+                                </p:cBhvr>
+                              </p:animEffect>
+                            </p:childTnLst>
+                          </p:cTn>
+                        </p:par>
+                        <p:par>
+                          <p:cTn id="29" dur="810" fill="hold" nodeType="afterEffect" grpId="0" presetID="18" presetClass="entr" presetSubtype="12">
+                            <p:stCondLst>
+                              <p:cond delay="1560"/>
+                            </p:stCondLst>
+                            <p:childTnLst>
+                              <p:set>
+                                <p:cBhvr>
+                                  <p:cTn id="30" dur="1" fill="hold">
+                                    <p:stCondLst>
+                                      <p:cond delay="0"/>
+                                    </p:stCondLst>
+                                  </p:cTn>
+                                  <p:tgtEl>
+                                    <p:spTgt spid="9"/>
+                                  </p:tgtEl>
+                                  <p:attrNameLst>
+                                    <p:attrName>style.visibility</p:attrName>
+                                  </p:attrNameLst>
+                                </p:cBhvr>
+                                <p:to>
+                                  <p:strVal val="visible"/>
+                                </p:to>
+                              </p:set>
+                              <p:animEffect transition="in" filter="circle(in)">
+                                <p:cBhvr>
+                                  <p:cTn id="291" dur="810"/>
+                                  <p:tgtEl>
+                                    <p:spTgt spid="9"/>
+                                  </p:tgtEl>
+                                </p:cBhvr>
+                              </p:animEffect>
+                            </p:childTnLst>
+                          </p:cTn>
+                        </p:par>
+                        <p:par>
+                          <p:cTn id="31" dur="450" fill="hold" nodeType="afterEffect" grpId="0" presetID="22" presetClass="entr" presetSubtype="1">
+                            <p:stCondLst>
+                              <p:cond delay="1690"/>
+                            </p:stCondLst>
+                            <p:childTnLst>
+                              <p:set>
+                                <p:cBhvr>
+                                  <p:cTn id="32" dur="1" fill="hold">
+                                    <p:stCondLst>
+                                      <p:cond delay="0"/>
+                                    </p:stCondLst>
+                                  </p:cTn>
+                                  <p:tgtEl>
+                                    <p:spTgt spid="16"/>
+                                  </p:tgtEl>
+                                  <p:attrNameLst>
+                                    <p:attrName>style.visibility</p:attrName>
+                                  </p:attrNameLst>
+                                </p:cBhvr>
+                                <p:to>
+                                  <p:strVal val="visible"/>
+                                </p:to>
+                              </p:set>
+                              <p:animEffect transition="in" filter="wipe(up)">
+                                <p:cBhvr>
+                                  <p:cTn id="311" dur="450"/>
+                                  <p:tgtEl>
+                                    <p:spTgt spid="16"/>
+                                  </p:tgtEl>
+                                </p:cBhvr>
+                              </p:animEffect>
+                            </p:childTnLst>
+                          </p:cTn>
+                        </p:par>
+                      </p:childTnLst>
+                    </p:cTn>
+                  </p:par>
+                </p:childTnLst>
+              </p:cTn>
+              <p:prevCondLst>
+                <p:cond evt="onPrev" delay="0">
+                  <p:tgtEl>
+                    <p:sldTgt/>
+                  </p:tgtEl>
+                </p:cond>
+              </p:prevCondLst>
+              <p:nextCondLst>
+                <p:cond evt="onNext" delay="0">
+                  <p:tgtEl>
+                    <p:sldTgt/>
+                  </p:tgtEl>
+                </p:cond>
+              </p:nextCondLst>
+            </p:seq>
+          </p:childTnLst>
+        </p:cTn>
+      </p:par>
+    </p:tnLst>
+  </p:timing>
 </p:sld>
 </file>
 
@@ -10768,8 +15249,432 @@
     <a:masterClrMapping/>
   </p:clrMapOvr>
   <p:transition spd="med">
-    <p:push/>
+    <p:zoom dir="in"/>
   </p:transition>
+  <p:timing>
+    <p:tnLst>
+      <p:par>
+        <p:cTn id="1" dur="indefinite" restart="never" nodeType="tmRoot">
+          <p:childTnLst>
+            <p:seq concurrent="1" nextAc="seek">
+              <p:cTn id="2" dur="indefinite" nodeType="mainSeq">
+                <p:childTnLst>
+                  <p:par>
+                    <p:cTn id="3" fill="hold">
+                      <p:stCondLst>
+                        <p:cond delay="indefinite"/>
+                      </p:stCondLst>
+                      <p:childTnLst>
+                        <p:par>
+                          <p:cTn id="5" dur="450" fill="hold" nodeType="clickEffect" grpId="0" presetID="21" presetClass="entr" presetSubtype="2">
+                            <p:stCondLst>
+                              <p:cond delay="0"/>
+                            </p:stCondLst>
+                            <p:childTnLst>
+                              <p:set>
+                                <p:cBhvr>
+                                  <p:cTn id="6" dur="1" fill="hold">
+                                    <p:stCondLst>
+                                      <p:cond delay="0"/>
+                                    </p:stCondLst>
+                                  </p:cTn>
+                                  <p:tgtEl>
+                                    <p:spTgt spid="3"/>
+                                  </p:tgtEl>
+                                  <p:attrNameLst>
+                                    <p:attrName>style.visibility</p:attrName>
+                                  </p:attrNameLst>
+                                </p:cBhvr>
+                                <p:to>
+                                  <p:strVal val="visible"/>
+                                </p:to>
+                              </p:set>
+                              <p:animEffect transition="in" filter="wheel(2)">
+                                <p:cBhvr>
+                                  <p:cTn id="51" dur="450"/>
+                                  <p:tgtEl>
+                                    <p:spTgt spid="3"/>
+                                  </p:tgtEl>
+                                </p:cBhvr>
+                              </p:animEffect>
+                            </p:childTnLst>
+                          </p:cTn>
+                        </p:par>
+                        <p:par>
+                          <p:cTn id="7" dur="570" fill="hold" nodeType="afterEffect" grpId="0" presetID="10" presetClass="entr" presetSubtype="0">
+                            <p:stCondLst>
+                              <p:cond delay="130"/>
+                            </p:stCondLst>
+                            <p:childTnLst>
+                              <p:set>
+                                <p:cBhvr>
+                                  <p:cTn id="8" dur="1" fill="hold">
+                                    <p:stCondLst>
+                                      <p:cond delay="0"/>
+                                    </p:stCondLst>
+                                  </p:cTn>
+                                  <p:tgtEl>
+                                    <p:spTgt spid="4"/>
+                                  </p:tgtEl>
+                                  <p:attrNameLst>
+                                    <p:attrName>style.visibility</p:attrName>
+                                  </p:attrNameLst>
+                                </p:cBhvr>
+                                <p:to>
+                                  <p:strVal val="visible"/>
+                                </p:to>
+                              </p:set>
+                              <p:animEffect transition="in" filter="dissolve">
+                                <p:cBhvr>
+                                  <p:cTn id="71" dur="570"/>
+                                  <p:tgtEl>
+                                    <p:spTgt spid="4"/>
+                                  </p:tgtEl>
+                                </p:cBhvr>
+                              </p:animEffect>
+                            </p:childTnLst>
+                          </p:cTn>
+                        </p:par>
+                        <p:par>
+                          <p:cTn id="9" dur="690" fill="hold" nodeType="afterEffect" grpId="0" presetID="25" presetClass="entr" presetSubtype="1">
+                            <p:stCondLst>
+                              <p:cond delay="260"/>
+                            </p:stCondLst>
+                            <p:childTnLst>
+                              <p:set>
+                                <p:cBhvr>
+                                  <p:cTn id="10" dur="1" fill="hold">
+                                    <p:stCondLst>
+                                      <p:cond delay="0"/>
+                                    </p:stCondLst>
+                                  </p:cTn>
+                                  <p:tgtEl>
+                                    <p:spTgt spid="5"/>
+                                  </p:tgtEl>
+                                  <p:attrNameLst>
+                                    <p:attrName>style.visibility</p:attrName>
+                                  </p:attrNameLst>
+                                </p:cBhvr>
+                                <p:to>
+                                  <p:strVal val="visible"/>
+                                </p:to>
+                              </p:set>
+                              <p:animEffect transition="in" filter="strips(downRight)">
+                                <p:cBhvr>
+                                  <p:cTn id="91" dur="690"/>
+                                  <p:tgtEl>
+                                    <p:spTgt spid="5"/>
+                                  </p:tgtEl>
+                                </p:cBhvr>
+                              </p:animEffect>
+                            </p:childTnLst>
+                          </p:cTn>
+                        </p:par>
+                        <p:par>
+                          <p:cTn id="11" dur="810" fill="hold" nodeType="afterEffect" grpId="0" presetID="45" presetClass="entr" presetSubtype="1">
+                            <p:stCondLst>
+                              <p:cond delay="390"/>
+                            </p:stCondLst>
+                            <p:childTnLst>
+                              <p:set>
+                                <p:cBhvr>
+                                  <p:cTn id="12" dur="1" fill="hold">
+                                    <p:stCondLst>
+                                      <p:cond delay="0"/>
+                                    </p:stCondLst>
+                                  </p:cTn>
+                                  <p:tgtEl>
+                                    <p:spTgt spid="6"/>
+                                  </p:tgtEl>
+                                  <p:attrNameLst>
+                                    <p:attrName>style.visibility</p:attrName>
+                                  </p:attrNameLst>
+                                </p:cBhvr>
+                                <p:to>
+                                  <p:strVal val="visible"/>
+                                </p:to>
+                              </p:set>
+                              <p:animEffect transition="in" filter="barn(inHorizontal)">
+                                <p:cBhvr>
+                                  <p:cTn id="111" dur="810"/>
+                                  <p:tgtEl>
+                                    <p:spTgt spid="6"/>
+                                  </p:tgtEl>
+                                </p:cBhvr>
+                              </p:animEffect>
+                            </p:childTnLst>
+                          </p:cTn>
+                        </p:par>
+                        <p:par>
+                          <p:cTn id="13" dur="450" fill="hold" nodeType="afterEffect" grpId="0" presetID="22" presetClass="entr" presetSubtype="8">
+                            <p:stCondLst>
+                              <p:cond delay="520"/>
+                            </p:stCondLst>
+                            <p:childTnLst>
+                              <p:set>
+                                <p:cBhvr>
+                                  <p:cTn id="14" dur="1" fill="hold">
+                                    <p:stCondLst>
+                                      <p:cond delay="0"/>
+                                    </p:stCondLst>
+                                  </p:cTn>
+                                  <p:tgtEl>
+                                    <p:spTgt spid="7"/>
+                                  </p:tgtEl>
+                                  <p:attrNameLst>
+                                    <p:attrName>style.visibility</p:attrName>
+                                  </p:attrNameLst>
+                                </p:cBhvr>
+                                <p:to>
+                                  <p:strVal val="visible"/>
+                                </p:to>
+                              </p:set>
+                              <p:animEffect transition="in" filter="wipe(left)">
+                                <p:cBhvr>
+                                  <p:cTn id="131" dur="450"/>
+                                  <p:tgtEl>
+                                    <p:spTgt spid="7"/>
+                                  </p:tgtEl>
+                                </p:cBhvr>
+                              </p:animEffect>
+                            </p:childTnLst>
+                          </p:cTn>
+                        </p:par>
+                        <p:par>
+                          <p:cTn id="15" dur="570" fill="hold" nodeType="afterEffect" grpId="0" presetID="37" presetClass="entr" presetSubtype="0">
+                            <p:stCondLst>
+                              <p:cond delay="650"/>
+                            </p:stCondLst>
+                            <p:childTnLst>
+                              <p:set>
+                                <p:cBhvr>
+                                  <p:cTn id="16" dur="1" fill="hold">
+                                    <p:stCondLst>
+                                      <p:cond delay="0"/>
+                                    </p:stCondLst>
+                                  </p:cTn>
+                                  <p:tgtEl>
+                                    <p:spTgt spid="8"/>
+                                  </p:tgtEl>
+                                  <p:attrNameLst>
+                                    <p:attrName>style.visibility</p:attrName>
+                                  </p:attrNameLst>
+                                </p:cBhvr>
+                                <p:to>
+                                  <p:strVal val="visible"/>
+                                </p:to>
+                              </p:set>
+                              <p:animEffect transition="in" filter="wedge">
+                                <p:cBhvr>
+                                  <p:cTn id="151" dur="570"/>
+                                  <p:tgtEl>
+                                    <p:spTgt spid="8"/>
+                                  </p:tgtEl>
+                                </p:cBhvr>
+                              </p:animEffect>
+                            </p:childTnLst>
+                          </p:cTn>
+                        </p:par>
+                        <p:par>
+                          <p:cTn id="17" dur="690" fill="hold" nodeType="afterEffect" grpId="0" presetID="52" presetClass="entr" presetSubtype="0">
+                            <p:stCondLst>
+                              <p:cond delay="780"/>
+                            </p:stCondLst>
+                            <p:childTnLst>
+                              <p:set>
+                                <p:cBhvr>
+                                  <p:cTn id="18" dur="1" fill="hold">
+                                    <p:stCondLst>
+                                      <p:cond delay="0"/>
+                                    </p:stCondLst>
+                                  </p:cTn>
+                                  <p:tgtEl>
+                                    <p:spTgt spid="9"/>
+                                  </p:tgtEl>
+                                  <p:attrNameLst>
+                                    <p:attrName>style.visibility</p:attrName>
+                                  </p:attrNameLst>
+                                </p:cBhvr>
+                                <p:to>
+                                  <p:strVal val="visible"/>
+                                </p:to>
+                              </p:set>
+                              <p:animEffect transition="in" filter="randombar(horizontal)">
+                                <p:cBhvr>
+                                  <p:cTn id="171" dur="690"/>
+                                  <p:tgtEl>
+                                    <p:spTgt spid="9"/>
+                                  </p:tgtEl>
+                                </p:cBhvr>
+                              </p:animEffect>
+                            </p:childTnLst>
+                          </p:cTn>
+                        </p:par>
+                        <p:par>
+                          <p:cTn id="19" dur="810" fill="hold" nodeType="afterEffect" grpId="0" presetID="21" presetClass="entr" presetSubtype="1">
+                            <p:stCondLst>
+                              <p:cond delay="910"/>
+                            </p:stCondLst>
+                            <p:childTnLst>
+                              <p:set>
+                                <p:cBhvr>
+                                  <p:cTn id="20" dur="1" fill="hold">
+                                    <p:stCondLst>
+                                      <p:cond delay="0"/>
+                                    </p:stCondLst>
+                                  </p:cTn>
+                                  <p:tgtEl>
+                                    <p:spTgt spid="10"/>
+                                  </p:tgtEl>
+                                  <p:attrNameLst>
+                                    <p:attrName>style.visibility</p:attrName>
+                                  </p:attrNameLst>
+                                </p:cBhvr>
+                                <p:to>
+                                  <p:strVal val="visible"/>
+                                </p:to>
+                              </p:set>
+                              <p:animEffect transition="in" filter="wheel(1)">
+                                <p:cBhvr>
+                                  <p:cTn id="191" dur="810"/>
+                                  <p:tgtEl>
+                                    <p:spTgt spid="10"/>
+                                  </p:tgtEl>
+                                </p:cBhvr>
+                              </p:animEffect>
+                            </p:childTnLst>
+                          </p:cTn>
+                        </p:par>
+                        <p:par>
+                          <p:cTn id="21" dur="450" fill="hold" nodeType="afterEffect" grpId="0" presetID="22" presetClass="entr" presetSubtype="4">
+                            <p:stCondLst>
+                              <p:cond delay="1040"/>
+                            </p:stCondLst>
+                            <p:childTnLst>
+                              <p:set>
+                                <p:cBhvr>
+                                  <p:cTn id="22" dur="1" fill="hold">
+                                    <p:stCondLst>
+                                      <p:cond delay="0"/>
+                                    </p:stCondLst>
+                                  </p:cTn>
+                                  <p:tgtEl>
+                                    <p:spTgt spid="11"/>
+                                  </p:tgtEl>
+                                  <p:attrNameLst>
+                                    <p:attrName>style.visibility</p:attrName>
+                                  </p:attrNameLst>
+                                </p:cBhvr>
+                                <p:to>
+                                  <p:strVal val="visible"/>
+                                </p:to>
+                              </p:set>
+                              <p:animEffect transition="in" filter="wipe(down)">
+                                <p:cBhvr>
+                                  <p:cTn id="211" dur="450"/>
+                                  <p:tgtEl>
+                                    <p:spTgt spid="11"/>
+                                  </p:tgtEl>
+                                </p:cBhvr>
+                              </p:animEffect>
+                            </p:childTnLst>
+                          </p:cTn>
+                        </p:par>
+                        <p:par>
+                          <p:cTn id="23" dur="570" fill="hold" nodeType="afterEffect" grpId="0" presetID="9" presetClass="entr" presetSubtype="0">
+                            <p:stCondLst>
+                              <p:cond delay="1170"/>
+                            </p:stCondLst>
+                            <p:childTnLst>
+                              <p:set>
+                                <p:cBhvr>
+                                  <p:cTn id="24" dur="1" fill="hold">
+                                    <p:stCondLst>
+                                      <p:cond delay="0"/>
+                                    </p:stCondLst>
+                                  </p:cTn>
+                                  <p:tgtEl>
+                                    <p:spTgt spid="12"/>
+                                  </p:tgtEl>
+                                  <p:attrNameLst>
+                                    <p:attrName>style.visibility</p:attrName>
+                                  </p:attrNameLst>
+                                </p:cBhvr>
+                                <p:to>
+                                  <p:strVal val="visible"/>
+                                </p:to>
+                              </p:set>
+                              <p:animEffect transition="in" filter="fade">
+                                <p:cBhvr>
+                                  <p:cTn id="231" dur="570"/>
+                                  <p:tgtEl>
+                                    <p:spTgt spid="12"/>
+                                  </p:tgtEl>
+                                </p:cBhvr>
+                              </p:animEffect>
+                            </p:childTnLst>
+                          </p:cTn>
+                        </p:par>
+                        <p:par>
+                          <p:cTn id="25" dur="690" fill="hold" nodeType="afterEffect" grpId="0" presetID="22" presetClass="entr" presetSubtype="2">
+                            <p:stCondLst>
+                              <p:cond delay="1300"/>
+                            </p:stCondLst>
+                            <p:childTnLst>
+                              <p:set>
+                                <p:cBhvr>
+                                  <p:cTn id="26" dur="1" fill="hold">
+                                    <p:stCondLst>
+                                      <p:cond delay="0"/>
+                                    </p:stCondLst>
+                                  </p:cTn>
+                                  <p:tgtEl>
+                                    <p:spTgt spid="13"/>
+                                  </p:tgtEl>
+                                  <p:attrNameLst>
+                                    <p:attrName>style.visibility</p:attrName>
+                                  </p:attrNameLst>
+                                </p:cBhvr>
+                                <p:to>
+                                  <p:strVal val="visible"/>
+                                </p:to>
+                              </p:set>
+                              <p:animEffect transition="in" filter="wipe(right)">
+                                <p:cBhvr>
+                                  <p:cTn id="251" dur="690"/>
+                                  <p:tgtEl>
+                                    <p:spTgt spid="13"/>
+                                  </p:tgtEl>
+                                </p:cBhvr>
+                              </p:animEffect>
+                            </p:childTnLst>
+                          </p:cTn>
+                        </p:par>
+                      </p:childTnLst>
+                    </p:cTn>
+                  </p:par>
+                </p:childTnLst>
+              </p:cTn>
+              <p:prevCondLst>
+                <p:cond evt="onPrev" delay="0">
+                  <p:tgtEl>
+                    <p:sldTgt/>
+                  </p:tgtEl>
+                </p:cond>
+              </p:prevCondLst>
+              <p:nextCondLst>
+                <p:cond evt="onNext" delay="0">
+                  <p:tgtEl>
+                    <p:sldTgt/>
+                  </p:tgtEl>
+                </p:cond>
+              </p:nextCondLst>
+            </p:seq>
+          </p:childTnLst>
+        </p:cTn>
+      </p:par>
+    </p:tnLst>
+  </p:timing>
 </p:sld>
 </file>
 
@@ -11597,8 +16502,537 @@
     <a:masterClrMapping/>
   </p:clrMapOvr>
   <p:transition spd="med">
-    <p:push/>
+    <p:comb dir="horz"/>
   </p:transition>
+  <p:timing>
+    <p:tnLst>
+      <p:par>
+        <p:cTn id="1" dur="indefinite" restart="never" nodeType="tmRoot">
+          <p:childTnLst>
+            <p:seq concurrent="1" nextAc="seek">
+              <p:cTn id="2" dur="indefinite" nodeType="mainSeq">
+                <p:childTnLst>
+                  <p:par>
+                    <p:cTn id="3" fill="hold">
+                      <p:stCondLst>
+                        <p:cond delay="indefinite"/>
+                      </p:stCondLst>
+                      <p:childTnLst>
+                        <p:par>
+                          <p:cTn id="5" dur="450" fill="hold" nodeType="clickEffect" grpId="0" presetID="43" presetClass="entr" presetSubtype="0">
+                            <p:stCondLst>
+                              <p:cond delay="0"/>
+                            </p:stCondLst>
+                            <p:childTnLst>
+                              <p:set>
+                                <p:cBhvr>
+                                  <p:cTn id="6" dur="1" fill="hold">
+                                    <p:stCondLst>
+                                      <p:cond delay="0"/>
+                                    </p:stCondLst>
+                                  </p:cTn>
+                                  <p:tgtEl>
+                                    <p:spTgt spid="3"/>
+                                  </p:tgtEl>
+                                  <p:attrNameLst>
+                                    <p:attrName>style.visibility</p:attrName>
+                                  </p:attrNameLst>
+                                </p:cBhvr>
+                                <p:to>
+                                  <p:strVal val="visible"/>
+                                </p:to>
+                              </p:set>
+                              <p:animEffect transition="in" filter="checkerboard(across)">
+                                <p:cBhvr>
+                                  <p:cTn id="51" dur="450"/>
+                                  <p:tgtEl>
+                                    <p:spTgt spid="3"/>
+                                  </p:tgtEl>
+                                </p:cBhvr>
+                              </p:animEffect>
+                            </p:childTnLst>
+                          </p:cTn>
+                        </p:par>
+                        <p:par>
+                          <p:cTn id="7" dur="570" fill="hold" nodeType="afterEffect" grpId="0" presetID="21" presetClass="entr" presetSubtype="2">
+                            <p:stCondLst>
+                              <p:cond delay="130"/>
+                            </p:stCondLst>
+                            <p:childTnLst>
+                              <p:set>
+                                <p:cBhvr>
+                                  <p:cTn id="8" dur="1" fill="hold">
+                                    <p:stCondLst>
+                                      <p:cond delay="0"/>
+                                    </p:stCondLst>
+                                  </p:cTn>
+                                  <p:tgtEl>
+                                    <p:spTgt spid="4"/>
+                                  </p:tgtEl>
+                                  <p:attrNameLst>
+                                    <p:attrName>style.visibility</p:attrName>
+                                  </p:attrNameLst>
+                                </p:cBhvr>
+                                <p:to>
+                                  <p:strVal val="visible"/>
+                                </p:to>
+                              </p:set>
+                              <p:animEffect transition="in" filter="wheel(2)">
+                                <p:cBhvr>
+                                  <p:cTn id="71" dur="570"/>
+                                  <p:tgtEl>
+                                    <p:spTgt spid="4"/>
+                                  </p:tgtEl>
+                                </p:cBhvr>
+                              </p:animEffect>
+                            </p:childTnLst>
+                          </p:cTn>
+                        </p:par>
+                        <p:par>
+                          <p:cTn id="9" dur="690" fill="hold" nodeType="afterEffect" grpId="0" presetID="10" presetClass="entr" presetSubtype="0">
+                            <p:stCondLst>
+                              <p:cond delay="260"/>
+                            </p:stCondLst>
+                            <p:childTnLst>
+                              <p:set>
+                                <p:cBhvr>
+                                  <p:cTn id="10" dur="1" fill="hold">
+                                    <p:stCondLst>
+                                      <p:cond delay="0"/>
+                                    </p:stCondLst>
+                                  </p:cTn>
+                                  <p:tgtEl>
+                                    <p:spTgt spid="5"/>
+                                  </p:tgtEl>
+                                  <p:attrNameLst>
+                                    <p:attrName>style.visibility</p:attrName>
+                                  </p:attrNameLst>
+                                </p:cBhvr>
+                                <p:to>
+                                  <p:strVal val="visible"/>
+                                </p:to>
+                              </p:set>
+                              <p:animEffect transition="in" filter="dissolve">
+                                <p:cBhvr>
+                                  <p:cTn id="91" dur="690"/>
+                                  <p:tgtEl>
+                                    <p:spTgt spid="5"/>
+                                  </p:tgtEl>
+                                </p:cBhvr>
+                              </p:animEffect>
+                            </p:childTnLst>
+                          </p:cTn>
+                        </p:par>
+                        <p:par>
+                          <p:cTn id="11" dur="810" fill="hold" nodeType="afterEffect" grpId="0" presetID="25" presetClass="entr" presetSubtype="1">
+                            <p:stCondLst>
+                              <p:cond delay="390"/>
+                            </p:stCondLst>
+                            <p:childTnLst>
+                              <p:set>
+                                <p:cBhvr>
+                                  <p:cTn id="12" dur="1" fill="hold">
+                                    <p:stCondLst>
+                                      <p:cond delay="0"/>
+                                    </p:stCondLst>
+                                  </p:cTn>
+                                  <p:tgtEl>
+                                    <p:spTgt spid="6"/>
+                                  </p:tgtEl>
+                                  <p:attrNameLst>
+                                    <p:attrName>style.visibility</p:attrName>
+                                  </p:attrNameLst>
+                                </p:cBhvr>
+                                <p:to>
+                                  <p:strVal val="visible"/>
+                                </p:to>
+                              </p:set>
+                              <p:animEffect transition="in" filter="strips(downRight)">
+                                <p:cBhvr>
+                                  <p:cTn id="111" dur="810"/>
+                                  <p:tgtEl>
+                                    <p:spTgt spid="6"/>
+                                  </p:tgtEl>
+                                </p:cBhvr>
+                              </p:animEffect>
+                            </p:childTnLst>
+                          </p:cTn>
+                        </p:par>
+                        <p:par>
+                          <p:cTn id="13" dur="450" fill="hold" nodeType="afterEffect" grpId="0" presetID="45" presetClass="entr" presetSubtype="1">
+                            <p:stCondLst>
+                              <p:cond delay="520"/>
+                            </p:stCondLst>
+                            <p:childTnLst>
+                              <p:set>
+                                <p:cBhvr>
+                                  <p:cTn id="14" dur="1" fill="hold">
+                                    <p:stCondLst>
+                                      <p:cond delay="0"/>
+                                    </p:stCondLst>
+                                  </p:cTn>
+                                  <p:tgtEl>
+                                    <p:spTgt spid="9"/>
+                                  </p:tgtEl>
+                                  <p:attrNameLst>
+                                    <p:attrName>style.visibility</p:attrName>
+                                  </p:attrNameLst>
+                                </p:cBhvr>
+                                <p:to>
+                                  <p:strVal val="visible"/>
+                                </p:to>
+                              </p:set>
+                              <p:animEffect transition="in" filter="barn(inHorizontal)">
+                                <p:cBhvr>
+                                  <p:cTn id="131" dur="450"/>
+                                  <p:tgtEl>
+                                    <p:spTgt spid="9"/>
+                                  </p:tgtEl>
+                                </p:cBhvr>
+                              </p:animEffect>
+                            </p:childTnLst>
+                          </p:cTn>
+                        </p:par>
+                        <p:par>
+                          <p:cTn id="15" dur="570" fill="hold" nodeType="afterEffect" grpId="0" presetID="22" presetClass="entr" presetSubtype="8">
+                            <p:stCondLst>
+                              <p:cond delay="650"/>
+                            </p:stCondLst>
+                            <p:childTnLst>
+                              <p:set>
+                                <p:cBhvr>
+                                  <p:cTn id="16" dur="1" fill="hold">
+                                    <p:stCondLst>
+                                      <p:cond delay="0"/>
+                                    </p:stCondLst>
+                                  </p:cTn>
+                                  <p:tgtEl>
+                                    <p:spTgt spid="12"/>
+                                  </p:tgtEl>
+                                  <p:attrNameLst>
+                                    <p:attrName>style.visibility</p:attrName>
+                                  </p:attrNameLst>
+                                </p:cBhvr>
+                                <p:to>
+                                  <p:strVal val="visible"/>
+                                </p:to>
+                              </p:set>
+                              <p:animEffect transition="in" filter="wipe(left)">
+                                <p:cBhvr>
+                                  <p:cTn id="151" dur="570"/>
+                                  <p:tgtEl>
+                                    <p:spTgt spid="12"/>
+                                  </p:tgtEl>
+                                </p:cBhvr>
+                              </p:animEffect>
+                            </p:childTnLst>
+                          </p:cTn>
+                        </p:par>
+                        <p:par>
+                          <p:cTn id="17" dur="690" fill="hold" nodeType="afterEffect" grpId="0" presetID="37" presetClass="entr" presetSubtype="0">
+                            <p:stCondLst>
+                              <p:cond delay="780"/>
+                            </p:stCondLst>
+                            <p:childTnLst>
+                              <p:set>
+                                <p:cBhvr>
+                                  <p:cTn id="18" dur="1" fill="hold">
+                                    <p:stCondLst>
+                                      <p:cond delay="0"/>
+                                    </p:stCondLst>
+                                  </p:cTn>
+                                  <p:tgtEl>
+                                    <p:spTgt spid="15"/>
+                                  </p:tgtEl>
+                                  <p:attrNameLst>
+                                    <p:attrName>style.visibility</p:attrName>
+                                  </p:attrNameLst>
+                                </p:cBhvr>
+                                <p:to>
+                                  <p:strVal val="visible"/>
+                                </p:to>
+                              </p:set>
+                              <p:animEffect transition="in" filter="wedge">
+                                <p:cBhvr>
+                                  <p:cTn id="171" dur="690"/>
+                                  <p:tgtEl>
+                                    <p:spTgt spid="15"/>
+                                  </p:tgtEl>
+                                </p:cBhvr>
+                              </p:animEffect>
+                            </p:childTnLst>
+                          </p:cTn>
+                        </p:par>
+                        <p:par>
+                          <p:cTn id="19" dur="810" fill="hold" nodeType="afterEffect" grpId="0" presetID="52" presetClass="entr" presetSubtype="0">
+                            <p:stCondLst>
+                              <p:cond delay="910"/>
+                            </p:stCondLst>
+                            <p:childTnLst>
+                              <p:set>
+                                <p:cBhvr>
+                                  <p:cTn id="20" dur="1" fill="hold">
+                                    <p:stCondLst>
+                                      <p:cond delay="0"/>
+                                    </p:stCondLst>
+                                  </p:cTn>
+                                  <p:tgtEl>
+                                    <p:spTgt spid="7"/>
+                                  </p:tgtEl>
+                                  <p:attrNameLst>
+                                    <p:attrName>style.visibility</p:attrName>
+                                  </p:attrNameLst>
+                                </p:cBhvr>
+                                <p:to>
+                                  <p:strVal val="visible"/>
+                                </p:to>
+                              </p:set>
+                              <p:animEffect transition="in" filter="randombar(horizontal)">
+                                <p:cBhvr>
+                                  <p:cTn id="191" dur="810"/>
+                                  <p:tgtEl>
+                                    <p:spTgt spid="7"/>
+                                  </p:tgtEl>
+                                </p:cBhvr>
+                              </p:animEffect>
+                            </p:childTnLst>
+                          </p:cTn>
+                        </p:par>
+                        <p:par>
+                          <p:cTn id="21" dur="450" fill="hold" nodeType="afterEffect" grpId="0" presetID="21" presetClass="entr" presetSubtype="1">
+                            <p:stCondLst>
+                              <p:cond delay="1040"/>
+                            </p:stCondLst>
+                            <p:childTnLst>
+                              <p:set>
+                                <p:cBhvr>
+                                  <p:cTn id="22" dur="1" fill="hold">
+                                    <p:stCondLst>
+                                      <p:cond delay="0"/>
+                                    </p:stCondLst>
+                                  </p:cTn>
+                                  <p:tgtEl>
+                                    <p:spTgt spid="10"/>
+                                  </p:tgtEl>
+                                  <p:attrNameLst>
+                                    <p:attrName>style.visibility</p:attrName>
+                                  </p:attrNameLst>
+                                </p:cBhvr>
+                                <p:to>
+                                  <p:strVal val="visible"/>
+                                </p:to>
+                              </p:set>
+                              <p:animEffect transition="in" filter="wheel(1)">
+                                <p:cBhvr>
+                                  <p:cTn id="211" dur="450"/>
+                                  <p:tgtEl>
+                                    <p:spTgt spid="10"/>
+                                  </p:tgtEl>
+                                </p:cBhvr>
+                              </p:animEffect>
+                            </p:childTnLst>
+                          </p:cTn>
+                        </p:par>
+                        <p:par>
+                          <p:cTn id="23" dur="570" fill="hold" nodeType="afterEffect" grpId="0" presetID="22" presetClass="entr" presetSubtype="4">
+                            <p:stCondLst>
+                              <p:cond delay="1170"/>
+                            </p:stCondLst>
+                            <p:childTnLst>
+                              <p:set>
+                                <p:cBhvr>
+                                  <p:cTn id="24" dur="1" fill="hold">
+                                    <p:stCondLst>
+                                      <p:cond delay="0"/>
+                                    </p:stCondLst>
+                                  </p:cTn>
+                                  <p:tgtEl>
+                                    <p:spTgt spid="13"/>
+                                  </p:tgtEl>
+                                  <p:attrNameLst>
+                                    <p:attrName>style.visibility</p:attrName>
+                                  </p:attrNameLst>
+                                </p:cBhvr>
+                                <p:to>
+                                  <p:strVal val="visible"/>
+                                </p:to>
+                              </p:set>
+                              <p:animEffect transition="in" filter="wipe(down)">
+                                <p:cBhvr>
+                                  <p:cTn id="231" dur="570"/>
+                                  <p:tgtEl>
+                                    <p:spTgt spid="13"/>
+                                  </p:tgtEl>
+                                </p:cBhvr>
+                              </p:animEffect>
+                            </p:childTnLst>
+                          </p:cTn>
+                        </p:par>
+                        <p:par>
+                          <p:cTn id="25" dur="690" fill="hold" nodeType="afterEffect" grpId="0" presetID="9" presetClass="entr" presetSubtype="0">
+                            <p:stCondLst>
+                              <p:cond delay="1300"/>
+                            </p:stCondLst>
+                            <p:childTnLst>
+                              <p:set>
+                                <p:cBhvr>
+                                  <p:cTn id="26" dur="1" fill="hold">
+                                    <p:stCondLst>
+                                      <p:cond delay="0"/>
+                                    </p:stCondLst>
+                                  </p:cTn>
+                                  <p:tgtEl>
+                                    <p:spTgt spid="16"/>
+                                  </p:tgtEl>
+                                  <p:attrNameLst>
+                                    <p:attrName>style.visibility</p:attrName>
+                                  </p:attrNameLst>
+                                </p:cBhvr>
+                                <p:to>
+                                  <p:strVal val="visible"/>
+                                </p:to>
+                              </p:set>
+                              <p:animEffect transition="in" filter="fade">
+                                <p:cBhvr>
+                                  <p:cTn id="251" dur="690"/>
+                                  <p:tgtEl>
+                                    <p:spTgt spid="16"/>
+                                  </p:tgtEl>
+                                </p:cBhvr>
+                              </p:animEffect>
+                            </p:childTnLst>
+                          </p:cTn>
+                        </p:par>
+                        <p:par>
+                          <p:cTn id="27" dur="810" fill="hold" nodeType="afterEffect" grpId="0" presetID="22" presetClass="entr" presetSubtype="2">
+                            <p:stCondLst>
+                              <p:cond delay="1430"/>
+                            </p:stCondLst>
+                            <p:childTnLst>
+                              <p:set>
+                                <p:cBhvr>
+                                  <p:cTn id="28" dur="1" fill="hold">
+                                    <p:stCondLst>
+                                      <p:cond delay="0"/>
+                                    </p:stCondLst>
+                                  </p:cTn>
+                                  <p:tgtEl>
+                                    <p:spTgt spid="8"/>
+                                  </p:tgtEl>
+                                  <p:attrNameLst>
+                                    <p:attrName>style.visibility</p:attrName>
+                                  </p:attrNameLst>
+                                </p:cBhvr>
+                                <p:to>
+                                  <p:strVal val="visible"/>
+                                </p:to>
+                              </p:set>
+                              <p:animEffect transition="in" filter="wipe(right)">
+                                <p:cBhvr>
+                                  <p:cTn id="271" dur="810"/>
+                                  <p:tgtEl>
+                                    <p:spTgt spid="8"/>
+                                  </p:tgtEl>
+                                </p:cBhvr>
+                              </p:animEffect>
+                            </p:childTnLst>
+                          </p:cTn>
+                        </p:par>
+                        <p:par>
+                          <p:cTn id="29" dur="450" fill="hold" nodeType="afterEffect" grpId="0" presetID="18" presetClass="entr" presetSubtype="12">
+                            <p:stCondLst>
+                              <p:cond delay="1560"/>
+                            </p:stCondLst>
+                            <p:childTnLst>
+                              <p:set>
+                                <p:cBhvr>
+                                  <p:cTn id="30" dur="1" fill="hold">
+                                    <p:stCondLst>
+                                      <p:cond delay="0"/>
+                                    </p:stCondLst>
+                                  </p:cTn>
+                                  <p:tgtEl>
+                                    <p:spTgt spid="11"/>
+                                  </p:tgtEl>
+                                  <p:attrNameLst>
+                                    <p:attrName>style.visibility</p:attrName>
+                                  </p:attrNameLst>
+                                </p:cBhvr>
+                                <p:to>
+                                  <p:strVal val="visible"/>
+                                </p:to>
+                              </p:set>
+                              <p:animEffect transition="in" filter="circle(in)">
+                                <p:cBhvr>
+                                  <p:cTn id="291" dur="450"/>
+                                  <p:tgtEl>
+                                    <p:spTgt spid="11"/>
+                                  </p:tgtEl>
+                                </p:cBhvr>
+                              </p:animEffect>
+                            </p:childTnLst>
+                          </p:cTn>
+                        </p:par>
+                        <p:par>
+                          <p:cTn id="31" dur="570" fill="hold" nodeType="afterEffect" grpId="0" presetID="22" presetClass="entr" presetSubtype="1">
+                            <p:stCondLst>
+                              <p:cond delay="1690"/>
+                            </p:stCondLst>
+                            <p:childTnLst>
+                              <p:set>
+                                <p:cBhvr>
+                                  <p:cTn id="32" dur="1" fill="hold">
+                                    <p:stCondLst>
+                                      <p:cond delay="0"/>
+                                    </p:stCondLst>
+                                  </p:cTn>
+                                  <p:tgtEl>
+                                    <p:spTgt spid="14"/>
+                                  </p:tgtEl>
+                                  <p:attrNameLst>
+                                    <p:attrName>style.visibility</p:attrName>
+                                  </p:attrNameLst>
+                                </p:cBhvr>
+                                <p:to>
+                                  <p:strVal val="visible"/>
+                                </p:to>
+                              </p:set>
+                              <p:animEffect transition="in" filter="wipe(up)">
+                                <p:cBhvr>
+                                  <p:cTn id="311" dur="570"/>
+                                  <p:tgtEl>
+                                    <p:spTgt spid="14"/>
+                                  </p:tgtEl>
+                                </p:cBhvr>
+                              </p:animEffect>
+                            </p:childTnLst>
+                          </p:cTn>
+                        </p:par>
+                      </p:childTnLst>
+                    </p:cTn>
+                  </p:par>
+                </p:childTnLst>
+              </p:cTn>
+              <p:prevCondLst>
+                <p:cond evt="onPrev" delay="0">
+                  <p:tgtEl>
+                    <p:sldTgt/>
+                  </p:tgtEl>
+                </p:cond>
+              </p:prevCondLst>
+              <p:nextCondLst>
+                <p:cond evt="onNext" delay="0">
+                  <p:tgtEl>
+                    <p:sldTgt/>
+                  </p:tgtEl>
+                </p:cond>
+              </p:nextCondLst>
+            </p:seq>
+          </p:childTnLst>
+        </p:cTn>
+      </p:par>
+    </p:tnLst>
+  </p:timing>
 </p:sld>
 </file>
 
@@ -12202,8 +17636,467 @@
     <a:masterClrMapping/>
   </p:clrMapOvr>
   <p:transition spd="med">
-    <p:push/>
+    <p:dissolve/>
   </p:transition>
+  <p:timing>
+    <p:tnLst>
+      <p:par>
+        <p:cTn id="1" dur="indefinite" restart="never" nodeType="tmRoot">
+          <p:childTnLst>
+            <p:seq concurrent="1" nextAc="seek">
+              <p:cTn id="2" dur="indefinite" nodeType="mainSeq">
+                <p:childTnLst>
+                  <p:par>
+                    <p:cTn id="3" fill="hold">
+                      <p:stCondLst>
+                        <p:cond delay="indefinite"/>
+                      </p:stCondLst>
+                      <p:childTnLst>
+                        <p:par>
+                          <p:cTn id="5" dur="570" fill="hold" nodeType="clickEffect" grpId="0" presetID="21" presetClass="entr" presetSubtype="2">
+                            <p:stCondLst>
+                              <p:cond delay="0"/>
+                            </p:stCondLst>
+                            <p:childTnLst>
+                              <p:set>
+                                <p:cBhvr>
+                                  <p:cTn id="6" dur="1" fill="hold">
+                                    <p:stCondLst>
+                                      <p:cond delay="0"/>
+                                    </p:stCondLst>
+                                  </p:cTn>
+                                  <p:tgtEl>
+                                    <p:spTgt spid="3"/>
+                                  </p:tgtEl>
+                                  <p:attrNameLst>
+                                    <p:attrName>style.visibility</p:attrName>
+                                  </p:attrNameLst>
+                                </p:cBhvr>
+                                <p:to>
+                                  <p:strVal val="visible"/>
+                                </p:to>
+                              </p:set>
+                              <p:animEffect transition="in" filter="wheel(2)">
+                                <p:cBhvr>
+                                  <p:cTn id="51" dur="570"/>
+                                  <p:tgtEl>
+                                    <p:spTgt spid="3"/>
+                                  </p:tgtEl>
+                                </p:cBhvr>
+                              </p:animEffect>
+                            </p:childTnLst>
+                          </p:cTn>
+                        </p:par>
+                        <p:par>
+                          <p:cTn id="7" dur="690" fill="hold" nodeType="afterEffect" grpId="0" presetID="10" presetClass="entr" presetSubtype="0">
+                            <p:stCondLst>
+                              <p:cond delay="130"/>
+                            </p:stCondLst>
+                            <p:childTnLst>
+                              <p:set>
+                                <p:cBhvr>
+                                  <p:cTn id="8" dur="1" fill="hold">
+                                    <p:stCondLst>
+                                      <p:cond delay="0"/>
+                                    </p:stCondLst>
+                                  </p:cTn>
+                                  <p:tgtEl>
+                                    <p:spTgt spid="4"/>
+                                  </p:tgtEl>
+                                  <p:attrNameLst>
+                                    <p:attrName>style.visibility</p:attrName>
+                                  </p:attrNameLst>
+                                </p:cBhvr>
+                                <p:to>
+                                  <p:strVal val="visible"/>
+                                </p:to>
+                              </p:set>
+                              <p:animEffect transition="in" filter="dissolve">
+                                <p:cBhvr>
+                                  <p:cTn id="71" dur="690"/>
+                                  <p:tgtEl>
+                                    <p:spTgt spid="4"/>
+                                  </p:tgtEl>
+                                </p:cBhvr>
+                              </p:animEffect>
+                            </p:childTnLst>
+                          </p:cTn>
+                        </p:par>
+                        <p:par>
+                          <p:cTn id="9" dur="810" fill="hold" nodeType="afterEffect" grpId="0" presetID="25" presetClass="entr" presetSubtype="1">
+                            <p:stCondLst>
+                              <p:cond delay="260"/>
+                            </p:stCondLst>
+                            <p:childTnLst>
+                              <p:set>
+                                <p:cBhvr>
+                                  <p:cTn id="10" dur="1" fill="hold">
+                                    <p:stCondLst>
+                                      <p:cond delay="0"/>
+                                    </p:stCondLst>
+                                  </p:cTn>
+                                  <p:tgtEl>
+                                    <p:spTgt spid="5"/>
+                                  </p:tgtEl>
+                                  <p:attrNameLst>
+                                    <p:attrName>style.visibility</p:attrName>
+                                  </p:attrNameLst>
+                                </p:cBhvr>
+                                <p:to>
+                                  <p:strVal val="visible"/>
+                                </p:to>
+                              </p:set>
+                              <p:animEffect transition="in" filter="strips(downRight)">
+                                <p:cBhvr>
+                                  <p:cTn id="91" dur="810"/>
+                                  <p:tgtEl>
+                                    <p:spTgt spid="5"/>
+                                  </p:tgtEl>
+                                </p:cBhvr>
+                              </p:animEffect>
+                            </p:childTnLst>
+                          </p:cTn>
+                        </p:par>
+                        <p:par>
+                          <p:cTn id="11" dur="450" fill="hold" nodeType="afterEffect" grpId="0" presetID="45" presetClass="entr" presetSubtype="1">
+                            <p:stCondLst>
+                              <p:cond delay="390"/>
+                            </p:stCondLst>
+                            <p:childTnLst>
+                              <p:set>
+                                <p:cBhvr>
+                                  <p:cTn id="12" dur="1" fill="hold">
+                                    <p:stCondLst>
+                                      <p:cond delay="0"/>
+                                    </p:stCondLst>
+                                  </p:cTn>
+                                  <p:tgtEl>
+                                    <p:spTgt spid="6"/>
+                                  </p:tgtEl>
+                                  <p:attrNameLst>
+                                    <p:attrName>style.visibility</p:attrName>
+                                  </p:attrNameLst>
+                                </p:cBhvr>
+                                <p:to>
+                                  <p:strVal val="visible"/>
+                                </p:to>
+                              </p:set>
+                              <p:animEffect transition="in" filter="barn(inHorizontal)">
+                                <p:cBhvr>
+                                  <p:cTn id="111" dur="450"/>
+                                  <p:tgtEl>
+                                    <p:spTgt spid="6"/>
+                                  </p:tgtEl>
+                                </p:cBhvr>
+                              </p:animEffect>
+                            </p:childTnLst>
+                          </p:cTn>
+                        </p:par>
+                        <p:par>
+                          <p:cTn id="13" dur="570" fill="hold" nodeType="afterEffect" grpId="0" presetID="22" presetClass="entr" presetSubtype="8">
+                            <p:stCondLst>
+                              <p:cond delay="520"/>
+                            </p:stCondLst>
+                            <p:childTnLst>
+                              <p:set>
+                                <p:cBhvr>
+                                  <p:cTn id="14" dur="1" fill="hold">
+                                    <p:stCondLst>
+                                      <p:cond delay="0"/>
+                                    </p:stCondLst>
+                                  </p:cTn>
+                                  <p:tgtEl>
+                                    <p:spTgt spid="7"/>
+                                  </p:tgtEl>
+                                  <p:attrNameLst>
+                                    <p:attrName>style.visibility</p:attrName>
+                                  </p:attrNameLst>
+                                </p:cBhvr>
+                                <p:to>
+                                  <p:strVal val="visible"/>
+                                </p:to>
+                              </p:set>
+                              <p:animEffect transition="in" filter="wipe(left)">
+                                <p:cBhvr>
+                                  <p:cTn id="131" dur="570"/>
+                                  <p:tgtEl>
+                                    <p:spTgt spid="7"/>
+                                  </p:tgtEl>
+                                </p:cBhvr>
+                              </p:animEffect>
+                            </p:childTnLst>
+                          </p:cTn>
+                        </p:par>
+                        <p:par>
+                          <p:cTn id="15" dur="690" fill="hold" nodeType="afterEffect" grpId="0" presetID="37" presetClass="entr" presetSubtype="0">
+                            <p:stCondLst>
+                              <p:cond delay="650"/>
+                            </p:stCondLst>
+                            <p:childTnLst>
+                              <p:set>
+                                <p:cBhvr>
+                                  <p:cTn id="16" dur="1" fill="hold">
+                                    <p:stCondLst>
+                                      <p:cond delay="0"/>
+                                    </p:stCondLst>
+                                  </p:cTn>
+                                  <p:tgtEl>
+                                    <p:spTgt spid="8"/>
+                                  </p:tgtEl>
+                                  <p:attrNameLst>
+                                    <p:attrName>style.visibility</p:attrName>
+                                  </p:attrNameLst>
+                                </p:cBhvr>
+                                <p:to>
+                                  <p:strVal val="visible"/>
+                                </p:to>
+                              </p:set>
+                              <p:animEffect transition="in" filter="wedge">
+                                <p:cBhvr>
+                                  <p:cTn id="151" dur="690"/>
+                                  <p:tgtEl>
+                                    <p:spTgt spid="8"/>
+                                  </p:tgtEl>
+                                </p:cBhvr>
+                              </p:animEffect>
+                            </p:childTnLst>
+                          </p:cTn>
+                        </p:par>
+                        <p:par>
+                          <p:cTn id="17" dur="810" fill="hold" nodeType="afterEffect" grpId="0" presetID="52" presetClass="entr" presetSubtype="0">
+                            <p:stCondLst>
+                              <p:cond delay="780"/>
+                            </p:stCondLst>
+                            <p:childTnLst>
+                              <p:set>
+                                <p:cBhvr>
+                                  <p:cTn id="18" dur="1" fill="hold">
+                                    <p:stCondLst>
+                                      <p:cond delay="0"/>
+                                    </p:stCondLst>
+                                  </p:cTn>
+                                  <p:tgtEl>
+                                    <p:spTgt spid="9"/>
+                                  </p:tgtEl>
+                                  <p:attrNameLst>
+                                    <p:attrName>style.visibility</p:attrName>
+                                  </p:attrNameLst>
+                                </p:cBhvr>
+                                <p:to>
+                                  <p:strVal val="visible"/>
+                                </p:to>
+                              </p:set>
+                              <p:animEffect transition="in" filter="randombar(horizontal)">
+                                <p:cBhvr>
+                                  <p:cTn id="171" dur="810"/>
+                                  <p:tgtEl>
+                                    <p:spTgt spid="9"/>
+                                  </p:tgtEl>
+                                </p:cBhvr>
+                              </p:animEffect>
+                            </p:childTnLst>
+                          </p:cTn>
+                        </p:par>
+                        <p:par>
+                          <p:cTn id="19" dur="450" fill="hold" nodeType="afterEffect" grpId="0" presetID="21" presetClass="entr" presetSubtype="1">
+                            <p:stCondLst>
+                              <p:cond delay="910"/>
+                            </p:stCondLst>
+                            <p:childTnLst>
+                              <p:set>
+                                <p:cBhvr>
+                                  <p:cTn id="20" dur="1" fill="hold">
+                                    <p:stCondLst>
+                                      <p:cond delay="0"/>
+                                    </p:stCondLst>
+                                  </p:cTn>
+                                  <p:tgtEl>
+                                    <p:spTgt spid="10"/>
+                                  </p:tgtEl>
+                                  <p:attrNameLst>
+                                    <p:attrName>style.visibility</p:attrName>
+                                  </p:attrNameLst>
+                                </p:cBhvr>
+                                <p:to>
+                                  <p:strVal val="visible"/>
+                                </p:to>
+                              </p:set>
+                              <p:animEffect transition="in" filter="wheel(1)">
+                                <p:cBhvr>
+                                  <p:cTn id="191" dur="450"/>
+                                  <p:tgtEl>
+                                    <p:spTgt spid="10"/>
+                                  </p:tgtEl>
+                                </p:cBhvr>
+                              </p:animEffect>
+                            </p:childTnLst>
+                          </p:cTn>
+                        </p:par>
+                        <p:par>
+                          <p:cTn id="21" dur="570" fill="hold" nodeType="afterEffect" grpId="0" presetID="22" presetClass="entr" presetSubtype="4">
+                            <p:stCondLst>
+                              <p:cond delay="1040"/>
+                            </p:stCondLst>
+                            <p:childTnLst>
+                              <p:set>
+                                <p:cBhvr>
+                                  <p:cTn id="22" dur="1" fill="hold">
+                                    <p:stCondLst>
+                                      <p:cond delay="0"/>
+                                    </p:stCondLst>
+                                  </p:cTn>
+                                  <p:tgtEl>
+                                    <p:spTgt spid="11"/>
+                                  </p:tgtEl>
+                                  <p:attrNameLst>
+                                    <p:attrName>style.visibility</p:attrName>
+                                  </p:attrNameLst>
+                                </p:cBhvr>
+                                <p:to>
+                                  <p:strVal val="visible"/>
+                                </p:to>
+                              </p:set>
+                              <p:animEffect transition="in" filter="wipe(down)">
+                                <p:cBhvr>
+                                  <p:cTn id="211" dur="570"/>
+                                  <p:tgtEl>
+                                    <p:spTgt spid="11"/>
+                                  </p:tgtEl>
+                                </p:cBhvr>
+                              </p:animEffect>
+                            </p:childTnLst>
+                          </p:cTn>
+                        </p:par>
+                        <p:par>
+                          <p:cTn id="23" dur="690" fill="hold" nodeType="afterEffect" grpId="0" presetID="9" presetClass="entr" presetSubtype="0">
+                            <p:stCondLst>
+                              <p:cond delay="1170"/>
+                            </p:stCondLst>
+                            <p:childTnLst>
+                              <p:set>
+                                <p:cBhvr>
+                                  <p:cTn id="24" dur="1" fill="hold">
+                                    <p:stCondLst>
+                                      <p:cond delay="0"/>
+                                    </p:stCondLst>
+                                  </p:cTn>
+                                  <p:tgtEl>
+                                    <p:spTgt spid="12"/>
+                                  </p:tgtEl>
+                                  <p:attrNameLst>
+                                    <p:attrName>style.visibility</p:attrName>
+                                  </p:attrNameLst>
+                                </p:cBhvr>
+                                <p:to>
+                                  <p:strVal val="visible"/>
+                                </p:to>
+                              </p:set>
+                              <p:animEffect transition="in" filter="fade">
+                                <p:cBhvr>
+                                  <p:cTn id="231" dur="690"/>
+                                  <p:tgtEl>
+                                    <p:spTgt spid="12"/>
+                                  </p:tgtEl>
+                                </p:cBhvr>
+                              </p:animEffect>
+                            </p:childTnLst>
+                          </p:cTn>
+                        </p:par>
+                        <p:par>
+                          <p:cTn id="25" dur="810" fill="hold" nodeType="afterEffect" grpId="0" presetID="22" presetClass="entr" presetSubtype="2">
+                            <p:stCondLst>
+                              <p:cond delay="1300"/>
+                            </p:stCondLst>
+                            <p:childTnLst>
+                              <p:set>
+                                <p:cBhvr>
+                                  <p:cTn id="26" dur="1" fill="hold">
+                                    <p:stCondLst>
+                                      <p:cond delay="0"/>
+                                    </p:stCondLst>
+                                  </p:cTn>
+                                  <p:tgtEl>
+                                    <p:spTgt spid="13"/>
+                                  </p:tgtEl>
+                                  <p:attrNameLst>
+                                    <p:attrName>style.visibility</p:attrName>
+                                  </p:attrNameLst>
+                                </p:cBhvr>
+                                <p:to>
+                                  <p:strVal val="visible"/>
+                                </p:to>
+                              </p:set>
+                              <p:animEffect transition="in" filter="wipe(right)">
+                                <p:cBhvr>
+                                  <p:cTn id="251" dur="810"/>
+                                  <p:tgtEl>
+                                    <p:spTgt spid="13"/>
+                                  </p:tgtEl>
+                                </p:cBhvr>
+                              </p:animEffect>
+                            </p:childTnLst>
+                          </p:cTn>
+                        </p:par>
+                        <p:par>
+                          <p:cTn id="27" dur="450" fill="hold" nodeType="afterEffect" grpId="0" presetID="18" presetClass="entr" presetSubtype="12">
+                            <p:stCondLst>
+                              <p:cond delay="1430"/>
+                            </p:stCondLst>
+                            <p:childTnLst>
+                              <p:set>
+                                <p:cBhvr>
+                                  <p:cTn id="28" dur="1" fill="hold">
+                                    <p:stCondLst>
+                                      <p:cond delay="0"/>
+                                    </p:stCondLst>
+                                  </p:cTn>
+                                  <p:tgtEl>
+                                    <p:spTgt spid="14"/>
+                                  </p:tgtEl>
+                                  <p:attrNameLst>
+                                    <p:attrName>style.visibility</p:attrName>
+                                  </p:attrNameLst>
+                                </p:cBhvr>
+                                <p:to>
+                                  <p:strVal val="visible"/>
+                                </p:to>
+                              </p:set>
+                              <p:animEffect transition="in" filter="circle(in)">
+                                <p:cBhvr>
+                                  <p:cTn id="271" dur="450"/>
+                                  <p:tgtEl>
+                                    <p:spTgt spid="14"/>
+                                  </p:tgtEl>
+                                </p:cBhvr>
+                              </p:animEffect>
+                            </p:childTnLst>
+                          </p:cTn>
+                        </p:par>
+                      </p:childTnLst>
+                    </p:cTn>
+                  </p:par>
+                </p:childTnLst>
+              </p:cTn>
+              <p:prevCondLst>
+                <p:cond evt="onPrev" delay="0">
+                  <p:tgtEl>
+                    <p:sldTgt/>
+                  </p:tgtEl>
+                </p:cond>
+              </p:prevCondLst>
+              <p:nextCondLst>
+                <p:cond evt="onNext" delay="0">
+                  <p:tgtEl>
+                    <p:sldTgt/>
+                  </p:tgtEl>
+                </p:cond>
+              </p:nextCondLst>
+            </p:seq>
+          </p:childTnLst>
+        </p:cTn>
+      </p:par>
+    </p:tnLst>
+  </p:timing>
 </p:sld>
 </file>
 
@@ -13031,8 +18924,537 @@
     <a:masterClrMapping/>
   </p:clrMapOvr>
   <p:transition spd="med">
-    <p:push/>
+    <p:zoom dir="in"/>
   </p:transition>
+  <p:timing>
+    <p:tnLst>
+      <p:par>
+        <p:cTn id="1" dur="indefinite" restart="never" nodeType="tmRoot">
+          <p:childTnLst>
+            <p:seq concurrent="1" nextAc="seek">
+              <p:cTn id="2" dur="indefinite" nodeType="mainSeq">
+                <p:childTnLst>
+                  <p:par>
+                    <p:cTn id="3" fill="hold">
+                      <p:stCondLst>
+                        <p:cond delay="indefinite"/>
+                      </p:stCondLst>
+                      <p:childTnLst>
+                        <p:par>
+                          <p:cTn id="5" dur="690" fill="hold" nodeType="clickEffect" grpId="0" presetID="10" presetClass="entr" presetSubtype="0">
+                            <p:stCondLst>
+                              <p:cond delay="0"/>
+                            </p:stCondLst>
+                            <p:childTnLst>
+                              <p:set>
+                                <p:cBhvr>
+                                  <p:cTn id="6" dur="1" fill="hold">
+                                    <p:stCondLst>
+                                      <p:cond delay="0"/>
+                                    </p:stCondLst>
+                                  </p:cTn>
+                                  <p:tgtEl>
+                                    <p:spTgt spid="3"/>
+                                  </p:tgtEl>
+                                  <p:attrNameLst>
+                                    <p:attrName>style.visibility</p:attrName>
+                                  </p:attrNameLst>
+                                </p:cBhvr>
+                                <p:to>
+                                  <p:strVal val="visible"/>
+                                </p:to>
+                              </p:set>
+                              <p:animEffect transition="in" filter="dissolve">
+                                <p:cBhvr>
+                                  <p:cTn id="51" dur="690"/>
+                                  <p:tgtEl>
+                                    <p:spTgt spid="3"/>
+                                  </p:tgtEl>
+                                </p:cBhvr>
+                              </p:animEffect>
+                            </p:childTnLst>
+                          </p:cTn>
+                        </p:par>
+                        <p:par>
+                          <p:cTn id="7" dur="810" fill="hold" nodeType="afterEffect" grpId="0" presetID="25" presetClass="entr" presetSubtype="1">
+                            <p:stCondLst>
+                              <p:cond delay="130"/>
+                            </p:stCondLst>
+                            <p:childTnLst>
+                              <p:set>
+                                <p:cBhvr>
+                                  <p:cTn id="8" dur="1" fill="hold">
+                                    <p:stCondLst>
+                                      <p:cond delay="0"/>
+                                    </p:stCondLst>
+                                  </p:cTn>
+                                  <p:tgtEl>
+                                    <p:spTgt spid="4"/>
+                                  </p:tgtEl>
+                                  <p:attrNameLst>
+                                    <p:attrName>style.visibility</p:attrName>
+                                  </p:attrNameLst>
+                                </p:cBhvr>
+                                <p:to>
+                                  <p:strVal val="visible"/>
+                                </p:to>
+                              </p:set>
+                              <p:animEffect transition="in" filter="strips(downRight)">
+                                <p:cBhvr>
+                                  <p:cTn id="71" dur="810"/>
+                                  <p:tgtEl>
+                                    <p:spTgt spid="4"/>
+                                  </p:tgtEl>
+                                </p:cBhvr>
+                              </p:animEffect>
+                            </p:childTnLst>
+                          </p:cTn>
+                        </p:par>
+                        <p:par>
+                          <p:cTn id="9" dur="450" fill="hold" nodeType="afterEffect" grpId="0" presetID="45" presetClass="entr" presetSubtype="1">
+                            <p:stCondLst>
+                              <p:cond delay="260"/>
+                            </p:stCondLst>
+                            <p:childTnLst>
+                              <p:set>
+                                <p:cBhvr>
+                                  <p:cTn id="10" dur="1" fill="hold">
+                                    <p:stCondLst>
+                                      <p:cond delay="0"/>
+                                    </p:stCondLst>
+                                  </p:cTn>
+                                  <p:tgtEl>
+                                    <p:spTgt spid="5"/>
+                                  </p:tgtEl>
+                                  <p:attrNameLst>
+                                    <p:attrName>style.visibility</p:attrName>
+                                  </p:attrNameLst>
+                                </p:cBhvr>
+                                <p:to>
+                                  <p:strVal val="visible"/>
+                                </p:to>
+                              </p:set>
+                              <p:animEffect transition="in" filter="barn(inHorizontal)">
+                                <p:cBhvr>
+                                  <p:cTn id="91" dur="450"/>
+                                  <p:tgtEl>
+                                    <p:spTgt spid="5"/>
+                                  </p:tgtEl>
+                                </p:cBhvr>
+                              </p:animEffect>
+                            </p:childTnLst>
+                          </p:cTn>
+                        </p:par>
+                        <p:par>
+                          <p:cTn id="11" dur="570" fill="hold" nodeType="afterEffect" grpId="0" presetID="22" presetClass="entr" presetSubtype="8">
+                            <p:stCondLst>
+                              <p:cond delay="390"/>
+                            </p:stCondLst>
+                            <p:childTnLst>
+                              <p:set>
+                                <p:cBhvr>
+                                  <p:cTn id="12" dur="1" fill="hold">
+                                    <p:stCondLst>
+                                      <p:cond delay="0"/>
+                                    </p:stCondLst>
+                                  </p:cTn>
+                                  <p:tgtEl>
+                                    <p:spTgt spid="6"/>
+                                  </p:tgtEl>
+                                  <p:attrNameLst>
+                                    <p:attrName>style.visibility</p:attrName>
+                                  </p:attrNameLst>
+                                </p:cBhvr>
+                                <p:to>
+                                  <p:strVal val="visible"/>
+                                </p:to>
+                              </p:set>
+                              <p:animEffect transition="in" filter="wipe(left)">
+                                <p:cBhvr>
+                                  <p:cTn id="111" dur="570"/>
+                                  <p:tgtEl>
+                                    <p:spTgt spid="6"/>
+                                  </p:tgtEl>
+                                </p:cBhvr>
+                              </p:animEffect>
+                            </p:childTnLst>
+                          </p:cTn>
+                        </p:par>
+                        <p:par>
+                          <p:cTn id="13" dur="690" fill="hold" nodeType="afterEffect" grpId="0" presetID="37" presetClass="entr" presetSubtype="0">
+                            <p:stCondLst>
+                              <p:cond delay="520"/>
+                            </p:stCondLst>
+                            <p:childTnLst>
+                              <p:set>
+                                <p:cBhvr>
+                                  <p:cTn id="14" dur="1" fill="hold">
+                                    <p:stCondLst>
+                                      <p:cond delay="0"/>
+                                    </p:stCondLst>
+                                  </p:cTn>
+                                  <p:tgtEl>
+                                    <p:spTgt spid="8"/>
+                                  </p:tgtEl>
+                                  <p:attrNameLst>
+                                    <p:attrName>style.visibility</p:attrName>
+                                  </p:attrNameLst>
+                                </p:cBhvr>
+                                <p:to>
+                                  <p:strVal val="visible"/>
+                                </p:to>
+                              </p:set>
+                              <p:animEffect transition="in" filter="wedge">
+                                <p:cBhvr>
+                                  <p:cTn id="131" dur="690"/>
+                                  <p:tgtEl>
+                                    <p:spTgt spid="8"/>
+                                  </p:tgtEl>
+                                </p:cBhvr>
+                              </p:animEffect>
+                            </p:childTnLst>
+                          </p:cTn>
+                        </p:par>
+                        <p:par>
+                          <p:cTn id="15" dur="810" fill="hold" nodeType="afterEffect" grpId="0" presetID="52" presetClass="entr" presetSubtype="0">
+                            <p:stCondLst>
+                              <p:cond delay="650"/>
+                            </p:stCondLst>
+                            <p:childTnLst>
+                              <p:set>
+                                <p:cBhvr>
+                                  <p:cTn id="16" dur="1" fill="hold">
+                                    <p:stCondLst>
+                                      <p:cond delay="0"/>
+                                    </p:stCondLst>
+                                  </p:cTn>
+                                  <p:tgtEl>
+                                    <p:spTgt spid="7"/>
+                                  </p:tgtEl>
+                                  <p:attrNameLst>
+                                    <p:attrName>style.visibility</p:attrName>
+                                  </p:attrNameLst>
+                                </p:cBhvr>
+                                <p:to>
+                                  <p:strVal val="visible"/>
+                                </p:to>
+                              </p:set>
+                              <p:animEffect transition="in" filter="randombar(horizontal)">
+                                <p:cBhvr>
+                                  <p:cTn id="151" dur="810"/>
+                                  <p:tgtEl>
+                                    <p:spTgt spid="7"/>
+                                  </p:tgtEl>
+                                </p:cBhvr>
+                              </p:animEffect>
+                            </p:childTnLst>
+                          </p:cTn>
+                        </p:par>
+                        <p:par>
+                          <p:cTn id="17" dur="450" fill="hold" nodeType="afterEffect" grpId="0" presetID="21" presetClass="entr" presetSubtype="1">
+                            <p:stCondLst>
+                              <p:cond delay="780"/>
+                            </p:stCondLst>
+                            <p:childTnLst>
+                              <p:set>
+                                <p:cBhvr>
+                                  <p:cTn id="18" dur="1" fill="hold">
+                                    <p:stCondLst>
+                                      <p:cond delay="0"/>
+                                    </p:stCondLst>
+                                  </p:cTn>
+                                  <p:tgtEl>
+                                    <p:spTgt spid="9"/>
+                                  </p:tgtEl>
+                                  <p:attrNameLst>
+                                    <p:attrName>style.visibility</p:attrName>
+                                  </p:attrNameLst>
+                                </p:cBhvr>
+                                <p:to>
+                                  <p:strVal val="visible"/>
+                                </p:to>
+                              </p:set>
+                              <p:animEffect transition="in" filter="wheel(1)">
+                                <p:cBhvr>
+                                  <p:cTn id="171" dur="450"/>
+                                  <p:tgtEl>
+                                    <p:spTgt spid="9"/>
+                                  </p:tgtEl>
+                                </p:cBhvr>
+                              </p:animEffect>
+                            </p:childTnLst>
+                          </p:cTn>
+                        </p:par>
+                        <p:par>
+                          <p:cTn id="19" dur="570" fill="hold" nodeType="afterEffect" grpId="0" presetID="22" presetClass="entr" presetSubtype="4">
+                            <p:stCondLst>
+                              <p:cond delay="910"/>
+                            </p:stCondLst>
+                            <p:childTnLst>
+                              <p:set>
+                                <p:cBhvr>
+                                  <p:cTn id="20" dur="1" fill="hold">
+                                    <p:stCondLst>
+                                      <p:cond delay="0"/>
+                                    </p:stCondLst>
+                                  </p:cTn>
+                                  <p:tgtEl>
+                                    <p:spTgt spid="11"/>
+                                  </p:tgtEl>
+                                  <p:attrNameLst>
+                                    <p:attrName>style.visibility</p:attrName>
+                                  </p:attrNameLst>
+                                </p:cBhvr>
+                                <p:to>
+                                  <p:strVal val="visible"/>
+                                </p:to>
+                              </p:set>
+                              <p:animEffect transition="in" filter="wipe(down)">
+                                <p:cBhvr>
+                                  <p:cTn id="191" dur="570"/>
+                                  <p:tgtEl>
+                                    <p:spTgt spid="11"/>
+                                  </p:tgtEl>
+                                </p:cBhvr>
+                              </p:animEffect>
+                            </p:childTnLst>
+                          </p:cTn>
+                        </p:par>
+                        <p:par>
+                          <p:cTn id="21" dur="690" fill="hold" nodeType="afterEffect" grpId="0" presetID="9" presetClass="entr" presetSubtype="0">
+                            <p:stCondLst>
+                              <p:cond delay="1040"/>
+                            </p:stCondLst>
+                            <p:childTnLst>
+                              <p:set>
+                                <p:cBhvr>
+                                  <p:cTn id="22" dur="1" fill="hold">
+                                    <p:stCondLst>
+                                      <p:cond delay="0"/>
+                                    </p:stCondLst>
+                                  </p:cTn>
+                                  <p:tgtEl>
+                                    <p:spTgt spid="10"/>
+                                  </p:tgtEl>
+                                  <p:attrNameLst>
+                                    <p:attrName>style.visibility</p:attrName>
+                                  </p:attrNameLst>
+                                </p:cBhvr>
+                                <p:to>
+                                  <p:strVal val="visible"/>
+                                </p:to>
+                              </p:set>
+                              <p:animEffect transition="in" filter="fade">
+                                <p:cBhvr>
+                                  <p:cTn id="211" dur="690"/>
+                                  <p:tgtEl>
+                                    <p:spTgt spid="10"/>
+                                  </p:tgtEl>
+                                </p:cBhvr>
+                              </p:animEffect>
+                            </p:childTnLst>
+                          </p:cTn>
+                        </p:par>
+                        <p:par>
+                          <p:cTn id="23" dur="810" fill="hold" nodeType="afterEffect" grpId="0" presetID="22" presetClass="entr" presetSubtype="2">
+                            <p:stCondLst>
+                              <p:cond delay="1170"/>
+                            </p:stCondLst>
+                            <p:childTnLst>
+                              <p:set>
+                                <p:cBhvr>
+                                  <p:cTn id="24" dur="1" fill="hold">
+                                    <p:stCondLst>
+                                      <p:cond delay="0"/>
+                                    </p:stCondLst>
+                                  </p:cTn>
+                                  <p:tgtEl>
+                                    <p:spTgt spid="12"/>
+                                  </p:tgtEl>
+                                  <p:attrNameLst>
+                                    <p:attrName>style.visibility</p:attrName>
+                                  </p:attrNameLst>
+                                </p:cBhvr>
+                                <p:to>
+                                  <p:strVal val="visible"/>
+                                </p:to>
+                              </p:set>
+                              <p:animEffect transition="in" filter="wipe(right)">
+                                <p:cBhvr>
+                                  <p:cTn id="231" dur="810"/>
+                                  <p:tgtEl>
+                                    <p:spTgt spid="12"/>
+                                  </p:tgtEl>
+                                </p:cBhvr>
+                              </p:animEffect>
+                            </p:childTnLst>
+                          </p:cTn>
+                        </p:par>
+                        <p:par>
+                          <p:cTn id="25" dur="450" fill="hold" nodeType="afterEffect" grpId="0" presetID="18" presetClass="entr" presetSubtype="12">
+                            <p:stCondLst>
+                              <p:cond delay="1300"/>
+                            </p:stCondLst>
+                            <p:childTnLst>
+                              <p:set>
+                                <p:cBhvr>
+                                  <p:cTn id="26" dur="1" fill="hold">
+                                    <p:stCondLst>
+                                      <p:cond delay="0"/>
+                                    </p:stCondLst>
+                                  </p:cTn>
+                                  <p:tgtEl>
+                                    <p:spTgt spid="14"/>
+                                  </p:tgtEl>
+                                  <p:attrNameLst>
+                                    <p:attrName>style.visibility</p:attrName>
+                                  </p:attrNameLst>
+                                </p:cBhvr>
+                                <p:to>
+                                  <p:strVal val="visible"/>
+                                </p:to>
+                              </p:set>
+                              <p:animEffect transition="in" filter="circle(in)">
+                                <p:cBhvr>
+                                  <p:cTn id="251" dur="450"/>
+                                  <p:tgtEl>
+                                    <p:spTgt spid="14"/>
+                                  </p:tgtEl>
+                                </p:cBhvr>
+                              </p:animEffect>
+                            </p:childTnLst>
+                          </p:cTn>
+                        </p:par>
+                        <p:par>
+                          <p:cTn id="27" dur="570" fill="hold" nodeType="afterEffect" grpId="0" presetID="22" presetClass="entr" presetSubtype="1">
+                            <p:stCondLst>
+                              <p:cond delay="1430"/>
+                            </p:stCondLst>
+                            <p:childTnLst>
+                              <p:set>
+                                <p:cBhvr>
+                                  <p:cTn id="28" dur="1" fill="hold">
+                                    <p:stCondLst>
+                                      <p:cond delay="0"/>
+                                    </p:stCondLst>
+                                  </p:cTn>
+                                  <p:tgtEl>
+                                    <p:spTgt spid="13"/>
+                                  </p:tgtEl>
+                                  <p:attrNameLst>
+                                    <p:attrName>style.visibility</p:attrName>
+                                  </p:attrNameLst>
+                                </p:cBhvr>
+                                <p:to>
+                                  <p:strVal val="visible"/>
+                                </p:to>
+                              </p:set>
+                              <p:animEffect transition="in" filter="wipe(up)">
+                                <p:cBhvr>
+                                  <p:cTn id="271" dur="570"/>
+                                  <p:tgtEl>
+                                    <p:spTgt spid="13"/>
+                                  </p:tgtEl>
+                                </p:cBhvr>
+                              </p:animEffect>
+                            </p:childTnLst>
+                          </p:cTn>
+                        </p:par>
+                        <p:par>
+                          <p:cTn id="29" dur="690" fill="hold" nodeType="afterEffect" grpId="0" presetID="42" presetClass="entr" presetSubtype="10">
+                            <p:stCondLst>
+                              <p:cond delay="1560"/>
+                            </p:stCondLst>
+                            <p:childTnLst>
+                              <p:set>
+                                <p:cBhvr>
+                                  <p:cTn id="30" dur="1" fill="hold">
+                                    <p:stCondLst>
+                                      <p:cond delay="0"/>
+                                    </p:stCondLst>
+                                  </p:cTn>
+                                  <p:tgtEl>
+                                    <p:spTgt spid="15"/>
+                                  </p:tgtEl>
+                                  <p:attrNameLst>
+                                    <p:attrName>style.visibility</p:attrName>
+                                  </p:attrNameLst>
+                                </p:cBhvr>
+                                <p:to>
+                                  <p:strVal val="visible"/>
+                                </p:to>
+                              </p:set>
+                              <p:animEffect transition="in" filter="blinds(horizontal)">
+                                <p:cBhvr>
+                                  <p:cTn id="291" dur="690"/>
+                                  <p:tgtEl>
+                                    <p:spTgt spid="15"/>
+                                  </p:tgtEl>
+                                </p:cBhvr>
+                              </p:animEffect>
+                            </p:childTnLst>
+                          </p:cTn>
+                        </p:par>
+                        <p:par>
+                          <p:cTn id="31" dur="810" fill="hold" nodeType="afterEffect" grpId="0" presetID="43" presetClass="entr" presetSubtype="0">
+                            <p:stCondLst>
+                              <p:cond delay="1690"/>
+                            </p:stCondLst>
+                            <p:childTnLst>
+                              <p:set>
+                                <p:cBhvr>
+                                  <p:cTn id="32" dur="1" fill="hold">
+                                    <p:stCondLst>
+                                      <p:cond delay="0"/>
+                                    </p:stCondLst>
+                                  </p:cTn>
+                                  <p:tgtEl>
+                                    <p:spTgt spid="17"/>
+                                  </p:tgtEl>
+                                  <p:attrNameLst>
+                                    <p:attrName>style.visibility</p:attrName>
+                                  </p:attrNameLst>
+                                </p:cBhvr>
+                                <p:to>
+                                  <p:strVal val="visible"/>
+                                </p:to>
+                              </p:set>
+                              <p:animEffect transition="in" filter="checkerboard(across)">
+                                <p:cBhvr>
+                                  <p:cTn id="311" dur="810"/>
+                                  <p:tgtEl>
+                                    <p:spTgt spid="17"/>
+                                  </p:tgtEl>
+                                </p:cBhvr>
+                              </p:animEffect>
+                            </p:childTnLst>
+                          </p:cTn>
+                        </p:par>
+                      </p:childTnLst>
+                    </p:cTn>
+                  </p:par>
+                </p:childTnLst>
+              </p:cTn>
+              <p:prevCondLst>
+                <p:cond evt="onPrev" delay="0">
+                  <p:tgtEl>
+                    <p:sldTgt/>
+                  </p:tgtEl>
+                </p:cond>
+              </p:prevCondLst>
+              <p:nextCondLst>
+                <p:cond evt="onNext" delay="0">
+                  <p:tgtEl>
+                    <p:sldTgt/>
+                  </p:tgtEl>
+                </p:cond>
+              </p:nextCondLst>
+            </p:seq>
+          </p:childTnLst>
+        </p:cTn>
+      </p:par>
+    </p:tnLst>
+  </p:timing>
 </p:sld>
 </file>
 
@@ -13914,8 +20336,537 @@
     <a:masterClrMapping/>
   </p:clrMapOvr>
   <p:transition spd="med">
-    <p:push/>
+    <p:cover dir="l"/>
   </p:transition>
+  <p:timing>
+    <p:tnLst>
+      <p:par>
+        <p:cTn id="1" dur="indefinite" restart="never" nodeType="tmRoot">
+          <p:childTnLst>
+            <p:seq concurrent="1" nextAc="seek">
+              <p:cTn id="2" dur="indefinite" nodeType="mainSeq">
+                <p:childTnLst>
+                  <p:par>
+                    <p:cTn id="3" fill="hold">
+                      <p:stCondLst>
+                        <p:cond delay="indefinite"/>
+                      </p:stCondLst>
+                      <p:childTnLst>
+                        <p:par>
+                          <p:cTn id="5" dur="810" fill="hold" nodeType="clickEffect" grpId="0" presetID="25" presetClass="entr" presetSubtype="1">
+                            <p:stCondLst>
+                              <p:cond delay="0"/>
+                            </p:stCondLst>
+                            <p:childTnLst>
+                              <p:set>
+                                <p:cBhvr>
+                                  <p:cTn id="6" dur="1" fill="hold">
+                                    <p:stCondLst>
+                                      <p:cond delay="0"/>
+                                    </p:stCondLst>
+                                  </p:cTn>
+                                  <p:tgtEl>
+                                    <p:spTgt spid="3"/>
+                                  </p:tgtEl>
+                                  <p:attrNameLst>
+                                    <p:attrName>style.visibility</p:attrName>
+                                  </p:attrNameLst>
+                                </p:cBhvr>
+                                <p:to>
+                                  <p:strVal val="visible"/>
+                                </p:to>
+                              </p:set>
+                              <p:animEffect transition="in" filter="strips(downRight)">
+                                <p:cBhvr>
+                                  <p:cTn id="51" dur="810"/>
+                                  <p:tgtEl>
+                                    <p:spTgt spid="3"/>
+                                  </p:tgtEl>
+                                </p:cBhvr>
+                              </p:animEffect>
+                            </p:childTnLst>
+                          </p:cTn>
+                        </p:par>
+                        <p:par>
+                          <p:cTn id="7" dur="450" fill="hold" nodeType="afterEffect" grpId="0" presetID="45" presetClass="entr" presetSubtype="1">
+                            <p:stCondLst>
+                              <p:cond delay="130"/>
+                            </p:stCondLst>
+                            <p:childTnLst>
+                              <p:set>
+                                <p:cBhvr>
+                                  <p:cTn id="8" dur="1" fill="hold">
+                                    <p:stCondLst>
+                                      <p:cond delay="0"/>
+                                    </p:stCondLst>
+                                  </p:cTn>
+                                  <p:tgtEl>
+                                    <p:spTgt spid="4"/>
+                                  </p:tgtEl>
+                                  <p:attrNameLst>
+                                    <p:attrName>style.visibility</p:attrName>
+                                  </p:attrNameLst>
+                                </p:cBhvr>
+                                <p:to>
+                                  <p:strVal val="visible"/>
+                                </p:to>
+                              </p:set>
+                              <p:animEffect transition="in" filter="barn(inHorizontal)">
+                                <p:cBhvr>
+                                  <p:cTn id="71" dur="450"/>
+                                  <p:tgtEl>
+                                    <p:spTgt spid="4"/>
+                                  </p:tgtEl>
+                                </p:cBhvr>
+                              </p:animEffect>
+                            </p:childTnLst>
+                          </p:cTn>
+                        </p:par>
+                        <p:par>
+                          <p:cTn id="9" dur="570" fill="hold" nodeType="afterEffect" grpId="0" presetID="22" presetClass="entr" presetSubtype="8">
+                            <p:stCondLst>
+                              <p:cond delay="260"/>
+                            </p:stCondLst>
+                            <p:childTnLst>
+                              <p:set>
+                                <p:cBhvr>
+                                  <p:cTn id="10" dur="1" fill="hold">
+                                    <p:stCondLst>
+                                      <p:cond delay="0"/>
+                                    </p:stCondLst>
+                                  </p:cTn>
+                                  <p:tgtEl>
+                                    <p:spTgt spid="5"/>
+                                  </p:tgtEl>
+                                  <p:attrNameLst>
+                                    <p:attrName>style.visibility</p:attrName>
+                                  </p:attrNameLst>
+                                </p:cBhvr>
+                                <p:to>
+                                  <p:strVal val="visible"/>
+                                </p:to>
+                              </p:set>
+                              <p:animEffect transition="in" filter="wipe(left)">
+                                <p:cBhvr>
+                                  <p:cTn id="91" dur="570"/>
+                                  <p:tgtEl>
+                                    <p:spTgt spid="5"/>
+                                  </p:tgtEl>
+                                </p:cBhvr>
+                              </p:animEffect>
+                            </p:childTnLst>
+                          </p:cTn>
+                        </p:par>
+                        <p:par>
+                          <p:cTn id="11" dur="690" fill="hold" nodeType="afterEffect" grpId="0" presetID="37" presetClass="entr" presetSubtype="0">
+                            <p:stCondLst>
+                              <p:cond delay="390"/>
+                            </p:stCondLst>
+                            <p:childTnLst>
+                              <p:set>
+                                <p:cBhvr>
+                                  <p:cTn id="12" dur="1" fill="hold">
+                                    <p:stCondLst>
+                                      <p:cond delay="0"/>
+                                    </p:stCondLst>
+                                  </p:cTn>
+                                  <p:tgtEl>
+                                    <p:spTgt spid="6"/>
+                                  </p:tgtEl>
+                                  <p:attrNameLst>
+                                    <p:attrName>style.visibility</p:attrName>
+                                  </p:attrNameLst>
+                                </p:cBhvr>
+                                <p:to>
+                                  <p:strVal val="visible"/>
+                                </p:to>
+                              </p:set>
+                              <p:animEffect transition="in" filter="wedge">
+                                <p:cBhvr>
+                                  <p:cTn id="111" dur="690"/>
+                                  <p:tgtEl>
+                                    <p:spTgt spid="6"/>
+                                  </p:tgtEl>
+                                </p:cBhvr>
+                              </p:animEffect>
+                            </p:childTnLst>
+                          </p:cTn>
+                        </p:par>
+                        <p:par>
+                          <p:cTn id="13" dur="810" fill="hold" nodeType="afterEffect" grpId="0" presetID="52" presetClass="entr" presetSubtype="0">
+                            <p:stCondLst>
+                              <p:cond delay="520"/>
+                            </p:stCondLst>
+                            <p:childTnLst>
+                              <p:set>
+                                <p:cBhvr>
+                                  <p:cTn id="14" dur="1" fill="hold">
+                                    <p:stCondLst>
+                                      <p:cond delay="0"/>
+                                    </p:stCondLst>
+                                  </p:cTn>
+                                  <p:tgtEl>
+                                    <p:spTgt spid="7"/>
+                                  </p:tgtEl>
+                                  <p:attrNameLst>
+                                    <p:attrName>style.visibility</p:attrName>
+                                  </p:attrNameLst>
+                                </p:cBhvr>
+                                <p:to>
+                                  <p:strVal val="visible"/>
+                                </p:to>
+                              </p:set>
+                              <p:animEffect transition="in" filter="randombar(horizontal)">
+                                <p:cBhvr>
+                                  <p:cTn id="131" dur="810"/>
+                                  <p:tgtEl>
+                                    <p:spTgt spid="7"/>
+                                  </p:tgtEl>
+                                </p:cBhvr>
+                              </p:animEffect>
+                            </p:childTnLst>
+                          </p:cTn>
+                        </p:par>
+                        <p:par>
+                          <p:cTn id="15" dur="450" fill="hold" nodeType="afterEffect" grpId="0" presetID="21" presetClass="entr" presetSubtype="1">
+                            <p:stCondLst>
+                              <p:cond delay="650"/>
+                            </p:stCondLst>
+                            <p:childTnLst>
+                              <p:set>
+                                <p:cBhvr>
+                                  <p:cTn id="16" dur="1" fill="hold">
+                                    <p:stCondLst>
+                                      <p:cond delay="0"/>
+                                    </p:stCondLst>
+                                  </p:cTn>
+                                  <p:tgtEl>
+                                    <p:spTgt spid="10"/>
+                                  </p:tgtEl>
+                                  <p:attrNameLst>
+                                    <p:attrName>style.visibility</p:attrName>
+                                  </p:attrNameLst>
+                                </p:cBhvr>
+                                <p:to>
+                                  <p:strVal val="visible"/>
+                                </p:to>
+                              </p:set>
+                              <p:animEffect transition="in" filter="wheel(1)">
+                                <p:cBhvr>
+                                  <p:cTn id="151" dur="450"/>
+                                  <p:tgtEl>
+                                    <p:spTgt spid="10"/>
+                                  </p:tgtEl>
+                                </p:cBhvr>
+                              </p:animEffect>
+                            </p:childTnLst>
+                          </p:cTn>
+                        </p:par>
+                        <p:par>
+                          <p:cTn id="17" dur="570" fill="hold" nodeType="afterEffect" grpId="0" presetID="22" presetClass="entr" presetSubtype="4">
+                            <p:stCondLst>
+                              <p:cond delay="780"/>
+                            </p:stCondLst>
+                            <p:childTnLst>
+                              <p:set>
+                                <p:cBhvr>
+                                  <p:cTn id="18" dur="1" fill="hold">
+                                    <p:stCondLst>
+                                      <p:cond delay="0"/>
+                                    </p:stCondLst>
+                                  </p:cTn>
+                                  <p:tgtEl>
+                                    <p:spTgt spid="11"/>
+                                  </p:tgtEl>
+                                  <p:attrNameLst>
+                                    <p:attrName>style.visibility</p:attrName>
+                                  </p:attrNameLst>
+                                </p:cBhvr>
+                                <p:to>
+                                  <p:strVal val="visible"/>
+                                </p:to>
+                              </p:set>
+                              <p:animEffect transition="in" filter="wipe(down)">
+                                <p:cBhvr>
+                                  <p:cTn id="171" dur="570"/>
+                                  <p:tgtEl>
+                                    <p:spTgt spid="11"/>
+                                  </p:tgtEl>
+                                </p:cBhvr>
+                              </p:animEffect>
+                            </p:childTnLst>
+                          </p:cTn>
+                        </p:par>
+                        <p:par>
+                          <p:cTn id="19" dur="690" fill="hold" nodeType="afterEffect" grpId="0" presetID="9" presetClass="entr" presetSubtype="0">
+                            <p:stCondLst>
+                              <p:cond delay="910"/>
+                            </p:stCondLst>
+                            <p:childTnLst>
+                              <p:set>
+                                <p:cBhvr>
+                                  <p:cTn id="20" dur="1" fill="hold">
+                                    <p:stCondLst>
+                                      <p:cond delay="0"/>
+                                    </p:stCondLst>
+                                  </p:cTn>
+                                  <p:tgtEl>
+                                    <p:spTgt spid="8"/>
+                                  </p:tgtEl>
+                                  <p:attrNameLst>
+                                    <p:attrName>style.visibility</p:attrName>
+                                  </p:attrNameLst>
+                                </p:cBhvr>
+                                <p:to>
+                                  <p:strVal val="visible"/>
+                                </p:to>
+                              </p:set>
+                              <p:animEffect transition="in" filter="fade">
+                                <p:cBhvr>
+                                  <p:cTn id="191" dur="690"/>
+                                  <p:tgtEl>
+                                    <p:spTgt spid="8"/>
+                                  </p:tgtEl>
+                                </p:cBhvr>
+                              </p:animEffect>
+                            </p:childTnLst>
+                          </p:cTn>
+                        </p:par>
+                        <p:par>
+                          <p:cTn id="21" dur="810" fill="hold" nodeType="afterEffect" grpId="0" presetID="22" presetClass="entr" presetSubtype="2">
+                            <p:stCondLst>
+                              <p:cond delay="1040"/>
+                            </p:stCondLst>
+                            <p:childTnLst>
+                              <p:set>
+                                <p:cBhvr>
+                                  <p:cTn id="22" dur="1" fill="hold">
+                                    <p:stCondLst>
+                                      <p:cond delay="0"/>
+                                    </p:stCondLst>
+                                  </p:cTn>
+                                  <p:tgtEl>
+                                    <p:spTgt spid="12"/>
+                                  </p:tgtEl>
+                                  <p:attrNameLst>
+                                    <p:attrName>style.visibility</p:attrName>
+                                  </p:attrNameLst>
+                                </p:cBhvr>
+                                <p:to>
+                                  <p:strVal val="visible"/>
+                                </p:to>
+                              </p:set>
+                              <p:animEffect transition="in" filter="wipe(right)">
+                                <p:cBhvr>
+                                  <p:cTn id="211" dur="810"/>
+                                  <p:tgtEl>
+                                    <p:spTgt spid="12"/>
+                                  </p:tgtEl>
+                                </p:cBhvr>
+                              </p:animEffect>
+                            </p:childTnLst>
+                          </p:cTn>
+                        </p:par>
+                        <p:par>
+                          <p:cTn id="23" dur="450" fill="hold" nodeType="afterEffect" grpId="0" presetID="18" presetClass="entr" presetSubtype="12">
+                            <p:stCondLst>
+                              <p:cond delay="1170"/>
+                            </p:stCondLst>
+                            <p:childTnLst>
+                              <p:set>
+                                <p:cBhvr>
+                                  <p:cTn id="24" dur="1" fill="hold">
+                                    <p:stCondLst>
+                                      <p:cond delay="0"/>
+                                    </p:stCondLst>
+                                  </p:cTn>
+                                  <p:tgtEl>
+                                    <p:spTgt spid="9"/>
+                                  </p:tgtEl>
+                                  <p:attrNameLst>
+                                    <p:attrName>style.visibility</p:attrName>
+                                  </p:attrNameLst>
+                                </p:cBhvr>
+                                <p:to>
+                                  <p:strVal val="visible"/>
+                                </p:to>
+                              </p:set>
+                              <p:animEffect transition="in" filter="circle(in)">
+                                <p:cBhvr>
+                                  <p:cTn id="231" dur="450"/>
+                                  <p:tgtEl>
+                                    <p:spTgt spid="9"/>
+                                  </p:tgtEl>
+                                </p:cBhvr>
+                              </p:animEffect>
+                            </p:childTnLst>
+                          </p:cTn>
+                        </p:par>
+                        <p:par>
+                          <p:cTn id="25" dur="570" fill="hold" nodeType="afterEffect" grpId="0" presetID="22" presetClass="entr" presetSubtype="1">
+                            <p:stCondLst>
+                              <p:cond delay="1300"/>
+                            </p:stCondLst>
+                            <p:childTnLst>
+                              <p:set>
+                                <p:cBhvr>
+                                  <p:cTn id="26" dur="1" fill="hold">
+                                    <p:stCondLst>
+                                      <p:cond delay="0"/>
+                                    </p:stCondLst>
+                                  </p:cTn>
+                                  <p:tgtEl>
+                                    <p:spTgt spid="13"/>
+                                  </p:tgtEl>
+                                  <p:attrNameLst>
+                                    <p:attrName>style.visibility</p:attrName>
+                                  </p:attrNameLst>
+                                </p:cBhvr>
+                                <p:to>
+                                  <p:strVal val="visible"/>
+                                </p:to>
+                              </p:set>
+                              <p:animEffect transition="in" filter="wipe(up)">
+                                <p:cBhvr>
+                                  <p:cTn id="251" dur="570"/>
+                                  <p:tgtEl>
+                                    <p:spTgt spid="13"/>
+                                  </p:tgtEl>
+                                </p:cBhvr>
+                              </p:animEffect>
+                            </p:childTnLst>
+                          </p:cTn>
+                        </p:par>
+                        <p:par>
+                          <p:cTn id="27" dur="690" fill="hold" nodeType="afterEffect" grpId="0" presetID="42" presetClass="entr" presetSubtype="10">
+                            <p:stCondLst>
+                              <p:cond delay="1430"/>
+                            </p:stCondLst>
+                            <p:childTnLst>
+                              <p:set>
+                                <p:cBhvr>
+                                  <p:cTn id="28" dur="1" fill="hold">
+                                    <p:stCondLst>
+                                      <p:cond delay="0"/>
+                                    </p:stCondLst>
+                                  </p:cTn>
+                                  <p:tgtEl>
+                                    <p:spTgt spid="14"/>
+                                  </p:tgtEl>
+                                  <p:attrNameLst>
+                                    <p:attrName>style.visibility</p:attrName>
+                                  </p:attrNameLst>
+                                </p:cBhvr>
+                                <p:to>
+                                  <p:strVal val="visible"/>
+                                </p:to>
+                              </p:set>
+                              <p:animEffect transition="in" filter="blinds(horizontal)">
+                                <p:cBhvr>
+                                  <p:cTn id="271" dur="690"/>
+                                  <p:tgtEl>
+                                    <p:spTgt spid="14"/>
+                                  </p:tgtEl>
+                                </p:cBhvr>
+                              </p:animEffect>
+                            </p:childTnLst>
+                          </p:cTn>
+                        </p:par>
+                        <p:par>
+                          <p:cTn id="29" dur="810" fill="hold" nodeType="afterEffect" grpId="0" presetID="43" presetClass="entr" presetSubtype="0">
+                            <p:stCondLst>
+                              <p:cond delay="1560"/>
+                            </p:stCondLst>
+                            <p:childTnLst>
+                              <p:set>
+                                <p:cBhvr>
+                                  <p:cTn id="30" dur="1" fill="hold">
+                                    <p:stCondLst>
+                                      <p:cond delay="0"/>
+                                    </p:stCondLst>
+                                  </p:cTn>
+                                  <p:tgtEl>
+                                    <p:spTgt spid="15"/>
+                                  </p:tgtEl>
+                                  <p:attrNameLst>
+                                    <p:attrName>style.visibility</p:attrName>
+                                  </p:attrNameLst>
+                                </p:cBhvr>
+                                <p:to>
+                                  <p:strVal val="visible"/>
+                                </p:to>
+                              </p:set>
+                              <p:animEffect transition="in" filter="checkerboard(across)">
+                                <p:cBhvr>
+                                  <p:cTn id="291" dur="810"/>
+                                  <p:tgtEl>
+                                    <p:spTgt spid="15"/>
+                                  </p:tgtEl>
+                                </p:cBhvr>
+                              </p:animEffect>
+                            </p:childTnLst>
+                          </p:cTn>
+                        </p:par>
+                        <p:par>
+                          <p:cTn id="31" dur="450" fill="hold" nodeType="afterEffect" grpId="0" presetID="21" presetClass="entr" presetSubtype="2">
+                            <p:stCondLst>
+                              <p:cond delay="1690"/>
+                            </p:stCondLst>
+                            <p:childTnLst>
+                              <p:set>
+                                <p:cBhvr>
+                                  <p:cTn id="32" dur="1" fill="hold">
+                                    <p:stCondLst>
+                                      <p:cond delay="0"/>
+                                    </p:stCondLst>
+                                  </p:cTn>
+                                  <p:tgtEl>
+                                    <p:spTgt spid="16"/>
+                                  </p:tgtEl>
+                                  <p:attrNameLst>
+                                    <p:attrName>style.visibility</p:attrName>
+                                  </p:attrNameLst>
+                                </p:cBhvr>
+                                <p:to>
+                                  <p:strVal val="visible"/>
+                                </p:to>
+                              </p:set>
+                              <p:animEffect transition="in" filter="wheel(2)">
+                                <p:cBhvr>
+                                  <p:cTn id="311" dur="450"/>
+                                  <p:tgtEl>
+                                    <p:spTgt spid="16"/>
+                                  </p:tgtEl>
+                                </p:cBhvr>
+                              </p:animEffect>
+                            </p:childTnLst>
+                          </p:cTn>
+                        </p:par>
+                      </p:childTnLst>
+                    </p:cTn>
+                  </p:par>
+                </p:childTnLst>
+              </p:cTn>
+              <p:prevCondLst>
+                <p:cond evt="onPrev" delay="0">
+                  <p:tgtEl>
+                    <p:sldTgt/>
+                  </p:tgtEl>
+                </p:cond>
+              </p:prevCondLst>
+              <p:nextCondLst>
+                <p:cond evt="onNext" delay="0">
+                  <p:tgtEl>
+                    <p:sldTgt/>
+                  </p:tgtEl>
+                </p:cond>
+              </p:nextCondLst>
+            </p:seq>
+          </p:childTnLst>
+        </p:cTn>
+      </p:par>
+    </p:tnLst>
+  </p:timing>
 </p:sld>
 </file>
 
@@ -15095,8 +22046,537 @@
     <a:masterClrMapping/>
   </p:clrMapOvr>
   <p:transition spd="med">
-    <p:push/>
+    <p:checker dir="across"/>
   </p:transition>
+  <p:timing>
+    <p:tnLst>
+      <p:par>
+        <p:cTn id="1" dur="indefinite" restart="never" nodeType="tmRoot">
+          <p:childTnLst>
+            <p:seq concurrent="1" nextAc="seek">
+              <p:cTn id="2" dur="indefinite" nodeType="mainSeq">
+                <p:childTnLst>
+                  <p:par>
+                    <p:cTn id="3" fill="hold">
+                      <p:stCondLst>
+                        <p:cond delay="indefinite"/>
+                      </p:stCondLst>
+                      <p:childTnLst>
+                        <p:par>
+                          <p:cTn id="5" dur="450" fill="hold" nodeType="clickEffect" grpId="0" presetID="45" presetClass="entr" presetSubtype="1">
+                            <p:stCondLst>
+                              <p:cond delay="0"/>
+                            </p:stCondLst>
+                            <p:childTnLst>
+                              <p:set>
+                                <p:cBhvr>
+                                  <p:cTn id="6" dur="1" fill="hold">
+                                    <p:stCondLst>
+                                      <p:cond delay="0"/>
+                                    </p:stCondLst>
+                                  </p:cTn>
+                                  <p:tgtEl>
+                                    <p:spTgt spid="3"/>
+                                  </p:tgtEl>
+                                  <p:attrNameLst>
+                                    <p:attrName>style.visibility</p:attrName>
+                                  </p:attrNameLst>
+                                </p:cBhvr>
+                                <p:to>
+                                  <p:strVal val="visible"/>
+                                </p:to>
+                              </p:set>
+                              <p:animEffect transition="in" filter="barn(inHorizontal)">
+                                <p:cBhvr>
+                                  <p:cTn id="51" dur="450"/>
+                                  <p:tgtEl>
+                                    <p:spTgt spid="3"/>
+                                  </p:tgtEl>
+                                </p:cBhvr>
+                              </p:animEffect>
+                            </p:childTnLst>
+                          </p:cTn>
+                        </p:par>
+                        <p:par>
+                          <p:cTn id="7" dur="570" fill="hold" nodeType="afterEffect" grpId="0" presetID="22" presetClass="entr" presetSubtype="8">
+                            <p:stCondLst>
+                              <p:cond delay="130"/>
+                            </p:stCondLst>
+                            <p:childTnLst>
+                              <p:set>
+                                <p:cBhvr>
+                                  <p:cTn id="8" dur="1" fill="hold">
+                                    <p:stCondLst>
+                                      <p:cond delay="0"/>
+                                    </p:stCondLst>
+                                  </p:cTn>
+                                  <p:tgtEl>
+                                    <p:spTgt spid="4"/>
+                                  </p:tgtEl>
+                                  <p:attrNameLst>
+                                    <p:attrName>style.visibility</p:attrName>
+                                  </p:attrNameLst>
+                                </p:cBhvr>
+                                <p:to>
+                                  <p:strVal val="visible"/>
+                                </p:to>
+                              </p:set>
+                              <p:animEffect transition="in" filter="wipe(left)">
+                                <p:cBhvr>
+                                  <p:cTn id="71" dur="570"/>
+                                  <p:tgtEl>
+                                    <p:spTgt spid="4"/>
+                                  </p:tgtEl>
+                                </p:cBhvr>
+                              </p:animEffect>
+                            </p:childTnLst>
+                          </p:cTn>
+                        </p:par>
+                        <p:par>
+                          <p:cTn id="9" dur="690" fill="hold" nodeType="afterEffect" grpId="0" presetID="37" presetClass="entr" presetSubtype="0">
+                            <p:stCondLst>
+                              <p:cond delay="260"/>
+                            </p:stCondLst>
+                            <p:childTnLst>
+                              <p:set>
+                                <p:cBhvr>
+                                  <p:cTn id="10" dur="1" fill="hold">
+                                    <p:stCondLst>
+                                      <p:cond delay="0"/>
+                                    </p:stCondLst>
+                                  </p:cTn>
+                                  <p:tgtEl>
+                                    <p:spTgt spid="5"/>
+                                  </p:tgtEl>
+                                  <p:attrNameLst>
+                                    <p:attrName>style.visibility</p:attrName>
+                                  </p:attrNameLst>
+                                </p:cBhvr>
+                                <p:to>
+                                  <p:strVal val="visible"/>
+                                </p:to>
+                              </p:set>
+                              <p:animEffect transition="in" filter="wedge">
+                                <p:cBhvr>
+                                  <p:cTn id="91" dur="690"/>
+                                  <p:tgtEl>
+                                    <p:spTgt spid="5"/>
+                                  </p:tgtEl>
+                                </p:cBhvr>
+                              </p:animEffect>
+                            </p:childTnLst>
+                          </p:cTn>
+                        </p:par>
+                        <p:par>
+                          <p:cTn id="11" dur="810" fill="hold" nodeType="afterEffect" grpId="0" presetID="52" presetClass="entr" presetSubtype="0">
+                            <p:stCondLst>
+                              <p:cond delay="390"/>
+                            </p:stCondLst>
+                            <p:childTnLst>
+                              <p:set>
+                                <p:cBhvr>
+                                  <p:cTn id="12" dur="1" fill="hold">
+                                    <p:stCondLst>
+                                      <p:cond delay="0"/>
+                                    </p:stCondLst>
+                                  </p:cTn>
+                                  <p:tgtEl>
+                                    <p:spTgt spid="6"/>
+                                  </p:tgtEl>
+                                  <p:attrNameLst>
+                                    <p:attrName>style.visibility</p:attrName>
+                                  </p:attrNameLst>
+                                </p:cBhvr>
+                                <p:to>
+                                  <p:strVal val="visible"/>
+                                </p:to>
+                              </p:set>
+                              <p:animEffect transition="in" filter="randombar(horizontal)">
+                                <p:cBhvr>
+                                  <p:cTn id="111" dur="810"/>
+                                  <p:tgtEl>
+                                    <p:spTgt spid="6"/>
+                                  </p:tgtEl>
+                                </p:cBhvr>
+                              </p:animEffect>
+                            </p:childTnLst>
+                          </p:cTn>
+                        </p:par>
+                        <p:par>
+                          <p:cTn id="13" dur="450" fill="hold" nodeType="afterEffect" grpId="0" presetID="21" presetClass="entr" presetSubtype="1">
+                            <p:stCondLst>
+                              <p:cond delay="520"/>
+                            </p:stCondLst>
+                            <p:childTnLst>
+                              <p:set>
+                                <p:cBhvr>
+                                  <p:cTn id="14" dur="1" fill="hold">
+                                    <p:stCondLst>
+                                      <p:cond delay="0"/>
+                                    </p:stCondLst>
+                                  </p:cTn>
+                                  <p:tgtEl>
+                                    <p:spTgt spid="11"/>
+                                  </p:tgtEl>
+                                  <p:attrNameLst>
+                                    <p:attrName>style.visibility</p:attrName>
+                                  </p:attrNameLst>
+                                </p:cBhvr>
+                                <p:to>
+                                  <p:strVal val="visible"/>
+                                </p:to>
+                              </p:set>
+                              <p:animEffect transition="in" filter="wheel(1)">
+                                <p:cBhvr>
+                                  <p:cTn id="131" dur="450"/>
+                                  <p:tgtEl>
+                                    <p:spTgt spid="11"/>
+                                  </p:tgtEl>
+                                </p:cBhvr>
+                              </p:animEffect>
+                            </p:childTnLst>
+                          </p:cTn>
+                        </p:par>
+                        <p:par>
+                          <p:cTn id="15" dur="570" fill="hold" nodeType="afterEffect" grpId="0" presetID="22" presetClass="entr" presetSubtype="4">
+                            <p:stCondLst>
+                              <p:cond delay="650"/>
+                            </p:stCondLst>
+                            <p:childTnLst>
+                              <p:set>
+                                <p:cBhvr>
+                                  <p:cTn id="16" dur="1" fill="hold">
+                                    <p:stCondLst>
+                                      <p:cond delay="0"/>
+                                    </p:stCondLst>
+                                  </p:cTn>
+                                  <p:tgtEl>
+                                    <p:spTgt spid="16"/>
+                                  </p:tgtEl>
+                                  <p:attrNameLst>
+                                    <p:attrName>style.visibility</p:attrName>
+                                  </p:attrNameLst>
+                                </p:cBhvr>
+                                <p:to>
+                                  <p:strVal val="visible"/>
+                                </p:to>
+                              </p:set>
+                              <p:animEffect transition="in" filter="wipe(down)">
+                                <p:cBhvr>
+                                  <p:cTn id="151" dur="570"/>
+                                  <p:tgtEl>
+                                    <p:spTgt spid="16"/>
+                                  </p:tgtEl>
+                                </p:cBhvr>
+                              </p:animEffect>
+                            </p:childTnLst>
+                          </p:cTn>
+                        </p:par>
+                        <p:par>
+                          <p:cTn id="17" dur="690" fill="hold" nodeType="afterEffect" grpId="0" presetID="9" presetClass="entr" presetSubtype="0">
+                            <p:stCondLst>
+                              <p:cond delay="780"/>
+                            </p:stCondLst>
+                            <p:childTnLst>
+                              <p:set>
+                                <p:cBhvr>
+                                  <p:cTn id="18" dur="1" fill="hold">
+                                    <p:stCondLst>
+                                      <p:cond delay="0"/>
+                                    </p:stCondLst>
+                                  </p:cTn>
+                                  <p:tgtEl>
+                                    <p:spTgt spid="21"/>
+                                  </p:tgtEl>
+                                  <p:attrNameLst>
+                                    <p:attrName>style.visibility</p:attrName>
+                                  </p:attrNameLst>
+                                </p:cBhvr>
+                                <p:to>
+                                  <p:strVal val="visible"/>
+                                </p:to>
+                              </p:set>
+                              <p:animEffect transition="in" filter="fade">
+                                <p:cBhvr>
+                                  <p:cTn id="171" dur="690"/>
+                                  <p:tgtEl>
+                                    <p:spTgt spid="21"/>
+                                  </p:tgtEl>
+                                </p:cBhvr>
+                              </p:animEffect>
+                            </p:childTnLst>
+                          </p:cTn>
+                        </p:par>
+                        <p:par>
+                          <p:cTn id="19" dur="810" fill="hold" nodeType="afterEffect" grpId="0" presetID="22" presetClass="entr" presetSubtype="2">
+                            <p:stCondLst>
+                              <p:cond delay="910"/>
+                            </p:stCondLst>
+                            <p:childTnLst>
+                              <p:set>
+                                <p:cBhvr>
+                                  <p:cTn id="20" dur="1" fill="hold">
+                                    <p:stCondLst>
+                                      <p:cond delay="0"/>
+                                    </p:stCondLst>
+                                  </p:cTn>
+                                  <p:tgtEl>
+                                    <p:spTgt spid="7"/>
+                                  </p:tgtEl>
+                                  <p:attrNameLst>
+                                    <p:attrName>style.visibility</p:attrName>
+                                  </p:attrNameLst>
+                                </p:cBhvr>
+                                <p:to>
+                                  <p:strVal val="visible"/>
+                                </p:to>
+                              </p:set>
+                              <p:animEffect transition="in" filter="wipe(right)">
+                                <p:cBhvr>
+                                  <p:cTn id="191" dur="810"/>
+                                  <p:tgtEl>
+                                    <p:spTgt spid="7"/>
+                                  </p:tgtEl>
+                                </p:cBhvr>
+                              </p:animEffect>
+                            </p:childTnLst>
+                          </p:cTn>
+                        </p:par>
+                        <p:par>
+                          <p:cTn id="21" dur="450" fill="hold" nodeType="afterEffect" grpId="0" presetID="18" presetClass="entr" presetSubtype="12">
+                            <p:stCondLst>
+                              <p:cond delay="1040"/>
+                            </p:stCondLst>
+                            <p:childTnLst>
+                              <p:set>
+                                <p:cBhvr>
+                                  <p:cTn id="22" dur="1" fill="hold">
+                                    <p:stCondLst>
+                                      <p:cond delay="0"/>
+                                    </p:stCondLst>
+                                  </p:cTn>
+                                  <p:tgtEl>
+                                    <p:spTgt spid="12"/>
+                                  </p:tgtEl>
+                                  <p:attrNameLst>
+                                    <p:attrName>style.visibility</p:attrName>
+                                  </p:attrNameLst>
+                                </p:cBhvr>
+                                <p:to>
+                                  <p:strVal val="visible"/>
+                                </p:to>
+                              </p:set>
+                              <p:animEffect transition="in" filter="circle(in)">
+                                <p:cBhvr>
+                                  <p:cTn id="211" dur="450"/>
+                                  <p:tgtEl>
+                                    <p:spTgt spid="12"/>
+                                  </p:tgtEl>
+                                </p:cBhvr>
+                              </p:animEffect>
+                            </p:childTnLst>
+                          </p:cTn>
+                        </p:par>
+                        <p:par>
+                          <p:cTn id="23" dur="570" fill="hold" nodeType="afterEffect" grpId="0" presetID="22" presetClass="entr" presetSubtype="1">
+                            <p:stCondLst>
+                              <p:cond delay="1170"/>
+                            </p:stCondLst>
+                            <p:childTnLst>
+                              <p:set>
+                                <p:cBhvr>
+                                  <p:cTn id="24" dur="1" fill="hold">
+                                    <p:stCondLst>
+                                      <p:cond delay="0"/>
+                                    </p:stCondLst>
+                                  </p:cTn>
+                                  <p:tgtEl>
+                                    <p:spTgt spid="17"/>
+                                  </p:tgtEl>
+                                  <p:attrNameLst>
+                                    <p:attrName>style.visibility</p:attrName>
+                                  </p:attrNameLst>
+                                </p:cBhvr>
+                                <p:to>
+                                  <p:strVal val="visible"/>
+                                </p:to>
+                              </p:set>
+                              <p:animEffect transition="in" filter="wipe(up)">
+                                <p:cBhvr>
+                                  <p:cTn id="231" dur="570"/>
+                                  <p:tgtEl>
+                                    <p:spTgt spid="17"/>
+                                  </p:tgtEl>
+                                </p:cBhvr>
+                              </p:animEffect>
+                            </p:childTnLst>
+                          </p:cTn>
+                        </p:par>
+                        <p:par>
+                          <p:cTn id="25" dur="690" fill="hold" nodeType="afterEffect" grpId="0" presetID="42" presetClass="entr" presetSubtype="10">
+                            <p:stCondLst>
+                              <p:cond delay="1300"/>
+                            </p:stCondLst>
+                            <p:childTnLst>
+                              <p:set>
+                                <p:cBhvr>
+                                  <p:cTn id="26" dur="1" fill="hold">
+                                    <p:stCondLst>
+                                      <p:cond delay="0"/>
+                                    </p:stCondLst>
+                                  </p:cTn>
+                                  <p:tgtEl>
+                                    <p:spTgt spid="22"/>
+                                  </p:tgtEl>
+                                  <p:attrNameLst>
+                                    <p:attrName>style.visibility</p:attrName>
+                                  </p:attrNameLst>
+                                </p:cBhvr>
+                                <p:to>
+                                  <p:strVal val="visible"/>
+                                </p:to>
+                              </p:set>
+                              <p:animEffect transition="in" filter="blinds(horizontal)">
+                                <p:cBhvr>
+                                  <p:cTn id="251" dur="690"/>
+                                  <p:tgtEl>
+                                    <p:spTgt spid="22"/>
+                                  </p:tgtEl>
+                                </p:cBhvr>
+                              </p:animEffect>
+                            </p:childTnLst>
+                          </p:cTn>
+                        </p:par>
+                        <p:par>
+                          <p:cTn id="27" dur="810" fill="hold" nodeType="afterEffect" grpId="0" presetID="43" presetClass="entr" presetSubtype="0">
+                            <p:stCondLst>
+                              <p:cond delay="1430"/>
+                            </p:stCondLst>
+                            <p:childTnLst>
+                              <p:set>
+                                <p:cBhvr>
+                                  <p:cTn id="28" dur="1" fill="hold">
+                                    <p:stCondLst>
+                                      <p:cond delay="0"/>
+                                    </p:stCondLst>
+                                  </p:cTn>
+                                  <p:tgtEl>
+                                    <p:spTgt spid="8"/>
+                                  </p:tgtEl>
+                                  <p:attrNameLst>
+                                    <p:attrName>style.visibility</p:attrName>
+                                  </p:attrNameLst>
+                                </p:cBhvr>
+                                <p:to>
+                                  <p:strVal val="visible"/>
+                                </p:to>
+                              </p:set>
+                              <p:animEffect transition="in" filter="checkerboard(across)">
+                                <p:cBhvr>
+                                  <p:cTn id="271" dur="810"/>
+                                  <p:tgtEl>
+                                    <p:spTgt spid="8"/>
+                                  </p:tgtEl>
+                                </p:cBhvr>
+                              </p:animEffect>
+                            </p:childTnLst>
+                          </p:cTn>
+                        </p:par>
+                        <p:par>
+                          <p:cTn id="29" dur="450" fill="hold" nodeType="afterEffect" grpId="0" presetID="21" presetClass="entr" presetSubtype="2">
+                            <p:stCondLst>
+                              <p:cond delay="1560"/>
+                            </p:stCondLst>
+                            <p:childTnLst>
+                              <p:set>
+                                <p:cBhvr>
+                                  <p:cTn id="30" dur="1" fill="hold">
+                                    <p:stCondLst>
+                                      <p:cond delay="0"/>
+                                    </p:stCondLst>
+                                  </p:cTn>
+                                  <p:tgtEl>
+                                    <p:spTgt spid="13"/>
+                                  </p:tgtEl>
+                                  <p:attrNameLst>
+                                    <p:attrName>style.visibility</p:attrName>
+                                  </p:attrNameLst>
+                                </p:cBhvr>
+                                <p:to>
+                                  <p:strVal val="visible"/>
+                                </p:to>
+                              </p:set>
+                              <p:animEffect transition="in" filter="wheel(2)">
+                                <p:cBhvr>
+                                  <p:cTn id="291" dur="450"/>
+                                  <p:tgtEl>
+                                    <p:spTgt spid="13"/>
+                                  </p:tgtEl>
+                                </p:cBhvr>
+                              </p:animEffect>
+                            </p:childTnLst>
+                          </p:cTn>
+                        </p:par>
+                        <p:par>
+                          <p:cTn id="31" dur="570" fill="hold" nodeType="afterEffect" grpId="0" presetID="10" presetClass="entr" presetSubtype="0">
+                            <p:stCondLst>
+                              <p:cond delay="1690"/>
+                            </p:stCondLst>
+                            <p:childTnLst>
+                              <p:set>
+                                <p:cBhvr>
+                                  <p:cTn id="32" dur="1" fill="hold">
+                                    <p:stCondLst>
+                                      <p:cond delay="0"/>
+                                    </p:stCondLst>
+                                  </p:cTn>
+                                  <p:tgtEl>
+                                    <p:spTgt spid="18"/>
+                                  </p:tgtEl>
+                                  <p:attrNameLst>
+                                    <p:attrName>style.visibility</p:attrName>
+                                  </p:attrNameLst>
+                                </p:cBhvr>
+                                <p:to>
+                                  <p:strVal val="visible"/>
+                                </p:to>
+                              </p:set>
+                              <p:animEffect transition="in" filter="dissolve">
+                                <p:cBhvr>
+                                  <p:cTn id="311" dur="570"/>
+                                  <p:tgtEl>
+                                    <p:spTgt spid="18"/>
+                                  </p:tgtEl>
+                                </p:cBhvr>
+                              </p:animEffect>
+                            </p:childTnLst>
+                          </p:cTn>
+                        </p:par>
+                      </p:childTnLst>
+                    </p:cTn>
+                  </p:par>
+                </p:childTnLst>
+              </p:cTn>
+              <p:prevCondLst>
+                <p:cond evt="onPrev" delay="0">
+                  <p:tgtEl>
+                    <p:sldTgt/>
+                  </p:tgtEl>
+                </p:cond>
+              </p:prevCondLst>
+              <p:nextCondLst>
+                <p:cond evt="onNext" delay="0">
+                  <p:tgtEl>
+                    <p:sldTgt/>
+                  </p:tgtEl>
+                </p:cond>
+              </p:nextCondLst>
+            </p:seq>
+          </p:childTnLst>
+        </p:cTn>
+      </p:par>
+    </p:tnLst>
+  </p:timing>
 </p:sld>
 </file>
 
@@ -16120,8 +23600,537 @@
     <a:masterClrMapping/>
   </p:clrMapOvr>
   <p:transition spd="med">
-    <p:push/>
+    <p:newsflash/>
   </p:transition>
+  <p:timing>
+    <p:tnLst>
+      <p:par>
+        <p:cTn id="1" dur="indefinite" restart="never" nodeType="tmRoot">
+          <p:childTnLst>
+            <p:seq concurrent="1" nextAc="seek">
+              <p:cTn id="2" dur="indefinite" nodeType="mainSeq">
+                <p:childTnLst>
+                  <p:par>
+                    <p:cTn id="3" fill="hold">
+                      <p:stCondLst>
+                        <p:cond delay="indefinite"/>
+                      </p:stCondLst>
+                      <p:childTnLst>
+                        <p:par>
+                          <p:cTn id="5" dur="570" fill="hold" nodeType="clickEffect" grpId="0" presetID="22" presetClass="entr" presetSubtype="8">
+                            <p:stCondLst>
+                              <p:cond delay="0"/>
+                            </p:stCondLst>
+                            <p:childTnLst>
+                              <p:set>
+                                <p:cBhvr>
+                                  <p:cTn id="6" dur="1" fill="hold">
+                                    <p:stCondLst>
+                                      <p:cond delay="0"/>
+                                    </p:stCondLst>
+                                  </p:cTn>
+                                  <p:tgtEl>
+                                    <p:spTgt spid="3"/>
+                                  </p:tgtEl>
+                                  <p:attrNameLst>
+                                    <p:attrName>style.visibility</p:attrName>
+                                  </p:attrNameLst>
+                                </p:cBhvr>
+                                <p:to>
+                                  <p:strVal val="visible"/>
+                                </p:to>
+                              </p:set>
+                              <p:animEffect transition="in" filter="wipe(left)">
+                                <p:cBhvr>
+                                  <p:cTn id="51" dur="570"/>
+                                  <p:tgtEl>
+                                    <p:spTgt spid="3"/>
+                                  </p:tgtEl>
+                                </p:cBhvr>
+                              </p:animEffect>
+                            </p:childTnLst>
+                          </p:cTn>
+                        </p:par>
+                        <p:par>
+                          <p:cTn id="7" dur="690" fill="hold" nodeType="afterEffect" grpId="0" presetID="37" presetClass="entr" presetSubtype="0">
+                            <p:stCondLst>
+                              <p:cond delay="130"/>
+                            </p:stCondLst>
+                            <p:childTnLst>
+                              <p:set>
+                                <p:cBhvr>
+                                  <p:cTn id="8" dur="1" fill="hold">
+                                    <p:stCondLst>
+                                      <p:cond delay="0"/>
+                                    </p:stCondLst>
+                                  </p:cTn>
+                                  <p:tgtEl>
+                                    <p:spTgt spid="4"/>
+                                  </p:tgtEl>
+                                  <p:attrNameLst>
+                                    <p:attrName>style.visibility</p:attrName>
+                                  </p:attrNameLst>
+                                </p:cBhvr>
+                                <p:to>
+                                  <p:strVal val="visible"/>
+                                </p:to>
+                              </p:set>
+                              <p:animEffect transition="in" filter="wedge">
+                                <p:cBhvr>
+                                  <p:cTn id="71" dur="690"/>
+                                  <p:tgtEl>
+                                    <p:spTgt spid="4"/>
+                                  </p:tgtEl>
+                                </p:cBhvr>
+                              </p:animEffect>
+                            </p:childTnLst>
+                          </p:cTn>
+                        </p:par>
+                        <p:par>
+                          <p:cTn id="9" dur="810" fill="hold" nodeType="afterEffect" grpId="0" presetID="52" presetClass="entr" presetSubtype="0">
+                            <p:stCondLst>
+                              <p:cond delay="260"/>
+                            </p:stCondLst>
+                            <p:childTnLst>
+                              <p:set>
+                                <p:cBhvr>
+                                  <p:cTn id="10" dur="1" fill="hold">
+                                    <p:stCondLst>
+                                      <p:cond delay="0"/>
+                                    </p:stCondLst>
+                                  </p:cTn>
+                                  <p:tgtEl>
+                                    <p:spTgt spid="5"/>
+                                  </p:tgtEl>
+                                  <p:attrNameLst>
+                                    <p:attrName>style.visibility</p:attrName>
+                                  </p:attrNameLst>
+                                </p:cBhvr>
+                                <p:to>
+                                  <p:strVal val="visible"/>
+                                </p:to>
+                              </p:set>
+                              <p:animEffect transition="in" filter="randombar(horizontal)">
+                                <p:cBhvr>
+                                  <p:cTn id="91" dur="810"/>
+                                  <p:tgtEl>
+                                    <p:spTgt spid="5"/>
+                                  </p:tgtEl>
+                                </p:cBhvr>
+                              </p:animEffect>
+                            </p:childTnLst>
+                          </p:cTn>
+                        </p:par>
+                        <p:par>
+                          <p:cTn id="11" dur="450" fill="hold" nodeType="afterEffect" grpId="0" presetID="21" presetClass="entr" presetSubtype="1">
+                            <p:stCondLst>
+                              <p:cond delay="390"/>
+                            </p:stCondLst>
+                            <p:childTnLst>
+                              <p:set>
+                                <p:cBhvr>
+                                  <p:cTn id="12" dur="1" fill="hold">
+                                    <p:stCondLst>
+                                      <p:cond delay="0"/>
+                                    </p:stCondLst>
+                                  </p:cTn>
+                                  <p:tgtEl>
+                                    <p:spTgt spid="9"/>
+                                  </p:tgtEl>
+                                  <p:attrNameLst>
+                                    <p:attrName>style.visibility</p:attrName>
+                                  </p:attrNameLst>
+                                </p:cBhvr>
+                                <p:to>
+                                  <p:strVal val="visible"/>
+                                </p:to>
+                              </p:set>
+                              <p:animEffect transition="in" filter="wheel(1)">
+                                <p:cBhvr>
+                                  <p:cTn id="111" dur="450"/>
+                                  <p:tgtEl>
+                                    <p:spTgt spid="9"/>
+                                  </p:tgtEl>
+                                </p:cBhvr>
+                              </p:animEffect>
+                            </p:childTnLst>
+                          </p:cTn>
+                        </p:par>
+                        <p:par>
+                          <p:cTn id="13" dur="570" fill="hold" nodeType="afterEffect" grpId="0" presetID="22" presetClass="entr" presetSubtype="4">
+                            <p:stCondLst>
+                              <p:cond delay="520"/>
+                            </p:stCondLst>
+                            <p:childTnLst>
+                              <p:set>
+                                <p:cBhvr>
+                                  <p:cTn id="14" dur="1" fill="hold">
+                                    <p:stCondLst>
+                                      <p:cond delay="0"/>
+                                    </p:stCondLst>
+                                  </p:cTn>
+                                  <p:tgtEl>
+                                    <p:spTgt spid="17"/>
+                                  </p:tgtEl>
+                                  <p:attrNameLst>
+                                    <p:attrName>style.visibility</p:attrName>
+                                  </p:attrNameLst>
+                                </p:cBhvr>
+                                <p:to>
+                                  <p:strVal val="visible"/>
+                                </p:to>
+                              </p:set>
+                              <p:animEffect transition="in" filter="wipe(down)">
+                                <p:cBhvr>
+                                  <p:cTn id="131" dur="570"/>
+                                  <p:tgtEl>
+                                    <p:spTgt spid="17"/>
+                                  </p:tgtEl>
+                                </p:cBhvr>
+                              </p:animEffect>
+                            </p:childTnLst>
+                          </p:cTn>
+                        </p:par>
+                        <p:par>
+                          <p:cTn id="15" dur="690" fill="hold" nodeType="afterEffect" grpId="0" presetID="9" presetClass="entr" presetSubtype="0">
+                            <p:stCondLst>
+                              <p:cond delay="650"/>
+                            </p:stCondLst>
+                            <p:childTnLst>
+                              <p:set>
+                                <p:cBhvr>
+                                  <p:cTn id="16" dur="1" fill="hold">
+                                    <p:stCondLst>
+                                      <p:cond delay="0"/>
+                                    </p:stCondLst>
+                                  </p:cTn>
+                                  <p:tgtEl>
+                                    <p:spTgt spid="10"/>
+                                  </p:tgtEl>
+                                  <p:attrNameLst>
+                                    <p:attrName>style.visibility</p:attrName>
+                                  </p:attrNameLst>
+                                </p:cBhvr>
+                                <p:to>
+                                  <p:strVal val="visible"/>
+                                </p:to>
+                              </p:set>
+                              <p:animEffect transition="in" filter="fade">
+                                <p:cBhvr>
+                                  <p:cTn id="151" dur="690"/>
+                                  <p:tgtEl>
+                                    <p:spTgt spid="10"/>
+                                  </p:tgtEl>
+                                </p:cBhvr>
+                              </p:animEffect>
+                            </p:childTnLst>
+                          </p:cTn>
+                        </p:par>
+                        <p:par>
+                          <p:cTn id="17" dur="810" fill="hold" nodeType="afterEffect" grpId="0" presetID="22" presetClass="entr" presetSubtype="2">
+                            <p:stCondLst>
+                              <p:cond delay="780"/>
+                            </p:stCondLst>
+                            <p:childTnLst>
+                              <p:set>
+                                <p:cBhvr>
+                                  <p:cTn id="18" dur="1" fill="hold">
+                                    <p:stCondLst>
+                                      <p:cond delay="0"/>
+                                    </p:stCondLst>
+                                  </p:cTn>
+                                  <p:tgtEl>
+                                    <p:spTgt spid="18"/>
+                                  </p:tgtEl>
+                                  <p:attrNameLst>
+                                    <p:attrName>style.visibility</p:attrName>
+                                  </p:attrNameLst>
+                                </p:cBhvr>
+                                <p:to>
+                                  <p:strVal val="visible"/>
+                                </p:to>
+                              </p:set>
+                              <p:animEffect transition="in" filter="wipe(right)">
+                                <p:cBhvr>
+                                  <p:cTn id="171" dur="810"/>
+                                  <p:tgtEl>
+                                    <p:spTgt spid="18"/>
+                                  </p:tgtEl>
+                                </p:cBhvr>
+                              </p:animEffect>
+                            </p:childTnLst>
+                          </p:cTn>
+                        </p:par>
+                        <p:par>
+                          <p:cTn id="19" dur="450" fill="hold" nodeType="afterEffect" grpId="0" presetID="18" presetClass="entr" presetSubtype="12">
+                            <p:stCondLst>
+                              <p:cond delay="910"/>
+                            </p:stCondLst>
+                            <p:childTnLst>
+                              <p:set>
+                                <p:cBhvr>
+                                  <p:cTn id="20" dur="1" fill="hold">
+                                    <p:stCondLst>
+                                      <p:cond delay="0"/>
+                                    </p:stCondLst>
+                                  </p:cTn>
+                                  <p:tgtEl>
+                                    <p:spTgt spid="8"/>
+                                  </p:tgtEl>
+                                  <p:attrNameLst>
+                                    <p:attrName>style.visibility</p:attrName>
+                                  </p:attrNameLst>
+                                </p:cBhvr>
+                                <p:to>
+                                  <p:strVal val="visible"/>
+                                </p:to>
+                              </p:set>
+                              <p:animEffect transition="in" filter="circle(in)">
+                                <p:cBhvr>
+                                  <p:cTn id="191" dur="450"/>
+                                  <p:tgtEl>
+                                    <p:spTgt spid="8"/>
+                                  </p:tgtEl>
+                                </p:cBhvr>
+                              </p:animEffect>
+                            </p:childTnLst>
+                          </p:cTn>
+                        </p:par>
+                        <p:par>
+                          <p:cTn id="21" dur="570" fill="hold" nodeType="afterEffect" grpId="0" presetID="22" presetClass="entr" presetSubtype="1">
+                            <p:stCondLst>
+                              <p:cond delay="1040"/>
+                            </p:stCondLst>
+                            <p:childTnLst>
+                              <p:set>
+                                <p:cBhvr>
+                                  <p:cTn id="22" dur="1" fill="hold">
+                                    <p:stCondLst>
+                                      <p:cond delay="0"/>
+                                    </p:stCondLst>
+                                  </p:cTn>
+                                  <p:tgtEl>
+                                    <p:spTgt spid="16"/>
+                                  </p:tgtEl>
+                                  <p:attrNameLst>
+                                    <p:attrName>style.visibility</p:attrName>
+                                  </p:attrNameLst>
+                                </p:cBhvr>
+                                <p:to>
+                                  <p:strVal val="visible"/>
+                                </p:to>
+                              </p:set>
+                              <p:animEffect transition="in" filter="wipe(up)">
+                                <p:cBhvr>
+                                  <p:cTn id="211" dur="570"/>
+                                  <p:tgtEl>
+                                    <p:spTgt spid="16"/>
+                                  </p:tgtEl>
+                                </p:cBhvr>
+                              </p:animEffect>
+                            </p:childTnLst>
+                          </p:cTn>
+                        </p:par>
+                        <p:par>
+                          <p:cTn id="23" dur="690" fill="hold" nodeType="afterEffect" grpId="0" presetID="42" presetClass="entr" presetSubtype="10">
+                            <p:stCondLst>
+                              <p:cond delay="1170"/>
+                            </p:stCondLst>
+                            <p:childTnLst>
+                              <p:set>
+                                <p:cBhvr>
+                                  <p:cTn id="24" dur="1" fill="hold">
+                                    <p:stCondLst>
+                                      <p:cond delay="0"/>
+                                    </p:stCondLst>
+                                  </p:cTn>
+                                  <p:tgtEl>
+                                    <p:spTgt spid="7"/>
+                                  </p:tgtEl>
+                                  <p:attrNameLst>
+                                    <p:attrName>style.visibility</p:attrName>
+                                  </p:attrNameLst>
+                                </p:cBhvr>
+                                <p:to>
+                                  <p:strVal val="visible"/>
+                                </p:to>
+                              </p:set>
+                              <p:animEffect transition="in" filter="blinds(horizontal)">
+                                <p:cBhvr>
+                                  <p:cTn id="231" dur="690"/>
+                                  <p:tgtEl>
+                                    <p:spTgt spid="7"/>
+                                  </p:tgtEl>
+                                </p:cBhvr>
+                              </p:animEffect>
+                            </p:childTnLst>
+                          </p:cTn>
+                        </p:par>
+                        <p:par>
+                          <p:cTn id="25" dur="810" fill="hold" nodeType="afterEffect" grpId="0" presetID="43" presetClass="entr" presetSubtype="0">
+                            <p:stCondLst>
+                              <p:cond delay="1300"/>
+                            </p:stCondLst>
+                            <p:childTnLst>
+                              <p:set>
+                                <p:cBhvr>
+                                  <p:cTn id="26" dur="1" fill="hold">
+                                    <p:stCondLst>
+                                      <p:cond delay="0"/>
+                                    </p:stCondLst>
+                                  </p:cTn>
+                                  <p:tgtEl>
+                                    <p:spTgt spid="11"/>
+                                  </p:tgtEl>
+                                  <p:attrNameLst>
+                                    <p:attrName>style.visibility</p:attrName>
+                                  </p:attrNameLst>
+                                </p:cBhvr>
+                                <p:to>
+                                  <p:strVal val="visible"/>
+                                </p:to>
+                              </p:set>
+                              <p:animEffect transition="in" filter="checkerboard(across)">
+                                <p:cBhvr>
+                                  <p:cTn id="251" dur="810"/>
+                                  <p:tgtEl>
+                                    <p:spTgt spid="11"/>
+                                  </p:tgtEl>
+                                </p:cBhvr>
+                              </p:animEffect>
+                            </p:childTnLst>
+                          </p:cTn>
+                        </p:par>
+                        <p:par>
+                          <p:cTn id="27" dur="450" fill="hold" nodeType="afterEffect" grpId="0" presetID="21" presetClass="entr" presetSubtype="2">
+                            <p:stCondLst>
+                              <p:cond delay="1430"/>
+                            </p:stCondLst>
+                            <p:childTnLst>
+                              <p:set>
+                                <p:cBhvr>
+                                  <p:cTn id="28" dur="1" fill="hold">
+                                    <p:stCondLst>
+                                      <p:cond delay="0"/>
+                                    </p:stCondLst>
+                                  </p:cTn>
+                                  <p:tgtEl>
+                                    <p:spTgt spid="15"/>
+                                  </p:tgtEl>
+                                  <p:attrNameLst>
+                                    <p:attrName>style.visibility</p:attrName>
+                                  </p:attrNameLst>
+                                </p:cBhvr>
+                                <p:to>
+                                  <p:strVal val="visible"/>
+                                </p:to>
+                              </p:set>
+                              <p:animEffect transition="in" filter="wheel(2)">
+                                <p:cBhvr>
+                                  <p:cTn id="271" dur="450"/>
+                                  <p:tgtEl>
+                                    <p:spTgt spid="15"/>
+                                  </p:tgtEl>
+                                </p:cBhvr>
+                              </p:animEffect>
+                            </p:childTnLst>
+                          </p:cTn>
+                        </p:par>
+                        <p:par>
+                          <p:cTn id="29" dur="570" fill="hold" nodeType="afterEffect" grpId="0" presetID="10" presetClass="entr" presetSubtype="0">
+                            <p:stCondLst>
+                              <p:cond delay="1560"/>
+                            </p:stCondLst>
+                            <p:childTnLst>
+                              <p:set>
+                                <p:cBhvr>
+                                  <p:cTn id="30" dur="1" fill="hold">
+                                    <p:stCondLst>
+                                      <p:cond delay="0"/>
+                                    </p:stCondLst>
+                                  </p:cTn>
+                                  <p:tgtEl>
+                                    <p:spTgt spid="19"/>
+                                  </p:tgtEl>
+                                  <p:attrNameLst>
+                                    <p:attrName>style.visibility</p:attrName>
+                                  </p:attrNameLst>
+                                </p:cBhvr>
+                                <p:to>
+                                  <p:strVal val="visible"/>
+                                </p:to>
+                              </p:set>
+                              <p:animEffect transition="in" filter="dissolve">
+                                <p:cBhvr>
+                                  <p:cTn id="291" dur="570"/>
+                                  <p:tgtEl>
+                                    <p:spTgt spid="19"/>
+                                  </p:tgtEl>
+                                </p:cBhvr>
+                              </p:animEffect>
+                            </p:childTnLst>
+                          </p:cTn>
+                        </p:par>
+                        <p:par>
+                          <p:cTn id="31" dur="690" fill="hold" nodeType="afterEffect" grpId="0" presetID="25" presetClass="entr" presetSubtype="1">
+                            <p:stCondLst>
+                              <p:cond delay="1690"/>
+                            </p:stCondLst>
+                            <p:childTnLst>
+                              <p:set>
+                                <p:cBhvr>
+                                  <p:cTn id="32" dur="1" fill="hold">
+                                    <p:stCondLst>
+                                      <p:cond delay="0"/>
+                                    </p:stCondLst>
+                                  </p:cTn>
+                                  <p:tgtEl>
+                                    <p:spTgt spid="6"/>
+                                  </p:tgtEl>
+                                  <p:attrNameLst>
+                                    <p:attrName>style.visibility</p:attrName>
+                                  </p:attrNameLst>
+                                </p:cBhvr>
+                                <p:to>
+                                  <p:strVal val="visible"/>
+                                </p:to>
+                              </p:set>
+                              <p:animEffect transition="in" filter="strips(downRight)">
+                                <p:cBhvr>
+                                  <p:cTn id="311" dur="690"/>
+                                  <p:tgtEl>
+                                    <p:spTgt spid="6"/>
+                                  </p:tgtEl>
+                                </p:cBhvr>
+                              </p:animEffect>
+                            </p:childTnLst>
+                          </p:cTn>
+                        </p:par>
+                      </p:childTnLst>
+                    </p:cTn>
+                  </p:par>
+                </p:childTnLst>
+              </p:cTn>
+              <p:prevCondLst>
+                <p:cond evt="onPrev" delay="0">
+                  <p:tgtEl>
+                    <p:sldTgt/>
+                  </p:tgtEl>
+                </p:cond>
+              </p:prevCondLst>
+              <p:nextCondLst>
+                <p:cond evt="onNext" delay="0">
+                  <p:tgtEl>
+                    <p:sldTgt/>
+                  </p:tgtEl>
+                </p:cond>
+              </p:nextCondLst>
+            </p:seq>
+          </p:childTnLst>
+        </p:cTn>
+      </p:par>
+    </p:tnLst>
+  </p:timing>
 </p:sld>
 </file>
 
@@ -16905,8 +24914,537 @@
     <a:masterClrMapping/>
   </p:clrMapOvr>
   <p:transition spd="med">
-    <p:push/>
+    <p:push dir="u"/>
   </p:transition>
+  <p:timing>
+    <p:tnLst>
+      <p:par>
+        <p:cTn id="1" dur="indefinite" restart="never" nodeType="tmRoot">
+          <p:childTnLst>
+            <p:seq concurrent="1" nextAc="seek">
+              <p:cTn id="2" dur="indefinite" nodeType="mainSeq">
+                <p:childTnLst>
+                  <p:par>
+                    <p:cTn id="3" fill="hold">
+                      <p:stCondLst>
+                        <p:cond delay="indefinite"/>
+                      </p:stCondLst>
+                      <p:childTnLst>
+                        <p:par>
+                          <p:cTn id="5" dur="690" fill="hold" nodeType="clickEffect" grpId="0" presetID="37" presetClass="entr" presetSubtype="0">
+                            <p:stCondLst>
+                              <p:cond delay="0"/>
+                            </p:stCondLst>
+                            <p:childTnLst>
+                              <p:set>
+                                <p:cBhvr>
+                                  <p:cTn id="6" dur="1" fill="hold">
+                                    <p:stCondLst>
+                                      <p:cond delay="0"/>
+                                    </p:stCondLst>
+                                  </p:cTn>
+                                  <p:tgtEl>
+                                    <p:spTgt spid="3"/>
+                                  </p:tgtEl>
+                                  <p:attrNameLst>
+                                    <p:attrName>style.visibility</p:attrName>
+                                  </p:attrNameLst>
+                                </p:cBhvr>
+                                <p:to>
+                                  <p:strVal val="visible"/>
+                                </p:to>
+                              </p:set>
+                              <p:animEffect transition="in" filter="wedge">
+                                <p:cBhvr>
+                                  <p:cTn id="51" dur="690"/>
+                                  <p:tgtEl>
+                                    <p:spTgt spid="3"/>
+                                  </p:tgtEl>
+                                </p:cBhvr>
+                              </p:animEffect>
+                            </p:childTnLst>
+                          </p:cTn>
+                        </p:par>
+                        <p:par>
+                          <p:cTn id="7" dur="810" fill="hold" nodeType="afterEffect" grpId="0" presetID="52" presetClass="entr" presetSubtype="0">
+                            <p:stCondLst>
+                              <p:cond delay="130"/>
+                            </p:stCondLst>
+                            <p:childTnLst>
+                              <p:set>
+                                <p:cBhvr>
+                                  <p:cTn id="8" dur="1" fill="hold">
+                                    <p:stCondLst>
+                                      <p:cond delay="0"/>
+                                    </p:stCondLst>
+                                  </p:cTn>
+                                  <p:tgtEl>
+                                    <p:spTgt spid="4"/>
+                                  </p:tgtEl>
+                                  <p:attrNameLst>
+                                    <p:attrName>style.visibility</p:attrName>
+                                  </p:attrNameLst>
+                                </p:cBhvr>
+                                <p:to>
+                                  <p:strVal val="visible"/>
+                                </p:to>
+                              </p:set>
+                              <p:animEffect transition="in" filter="randombar(horizontal)">
+                                <p:cBhvr>
+                                  <p:cTn id="71" dur="810"/>
+                                  <p:tgtEl>
+                                    <p:spTgt spid="4"/>
+                                  </p:tgtEl>
+                                </p:cBhvr>
+                              </p:animEffect>
+                            </p:childTnLst>
+                          </p:cTn>
+                        </p:par>
+                        <p:par>
+                          <p:cTn id="9" dur="450" fill="hold" nodeType="afterEffect" grpId="0" presetID="21" presetClass="entr" presetSubtype="1">
+                            <p:stCondLst>
+                              <p:cond delay="260"/>
+                            </p:stCondLst>
+                            <p:childTnLst>
+                              <p:set>
+                                <p:cBhvr>
+                                  <p:cTn id="10" dur="1" fill="hold">
+                                    <p:stCondLst>
+                                      <p:cond delay="0"/>
+                                    </p:stCondLst>
+                                  </p:cTn>
+                                  <p:tgtEl>
+                                    <p:spTgt spid="5"/>
+                                  </p:tgtEl>
+                                  <p:attrNameLst>
+                                    <p:attrName>style.visibility</p:attrName>
+                                  </p:attrNameLst>
+                                </p:cBhvr>
+                                <p:to>
+                                  <p:strVal val="visible"/>
+                                </p:to>
+                              </p:set>
+                              <p:animEffect transition="in" filter="wheel(1)">
+                                <p:cBhvr>
+                                  <p:cTn id="91" dur="450"/>
+                                  <p:tgtEl>
+                                    <p:spTgt spid="5"/>
+                                  </p:tgtEl>
+                                </p:cBhvr>
+                              </p:animEffect>
+                            </p:childTnLst>
+                          </p:cTn>
+                        </p:par>
+                        <p:par>
+                          <p:cTn id="11" dur="570" fill="hold" nodeType="afterEffect" grpId="0" presetID="22" presetClass="entr" presetSubtype="4">
+                            <p:stCondLst>
+                              <p:cond delay="390"/>
+                            </p:stCondLst>
+                            <p:childTnLst>
+                              <p:set>
+                                <p:cBhvr>
+                                  <p:cTn id="12" dur="1" fill="hold">
+                                    <p:stCondLst>
+                                      <p:cond delay="0"/>
+                                    </p:stCondLst>
+                                  </p:cTn>
+                                  <p:tgtEl>
+                                    <p:spTgt spid="6"/>
+                                  </p:tgtEl>
+                                  <p:attrNameLst>
+                                    <p:attrName>style.visibility</p:attrName>
+                                  </p:attrNameLst>
+                                </p:cBhvr>
+                                <p:to>
+                                  <p:strVal val="visible"/>
+                                </p:to>
+                              </p:set>
+                              <p:animEffect transition="in" filter="wipe(down)">
+                                <p:cBhvr>
+                                  <p:cTn id="111" dur="570"/>
+                                  <p:tgtEl>
+                                    <p:spTgt spid="6"/>
+                                  </p:tgtEl>
+                                </p:cBhvr>
+                              </p:animEffect>
+                            </p:childTnLst>
+                          </p:cTn>
+                        </p:par>
+                        <p:par>
+                          <p:cTn id="13" dur="690" fill="hold" nodeType="afterEffect" grpId="0" presetID="9" presetClass="entr" presetSubtype="0">
+                            <p:stCondLst>
+                              <p:cond delay="520"/>
+                            </p:stCondLst>
+                            <p:childTnLst>
+                              <p:set>
+                                <p:cBhvr>
+                                  <p:cTn id="14" dur="1" fill="hold">
+                                    <p:stCondLst>
+                                      <p:cond delay="0"/>
+                                    </p:stCondLst>
+                                  </p:cTn>
+                                  <p:tgtEl>
+                                    <p:spTgt spid="9"/>
+                                  </p:tgtEl>
+                                  <p:attrNameLst>
+                                    <p:attrName>style.visibility</p:attrName>
+                                  </p:attrNameLst>
+                                </p:cBhvr>
+                                <p:to>
+                                  <p:strVal val="visible"/>
+                                </p:to>
+                              </p:set>
+                              <p:animEffect transition="in" filter="fade">
+                                <p:cBhvr>
+                                  <p:cTn id="131" dur="690"/>
+                                  <p:tgtEl>
+                                    <p:spTgt spid="9"/>
+                                  </p:tgtEl>
+                                </p:cBhvr>
+                              </p:animEffect>
+                            </p:childTnLst>
+                          </p:cTn>
+                        </p:par>
+                        <p:par>
+                          <p:cTn id="15" dur="810" fill="hold" nodeType="afterEffect" grpId="0" presetID="22" presetClass="entr" presetSubtype="2">
+                            <p:stCondLst>
+                              <p:cond delay="650"/>
+                            </p:stCondLst>
+                            <p:childTnLst>
+                              <p:set>
+                                <p:cBhvr>
+                                  <p:cTn id="16" dur="1" fill="hold">
+                                    <p:stCondLst>
+                                      <p:cond delay="0"/>
+                                    </p:stCondLst>
+                                  </p:cTn>
+                                  <p:tgtEl>
+                                    <p:spTgt spid="12"/>
+                                  </p:tgtEl>
+                                  <p:attrNameLst>
+                                    <p:attrName>style.visibility</p:attrName>
+                                  </p:attrNameLst>
+                                </p:cBhvr>
+                                <p:to>
+                                  <p:strVal val="visible"/>
+                                </p:to>
+                              </p:set>
+                              <p:animEffect transition="in" filter="wipe(right)">
+                                <p:cBhvr>
+                                  <p:cTn id="151" dur="810"/>
+                                  <p:tgtEl>
+                                    <p:spTgt spid="12"/>
+                                  </p:tgtEl>
+                                </p:cBhvr>
+                              </p:animEffect>
+                            </p:childTnLst>
+                          </p:cTn>
+                        </p:par>
+                        <p:par>
+                          <p:cTn id="17" dur="450" fill="hold" nodeType="afterEffect" grpId="0" presetID="18" presetClass="entr" presetSubtype="12">
+                            <p:stCondLst>
+                              <p:cond delay="780"/>
+                            </p:stCondLst>
+                            <p:childTnLst>
+                              <p:set>
+                                <p:cBhvr>
+                                  <p:cTn id="18" dur="1" fill="hold">
+                                    <p:stCondLst>
+                                      <p:cond delay="0"/>
+                                    </p:stCondLst>
+                                  </p:cTn>
+                                  <p:tgtEl>
+                                    <p:spTgt spid="15"/>
+                                  </p:tgtEl>
+                                  <p:attrNameLst>
+                                    <p:attrName>style.visibility</p:attrName>
+                                  </p:attrNameLst>
+                                </p:cBhvr>
+                                <p:to>
+                                  <p:strVal val="visible"/>
+                                </p:to>
+                              </p:set>
+                              <p:animEffect transition="in" filter="circle(in)">
+                                <p:cBhvr>
+                                  <p:cTn id="171" dur="450"/>
+                                  <p:tgtEl>
+                                    <p:spTgt spid="15"/>
+                                  </p:tgtEl>
+                                </p:cBhvr>
+                              </p:animEffect>
+                            </p:childTnLst>
+                          </p:cTn>
+                        </p:par>
+                        <p:par>
+                          <p:cTn id="19" dur="570" fill="hold" nodeType="afterEffect" grpId="0" presetID="22" presetClass="entr" presetSubtype="1">
+                            <p:stCondLst>
+                              <p:cond delay="910"/>
+                            </p:stCondLst>
+                            <p:childTnLst>
+                              <p:set>
+                                <p:cBhvr>
+                                  <p:cTn id="20" dur="1" fill="hold">
+                                    <p:stCondLst>
+                                      <p:cond delay="0"/>
+                                    </p:stCondLst>
+                                  </p:cTn>
+                                  <p:tgtEl>
+                                    <p:spTgt spid="7"/>
+                                  </p:tgtEl>
+                                  <p:attrNameLst>
+                                    <p:attrName>style.visibility</p:attrName>
+                                  </p:attrNameLst>
+                                </p:cBhvr>
+                                <p:to>
+                                  <p:strVal val="visible"/>
+                                </p:to>
+                              </p:set>
+                              <p:animEffect transition="in" filter="wipe(up)">
+                                <p:cBhvr>
+                                  <p:cTn id="191" dur="570"/>
+                                  <p:tgtEl>
+                                    <p:spTgt spid="7"/>
+                                  </p:tgtEl>
+                                </p:cBhvr>
+                              </p:animEffect>
+                            </p:childTnLst>
+                          </p:cTn>
+                        </p:par>
+                        <p:par>
+                          <p:cTn id="21" dur="690" fill="hold" nodeType="afterEffect" grpId="0" presetID="42" presetClass="entr" presetSubtype="10">
+                            <p:stCondLst>
+                              <p:cond delay="1040"/>
+                            </p:stCondLst>
+                            <p:childTnLst>
+                              <p:set>
+                                <p:cBhvr>
+                                  <p:cTn id="22" dur="1" fill="hold">
+                                    <p:stCondLst>
+                                      <p:cond delay="0"/>
+                                    </p:stCondLst>
+                                  </p:cTn>
+                                  <p:tgtEl>
+                                    <p:spTgt spid="8"/>
+                                  </p:tgtEl>
+                                  <p:attrNameLst>
+                                    <p:attrName>style.visibility</p:attrName>
+                                  </p:attrNameLst>
+                                </p:cBhvr>
+                                <p:to>
+                                  <p:strVal val="visible"/>
+                                </p:to>
+                              </p:set>
+                              <p:animEffect transition="in" filter="blinds(horizontal)">
+                                <p:cBhvr>
+                                  <p:cTn id="211" dur="690"/>
+                                  <p:tgtEl>
+                                    <p:spTgt spid="8"/>
+                                  </p:tgtEl>
+                                </p:cBhvr>
+                              </p:animEffect>
+                            </p:childTnLst>
+                          </p:cTn>
+                        </p:par>
+                        <p:par>
+                          <p:cTn id="23" dur="810" fill="hold" nodeType="afterEffect" grpId="0" presetID="43" presetClass="entr" presetSubtype="0">
+                            <p:stCondLst>
+                              <p:cond delay="1170"/>
+                            </p:stCondLst>
+                            <p:childTnLst>
+                              <p:set>
+                                <p:cBhvr>
+                                  <p:cTn id="24" dur="1" fill="hold">
+                                    <p:stCondLst>
+                                      <p:cond delay="0"/>
+                                    </p:stCondLst>
+                                  </p:cTn>
+                                  <p:tgtEl>
+                                    <p:spTgt spid="10"/>
+                                  </p:tgtEl>
+                                  <p:attrNameLst>
+                                    <p:attrName>style.visibility</p:attrName>
+                                  </p:attrNameLst>
+                                </p:cBhvr>
+                                <p:to>
+                                  <p:strVal val="visible"/>
+                                </p:to>
+                              </p:set>
+                              <p:animEffect transition="in" filter="checkerboard(across)">
+                                <p:cBhvr>
+                                  <p:cTn id="231" dur="810"/>
+                                  <p:tgtEl>
+                                    <p:spTgt spid="10"/>
+                                  </p:tgtEl>
+                                </p:cBhvr>
+                              </p:animEffect>
+                            </p:childTnLst>
+                          </p:cTn>
+                        </p:par>
+                        <p:par>
+                          <p:cTn id="25" dur="450" fill="hold" nodeType="afterEffect" grpId="0" presetID="21" presetClass="entr" presetSubtype="2">
+                            <p:stCondLst>
+                              <p:cond delay="1300"/>
+                            </p:stCondLst>
+                            <p:childTnLst>
+                              <p:set>
+                                <p:cBhvr>
+                                  <p:cTn id="26" dur="1" fill="hold">
+                                    <p:stCondLst>
+                                      <p:cond delay="0"/>
+                                    </p:stCondLst>
+                                  </p:cTn>
+                                  <p:tgtEl>
+                                    <p:spTgt spid="11"/>
+                                  </p:tgtEl>
+                                  <p:attrNameLst>
+                                    <p:attrName>style.visibility</p:attrName>
+                                  </p:attrNameLst>
+                                </p:cBhvr>
+                                <p:to>
+                                  <p:strVal val="visible"/>
+                                </p:to>
+                              </p:set>
+                              <p:animEffect transition="in" filter="wheel(2)">
+                                <p:cBhvr>
+                                  <p:cTn id="251" dur="450"/>
+                                  <p:tgtEl>
+                                    <p:spTgt spid="11"/>
+                                  </p:tgtEl>
+                                </p:cBhvr>
+                              </p:animEffect>
+                            </p:childTnLst>
+                          </p:cTn>
+                        </p:par>
+                        <p:par>
+                          <p:cTn id="27" dur="570" fill="hold" nodeType="afterEffect" grpId="0" presetID="10" presetClass="entr" presetSubtype="0">
+                            <p:stCondLst>
+                              <p:cond delay="1430"/>
+                            </p:stCondLst>
+                            <p:childTnLst>
+                              <p:set>
+                                <p:cBhvr>
+                                  <p:cTn id="28" dur="1" fill="hold">
+                                    <p:stCondLst>
+                                      <p:cond delay="0"/>
+                                    </p:stCondLst>
+                                  </p:cTn>
+                                  <p:tgtEl>
+                                    <p:spTgt spid="13"/>
+                                  </p:tgtEl>
+                                  <p:attrNameLst>
+                                    <p:attrName>style.visibility</p:attrName>
+                                  </p:attrNameLst>
+                                </p:cBhvr>
+                                <p:to>
+                                  <p:strVal val="visible"/>
+                                </p:to>
+                              </p:set>
+                              <p:animEffect transition="in" filter="dissolve">
+                                <p:cBhvr>
+                                  <p:cTn id="271" dur="570"/>
+                                  <p:tgtEl>
+                                    <p:spTgt spid="13"/>
+                                  </p:tgtEl>
+                                </p:cBhvr>
+                              </p:animEffect>
+                            </p:childTnLst>
+                          </p:cTn>
+                        </p:par>
+                        <p:par>
+                          <p:cTn id="29" dur="690" fill="hold" nodeType="afterEffect" grpId="0" presetID="25" presetClass="entr" presetSubtype="1">
+                            <p:stCondLst>
+                              <p:cond delay="1560"/>
+                            </p:stCondLst>
+                            <p:childTnLst>
+                              <p:set>
+                                <p:cBhvr>
+                                  <p:cTn id="30" dur="1" fill="hold">
+                                    <p:stCondLst>
+                                      <p:cond delay="0"/>
+                                    </p:stCondLst>
+                                  </p:cTn>
+                                  <p:tgtEl>
+                                    <p:spTgt spid="14"/>
+                                  </p:tgtEl>
+                                  <p:attrNameLst>
+                                    <p:attrName>style.visibility</p:attrName>
+                                  </p:attrNameLst>
+                                </p:cBhvr>
+                                <p:to>
+                                  <p:strVal val="visible"/>
+                                </p:to>
+                              </p:set>
+                              <p:animEffect transition="in" filter="strips(downRight)">
+                                <p:cBhvr>
+                                  <p:cTn id="291" dur="690"/>
+                                  <p:tgtEl>
+                                    <p:spTgt spid="14"/>
+                                  </p:tgtEl>
+                                </p:cBhvr>
+                              </p:animEffect>
+                            </p:childTnLst>
+                          </p:cTn>
+                        </p:par>
+                        <p:par>
+                          <p:cTn id="31" dur="810" fill="hold" nodeType="afterEffect" grpId="0" presetID="45" presetClass="entr" presetSubtype="1">
+                            <p:stCondLst>
+                              <p:cond delay="1690"/>
+                            </p:stCondLst>
+                            <p:childTnLst>
+                              <p:set>
+                                <p:cBhvr>
+                                  <p:cTn id="32" dur="1" fill="hold">
+                                    <p:stCondLst>
+                                      <p:cond delay="0"/>
+                                    </p:stCondLst>
+                                  </p:cTn>
+                                  <p:tgtEl>
+                                    <p:spTgt spid="16"/>
+                                  </p:tgtEl>
+                                  <p:attrNameLst>
+                                    <p:attrName>style.visibility</p:attrName>
+                                  </p:attrNameLst>
+                                </p:cBhvr>
+                                <p:to>
+                                  <p:strVal val="visible"/>
+                                </p:to>
+                              </p:set>
+                              <p:animEffect transition="in" filter="barn(inHorizontal)">
+                                <p:cBhvr>
+                                  <p:cTn id="311" dur="810"/>
+                                  <p:tgtEl>
+                                    <p:spTgt spid="16"/>
+                                  </p:tgtEl>
+                                </p:cBhvr>
+                              </p:animEffect>
+                            </p:childTnLst>
+                          </p:cTn>
+                        </p:par>
+                      </p:childTnLst>
+                    </p:cTn>
+                  </p:par>
+                </p:childTnLst>
+              </p:cTn>
+              <p:prevCondLst>
+                <p:cond evt="onPrev" delay="0">
+                  <p:tgtEl>
+                    <p:sldTgt/>
+                  </p:tgtEl>
+                </p:cond>
+              </p:prevCondLst>
+              <p:nextCondLst>
+                <p:cond evt="onNext" delay="0">
+                  <p:tgtEl>
+                    <p:sldTgt/>
+                  </p:tgtEl>
+                </p:cond>
+              </p:nextCondLst>
+            </p:seq>
+          </p:childTnLst>
+        </p:cTn>
+      </p:par>
+    </p:tnLst>
+  </p:timing>
 </p:sld>
 </file>
 
@@ -17889,8 +26427,537 @@
     <a:masterClrMapping/>
   </p:clrMapOvr>
   <p:transition spd="med">
-    <p:push/>
+    <p:wipe dir="d"/>
   </p:transition>
+  <p:timing>
+    <p:tnLst>
+      <p:par>
+        <p:cTn id="1" dur="indefinite" restart="never" nodeType="tmRoot">
+          <p:childTnLst>
+            <p:seq concurrent="1" nextAc="seek">
+              <p:cTn id="2" dur="indefinite" nodeType="mainSeq">
+                <p:childTnLst>
+                  <p:par>
+                    <p:cTn id="3" fill="hold">
+                      <p:stCondLst>
+                        <p:cond delay="indefinite"/>
+                      </p:stCondLst>
+                      <p:childTnLst>
+                        <p:par>
+                          <p:cTn id="5" dur="810" fill="hold" nodeType="clickEffect" grpId="0" presetID="52" presetClass="entr" presetSubtype="0">
+                            <p:stCondLst>
+                              <p:cond delay="0"/>
+                            </p:stCondLst>
+                            <p:childTnLst>
+                              <p:set>
+                                <p:cBhvr>
+                                  <p:cTn id="6" dur="1" fill="hold">
+                                    <p:stCondLst>
+                                      <p:cond delay="0"/>
+                                    </p:stCondLst>
+                                  </p:cTn>
+                                  <p:tgtEl>
+                                    <p:spTgt spid="3"/>
+                                  </p:tgtEl>
+                                  <p:attrNameLst>
+                                    <p:attrName>style.visibility</p:attrName>
+                                  </p:attrNameLst>
+                                </p:cBhvr>
+                                <p:to>
+                                  <p:strVal val="visible"/>
+                                </p:to>
+                              </p:set>
+                              <p:animEffect transition="in" filter="randombar(horizontal)">
+                                <p:cBhvr>
+                                  <p:cTn id="51" dur="810"/>
+                                  <p:tgtEl>
+                                    <p:spTgt spid="3"/>
+                                  </p:tgtEl>
+                                </p:cBhvr>
+                              </p:animEffect>
+                            </p:childTnLst>
+                          </p:cTn>
+                        </p:par>
+                        <p:par>
+                          <p:cTn id="7" dur="450" fill="hold" nodeType="afterEffect" grpId="0" presetID="21" presetClass="entr" presetSubtype="1">
+                            <p:stCondLst>
+                              <p:cond delay="130"/>
+                            </p:stCondLst>
+                            <p:childTnLst>
+                              <p:set>
+                                <p:cBhvr>
+                                  <p:cTn id="8" dur="1" fill="hold">
+                                    <p:stCondLst>
+                                      <p:cond delay="0"/>
+                                    </p:stCondLst>
+                                  </p:cTn>
+                                  <p:tgtEl>
+                                    <p:spTgt spid="4"/>
+                                  </p:tgtEl>
+                                  <p:attrNameLst>
+                                    <p:attrName>style.visibility</p:attrName>
+                                  </p:attrNameLst>
+                                </p:cBhvr>
+                                <p:to>
+                                  <p:strVal val="visible"/>
+                                </p:to>
+                              </p:set>
+                              <p:animEffect transition="in" filter="wheel(1)">
+                                <p:cBhvr>
+                                  <p:cTn id="71" dur="450"/>
+                                  <p:tgtEl>
+                                    <p:spTgt spid="4"/>
+                                  </p:tgtEl>
+                                </p:cBhvr>
+                              </p:animEffect>
+                            </p:childTnLst>
+                          </p:cTn>
+                        </p:par>
+                        <p:par>
+                          <p:cTn id="9" dur="570" fill="hold" nodeType="afterEffect" grpId="0" presetID="22" presetClass="entr" presetSubtype="4">
+                            <p:stCondLst>
+                              <p:cond delay="260"/>
+                            </p:stCondLst>
+                            <p:childTnLst>
+                              <p:set>
+                                <p:cBhvr>
+                                  <p:cTn id="10" dur="1" fill="hold">
+                                    <p:stCondLst>
+                                      <p:cond delay="0"/>
+                                    </p:stCondLst>
+                                  </p:cTn>
+                                  <p:tgtEl>
+                                    <p:spTgt spid="5"/>
+                                  </p:tgtEl>
+                                  <p:attrNameLst>
+                                    <p:attrName>style.visibility</p:attrName>
+                                  </p:attrNameLst>
+                                </p:cBhvr>
+                                <p:to>
+                                  <p:strVal val="visible"/>
+                                </p:to>
+                              </p:set>
+                              <p:animEffect transition="in" filter="wipe(down)">
+                                <p:cBhvr>
+                                  <p:cTn id="91" dur="570"/>
+                                  <p:tgtEl>
+                                    <p:spTgt spid="5"/>
+                                  </p:tgtEl>
+                                </p:cBhvr>
+                              </p:animEffect>
+                            </p:childTnLst>
+                          </p:cTn>
+                        </p:par>
+                        <p:par>
+                          <p:cTn id="11" dur="690" fill="hold" nodeType="afterEffect" grpId="0" presetID="9" presetClass="entr" presetSubtype="0">
+                            <p:stCondLst>
+                              <p:cond delay="390"/>
+                            </p:stCondLst>
+                            <p:childTnLst>
+                              <p:set>
+                                <p:cBhvr>
+                                  <p:cTn id="12" dur="1" fill="hold">
+                                    <p:stCondLst>
+                                      <p:cond delay="0"/>
+                                    </p:stCondLst>
+                                  </p:cTn>
+                                  <p:tgtEl>
+                                    <p:spTgt spid="6"/>
+                                  </p:tgtEl>
+                                  <p:attrNameLst>
+                                    <p:attrName>style.visibility</p:attrName>
+                                  </p:attrNameLst>
+                                </p:cBhvr>
+                                <p:to>
+                                  <p:strVal val="visible"/>
+                                </p:to>
+                              </p:set>
+                              <p:animEffect transition="in" filter="fade">
+                                <p:cBhvr>
+                                  <p:cTn id="111" dur="690"/>
+                                  <p:tgtEl>
+                                    <p:spTgt spid="6"/>
+                                  </p:tgtEl>
+                                </p:cBhvr>
+                              </p:animEffect>
+                            </p:childTnLst>
+                          </p:cTn>
+                        </p:par>
+                        <p:par>
+                          <p:cTn id="13" dur="810" fill="hold" nodeType="afterEffect" grpId="0" presetID="22" presetClass="entr" presetSubtype="2">
+                            <p:stCondLst>
+                              <p:cond delay="520"/>
+                            </p:stCondLst>
+                            <p:childTnLst>
+                              <p:set>
+                                <p:cBhvr>
+                                  <p:cTn id="14" dur="1" fill="hold">
+                                    <p:stCondLst>
+                                      <p:cond delay="0"/>
+                                    </p:stCondLst>
+                                  </p:cTn>
+                                  <p:tgtEl>
+                                    <p:spTgt spid="19"/>
+                                  </p:tgtEl>
+                                  <p:attrNameLst>
+                                    <p:attrName>style.visibility</p:attrName>
+                                  </p:attrNameLst>
+                                </p:cBhvr>
+                                <p:to>
+                                  <p:strVal val="visible"/>
+                                </p:to>
+                              </p:set>
+                              <p:animEffect transition="in" filter="wipe(right)">
+                                <p:cBhvr>
+                                  <p:cTn id="131" dur="810"/>
+                                  <p:tgtEl>
+                                    <p:spTgt spid="19"/>
+                                  </p:tgtEl>
+                                </p:cBhvr>
+                              </p:animEffect>
+                            </p:childTnLst>
+                          </p:cTn>
+                        </p:par>
+                        <p:par>
+                          <p:cTn id="15" dur="450" fill="hold" nodeType="afterEffect" grpId="0" presetID="18" presetClass="entr" presetSubtype="12">
+                            <p:stCondLst>
+                              <p:cond delay="650"/>
+                            </p:stCondLst>
+                            <p:childTnLst>
+                              <p:set>
+                                <p:cBhvr>
+                                  <p:cTn id="16" dur="1" fill="hold">
+                                    <p:stCondLst>
+                                      <p:cond delay="0"/>
+                                    </p:stCondLst>
+                                  </p:cTn>
+                                  <p:tgtEl>
+                                    <p:spTgt spid="17"/>
+                                  </p:tgtEl>
+                                  <p:attrNameLst>
+                                    <p:attrName>style.visibility</p:attrName>
+                                  </p:attrNameLst>
+                                </p:cBhvr>
+                                <p:to>
+                                  <p:strVal val="visible"/>
+                                </p:to>
+                              </p:set>
+                              <p:animEffect transition="in" filter="circle(in)">
+                                <p:cBhvr>
+                                  <p:cTn id="151" dur="450"/>
+                                  <p:tgtEl>
+                                    <p:spTgt spid="17"/>
+                                  </p:tgtEl>
+                                </p:cBhvr>
+                              </p:animEffect>
+                            </p:childTnLst>
+                          </p:cTn>
+                        </p:par>
+                        <p:par>
+                          <p:cTn id="17" dur="570" fill="hold" nodeType="afterEffect" grpId="0" presetID="22" presetClass="entr" presetSubtype="1">
+                            <p:stCondLst>
+                              <p:cond delay="780"/>
+                            </p:stCondLst>
+                            <p:childTnLst>
+                              <p:set>
+                                <p:cBhvr>
+                                  <p:cTn id="18" dur="1" fill="hold">
+                                    <p:stCondLst>
+                                      <p:cond delay="0"/>
+                                    </p:stCondLst>
+                                  </p:cTn>
+                                  <p:tgtEl>
+                                    <p:spTgt spid="11"/>
+                                  </p:tgtEl>
+                                  <p:attrNameLst>
+                                    <p:attrName>style.visibility</p:attrName>
+                                  </p:attrNameLst>
+                                </p:cBhvr>
+                                <p:to>
+                                  <p:strVal val="visible"/>
+                                </p:to>
+                              </p:set>
+                              <p:animEffect transition="in" filter="wipe(up)">
+                                <p:cBhvr>
+                                  <p:cTn id="171" dur="570"/>
+                                  <p:tgtEl>
+                                    <p:spTgt spid="11"/>
+                                  </p:tgtEl>
+                                </p:cBhvr>
+                              </p:animEffect>
+                            </p:childTnLst>
+                          </p:cTn>
+                        </p:par>
+                        <p:par>
+                          <p:cTn id="19" dur="690" fill="hold" nodeType="afterEffect" grpId="0" presetID="42" presetClass="entr" presetSubtype="10">
+                            <p:stCondLst>
+                              <p:cond delay="910"/>
+                            </p:stCondLst>
+                            <p:childTnLst>
+                              <p:set>
+                                <p:cBhvr>
+                                  <p:cTn id="20" dur="1" fill="hold">
+                                    <p:stCondLst>
+                                      <p:cond delay="0"/>
+                                    </p:stCondLst>
+                                  </p:cTn>
+                                  <p:tgtEl>
+                                    <p:spTgt spid="20"/>
+                                  </p:tgtEl>
+                                  <p:attrNameLst>
+                                    <p:attrName>style.visibility</p:attrName>
+                                  </p:attrNameLst>
+                                </p:cBhvr>
+                                <p:to>
+                                  <p:strVal val="visible"/>
+                                </p:to>
+                              </p:set>
+                              <p:animEffect transition="in" filter="blinds(horizontal)">
+                                <p:cBhvr>
+                                  <p:cTn id="191" dur="690"/>
+                                  <p:tgtEl>
+                                    <p:spTgt spid="20"/>
+                                  </p:tgtEl>
+                                </p:cBhvr>
+                              </p:animEffect>
+                            </p:childTnLst>
+                          </p:cTn>
+                        </p:par>
+                        <p:par>
+                          <p:cTn id="21" dur="810" fill="hold" nodeType="afterEffect" grpId="0" presetID="43" presetClass="entr" presetSubtype="0">
+                            <p:stCondLst>
+                              <p:cond delay="1040"/>
+                            </p:stCondLst>
+                            <p:childTnLst>
+                              <p:set>
+                                <p:cBhvr>
+                                  <p:cTn id="22" dur="1" fill="hold">
+                                    <p:stCondLst>
+                                      <p:cond delay="0"/>
+                                    </p:stCondLst>
+                                  </p:cTn>
+                                  <p:tgtEl>
+                                    <p:spTgt spid="15"/>
+                                  </p:tgtEl>
+                                  <p:attrNameLst>
+                                    <p:attrName>style.visibility</p:attrName>
+                                  </p:attrNameLst>
+                                </p:cBhvr>
+                                <p:to>
+                                  <p:strVal val="visible"/>
+                                </p:to>
+                              </p:set>
+                              <p:animEffect transition="in" filter="checkerboard(across)">
+                                <p:cBhvr>
+                                  <p:cTn id="211" dur="810"/>
+                                  <p:tgtEl>
+                                    <p:spTgt spid="15"/>
+                                  </p:tgtEl>
+                                </p:cBhvr>
+                              </p:animEffect>
+                            </p:childTnLst>
+                          </p:cTn>
+                        </p:par>
+                        <p:par>
+                          <p:cTn id="23" dur="450" fill="hold" nodeType="afterEffect" grpId="0" presetID="21" presetClass="entr" presetSubtype="2">
+                            <p:stCondLst>
+                              <p:cond delay="1170"/>
+                            </p:stCondLst>
+                            <p:childTnLst>
+                              <p:set>
+                                <p:cBhvr>
+                                  <p:cTn id="24" dur="1" fill="hold">
+                                    <p:stCondLst>
+                                      <p:cond delay="0"/>
+                                    </p:stCondLst>
+                                  </p:cTn>
+                                  <p:tgtEl>
+                                    <p:spTgt spid="9"/>
+                                  </p:tgtEl>
+                                  <p:attrNameLst>
+                                    <p:attrName>style.visibility</p:attrName>
+                                  </p:attrNameLst>
+                                </p:cBhvr>
+                                <p:to>
+                                  <p:strVal val="visible"/>
+                                </p:to>
+                              </p:set>
+                              <p:animEffect transition="in" filter="wheel(2)">
+                                <p:cBhvr>
+                                  <p:cTn id="231" dur="450"/>
+                                  <p:tgtEl>
+                                    <p:spTgt spid="9"/>
+                                  </p:tgtEl>
+                                </p:cBhvr>
+                              </p:animEffect>
+                            </p:childTnLst>
+                          </p:cTn>
+                        </p:par>
+                        <p:par>
+                          <p:cTn id="25" dur="570" fill="hold" nodeType="afterEffect" grpId="0" presetID="10" presetClass="entr" presetSubtype="0">
+                            <p:stCondLst>
+                              <p:cond delay="1300"/>
+                            </p:stCondLst>
+                            <p:childTnLst>
+                              <p:set>
+                                <p:cBhvr>
+                                  <p:cTn id="26" dur="1" fill="hold">
+                                    <p:stCondLst>
+                                      <p:cond delay="0"/>
+                                    </p:stCondLst>
+                                  </p:cTn>
+                                  <p:tgtEl>
+                                    <p:spTgt spid="10"/>
+                                  </p:tgtEl>
+                                  <p:attrNameLst>
+                                    <p:attrName>style.visibility</p:attrName>
+                                  </p:attrNameLst>
+                                </p:cBhvr>
+                                <p:to>
+                                  <p:strVal val="visible"/>
+                                </p:to>
+                              </p:set>
+                              <p:animEffect transition="in" filter="dissolve">
+                                <p:cBhvr>
+                                  <p:cTn id="251" dur="570"/>
+                                  <p:tgtEl>
+                                    <p:spTgt spid="10"/>
+                                  </p:tgtEl>
+                                </p:cBhvr>
+                              </p:animEffect>
+                            </p:childTnLst>
+                          </p:cTn>
+                        </p:par>
+                        <p:par>
+                          <p:cTn id="27" dur="690" fill="hold" nodeType="afterEffect" grpId="0" presetID="25" presetClass="entr" presetSubtype="1">
+                            <p:stCondLst>
+                              <p:cond delay="1430"/>
+                            </p:stCondLst>
+                            <p:childTnLst>
+                              <p:set>
+                                <p:cBhvr>
+                                  <p:cTn id="28" dur="1" fill="hold">
+                                    <p:stCondLst>
+                                      <p:cond delay="0"/>
+                                    </p:stCondLst>
+                                  </p:cTn>
+                                  <p:tgtEl>
+                                    <p:spTgt spid="16"/>
+                                  </p:tgtEl>
+                                  <p:attrNameLst>
+                                    <p:attrName>style.visibility</p:attrName>
+                                  </p:attrNameLst>
+                                </p:cBhvr>
+                                <p:to>
+                                  <p:strVal val="visible"/>
+                                </p:to>
+                              </p:set>
+                              <p:animEffect transition="in" filter="strips(downRight)">
+                                <p:cBhvr>
+                                  <p:cTn id="271" dur="690"/>
+                                  <p:tgtEl>
+                                    <p:spTgt spid="16"/>
+                                  </p:tgtEl>
+                                </p:cBhvr>
+                              </p:animEffect>
+                            </p:childTnLst>
+                          </p:cTn>
+                        </p:par>
+                        <p:par>
+                          <p:cTn id="29" dur="810" fill="hold" nodeType="afterEffect" grpId="0" presetID="45" presetClass="entr" presetSubtype="1">
+                            <p:stCondLst>
+                              <p:cond delay="1560"/>
+                            </p:stCondLst>
+                            <p:childTnLst>
+                              <p:set>
+                                <p:cBhvr>
+                                  <p:cTn id="30" dur="1" fill="hold">
+                                    <p:stCondLst>
+                                      <p:cond delay="0"/>
+                                    </p:stCondLst>
+                                  </p:cTn>
+                                  <p:tgtEl>
+                                    <p:spTgt spid="13"/>
+                                  </p:tgtEl>
+                                  <p:attrNameLst>
+                                    <p:attrName>style.visibility</p:attrName>
+                                  </p:attrNameLst>
+                                </p:cBhvr>
+                                <p:to>
+                                  <p:strVal val="visible"/>
+                                </p:to>
+                              </p:set>
+                              <p:animEffect transition="in" filter="barn(inHorizontal)">
+                                <p:cBhvr>
+                                  <p:cTn id="291" dur="810"/>
+                                  <p:tgtEl>
+                                    <p:spTgt spid="13"/>
+                                  </p:tgtEl>
+                                </p:cBhvr>
+                              </p:animEffect>
+                            </p:childTnLst>
+                          </p:cTn>
+                        </p:par>
+                        <p:par>
+                          <p:cTn id="31" dur="450" fill="hold" nodeType="afterEffect" grpId="0" presetID="22" presetClass="entr" presetSubtype="8">
+                            <p:stCondLst>
+                              <p:cond delay="1690"/>
+                            </p:stCondLst>
+                            <p:childTnLst>
+                              <p:set>
+                                <p:cBhvr>
+                                  <p:cTn id="32" dur="1" fill="hold">
+                                    <p:stCondLst>
+                                      <p:cond delay="0"/>
+                                    </p:stCondLst>
+                                  </p:cTn>
+                                  <p:tgtEl>
+                                    <p:spTgt spid="7"/>
+                                  </p:tgtEl>
+                                  <p:attrNameLst>
+                                    <p:attrName>style.visibility</p:attrName>
+                                  </p:attrNameLst>
+                                </p:cBhvr>
+                                <p:to>
+                                  <p:strVal val="visible"/>
+                                </p:to>
+                              </p:set>
+                              <p:animEffect transition="in" filter="wipe(left)">
+                                <p:cBhvr>
+                                  <p:cTn id="311" dur="450"/>
+                                  <p:tgtEl>
+                                    <p:spTgt spid="7"/>
+                                  </p:tgtEl>
+                                </p:cBhvr>
+                              </p:animEffect>
+                            </p:childTnLst>
+                          </p:cTn>
+                        </p:par>
+                      </p:childTnLst>
+                    </p:cTn>
+                  </p:par>
+                </p:childTnLst>
+              </p:cTn>
+              <p:prevCondLst>
+                <p:cond evt="onPrev" delay="0">
+                  <p:tgtEl>
+                    <p:sldTgt/>
+                  </p:tgtEl>
+                </p:cond>
+              </p:prevCondLst>
+              <p:nextCondLst>
+                <p:cond evt="onNext" delay="0">
+                  <p:tgtEl>
+                    <p:sldTgt/>
+                  </p:tgtEl>
+                </p:cond>
+              </p:nextCondLst>
+            </p:seq>
+          </p:childTnLst>
+        </p:cTn>
+      </p:par>
+    </p:tnLst>
+  </p:timing>
 </p:sld>
 </file>
 

--- a/templates/03-portfolio-pixel-art-portfolio/03__retropixel.pptx
+++ b/templates/03-portfolio-pixel-art-portfolio/03__retropixel.pptx
@@ -122,6 +122,1886 @@
     </a:lvl9pPr>
   </p:defaultTextStyle>
 </p:presentation>
+</file>
+
+<file path=ppt/notesMasters/notesMaster1.xml><?xml version="1.0" encoding="utf-8"?>
+<p:notesMaster xmlns:a="http://schemas.openxmlformats.org/drawingml/2006/main" xmlns:p="http://schemas.openxmlformats.org/presentationml/2006/main" xmlns:r="http://schemas.openxmlformats.org/officeDocument/2006/relationships">
+  <p:cSld>
+    <p:bg>
+      <p:bgRef idx="1001">
+        <a:schemeClr val="bg1"/>
+      </p:bgRef>
+    </p:bg>
+    <p:spTree>
+      <p:nvGrpSpPr>
+        <p:cNvPr id="1" name=""/>
+        <p:cNvGrpSpPr/>
+        <p:nvPr/>
+      </p:nvGrpSpPr>
+      <p:grpSpPr>
+        <a:xfrm>
+          <a:off x="0" y="0"/>
+          <a:ext cx="0" cy="0"/>
+          <a:chOff x="0" y="0"/>
+          <a:chExt cx="0" cy="0"/>
+        </a:xfrm>
+      </p:grpSpPr>
+      <p:sp>
+        <p:nvSpPr>
+          <p:cNvPr id="2" name="Header Placeholder 1"/>
+          <p:cNvSpPr>
+            <a:spLocks noGrp="1"/>
+          </p:cNvSpPr>
+          <p:nvPr>
+            <p:ph type="hdr" sz="quarter"/>
+          </p:nvPr>
+        </p:nvSpPr>
+        <p:spPr>
+          <a:xfrm>
+            <a:off x="0" y="0"/>
+            <a:ext cx="2971800" cy="457200"/>
+          </a:xfrm>
+          <a:prstGeom prst="rect">
+            <a:avLst/>
+          </a:prstGeom>
+        </p:spPr>
+        <p:txBody>
+          <a:bodyPr vert="horz" lIns="91440" tIns="45720" rIns="91440" bIns="45720" rtlCol="0"/>
+          <a:lstStyle>
+            <a:lvl1pPr algn="l">
+              <a:defRPr sz="1200"/>
+            </a:lvl1pPr>
+          </a:lstStyle>
+          <a:p>
+            <a:endParaRPr lang="en-US"/>
+          </a:p>
+        </p:txBody>
+      </p:sp>
+      <p:sp>
+        <p:nvSpPr>
+          <p:cNvPr id="3" name="Date Placeholder 2"/>
+          <p:cNvSpPr>
+            <a:spLocks noGrp="1"/>
+          </p:cNvSpPr>
+          <p:nvPr>
+            <p:ph type="dt" idx="1"/>
+          </p:nvPr>
+        </p:nvSpPr>
+        <p:spPr>
+          <a:xfrm>
+            <a:off x="3884613" y="0"/>
+            <a:ext cx="2971800" cy="457200"/>
+          </a:xfrm>
+          <a:prstGeom prst="rect">
+            <a:avLst/>
+          </a:prstGeom>
+        </p:spPr>
+        <p:txBody>
+          <a:bodyPr vert="horz" lIns="91440" tIns="45720" rIns="91440" bIns="45720" rtlCol="0"/>
+          <a:lstStyle>
+            <a:lvl1pPr algn="r">
+              <a:defRPr sz="1200"/>
+            </a:lvl1pPr>
+          </a:lstStyle>
+          <a:p>
+            <a:fld id="{0F89C1C7-3DCD-1040-A9CF-14679D8B5DDD}" type="datetimeFigureOut">
+              <a:rPr lang="en-US" smtClean="0"/>
+              <a:t>10/17/16</a:t>
+            </a:fld>
+            <a:endParaRPr lang="en-US"/>
+          </a:p>
+        </p:txBody>
+      </p:sp>
+      <p:sp>
+        <p:nvSpPr>
+          <p:cNvPr id="4" name="Slide Image Placeholder 3"/>
+          <p:cNvSpPr>
+            <a:spLocks noGrp="1" noRot="1" noChangeAspect="1"/>
+          </p:cNvSpPr>
+          <p:nvPr>
+            <p:ph type="sldImg" idx="2"/>
+          </p:nvPr>
+        </p:nvSpPr>
+        <p:spPr>
+          <a:xfrm>
+            <a:off x="1143000" y="685800"/>
+            <a:ext cx="4572000" cy="3429000"/>
+          </a:xfrm>
+          <a:prstGeom prst="rect">
+            <a:avLst/>
+          </a:prstGeom>
+          <a:noFill/>
+          <a:ln w="12700">
+            <a:solidFill>
+              <a:prstClr val="black"/>
+            </a:solidFill>
+          </a:ln>
+        </p:spPr>
+        <p:txBody>
+          <a:bodyPr vert="horz" lIns="91440" tIns="45720" rIns="91440" bIns="45720" rtlCol="0" anchor="ctr"/>
+          <a:lstStyle/>
+          <a:p>
+            <a:endParaRPr lang="en-US"/>
+          </a:p>
+        </p:txBody>
+      </p:sp>
+      <p:sp>
+        <p:nvSpPr>
+          <p:cNvPr id="5" name="Notes Placeholder 4"/>
+          <p:cNvSpPr>
+            <a:spLocks noGrp="1"/>
+          </p:cNvSpPr>
+          <p:nvPr>
+            <p:ph type="body" sz="quarter" idx="3"/>
+          </p:nvPr>
+        </p:nvSpPr>
+        <p:spPr>
+          <a:xfrm>
+            <a:off x="685800" y="4343400"/>
+            <a:ext cx="5486400" cy="4114800"/>
+          </a:xfrm>
+          <a:prstGeom prst="rect">
+            <a:avLst/>
+          </a:prstGeom>
+        </p:spPr>
+        <p:txBody>
+          <a:bodyPr vert="horz" lIns="91440" tIns="45720" rIns="91440" bIns="45720" rtlCol="0"/>
+          <a:lstStyle/>
+          <a:p>
+            <a:pPr lvl="0"/>
+            <a:r>
+              <a:rPr lang="en-US" smtClean="0"/>
+              <a:t>Click to edit Master text styles</a:t>
+            </a:r>
+          </a:p>
+          <a:p>
+            <a:pPr lvl="1"/>
+            <a:r>
+              <a:rPr lang="en-US" smtClean="0"/>
+              <a:t>Second level</a:t>
+            </a:r>
+          </a:p>
+          <a:p>
+            <a:pPr lvl="2"/>
+            <a:r>
+              <a:rPr lang="en-US" smtClean="0"/>
+              <a:t>Third level</a:t>
+            </a:r>
+          </a:p>
+          <a:p>
+            <a:pPr lvl="3"/>
+            <a:r>
+              <a:rPr lang="en-US" smtClean="0"/>
+              <a:t>Fourth level</a:t>
+            </a:r>
+          </a:p>
+          <a:p>
+            <a:pPr lvl="4"/>
+            <a:r>
+              <a:rPr lang="en-US" smtClean="0"/>
+              <a:t>Fifth level</a:t>
+            </a:r>
+            <a:endParaRPr lang="en-US"/>
+          </a:p>
+        </p:txBody>
+      </p:sp>
+      <p:sp>
+        <p:nvSpPr>
+          <p:cNvPr id="6" name="Footer Placeholder 5"/>
+          <p:cNvSpPr>
+            <a:spLocks noGrp="1"/>
+          </p:cNvSpPr>
+          <p:nvPr>
+            <p:ph type="ftr" sz="quarter" idx="4"/>
+          </p:nvPr>
+        </p:nvSpPr>
+        <p:spPr>
+          <a:xfrm>
+            <a:off x="0" y="8685213"/>
+            <a:ext cx="2971800" cy="457200"/>
+          </a:xfrm>
+          <a:prstGeom prst="rect">
+            <a:avLst/>
+          </a:prstGeom>
+        </p:spPr>
+        <p:txBody>
+          <a:bodyPr vert="horz" lIns="91440" tIns="45720" rIns="91440" bIns="45720" rtlCol="0" anchor="b"/>
+          <a:lstStyle>
+            <a:lvl1pPr algn="l">
+              <a:defRPr sz="1200"/>
+            </a:lvl1pPr>
+          </a:lstStyle>
+          <a:p>
+            <a:endParaRPr lang="en-US"/>
+          </a:p>
+        </p:txBody>
+      </p:sp>
+      <p:sp>
+        <p:nvSpPr>
+          <p:cNvPr id="7" name="Slide Number Placeholder 6"/>
+          <p:cNvSpPr>
+            <a:spLocks noGrp="1"/>
+          </p:cNvSpPr>
+          <p:nvPr>
+            <p:ph type="sldNum" sz="quarter" idx="5"/>
+          </p:nvPr>
+        </p:nvSpPr>
+        <p:spPr>
+          <a:xfrm>
+            <a:off x="3884613" y="8685213"/>
+            <a:ext cx="2971800" cy="457200"/>
+          </a:xfrm>
+          <a:prstGeom prst="rect">
+            <a:avLst/>
+          </a:prstGeom>
+        </p:spPr>
+        <p:txBody>
+          <a:bodyPr vert="horz" lIns="91440" tIns="45720" rIns="91440" bIns="45720" rtlCol="0" anchor="b"/>
+          <a:lstStyle>
+            <a:lvl1pPr algn="r">
+              <a:defRPr sz="1200"/>
+            </a:lvl1pPr>
+          </a:lstStyle>
+          <a:p>
+            <a:fld id="{BB5E49A5-4136-284D-997B-48E1D791AD67}" type="slidenum">
+              <a:rPr lang="en-US" smtClean="0"/>
+              <a:t>‹#›</a:t>
+            </a:fld>
+            <a:endParaRPr lang="en-US"/>
+          </a:p>
+        </p:txBody>
+      </p:sp>
+    </p:spTree>
+    <p:extLst>
+      <p:ext uri="{BB962C8B-B14F-4D97-AF65-F5344CB8AC3E}">
+        <p14:creationId xmlns:p14="http://schemas.microsoft.com/office/powerpoint/2010/main" val="2623252185"/>
+      </p:ext>
+    </p:extLst>
+  </p:cSld>
+  <p:clrMap bg1="lt1" tx1="dk1" bg2="lt2" tx2="dk2" accent1="accent1" accent2="accent2" accent3="accent3" accent4="accent4" accent5="accent5" accent6="accent6" hlink="hlink" folHlink="folHlink"/>
+  <p:notesStyle>
+    <a:lvl1pPr marL="0" algn="l" defTabSz="457200" rtl="0" eaLnBrk="1" latinLnBrk="0" hangingPunct="1">
+      <a:defRPr sz="1200" kern="1200">
+        <a:solidFill>
+          <a:schemeClr val="tx1"/>
+        </a:solidFill>
+        <a:latin typeface="+mn-lt"/>
+        <a:ea typeface="+mn-ea"/>
+        <a:cs typeface="+mn-cs"/>
+      </a:defRPr>
+    </a:lvl1pPr>
+    <a:lvl2pPr marL="457200" algn="l" defTabSz="457200" rtl="0" eaLnBrk="1" latinLnBrk="0" hangingPunct="1">
+      <a:defRPr sz="1200" kern="1200">
+        <a:solidFill>
+          <a:schemeClr val="tx1"/>
+        </a:solidFill>
+        <a:latin typeface="+mn-lt"/>
+        <a:ea typeface="+mn-ea"/>
+        <a:cs typeface="+mn-cs"/>
+      </a:defRPr>
+    </a:lvl2pPr>
+    <a:lvl3pPr marL="914400" algn="l" defTabSz="457200" rtl="0" eaLnBrk="1" latinLnBrk="0" hangingPunct="1">
+      <a:defRPr sz="1200" kern="1200">
+        <a:solidFill>
+          <a:schemeClr val="tx1"/>
+        </a:solidFill>
+        <a:latin typeface="+mn-lt"/>
+        <a:ea typeface="+mn-ea"/>
+        <a:cs typeface="+mn-cs"/>
+      </a:defRPr>
+    </a:lvl3pPr>
+    <a:lvl4pPr marL="1371600" algn="l" defTabSz="457200" rtl="0" eaLnBrk="1" latinLnBrk="0" hangingPunct="1">
+      <a:defRPr sz="1200" kern="1200">
+        <a:solidFill>
+          <a:schemeClr val="tx1"/>
+        </a:solidFill>
+        <a:latin typeface="+mn-lt"/>
+        <a:ea typeface="+mn-ea"/>
+        <a:cs typeface="+mn-cs"/>
+      </a:defRPr>
+    </a:lvl4pPr>
+    <a:lvl5pPr marL="1828800" algn="l" defTabSz="457200" rtl="0" eaLnBrk="1" latinLnBrk="0" hangingPunct="1">
+      <a:defRPr sz="1200" kern="1200">
+        <a:solidFill>
+          <a:schemeClr val="tx1"/>
+        </a:solidFill>
+        <a:latin typeface="+mn-lt"/>
+        <a:ea typeface="+mn-ea"/>
+        <a:cs typeface="+mn-cs"/>
+      </a:defRPr>
+    </a:lvl5pPr>
+    <a:lvl6pPr marL="2286000" algn="l" defTabSz="457200" rtl="0" eaLnBrk="1" latinLnBrk="0" hangingPunct="1">
+      <a:defRPr sz="1200" kern="1200">
+        <a:solidFill>
+          <a:schemeClr val="tx1"/>
+        </a:solidFill>
+        <a:latin typeface="+mn-lt"/>
+        <a:ea typeface="+mn-ea"/>
+        <a:cs typeface="+mn-cs"/>
+      </a:defRPr>
+    </a:lvl6pPr>
+    <a:lvl7pPr marL="2743200" algn="l" defTabSz="457200" rtl="0" eaLnBrk="1" latinLnBrk="0" hangingPunct="1">
+      <a:defRPr sz="1200" kern="1200">
+        <a:solidFill>
+          <a:schemeClr val="tx1"/>
+        </a:solidFill>
+        <a:latin typeface="+mn-lt"/>
+        <a:ea typeface="+mn-ea"/>
+        <a:cs typeface="+mn-cs"/>
+      </a:defRPr>
+    </a:lvl7pPr>
+    <a:lvl8pPr marL="3200400" algn="l" defTabSz="457200" rtl="0" eaLnBrk="1" latinLnBrk="0" hangingPunct="1">
+      <a:defRPr sz="1200" kern="1200">
+        <a:solidFill>
+          <a:schemeClr val="tx1"/>
+        </a:solidFill>
+        <a:latin typeface="+mn-lt"/>
+        <a:ea typeface="+mn-ea"/>
+        <a:cs typeface="+mn-cs"/>
+      </a:defRPr>
+    </a:lvl8pPr>
+    <a:lvl9pPr marL="3657600" algn="l" defTabSz="457200" rtl="0" eaLnBrk="1" latinLnBrk="0" hangingPunct="1">
+      <a:defRPr sz="1200" kern="1200">
+        <a:solidFill>
+          <a:schemeClr val="tx1"/>
+        </a:solidFill>
+        <a:latin typeface="+mn-lt"/>
+        <a:ea typeface="+mn-ea"/>
+        <a:cs typeface="+mn-cs"/>
+      </a:defRPr>
+    </a:lvl9pPr>
+  </p:notesStyle>
+</p:notesMaster>
+</file>
+
+<file path=ppt/notesSlides/notesSlide1.xml><?xml version="1.0" encoding="utf-8"?>
+<p:notes xmlns:a="http://schemas.openxmlformats.org/drawingml/2006/main" xmlns:p="http://schemas.openxmlformats.org/presentationml/2006/main" xmlns:r="http://schemas.openxmlformats.org/officeDocument/2006/relationships">
+  <p:cSld>
+    <p:spTree>
+      <p:nvGrpSpPr>
+        <p:cNvPr id="1" name=""/>
+        <p:cNvGrpSpPr/>
+        <p:nvPr/>
+      </p:nvGrpSpPr>
+      <p:grpSpPr>
+        <a:xfrm>
+          <a:off x="0" y="0"/>
+          <a:ext cx="0" cy="0"/>
+          <a:chOff x="0" y="0"/>
+          <a:chExt cx="0" cy="0"/>
+        </a:xfrm>
+      </p:grpSpPr>
+      <p:sp>
+        <p:nvSpPr>
+          <p:cNvPr id="2" name="Slide Image Placeholder 1"/>
+          <p:cNvSpPr>
+            <a:spLocks noGrp="1"/>
+          </p:cNvSpPr>
+          <p:nvPr>
+            <p:ph type="sldImg" idx="2"/>
+          </p:nvPr>
+        </p:nvSpPr>
+        <p:spPr/>
+      </p:sp>
+      <p:sp>
+        <p:nvSpPr>
+          <p:cNvPr id="3" name="Notes Placeholder 2"/>
+          <p:cNvSpPr>
+            <a:spLocks noGrp="1"/>
+          </p:cNvSpPr>
+          <p:nvPr>
+            <p:ph type="body" idx="3" sz="quarter"/>
+          </p:nvPr>
+        </p:nvSpPr>
+        <p:spPr/>
+        <p:txBody>
+          <a:bodyPr/>
+          <a:lstStyle/>
+          <a:p>
+            <a:r>
+              <a:t>【页面定位】像素与美术作品集 —— 开场页：自我介绍或破题，停留时间可稍长。</a:t>
+            </a:r>
+          </a:p>
+          <a:p>
+            <a:r>
+              <a:t>【放映】本页元素按“背景→主体→标注”顺序错峰入场（约 2 秒完成）；开启“使用计时器”后本页停留 8 秒自动翻页。</a:t>
+            </a:r>
+          </a:p>
+          <a:p>
+            <a:r>
+              <a:t>【编辑】直接点击文本框替换占位文字；在“设计→变体”中一键换配色；图片占位框右键“更改图片”即可替换。</a:t>
+            </a:r>
+          </a:p>
+          <a:p>
+            <a:r>
+              <a:t>【联动】图表为原生可编辑图表：右键“编辑数据”即可替换数值。</a:t>
+            </a:r>
+          </a:p>
+        </p:txBody>
+      </p:sp>
+      <p:sp>
+        <p:nvSpPr>
+          <p:cNvPr id="4" name="Slide Number Placeholder 3"/>
+          <p:cNvSpPr>
+            <a:spLocks noGrp="1"/>
+          </p:cNvSpPr>
+          <p:nvPr>
+            <p:ph type="sldNum" idx="5" sz="quarter"/>
+          </p:nvPr>
+        </p:nvSpPr>
+        <p:spPr/>
+      </p:sp>
+    </p:spTree>
+  </p:cSld>
+  <p:clrMapOvr>
+    <a:masterClrMapping/>
+  </p:clrMapOvr>
+</p:notes>
+</file>
+
+<file path=ppt/notesSlides/notesSlide10.xml><?xml version="1.0" encoding="utf-8"?>
+<p:notes xmlns:a="http://schemas.openxmlformats.org/drawingml/2006/main" xmlns:p="http://schemas.openxmlformats.org/presentationml/2006/main" xmlns:r="http://schemas.openxmlformats.org/officeDocument/2006/relationships">
+  <p:cSld>
+    <p:spTree>
+      <p:nvGrpSpPr>
+        <p:cNvPr id="1" name=""/>
+        <p:cNvGrpSpPr/>
+        <p:nvPr/>
+      </p:nvGrpSpPr>
+      <p:grpSpPr>
+        <a:xfrm>
+          <a:off x="0" y="0"/>
+          <a:ext cx="0" cy="0"/>
+          <a:chOff x="0" y="0"/>
+          <a:chExt cx="0" cy="0"/>
+        </a:xfrm>
+      </p:grpSpPr>
+      <p:sp>
+        <p:nvSpPr>
+          <p:cNvPr id="2" name="Slide Image Placeholder 1"/>
+          <p:cNvSpPr>
+            <a:spLocks noGrp="1"/>
+          </p:cNvSpPr>
+          <p:nvPr>
+            <p:ph type="sldImg" idx="2"/>
+          </p:nvPr>
+        </p:nvSpPr>
+        <p:spPr/>
+      </p:sp>
+      <p:sp>
+        <p:nvSpPr>
+          <p:cNvPr id="3" name="Notes Placeholder 2"/>
+          <p:cNvSpPr>
+            <a:spLocks noGrp="1"/>
+          </p:cNvSpPr>
+          <p:nvPr>
+            <p:ph type="body" idx="3" sz="quarter"/>
+          </p:nvPr>
+        </p:nvSpPr>
+        <p:spPr/>
+        <p:txBody>
+          <a:bodyPr/>
+          <a:lstStyle/>
+          <a:p>
+            <a:r>
+              <a:t>【页面定位】DATA —— 收尾页：总结要点并给出行动号召或联系方式。</a:t>
+            </a:r>
+          </a:p>
+          <a:p>
+            <a:r>
+              <a:t>【放映】本页元素按“背景→主体→标注”顺序错峰入场（约 2 秒完成）；开启“使用计时器”后本页停留 8 秒自动翻页。</a:t>
+            </a:r>
+          </a:p>
+          <a:p>
+            <a:r>
+              <a:t>【编辑】直接点击文本框替换占位文字；在“设计→变体”中一键换配色；图片占位框右键“更改图片”即可替换。</a:t>
+            </a:r>
+          </a:p>
+          <a:p>
+            <a:r>
+              <a:t>【联动】图表为原生可编辑图表：右键“编辑数据”即可替换数值。</a:t>
+            </a:r>
+          </a:p>
+        </p:txBody>
+      </p:sp>
+      <p:sp>
+        <p:nvSpPr>
+          <p:cNvPr id="4" name="Slide Number Placeholder 3"/>
+          <p:cNvSpPr>
+            <a:spLocks noGrp="1"/>
+          </p:cNvSpPr>
+          <p:nvPr>
+            <p:ph type="sldNum" idx="5" sz="quarter"/>
+          </p:nvPr>
+        </p:nvSpPr>
+        <p:spPr/>
+      </p:sp>
+    </p:spTree>
+  </p:cSld>
+  <p:clrMapOvr>
+    <a:masterClrMapping/>
+  </p:clrMapOvr>
+</p:notes>
+</file>
+
+<file path=ppt/notesSlides/notesSlide11.xml><?xml version="1.0" encoding="utf-8"?>
+<p:notes xmlns:a="http://schemas.openxmlformats.org/drawingml/2006/main" xmlns:p="http://schemas.openxmlformats.org/presentationml/2006/main" xmlns:r="http://schemas.openxmlformats.org/officeDocument/2006/relationships">
+  <p:cSld>
+    <p:spTree>
+      <p:nvGrpSpPr>
+        <p:cNvPr id="1" name=""/>
+        <p:cNvGrpSpPr/>
+        <p:nvPr/>
+      </p:nvGrpSpPr>
+      <p:grpSpPr>
+        <a:xfrm>
+          <a:off x="0" y="0"/>
+          <a:ext cx="0" cy="0"/>
+          <a:chOff x="0" y="0"/>
+          <a:chExt cx="0" cy="0"/>
+        </a:xfrm>
+      </p:grpSpPr>
+      <p:sp>
+        <p:nvSpPr>
+          <p:cNvPr id="2" name="Slide Image Placeholder 1"/>
+          <p:cNvSpPr>
+            <a:spLocks noGrp="1"/>
+          </p:cNvSpPr>
+          <p:nvPr>
+            <p:ph type="sldImg" idx="2"/>
+          </p:nvPr>
+        </p:nvSpPr>
+        <p:spPr/>
+      </p:sp>
+      <p:sp>
+        <p:nvSpPr>
+          <p:cNvPr id="3" name="Notes Placeholder 2"/>
+          <p:cNvSpPr>
+            <a:spLocks noGrp="1"/>
+          </p:cNvSpPr>
+          <p:nvPr>
+            <p:ph type="body" idx="3" sz="quarter"/>
+          </p:nvPr>
+        </p:nvSpPr>
+        <p:spPr/>
+        <p:txBody>
+          <a:bodyPr/>
+          <a:lstStyle/>
+          <a:p>
+            <a:r>
+              <a:t>【页面定位】KEY POINTS —— 开场页：自我介绍或破题，停留时间可稍长。</a:t>
+            </a:r>
+          </a:p>
+          <a:p>
+            <a:r>
+              <a:t>【放映】本页元素按“背景→主体→标注”顺序错峰入场（约 2 秒完成）；开启“使用计时器”后本页停留 8 秒自动翻页。</a:t>
+            </a:r>
+          </a:p>
+          <a:p>
+            <a:r>
+              <a:t>【编辑】直接点击文本框替换占位文字；在“设计→变体”中一键换配色；图片占位框右键“更改图片”即可替换。</a:t>
+            </a:r>
+          </a:p>
+          <a:p>
+            <a:r>
+              <a:t>【联动】图表为原生可编辑图表：右键“编辑数据”即可替换数值。</a:t>
+            </a:r>
+          </a:p>
+        </p:txBody>
+      </p:sp>
+      <p:sp>
+        <p:nvSpPr>
+          <p:cNvPr id="4" name="Slide Number Placeholder 3"/>
+          <p:cNvSpPr>
+            <a:spLocks noGrp="1"/>
+          </p:cNvSpPr>
+          <p:nvPr>
+            <p:ph type="sldNum" idx="5" sz="quarter"/>
+          </p:nvPr>
+        </p:nvSpPr>
+        <p:spPr/>
+      </p:sp>
+    </p:spTree>
+  </p:cSld>
+  <p:clrMapOvr>
+    <a:masterClrMapping/>
+  </p:clrMapOvr>
+</p:notes>
+</file>
+
+<file path=ppt/notesSlides/notesSlide12.xml><?xml version="1.0" encoding="utf-8"?>
+<p:notes xmlns:a="http://schemas.openxmlformats.org/drawingml/2006/main" xmlns:p="http://schemas.openxmlformats.org/presentationml/2006/main" xmlns:r="http://schemas.openxmlformats.org/officeDocument/2006/relationships">
+  <p:cSld>
+    <p:spTree>
+      <p:nvGrpSpPr>
+        <p:cNvPr id="1" name=""/>
+        <p:cNvGrpSpPr/>
+        <p:nvPr/>
+      </p:nvGrpSpPr>
+      <p:grpSpPr>
+        <a:xfrm>
+          <a:off x="0" y="0"/>
+          <a:ext cx="0" cy="0"/>
+          <a:chOff x="0" y="0"/>
+          <a:chExt cx="0" cy="0"/>
+        </a:xfrm>
+      </p:grpSpPr>
+      <p:sp>
+        <p:nvSpPr>
+          <p:cNvPr id="2" name="Slide Image Placeholder 1"/>
+          <p:cNvSpPr>
+            <a:spLocks noGrp="1"/>
+          </p:cNvSpPr>
+          <p:nvPr>
+            <p:ph type="sldImg" idx="2"/>
+          </p:nvPr>
+        </p:nvSpPr>
+        <p:spPr/>
+      </p:sp>
+      <p:sp>
+        <p:nvSpPr>
+          <p:cNvPr id="3" name="Notes Placeholder 2"/>
+          <p:cNvSpPr>
+            <a:spLocks noGrp="1"/>
+          </p:cNvSpPr>
+          <p:nvPr>
+            <p:ph type="body" idx="3" sz="quarter"/>
+          </p:nvPr>
+        </p:nvSpPr>
+        <p:spPr/>
+        <p:txBody>
+          <a:bodyPr/>
+          <a:lstStyle/>
+          <a:p>
+            <a:r>
+              <a:t>【页面定位】02 —— 概览页：快速带过结构，告诉听众接下来讲什么。</a:t>
+            </a:r>
+          </a:p>
+          <a:p>
+            <a:r>
+              <a:t>【放映】本页元素按“背景→主体→标注”顺序错峰入场（约 2 秒完成）；开启“使用计时器”后本页停留 8 秒自动翻页。</a:t>
+            </a:r>
+          </a:p>
+          <a:p>
+            <a:r>
+              <a:t>【编辑】直接点击文本框替换占位文字；在“设计→变体”中一键换配色；图片占位框右键“更改图片”即可替换。</a:t>
+            </a:r>
+          </a:p>
+          <a:p>
+            <a:r>
+              <a:t>【联动】图表为原生可编辑图表：右键“编辑数据”即可替换数值。</a:t>
+            </a:r>
+          </a:p>
+        </p:txBody>
+      </p:sp>
+      <p:sp>
+        <p:nvSpPr>
+          <p:cNvPr id="4" name="Slide Number Placeholder 3"/>
+          <p:cNvSpPr>
+            <a:spLocks noGrp="1"/>
+          </p:cNvSpPr>
+          <p:nvPr>
+            <p:ph type="sldNum" idx="5" sz="quarter"/>
+          </p:nvPr>
+        </p:nvSpPr>
+        <p:spPr/>
+      </p:sp>
+    </p:spTree>
+  </p:cSld>
+  <p:clrMapOvr>
+    <a:masterClrMapping/>
+  </p:clrMapOvr>
+</p:notes>
+</file>
+
+<file path=ppt/notesSlides/notesSlide13.xml><?xml version="1.0" encoding="utf-8"?>
+<p:notes xmlns:a="http://schemas.openxmlformats.org/drawingml/2006/main" xmlns:p="http://schemas.openxmlformats.org/presentationml/2006/main" xmlns:r="http://schemas.openxmlformats.org/officeDocument/2006/relationships">
+  <p:cSld>
+    <p:spTree>
+      <p:nvGrpSpPr>
+        <p:cNvPr id="1" name=""/>
+        <p:cNvGrpSpPr/>
+        <p:nvPr/>
+      </p:nvGrpSpPr>
+      <p:grpSpPr>
+        <a:xfrm>
+          <a:off x="0" y="0"/>
+          <a:ext cx="0" cy="0"/>
+          <a:chOff x="0" y="0"/>
+          <a:chExt cx="0" cy="0"/>
+        </a:xfrm>
+      </p:grpSpPr>
+      <p:sp>
+        <p:nvSpPr>
+          <p:cNvPr id="2" name="Slide Image Placeholder 1"/>
+          <p:cNvSpPr>
+            <a:spLocks noGrp="1"/>
+          </p:cNvSpPr>
+          <p:nvPr>
+            <p:ph type="sldImg" idx="2"/>
+          </p:nvPr>
+        </p:nvSpPr>
+        <p:spPr/>
+      </p:sp>
+      <p:sp>
+        <p:nvSpPr>
+          <p:cNvPr id="3" name="Notes Placeholder 2"/>
+          <p:cNvSpPr>
+            <a:spLocks noGrp="1"/>
+          </p:cNvSpPr>
+          <p:nvPr>
+            <p:ph type="body" idx="3" sz="quarter"/>
+          </p:nvPr>
+        </p:nvSpPr>
+        <p:spPr/>
+        <p:txBody>
+          <a:bodyPr/>
+          <a:lstStyle/>
+          <a:p>
+            <a:r>
+              <a:t>【页面定位】在此输入一句创作感言。 —— 内容页：逐条展开，配合动画节奏点击推进。</a:t>
+            </a:r>
+          </a:p>
+          <a:p>
+            <a:r>
+              <a:t>【放映】本页元素按“背景→主体→标注”顺序错峰入场（约 2 秒完成）；开启“使用计时器”后本页停留 8 秒自动翻页。</a:t>
+            </a:r>
+          </a:p>
+          <a:p>
+            <a:r>
+              <a:t>【编辑】直接点击文本框替换占位文字；在“设计→变体”中一键换配色；图片占位框右键“更改图片”即可替换。</a:t>
+            </a:r>
+          </a:p>
+          <a:p>
+            <a:r>
+              <a:t>【联动】图表为原生可编辑图表：右键“编辑数据”即可替换数值。</a:t>
+            </a:r>
+          </a:p>
+        </p:txBody>
+      </p:sp>
+      <p:sp>
+        <p:nvSpPr>
+          <p:cNvPr id="4" name="Slide Number Placeholder 3"/>
+          <p:cNvSpPr>
+            <a:spLocks noGrp="1"/>
+          </p:cNvSpPr>
+          <p:nvPr>
+            <p:ph type="sldNum" idx="5" sz="quarter"/>
+          </p:nvPr>
+        </p:nvSpPr>
+        <p:spPr/>
+      </p:sp>
+    </p:spTree>
+  </p:cSld>
+  <p:clrMapOvr>
+    <a:masterClrMapping/>
+  </p:clrMapOvr>
+</p:notes>
+</file>
+
+<file path=ppt/notesSlides/notesSlide14.xml><?xml version="1.0" encoding="utf-8"?>
+<p:notes xmlns:a="http://schemas.openxmlformats.org/drawingml/2006/main" xmlns:p="http://schemas.openxmlformats.org/presentationml/2006/main" xmlns:r="http://schemas.openxmlformats.org/officeDocument/2006/relationships">
+  <p:cSld>
+    <p:spTree>
+      <p:nvGrpSpPr>
+        <p:cNvPr id="1" name=""/>
+        <p:cNvGrpSpPr/>
+        <p:nvPr/>
+      </p:nvGrpSpPr>
+      <p:grpSpPr>
+        <a:xfrm>
+          <a:off x="0" y="0"/>
+          <a:ext cx="0" cy="0"/>
+          <a:chOff x="0" y="0"/>
+          <a:chExt cx="0" cy="0"/>
+        </a:xfrm>
+      </p:grpSpPr>
+      <p:sp>
+        <p:nvSpPr>
+          <p:cNvPr id="2" name="Slide Image Placeholder 1"/>
+          <p:cNvSpPr>
+            <a:spLocks noGrp="1"/>
+          </p:cNvSpPr>
+          <p:nvPr>
+            <p:ph type="sldImg" idx="2"/>
+          </p:nvPr>
+        </p:nvSpPr>
+        <p:spPr/>
+      </p:sp>
+      <p:sp>
+        <p:nvSpPr>
+          <p:cNvPr id="3" name="Notes Placeholder 2"/>
+          <p:cNvSpPr>
+            <a:spLocks noGrp="1"/>
+          </p:cNvSpPr>
+          <p:nvPr>
+            <p:ph type="body" idx="3" sz="quarter"/>
+          </p:nvPr>
+        </p:nvSpPr>
+        <p:spPr/>
+        <p:txBody>
+          <a:bodyPr/>
+          <a:lstStyle/>
+          <a:p>
+            <a:r>
+              <a:t>【页面定位】TEAM —— 数据页：先说结论，再用图表佐证。</a:t>
+            </a:r>
+          </a:p>
+          <a:p>
+            <a:r>
+              <a:t>【放映】本页元素按“背景→主体→标注”顺序错峰入场（约 2 秒完成）；开启“使用计时器”后本页停留 8 秒自动翻页。</a:t>
+            </a:r>
+          </a:p>
+          <a:p>
+            <a:r>
+              <a:t>【编辑】直接点击文本框替换占位文字；在“设计→变体”中一键换配色；图片占位框右键“更改图片”即可替换。</a:t>
+            </a:r>
+          </a:p>
+          <a:p>
+            <a:r>
+              <a:t>【联动】图表为原生可编辑图表：右键“编辑数据”即可替换数值。</a:t>
+            </a:r>
+          </a:p>
+        </p:txBody>
+      </p:sp>
+      <p:sp>
+        <p:nvSpPr>
+          <p:cNvPr id="4" name="Slide Number Placeholder 3"/>
+          <p:cNvSpPr>
+            <a:spLocks noGrp="1"/>
+          </p:cNvSpPr>
+          <p:nvPr>
+            <p:ph type="sldNum" idx="5" sz="quarter"/>
+          </p:nvPr>
+        </p:nvSpPr>
+        <p:spPr/>
+      </p:sp>
+    </p:spTree>
+  </p:cSld>
+  <p:clrMapOvr>
+    <a:masterClrMapping/>
+  </p:clrMapOvr>
+</p:notes>
+</file>
+
+<file path=ppt/notesSlides/notesSlide15.xml><?xml version="1.0" encoding="utf-8"?>
+<p:notes xmlns:a="http://schemas.openxmlformats.org/drawingml/2006/main" xmlns:p="http://schemas.openxmlformats.org/presentationml/2006/main" xmlns:r="http://schemas.openxmlformats.org/officeDocument/2006/relationships">
+  <p:cSld>
+    <p:spTree>
+      <p:nvGrpSpPr>
+        <p:cNvPr id="1" name=""/>
+        <p:cNvGrpSpPr/>
+        <p:nvPr/>
+      </p:nvGrpSpPr>
+      <p:grpSpPr>
+        <a:xfrm>
+          <a:off x="0" y="0"/>
+          <a:ext cx="0" cy="0"/>
+          <a:chOff x="0" y="0"/>
+          <a:chExt cx="0" cy="0"/>
+        </a:xfrm>
+      </p:grpSpPr>
+      <p:sp>
+        <p:nvSpPr>
+          <p:cNvPr id="2" name="Slide Image Placeholder 1"/>
+          <p:cNvSpPr>
+            <a:spLocks noGrp="1"/>
+          </p:cNvSpPr>
+          <p:nvPr>
+            <p:ph type="sldImg" idx="2"/>
+          </p:nvPr>
+        </p:nvSpPr>
+        <p:spPr/>
+      </p:sp>
+      <p:sp>
+        <p:nvSpPr>
+          <p:cNvPr id="3" name="Notes Placeholder 2"/>
+          <p:cNvSpPr>
+            <a:spLocks noGrp="1"/>
+          </p:cNvSpPr>
+          <p:nvPr>
+            <p:ph type="body" idx="3" sz="quarter"/>
+          </p:nvPr>
+        </p:nvSpPr>
+        <p:spPr/>
+        <p:txBody>
+          <a:bodyPr/>
+          <a:lstStyle/>
+          <a:p>
+            <a:r>
+              <a:t>【页面定位】STEPS —— 收尾页：总结要点并给出行动号召或联系方式。</a:t>
+            </a:r>
+          </a:p>
+          <a:p>
+            <a:r>
+              <a:t>【放映】本页元素按“背景→主体→标注”顺序错峰入场（约 2 秒完成）；开启“使用计时器”后本页停留 8 秒自动翻页。</a:t>
+            </a:r>
+          </a:p>
+          <a:p>
+            <a:r>
+              <a:t>【编辑】直接点击文本框替换占位文字；在“设计→变体”中一键换配色；图片占位框右键“更改图片”即可替换。</a:t>
+            </a:r>
+          </a:p>
+          <a:p>
+            <a:r>
+              <a:t>【联动】图表为原生可编辑图表：右键“编辑数据”即可替换数值。</a:t>
+            </a:r>
+          </a:p>
+        </p:txBody>
+      </p:sp>
+      <p:sp>
+        <p:nvSpPr>
+          <p:cNvPr id="4" name="Slide Number Placeholder 3"/>
+          <p:cNvSpPr>
+            <a:spLocks noGrp="1"/>
+          </p:cNvSpPr>
+          <p:nvPr>
+            <p:ph type="sldNum" idx="5" sz="quarter"/>
+          </p:nvPr>
+        </p:nvSpPr>
+        <p:spPr/>
+      </p:sp>
+    </p:spTree>
+  </p:cSld>
+  <p:clrMapOvr>
+    <a:masterClrMapping/>
+  </p:clrMapOvr>
+</p:notes>
+</file>
+
+<file path=ppt/notesSlides/notesSlide16.xml><?xml version="1.0" encoding="utf-8"?>
+<p:notes xmlns:a="http://schemas.openxmlformats.org/drawingml/2006/main" xmlns:p="http://schemas.openxmlformats.org/presentationml/2006/main" xmlns:r="http://schemas.openxmlformats.org/officeDocument/2006/relationships">
+  <p:cSld>
+    <p:spTree>
+      <p:nvGrpSpPr>
+        <p:cNvPr id="1" name=""/>
+        <p:cNvGrpSpPr/>
+        <p:nvPr/>
+      </p:nvGrpSpPr>
+      <p:grpSpPr>
+        <a:xfrm>
+          <a:off x="0" y="0"/>
+          <a:ext cx="0" cy="0"/>
+          <a:chOff x="0" y="0"/>
+          <a:chExt cx="0" cy="0"/>
+        </a:xfrm>
+      </p:grpSpPr>
+      <p:sp>
+        <p:nvSpPr>
+          <p:cNvPr id="2" name="Slide Image Placeholder 1"/>
+          <p:cNvSpPr>
+            <a:spLocks noGrp="1"/>
+          </p:cNvSpPr>
+          <p:nvPr>
+            <p:ph type="sldImg" idx="2"/>
+          </p:nvPr>
+        </p:nvSpPr>
+        <p:spPr/>
+      </p:sp>
+      <p:sp>
+        <p:nvSpPr>
+          <p:cNvPr id="3" name="Notes Placeholder 2"/>
+          <p:cNvSpPr>
+            <a:spLocks noGrp="1"/>
+          </p:cNvSpPr>
+          <p:nvPr>
+            <p:ph type="body" idx="3" sz="quarter"/>
+          </p:nvPr>
+        </p:nvSpPr>
+        <p:spPr/>
+        <p:txBody>
+          <a:bodyPr/>
+          <a:lstStyle/>
+          <a:p>
+            <a:r>
+              <a:t>【页面定位】GLOSSARY —— 开场页：自我介绍或破题，停留时间可稍长。</a:t>
+            </a:r>
+          </a:p>
+          <a:p>
+            <a:r>
+              <a:t>【放映】本页元素按“背景→主体→标注”顺序错峰入场（约 2 秒完成）；开启“使用计时器”后本页停留 8 秒自动翻页。</a:t>
+            </a:r>
+          </a:p>
+          <a:p>
+            <a:r>
+              <a:t>【编辑】直接点击文本框替换占位文字；在“设计→变体”中一键换配色；图片占位框右键“更改图片”即可替换。</a:t>
+            </a:r>
+          </a:p>
+          <a:p>
+            <a:r>
+              <a:t>【联动】图表为原生可编辑图表：右键“编辑数据”即可替换数值。</a:t>
+            </a:r>
+          </a:p>
+        </p:txBody>
+      </p:sp>
+      <p:sp>
+        <p:nvSpPr>
+          <p:cNvPr id="4" name="Slide Number Placeholder 3"/>
+          <p:cNvSpPr>
+            <a:spLocks noGrp="1"/>
+          </p:cNvSpPr>
+          <p:nvPr>
+            <p:ph type="sldNum" idx="5" sz="quarter"/>
+          </p:nvPr>
+        </p:nvSpPr>
+        <p:spPr/>
+      </p:sp>
+    </p:spTree>
+  </p:cSld>
+  <p:clrMapOvr>
+    <a:masterClrMapping/>
+  </p:clrMapOvr>
+</p:notes>
+</file>
+
+<file path=ppt/notesSlides/notesSlide17.xml><?xml version="1.0" encoding="utf-8"?>
+<p:notes xmlns:a="http://schemas.openxmlformats.org/drawingml/2006/main" xmlns:p="http://schemas.openxmlformats.org/presentationml/2006/main" xmlns:r="http://schemas.openxmlformats.org/officeDocument/2006/relationships">
+  <p:cSld>
+    <p:spTree>
+      <p:nvGrpSpPr>
+        <p:cNvPr id="1" name=""/>
+        <p:cNvGrpSpPr/>
+        <p:nvPr/>
+      </p:nvGrpSpPr>
+      <p:grpSpPr>
+        <a:xfrm>
+          <a:off x="0" y="0"/>
+          <a:ext cx="0" cy="0"/>
+          <a:chOff x="0" y="0"/>
+          <a:chExt cx="0" cy="0"/>
+        </a:xfrm>
+      </p:grpSpPr>
+      <p:sp>
+        <p:nvSpPr>
+          <p:cNvPr id="2" name="Slide Image Placeholder 1"/>
+          <p:cNvSpPr>
+            <a:spLocks noGrp="1"/>
+          </p:cNvSpPr>
+          <p:nvPr>
+            <p:ph type="sldImg" idx="2"/>
+          </p:nvPr>
+        </p:nvSpPr>
+        <p:spPr/>
+      </p:sp>
+      <p:sp>
+        <p:nvSpPr>
+          <p:cNvPr id="3" name="Notes Placeholder 2"/>
+          <p:cNvSpPr>
+            <a:spLocks noGrp="1"/>
+          </p:cNvSpPr>
+          <p:nvPr>
+            <p:ph type="body" idx="3" sz="quarter"/>
+          </p:nvPr>
+        </p:nvSpPr>
+        <p:spPr/>
+        <p:txBody>
+          <a:bodyPr/>
+          <a:lstStyle/>
+          <a:p>
+            <a:r>
+              <a:t>【页面定位】HIGHLIGHT —— 概览页：快速带过结构，告诉听众接下来讲什么。</a:t>
+            </a:r>
+          </a:p>
+          <a:p>
+            <a:r>
+              <a:t>【放映】本页元素按“背景→主体→标注”顺序错峰入场（约 2 秒完成）；开启“使用计时器”后本页停留 8 秒自动翻页。</a:t>
+            </a:r>
+          </a:p>
+          <a:p>
+            <a:r>
+              <a:t>【编辑】直接点击文本框替换占位文字；在“设计→变体”中一键换配色；图片占位框右键“更改图片”即可替换。</a:t>
+            </a:r>
+          </a:p>
+          <a:p>
+            <a:r>
+              <a:t>【联动】图表为原生可编辑图表：右键“编辑数据”即可替换数值。</a:t>
+            </a:r>
+          </a:p>
+        </p:txBody>
+      </p:sp>
+      <p:sp>
+        <p:nvSpPr>
+          <p:cNvPr id="4" name="Slide Number Placeholder 3"/>
+          <p:cNvSpPr>
+            <a:spLocks noGrp="1"/>
+          </p:cNvSpPr>
+          <p:nvPr>
+            <p:ph type="sldNum" idx="5" sz="quarter"/>
+          </p:nvPr>
+        </p:nvSpPr>
+        <p:spPr/>
+      </p:sp>
+    </p:spTree>
+  </p:cSld>
+  <p:clrMapOvr>
+    <a:masterClrMapping/>
+  </p:clrMapOvr>
+</p:notes>
+</file>
+
+<file path=ppt/notesSlides/notesSlide18.xml><?xml version="1.0" encoding="utf-8"?>
+<p:notes xmlns:a="http://schemas.openxmlformats.org/drawingml/2006/main" xmlns:p="http://schemas.openxmlformats.org/presentationml/2006/main" xmlns:r="http://schemas.openxmlformats.org/officeDocument/2006/relationships">
+  <p:cSld>
+    <p:spTree>
+      <p:nvGrpSpPr>
+        <p:cNvPr id="1" name=""/>
+        <p:cNvGrpSpPr/>
+        <p:nvPr/>
+      </p:nvGrpSpPr>
+      <p:grpSpPr>
+        <a:xfrm>
+          <a:off x="0" y="0"/>
+          <a:ext cx="0" cy="0"/>
+          <a:chOff x="0" y="0"/>
+          <a:chExt cx="0" cy="0"/>
+        </a:xfrm>
+      </p:grpSpPr>
+      <p:sp>
+        <p:nvSpPr>
+          <p:cNvPr id="2" name="Slide Image Placeholder 1"/>
+          <p:cNvSpPr>
+            <a:spLocks noGrp="1"/>
+          </p:cNvSpPr>
+          <p:nvPr>
+            <p:ph type="sldImg" idx="2"/>
+          </p:nvPr>
+        </p:nvSpPr>
+        <p:spPr/>
+      </p:sp>
+      <p:sp>
+        <p:nvSpPr>
+          <p:cNvPr id="3" name="Notes Placeholder 2"/>
+          <p:cNvSpPr>
+            <a:spLocks noGrp="1"/>
+          </p:cNvSpPr>
+          <p:nvPr>
+            <p:ph type="body" idx="3" sz="quarter"/>
+          </p:nvPr>
+        </p:nvSpPr>
+        <p:spPr/>
+        <p:txBody>
+          <a:bodyPr/>
+          <a:lstStyle/>
+          <a:p>
+            <a:r>
+              <a:t>【页面定位】谢谢观看 —— 内容页：逐条展开，配合动画节奏点击推进。</a:t>
+            </a:r>
+          </a:p>
+          <a:p>
+            <a:r>
+              <a:t>【放映】本页元素按“背景→主体→标注”顺序错峰入场（约 2 秒完成）；开启“使用计时器”后本页停留 8 秒自动翻页。</a:t>
+            </a:r>
+          </a:p>
+          <a:p>
+            <a:r>
+              <a:t>【编辑】直接点击文本框替换占位文字；在“设计→变体”中一键换配色；图片占位框右键“更改图片”即可替换。</a:t>
+            </a:r>
+          </a:p>
+          <a:p>
+            <a:r>
+              <a:t>【联动】图表为原生可编辑图表：右键“编辑数据”即可替换数值。</a:t>
+            </a:r>
+          </a:p>
+        </p:txBody>
+      </p:sp>
+      <p:sp>
+        <p:nvSpPr>
+          <p:cNvPr id="4" name="Slide Number Placeholder 3"/>
+          <p:cNvSpPr>
+            <a:spLocks noGrp="1"/>
+          </p:cNvSpPr>
+          <p:nvPr>
+            <p:ph type="sldNum" idx="5" sz="quarter"/>
+          </p:nvPr>
+        </p:nvSpPr>
+        <p:spPr/>
+      </p:sp>
+    </p:spTree>
+  </p:cSld>
+  <p:clrMapOvr>
+    <a:masterClrMapping/>
+  </p:clrMapOvr>
+</p:notes>
+</file>
+
+<file path=ppt/notesSlides/notesSlide2.xml><?xml version="1.0" encoding="utf-8"?>
+<p:notes xmlns:a="http://schemas.openxmlformats.org/drawingml/2006/main" xmlns:p="http://schemas.openxmlformats.org/presentationml/2006/main" xmlns:r="http://schemas.openxmlformats.org/officeDocument/2006/relationships">
+  <p:cSld>
+    <p:spTree>
+      <p:nvGrpSpPr>
+        <p:cNvPr id="1" name=""/>
+        <p:cNvGrpSpPr/>
+        <p:nvPr/>
+      </p:nvGrpSpPr>
+      <p:grpSpPr>
+        <a:xfrm>
+          <a:off x="0" y="0"/>
+          <a:ext cx="0" cy="0"/>
+          <a:chOff x="0" y="0"/>
+          <a:chExt cx="0" cy="0"/>
+        </a:xfrm>
+      </p:grpSpPr>
+      <p:sp>
+        <p:nvSpPr>
+          <p:cNvPr id="2" name="Slide Image Placeholder 1"/>
+          <p:cNvSpPr>
+            <a:spLocks noGrp="1"/>
+          </p:cNvSpPr>
+          <p:nvPr>
+            <p:ph type="sldImg" idx="2"/>
+          </p:nvPr>
+        </p:nvSpPr>
+        <p:spPr/>
+      </p:sp>
+      <p:sp>
+        <p:nvSpPr>
+          <p:cNvPr id="3" name="Notes Placeholder 2"/>
+          <p:cNvSpPr>
+            <a:spLocks noGrp="1"/>
+          </p:cNvSpPr>
+          <p:nvPr>
+            <p:ph type="body" idx="3" sz="quarter"/>
+          </p:nvPr>
+        </p:nvSpPr>
+        <p:spPr/>
+        <p:txBody>
+          <a:bodyPr/>
+          <a:lstStyle/>
+          <a:p>
+            <a:r>
+              <a:t>【页面定位】OVERVIEW —— 概览页：快速带过结构，告诉听众接下来讲什么。</a:t>
+            </a:r>
+          </a:p>
+          <a:p>
+            <a:r>
+              <a:t>【放映】本页元素按“背景→主体→标注”顺序错峰入场（约 2 秒完成）；开启“使用计时器”后本页停留 8 秒自动翻页。</a:t>
+            </a:r>
+          </a:p>
+          <a:p>
+            <a:r>
+              <a:t>【编辑】直接点击文本框替换占位文字；在“设计→变体”中一键换配色；图片占位框右键“更改图片”即可替换。</a:t>
+            </a:r>
+          </a:p>
+          <a:p>
+            <a:r>
+              <a:t>【联动】图表为原生可编辑图表：右键“编辑数据”即可替换数值。</a:t>
+            </a:r>
+          </a:p>
+        </p:txBody>
+      </p:sp>
+      <p:sp>
+        <p:nvSpPr>
+          <p:cNvPr id="4" name="Slide Number Placeholder 3"/>
+          <p:cNvSpPr>
+            <a:spLocks noGrp="1"/>
+          </p:cNvSpPr>
+          <p:nvPr>
+            <p:ph type="sldNum" idx="5" sz="quarter"/>
+          </p:nvPr>
+        </p:nvSpPr>
+        <p:spPr/>
+      </p:sp>
+    </p:spTree>
+  </p:cSld>
+  <p:clrMapOvr>
+    <a:masterClrMapping/>
+  </p:clrMapOvr>
+</p:notes>
+</file>
+
+<file path=ppt/notesSlides/notesSlide3.xml><?xml version="1.0" encoding="utf-8"?>
+<p:notes xmlns:a="http://schemas.openxmlformats.org/drawingml/2006/main" xmlns:p="http://schemas.openxmlformats.org/presentationml/2006/main" xmlns:r="http://schemas.openxmlformats.org/officeDocument/2006/relationships">
+  <p:cSld>
+    <p:spTree>
+      <p:nvGrpSpPr>
+        <p:cNvPr id="1" name=""/>
+        <p:cNvGrpSpPr/>
+        <p:nvPr/>
+      </p:nvGrpSpPr>
+      <p:grpSpPr>
+        <a:xfrm>
+          <a:off x="0" y="0"/>
+          <a:ext cx="0" cy="0"/>
+          <a:chOff x="0" y="0"/>
+          <a:chExt cx="0" cy="0"/>
+        </a:xfrm>
+      </p:grpSpPr>
+      <p:sp>
+        <p:nvSpPr>
+          <p:cNvPr id="2" name="Slide Image Placeholder 1"/>
+          <p:cNvSpPr>
+            <a:spLocks noGrp="1"/>
+          </p:cNvSpPr>
+          <p:nvPr>
+            <p:ph type="sldImg" idx="2"/>
+          </p:nvPr>
+        </p:nvSpPr>
+        <p:spPr/>
+      </p:sp>
+      <p:sp>
+        <p:nvSpPr>
+          <p:cNvPr id="3" name="Notes Placeholder 2"/>
+          <p:cNvSpPr>
+            <a:spLocks noGrp="1"/>
+          </p:cNvSpPr>
+          <p:nvPr>
+            <p:ph type="body" idx="3" sz="quarter"/>
+          </p:nvPr>
+        </p:nvSpPr>
+        <p:spPr/>
+        <p:txBody>
+          <a:bodyPr/>
+          <a:lstStyle/>
+          <a:p>
+            <a:r>
+              <a:t>【页面定位】01 —— 内容页：逐条展开，配合动画节奏点击推进。</a:t>
+            </a:r>
+          </a:p>
+          <a:p>
+            <a:r>
+              <a:t>【放映】本页元素按“背景→主体→标注”顺序错峰入场（约 2 秒完成）；开启“使用计时器”后本页停留 8 秒自动翻页。</a:t>
+            </a:r>
+          </a:p>
+          <a:p>
+            <a:r>
+              <a:t>【编辑】直接点击文本框替换占位文字；在“设计→变体”中一键换配色；图片占位框右键“更改图片”即可替换。</a:t>
+            </a:r>
+          </a:p>
+          <a:p>
+            <a:r>
+              <a:t>【联动】图表为原生可编辑图表：右键“编辑数据”即可替换数值。</a:t>
+            </a:r>
+          </a:p>
+        </p:txBody>
+      </p:sp>
+      <p:sp>
+        <p:nvSpPr>
+          <p:cNvPr id="4" name="Slide Number Placeholder 3"/>
+          <p:cNvSpPr>
+            <a:spLocks noGrp="1"/>
+          </p:cNvSpPr>
+          <p:nvPr>
+            <p:ph type="sldNum" idx="5" sz="quarter"/>
+          </p:nvPr>
+        </p:nvSpPr>
+        <p:spPr/>
+      </p:sp>
+    </p:spTree>
+  </p:cSld>
+  <p:clrMapOvr>
+    <a:masterClrMapping/>
+  </p:clrMapOvr>
+</p:notes>
+</file>
+
+<file path=ppt/notesSlides/notesSlide4.xml><?xml version="1.0" encoding="utf-8"?>
+<p:notes xmlns:a="http://schemas.openxmlformats.org/drawingml/2006/main" xmlns:p="http://schemas.openxmlformats.org/presentationml/2006/main" xmlns:r="http://schemas.openxmlformats.org/officeDocument/2006/relationships">
+  <p:cSld>
+    <p:spTree>
+      <p:nvGrpSpPr>
+        <p:cNvPr id="1" name=""/>
+        <p:cNvGrpSpPr/>
+        <p:nvPr/>
+      </p:nvGrpSpPr>
+      <p:grpSpPr>
+        <a:xfrm>
+          <a:off x="0" y="0"/>
+          <a:ext cx="0" cy="0"/>
+          <a:chOff x="0" y="0"/>
+          <a:chExt cx="0" cy="0"/>
+        </a:xfrm>
+      </p:grpSpPr>
+      <p:sp>
+        <p:nvSpPr>
+          <p:cNvPr id="2" name="Slide Image Placeholder 1"/>
+          <p:cNvSpPr>
+            <a:spLocks noGrp="1"/>
+          </p:cNvSpPr>
+          <p:nvPr>
+            <p:ph type="sldImg" idx="2"/>
+          </p:nvPr>
+        </p:nvSpPr>
+        <p:spPr/>
+      </p:sp>
+      <p:sp>
+        <p:nvSpPr>
+          <p:cNvPr id="3" name="Notes Placeholder 2"/>
+          <p:cNvSpPr>
+            <a:spLocks noGrp="1"/>
+          </p:cNvSpPr>
+          <p:nvPr>
+            <p:ph type="body" idx="3" sz="quarter"/>
+          </p:nvPr>
+        </p:nvSpPr>
+        <p:spPr/>
+        <p:txBody>
+          <a:bodyPr/>
+          <a:lstStyle/>
+          <a:p>
+            <a:r>
+              <a:t>【页面定位】OVERVIEW —— 数据页：先说结论，再用图表佐证。</a:t>
+            </a:r>
+          </a:p>
+          <a:p>
+            <a:r>
+              <a:t>【放映】本页元素按“背景→主体→标注”顺序错峰入场（约 2 秒完成）；开启“使用计时器”后本页停留 8 秒自动翻页。</a:t>
+            </a:r>
+          </a:p>
+          <a:p>
+            <a:r>
+              <a:t>【编辑】直接点击文本框替换占位文字；在“设计→变体”中一键换配色；图片占位框右键“更改图片”即可替换。</a:t>
+            </a:r>
+          </a:p>
+          <a:p>
+            <a:r>
+              <a:t>【联动】图表为原生可编辑图表：右键“编辑数据”即可替换数值。</a:t>
+            </a:r>
+          </a:p>
+        </p:txBody>
+      </p:sp>
+      <p:sp>
+        <p:nvSpPr>
+          <p:cNvPr id="4" name="Slide Number Placeholder 3"/>
+          <p:cNvSpPr>
+            <a:spLocks noGrp="1"/>
+          </p:cNvSpPr>
+          <p:nvPr>
+            <p:ph type="sldNum" idx="5" sz="quarter"/>
+          </p:nvPr>
+        </p:nvSpPr>
+        <p:spPr/>
+      </p:sp>
+    </p:spTree>
+  </p:cSld>
+  <p:clrMapOvr>
+    <a:masterClrMapping/>
+  </p:clrMapOvr>
+</p:notes>
+</file>
+
+<file path=ppt/notesSlides/notesSlide5.xml><?xml version="1.0" encoding="utf-8"?>
+<p:notes xmlns:a="http://schemas.openxmlformats.org/drawingml/2006/main" xmlns:p="http://schemas.openxmlformats.org/presentationml/2006/main" xmlns:r="http://schemas.openxmlformats.org/officeDocument/2006/relationships">
+  <p:cSld>
+    <p:spTree>
+      <p:nvGrpSpPr>
+        <p:cNvPr id="1" name=""/>
+        <p:cNvGrpSpPr/>
+        <p:nvPr/>
+      </p:nvGrpSpPr>
+      <p:grpSpPr>
+        <a:xfrm>
+          <a:off x="0" y="0"/>
+          <a:ext cx="0" cy="0"/>
+          <a:chOff x="0" y="0"/>
+          <a:chExt cx="0" cy="0"/>
+        </a:xfrm>
+      </p:grpSpPr>
+      <p:sp>
+        <p:nvSpPr>
+          <p:cNvPr id="2" name="Slide Image Placeholder 1"/>
+          <p:cNvSpPr>
+            <a:spLocks noGrp="1"/>
+          </p:cNvSpPr>
+          <p:nvPr>
+            <p:ph type="sldImg" idx="2"/>
+          </p:nvPr>
+        </p:nvSpPr>
+        <p:spPr/>
+      </p:sp>
+      <p:sp>
+        <p:nvSpPr>
+          <p:cNvPr id="3" name="Notes Placeholder 2"/>
+          <p:cNvSpPr>
+            <a:spLocks noGrp="1"/>
+          </p:cNvSpPr>
+          <p:nvPr>
+            <p:ph type="body" idx="3" sz="quarter"/>
+          </p:nvPr>
+        </p:nvSpPr>
+        <p:spPr/>
+        <p:txBody>
+          <a:bodyPr/>
+          <a:lstStyle/>
+          <a:p>
+            <a:r>
+              <a:t>【页面定位】KEY POINTS —— 收尾页：总结要点并给出行动号召或联系方式。</a:t>
+            </a:r>
+          </a:p>
+          <a:p>
+            <a:r>
+              <a:t>【放映】本页元素按“背景→主体→标注”顺序错峰入场（约 2 秒完成）；开启“使用计时器”后本页停留 8 秒自动翻页。</a:t>
+            </a:r>
+          </a:p>
+          <a:p>
+            <a:r>
+              <a:t>【编辑】直接点击文本框替换占位文字；在“设计→变体”中一键换配色；图片占位框右键“更改图片”即可替换。</a:t>
+            </a:r>
+          </a:p>
+          <a:p>
+            <a:r>
+              <a:t>【联动】图表为原生可编辑图表：右键“编辑数据”即可替换数值。</a:t>
+            </a:r>
+          </a:p>
+        </p:txBody>
+      </p:sp>
+      <p:sp>
+        <p:nvSpPr>
+          <p:cNvPr id="4" name="Slide Number Placeholder 3"/>
+          <p:cNvSpPr>
+            <a:spLocks noGrp="1"/>
+          </p:cNvSpPr>
+          <p:nvPr>
+            <p:ph type="sldNum" idx="5" sz="quarter"/>
+          </p:nvPr>
+        </p:nvSpPr>
+        <p:spPr/>
+      </p:sp>
+    </p:spTree>
+  </p:cSld>
+  <p:clrMapOvr>
+    <a:masterClrMapping/>
+  </p:clrMapOvr>
+</p:notes>
+</file>
+
+<file path=ppt/notesSlides/notesSlide6.xml><?xml version="1.0" encoding="utf-8"?>
+<p:notes xmlns:a="http://schemas.openxmlformats.org/drawingml/2006/main" xmlns:p="http://schemas.openxmlformats.org/presentationml/2006/main" xmlns:r="http://schemas.openxmlformats.org/officeDocument/2006/relationships">
+  <p:cSld>
+    <p:spTree>
+      <p:nvGrpSpPr>
+        <p:cNvPr id="1" name=""/>
+        <p:cNvGrpSpPr/>
+        <p:nvPr/>
+      </p:nvGrpSpPr>
+      <p:grpSpPr>
+        <a:xfrm>
+          <a:off x="0" y="0"/>
+          <a:ext cx="0" cy="0"/>
+          <a:chOff x="0" y="0"/>
+          <a:chExt cx="0" cy="0"/>
+        </a:xfrm>
+      </p:grpSpPr>
+      <p:sp>
+        <p:nvSpPr>
+          <p:cNvPr id="2" name="Slide Image Placeholder 1"/>
+          <p:cNvSpPr>
+            <a:spLocks noGrp="1"/>
+          </p:cNvSpPr>
+          <p:nvPr>
+            <p:ph type="sldImg" idx="2"/>
+          </p:nvPr>
+        </p:nvSpPr>
+        <p:spPr/>
+      </p:sp>
+      <p:sp>
+        <p:nvSpPr>
+          <p:cNvPr id="3" name="Notes Placeholder 2"/>
+          <p:cNvSpPr>
+            <a:spLocks noGrp="1"/>
+          </p:cNvSpPr>
+          <p:nvPr>
+            <p:ph type="body" idx="3" sz="quarter"/>
+          </p:nvPr>
+        </p:nvSpPr>
+        <p:spPr/>
+        <p:txBody>
+          <a:bodyPr/>
+          <a:lstStyle/>
+          <a:p>
+            <a:r>
+              <a:t>【页面定位】METRICS —— 开场页：自我介绍或破题，停留时间可稍长。</a:t>
+            </a:r>
+          </a:p>
+          <a:p>
+            <a:r>
+              <a:t>【放映】本页元素按“背景→主体→标注”顺序错峰入场（约 2 秒完成）；开启“使用计时器”后本页停留 8 秒自动翻页。</a:t>
+            </a:r>
+          </a:p>
+          <a:p>
+            <a:r>
+              <a:t>【编辑】直接点击文本框替换占位文字；在“设计→变体”中一键换配色；图片占位框右键“更改图片”即可替换。</a:t>
+            </a:r>
+          </a:p>
+          <a:p>
+            <a:r>
+              <a:t>【联动】图表为原生可编辑图表：右键“编辑数据”即可替换数值。</a:t>
+            </a:r>
+          </a:p>
+        </p:txBody>
+      </p:sp>
+      <p:sp>
+        <p:nvSpPr>
+          <p:cNvPr id="4" name="Slide Number Placeholder 3"/>
+          <p:cNvSpPr>
+            <a:spLocks noGrp="1"/>
+          </p:cNvSpPr>
+          <p:nvPr>
+            <p:ph type="sldNum" idx="5" sz="quarter"/>
+          </p:nvPr>
+        </p:nvSpPr>
+        <p:spPr/>
+      </p:sp>
+    </p:spTree>
+  </p:cSld>
+  <p:clrMapOvr>
+    <a:masterClrMapping/>
+  </p:clrMapOvr>
+</p:notes>
+</file>
+
+<file path=ppt/notesSlides/notesSlide7.xml><?xml version="1.0" encoding="utf-8"?>
+<p:notes xmlns:a="http://schemas.openxmlformats.org/drawingml/2006/main" xmlns:p="http://schemas.openxmlformats.org/presentationml/2006/main" xmlns:r="http://schemas.openxmlformats.org/officeDocument/2006/relationships">
+  <p:cSld>
+    <p:spTree>
+      <p:nvGrpSpPr>
+        <p:cNvPr id="1" name=""/>
+        <p:cNvGrpSpPr/>
+        <p:nvPr/>
+      </p:nvGrpSpPr>
+      <p:grpSpPr>
+        <a:xfrm>
+          <a:off x="0" y="0"/>
+          <a:ext cx="0" cy="0"/>
+          <a:chOff x="0" y="0"/>
+          <a:chExt cx="0" cy="0"/>
+        </a:xfrm>
+      </p:grpSpPr>
+      <p:sp>
+        <p:nvSpPr>
+          <p:cNvPr id="2" name="Slide Image Placeholder 1"/>
+          <p:cNvSpPr>
+            <a:spLocks noGrp="1"/>
+          </p:cNvSpPr>
+          <p:nvPr>
+            <p:ph type="sldImg" idx="2"/>
+          </p:nvPr>
+        </p:nvSpPr>
+        <p:spPr/>
+      </p:sp>
+      <p:sp>
+        <p:nvSpPr>
+          <p:cNvPr id="3" name="Notes Placeholder 2"/>
+          <p:cNvSpPr>
+            <a:spLocks noGrp="1"/>
+          </p:cNvSpPr>
+          <p:nvPr>
+            <p:ph type="body" idx="3" sz="quarter"/>
+          </p:nvPr>
+        </p:nvSpPr>
+        <p:spPr/>
+        <p:txBody>
+          <a:bodyPr/>
+          <a:lstStyle/>
+          <a:p>
+            <a:r>
+              <a:t>【页面定位】PROCESS —— 概览页：快速带过结构，告诉听众接下来讲什么。</a:t>
+            </a:r>
+          </a:p>
+          <a:p>
+            <a:r>
+              <a:t>【放映】本页元素按“背景→主体→标注”顺序错峰入场（约 2 秒完成）；开启“使用计时器”后本页停留 8 秒自动翻页。</a:t>
+            </a:r>
+          </a:p>
+          <a:p>
+            <a:r>
+              <a:t>【编辑】直接点击文本框替换占位文字；在“设计→变体”中一键换配色；图片占位框右键“更改图片”即可替换。</a:t>
+            </a:r>
+          </a:p>
+          <a:p>
+            <a:r>
+              <a:t>【联动】图表为原生可编辑图表：右键“编辑数据”即可替换数值。</a:t>
+            </a:r>
+          </a:p>
+        </p:txBody>
+      </p:sp>
+      <p:sp>
+        <p:nvSpPr>
+          <p:cNvPr id="4" name="Slide Number Placeholder 3"/>
+          <p:cNvSpPr>
+            <a:spLocks noGrp="1"/>
+          </p:cNvSpPr>
+          <p:nvPr>
+            <p:ph type="sldNum" idx="5" sz="quarter"/>
+          </p:nvPr>
+        </p:nvSpPr>
+        <p:spPr/>
+      </p:sp>
+    </p:spTree>
+  </p:cSld>
+  <p:clrMapOvr>
+    <a:masterClrMapping/>
+  </p:clrMapOvr>
+</p:notes>
+</file>
+
+<file path=ppt/notesSlides/notesSlide8.xml><?xml version="1.0" encoding="utf-8"?>
+<p:notes xmlns:a="http://schemas.openxmlformats.org/drawingml/2006/main" xmlns:p="http://schemas.openxmlformats.org/presentationml/2006/main" xmlns:r="http://schemas.openxmlformats.org/officeDocument/2006/relationships">
+  <p:cSld>
+    <p:spTree>
+      <p:nvGrpSpPr>
+        <p:cNvPr id="1" name=""/>
+        <p:cNvGrpSpPr/>
+        <p:nvPr/>
+      </p:nvGrpSpPr>
+      <p:grpSpPr>
+        <a:xfrm>
+          <a:off x="0" y="0"/>
+          <a:ext cx="0" cy="0"/>
+          <a:chOff x="0" y="0"/>
+          <a:chExt cx="0" cy="0"/>
+        </a:xfrm>
+      </p:grpSpPr>
+      <p:sp>
+        <p:nvSpPr>
+          <p:cNvPr id="2" name="Slide Image Placeholder 1"/>
+          <p:cNvSpPr>
+            <a:spLocks noGrp="1"/>
+          </p:cNvSpPr>
+          <p:nvPr>
+            <p:ph type="sldImg" idx="2"/>
+          </p:nvPr>
+        </p:nvSpPr>
+        <p:spPr/>
+      </p:sp>
+      <p:sp>
+        <p:nvSpPr>
+          <p:cNvPr id="3" name="Notes Placeholder 2"/>
+          <p:cNvSpPr>
+            <a:spLocks noGrp="1"/>
+          </p:cNvSpPr>
+          <p:nvPr>
+            <p:ph type="body" idx="3" sz="quarter"/>
+          </p:nvPr>
+        </p:nvSpPr>
+        <p:spPr/>
+        <p:txBody>
+          <a:bodyPr/>
+          <a:lstStyle/>
+          <a:p>
+            <a:r>
+              <a:t>【页面定位】PROCESS —— 内容页：逐条展开，配合动画节奏点击推进。</a:t>
+            </a:r>
+          </a:p>
+          <a:p>
+            <a:r>
+              <a:t>【放映】本页元素按“背景→主体→标注”顺序错峰入场（约 2 秒完成）；开启“使用计时器”后本页停留 8 秒自动翻页。</a:t>
+            </a:r>
+          </a:p>
+          <a:p>
+            <a:r>
+              <a:t>【编辑】直接点击文本框替换占位文字；在“设计→变体”中一键换配色；图片占位框右键“更改图片”即可替换。</a:t>
+            </a:r>
+          </a:p>
+          <a:p>
+            <a:r>
+              <a:t>【联动】图表为原生可编辑图表：右键“编辑数据”即可替换数值。</a:t>
+            </a:r>
+          </a:p>
+        </p:txBody>
+      </p:sp>
+      <p:sp>
+        <p:nvSpPr>
+          <p:cNvPr id="4" name="Slide Number Placeholder 3"/>
+          <p:cNvSpPr>
+            <a:spLocks noGrp="1"/>
+          </p:cNvSpPr>
+          <p:nvPr>
+            <p:ph type="sldNum" idx="5" sz="quarter"/>
+          </p:nvPr>
+        </p:nvSpPr>
+        <p:spPr/>
+      </p:sp>
+    </p:spTree>
+  </p:cSld>
+  <p:clrMapOvr>
+    <a:masterClrMapping/>
+  </p:clrMapOvr>
+</p:notes>
+</file>
+
+<file path=ppt/notesSlides/notesSlide9.xml><?xml version="1.0" encoding="utf-8"?>
+<p:notes xmlns:a="http://schemas.openxmlformats.org/drawingml/2006/main" xmlns:p="http://schemas.openxmlformats.org/presentationml/2006/main" xmlns:r="http://schemas.openxmlformats.org/officeDocument/2006/relationships">
+  <p:cSld>
+    <p:spTree>
+      <p:nvGrpSpPr>
+        <p:cNvPr id="1" name=""/>
+        <p:cNvGrpSpPr/>
+        <p:nvPr/>
+      </p:nvGrpSpPr>
+      <p:grpSpPr>
+        <a:xfrm>
+          <a:off x="0" y="0"/>
+          <a:ext cx="0" cy="0"/>
+          <a:chOff x="0" y="0"/>
+          <a:chExt cx="0" cy="0"/>
+        </a:xfrm>
+      </p:grpSpPr>
+      <p:sp>
+        <p:nvSpPr>
+          <p:cNvPr id="2" name="Slide Image Placeholder 1"/>
+          <p:cNvSpPr>
+            <a:spLocks noGrp="1"/>
+          </p:cNvSpPr>
+          <p:nvPr>
+            <p:ph type="sldImg" idx="2"/>
+          </p:nvPr>
+        </p:nvSpPr>
+        <p:spPr/>
+      </p:sp>
+      <p:sp>
+        <p:nvSpPr>
+          <p:cNvPr id="3" name="Notes Placeholder 2"/>
+          <p:cNvSpPr>
+            <a:spLocks noGrp="1"/>
+          </p:cNvSpPr>
+          <p:nvPr>
+            <p:ph type="body" idx="3" sz="quarter"/>
+          </p:nvPr>
+        </p:nvSpPr>
+        <p:spPr/>
+        <p:txBody>
+          <a:bodyPr/>
+          <a:lstStyle/>
+          <a:p>
+            <a:r>
+              <a:t>【页面定位】DATA —— 数据页：先说结论，再用图表佐证。</a:t>
+            </a:r>
+          </a:p>
+          <a:p>
+            <a:r>
+              <a:t>【放映】本页元素按“背景→主体→标注”顺序错峰入场（约 2 秒完成）；开启“使用计时器”后本页停留 8 秒自动翻页。</a:t>
+            </a:r>
+          </a:p>
+          <a:p>
+            <a:r>
+              <a:t>【编辑】直接点击文本框替换占位文字；在“设计→变体”中一键换配色；图片占位框右键“更改图片”即可替换。</a:t>
+            </a:r>
+          </a:p>
+          <a:p>
+            <a:r>
+              <a:t>【联动】图表为原生可编辑图表：右键“编辑数据”即可替换数值。</a:t>
+            </a:r>
+          </a:p>
+        </p:txBody>
+      </p:sp>
+      <p:sp>
+        <p:nvSpPr>
+          <p:cNvPr id="4" name="Slide Number Placeholder 3"/>
+          <p:cNvSpPr>
+            <a:spLocks noGrp="1"/>
+          </p:cNvSpPr>
+          <p:nvPr>
+            <p:ph type="sldNum" idx="5" sz="quarter"/>
+          </p:nvPr>
+        </p:nvSpPr>
+        <p:spPr/>
+      </p:sp>
+    </p:spTree>
+  </p:cSld>
+  <p:clrMapOvr>
+    <a:masterClrMapping/>
+  </p:clrMapOvr>
+</p:notes>
 </file>
 
 <file path=ppt/slideLayouts/slideLayout1.xml><?xml version="1.0" encoding="utf-8"?>
@@ -3606,7 +5486,7 @@
   <p:clrMapOvr>
     <a:masterClrMapping/>
   </p:clrMapOvr>
-  <p:transition spd="med">
+  <p:transition spd="med" advClick="1" advTm="8000">
     <p:circle dir="in"/>
   </p:transition>
   <p:timing>
@@ -5048,7 +6928,7 @@
   <p:clrMapOvr>
     <a:masterClrMapping/>
   </p:clrMapOvr>
-  <p:transition spd="med">
+  <p:transition spd="med" advClick="1" advTm="8000">
     <p:fade/>
   </p:transition>
   <p:timing>
@@ -6408,7 +8288,7 @@
   <p:clrMapOvr>
     <a:masterClrMapping/>
   </p:clrMapOvr>
-  <p:transition spd="med">
+  <p:transition spd="med" advClick="1" advTm="8000">
     <p:push dir="l"/>
   </p:transition>
   <p:timing>
@@ -7542,7 +9422,7 @@
   <p:clrMapOvr>
     <a:masterClrMapping/>
   </p:clrMapOvr>
-  <p:transition spd="med">
+  <p:transition spd="med" advClick="1" advTm="8000">
     <p:wipe dir="u"/>
   </p:transition>
   <p:timing>
@@ -8606,7 +10486,7 @@
   <p:clrMapOvr>
     <a:masterClrMapping/>
   </p:clrMapOvr>
-  <p:transition spd="med">
+  <p:transition spd="med" advClick="1" advTm="8000">
     <p:split orient="horz"/>
   </p:transition>
   <p:timing>
@@ -10022,7 +11902,7 @@
   <p:clrMapOvr>
     <a:masterClrMapping/>
   </p:clrMapOvr>
-  <p:transition spd="med">
+  <p:transition spd="med" advClick="1" advTm="8000">
     <p:blinds dir="horz"/>
   </p:transition>
   <p:timing>
@@ -11576,7 +13456,7 @@
   <p:clrMapOvr>
     <a:masterClrMapping/>
   </p:clrMapOvr>
-  <p:transition spd="med">
+  <p:transition spd="med" advClick="1" advTm="8000">
     <p:circle dir="in"/>
   </p:transition>
   <p:timing>
@@ -12886,7 +14766,7 @@
   <p:clrMapOvr>
     <a:masterClrMapping/>
   </p:clrMapOvr>
-  <p:transition spd="med">
+  <p:transition spd="med" advClick="1" advTm="8000">
     <p:comb dir="horz"/>
   </p:transition>
   <p:timing>
@@ -14158,7 +16038,7 @@
   <p:clrMapOvr>
     <a:masterClrMapping/>
   </p:clrMapOvr>
-  <p:transition spd="med">
+  <p:transition spd="med" advClick="1" advTm="8000">
     <p:dissolve/>
   </p:transition>
   <p:timing>
@@ -15248,7 +17128,7 @@
   <p:clrMapOvr>
     <a:masterClrMapping/>
   </p:clrMapOvr>
-  <p:transition spd="med">
+  <p:transition spd="med" advClick="1" advTm="8000">
     <p:zoom dir="in"/>
   </p:transition>
   <p:timing>
@@ -16501,7 +18381,7 @@
   <p:clrMapOvr>
     <a:masterClrMapping/>
   </p:clrMapOvr>
-  <p:transition spd="med">
+  <p:transition spd="med" advClick="1" advTm="8000">
     <p:comb dir="horz"/>
   </p:transition>
   <p:timing>
@@ -17635,7 +19515,7 @@
   <p:clrMapOvr>
     <a:masterClrMapping/>
   </p:clrMapOvr>
-  <p:transition spd="med">
+  <p:transition spd="med" advClick="1" advTm="8000">
     <p:dissolve/>
   </p:transition>
   <p:timing>
@@ -18923,7 +20803,7 @@
   <p:clrMapOvr>
     <a:masterClrMapping/>
   </p:clrMapOvr>
-  <p:transition spd="med">
+  <p:transition spd="med" advClick="1" advTm="8000">
     <p:zoom dir="in"/>
   </p:transition>
   <p:timing>
@@ -20335,7 +22215,7 @@
   <p:clrMapOvr>
     <a:masterClrMapping/>
   </p:clrMapOvr>
-  <p:transition spd="med">
+  <p:transition spd="med" advClick="1" advTm="8000">
     <p:cover dir="l"/>
   </p:transition>
   <p:timing>
@@ -22045,7 +23925,7 @@
   <p:clrMapOvr>
     <a:masterClrMapping/>
   </p:clrMapOvr>
-  <p:transition spd="med">
+  <p:transition spd="med" advClick="1" advTm="8000">
     <p:checker dir="across"/>
   </p:transition>
   <p:timing>
@@ -23599,7 +25479,7 @@
   <p:clrMapOvr>
     <a:masterClrMapping/>
   </p:clrMapOvr>
-  <p:transition spd="med">
+  <p:transition spd="med" advClick="1" advTm="8000">
     <p:newsflash/>
   </p:transition>
   <p:timing>
@@ -24913,7 +26793,7 @@
   <p:clrMapOvr>
     <a:masterClrMapping/>
   </p:clrMapOvr>
-  <p:transition spd="med">
+  <p:transition spd="med" advClick="1" advTm="8000">
     <p:push dir="u"/>
   </p:transition>
   <p:timing>
@@ -26165,7 +28045,7 @@
                 <a:ea typeface="微软雅黑"/>
                 <a:cs typeface="微软雅黑"/>
               </a:rPr>
-              <a:t>图表占位 · 在 PowerPoint 中插入图表替换</a:t>
+              <a:t>原生可编辑图表 · 右键图表 → 编辑数据 即可替换数值</a:t>
             </a:r>
           </a:p>
         </p:txBody>
@@ -26426,7 +28306,7 @@
   <p:clrMapOvr>
     <a:masterClrMapping/>
   </p:clrMapOvr>
-  <p:transition spd="med">
+  <p:transition spd="med" advClick="1" advTm="8000">
     <p:wipe dir="d"/>
   </p:transition>
   <p:timing>
@@ -27279,4 +29159,324 @@
   </a:objectDefaults>
   <a:extraClrSchemeLst/>
 </a:theme>
+</file>
+
+<file path=ppt/theme/theme2.xml><?xml version="1.0" encoding="utf-8"?>
+<a:theme xmlns:a="http://schemas.openxmlformats.org/drawingml/2006/main" name="Office Theme">
+  <a:themeElements>
+    <a:clrScheme name="Office">
+      <a:dk1>
+        <a:sysClr val="windowText" lastClr="000000"/>
+      </a:dk1>
+      <a:lt1>
+        <a:sysClr val="window" lastClr="FFFFFF"/>
+      </a:lt1>
+      <a:dk2>
+        <a:srgbClr val="1F497D"/>
+      </a:dk2>
+      <a:lt2>
+        <a:srgbClr val="EEECE1"/>
+      </a:lt2>
+      <a:accent1>
+        <a:srgbClr val="4F81BD"/>
+      </a:accent1>
+      <a:accent2>
+        <a:srgbClr val="C0504D"/>
+      </a:accent2>
+      <a:accent3>
+        <a:srgbClr val="9BBB59"/>
+      </a:accent3>
+      <a:accent4>
+        <a:srgbClr val="8064A2"/>
+      </a:accent4>
+      <a:accent5>
+        <a:srgbClr val="4BACC6"/>
+      </a:accent5>
+      <a:accent6>
+        <a:srgbClr val="F79646"/>
+      </a:accent6>
+      <a:hlink>
+        <a:srgbClr val="0000FF"/>
+      </a:hlink>
+      <a:folHlink>
+        <a:srgbClr val="800080"/>
+      </a:folHlink>
+    </a:clrScheme>
+    <a:fontScheme name="Office">
+      <a:majorFont>
+        <a:latin typeface="Calibri"/>
+        <a:ea typeface=""/>
+        <a:cs typeface=""/>
+        <a:font script="Jpan" typeface="ＭＳ Ｐゴシック"/>
+        <a:font script="Hang" typeface="맑은 고딕"/>
+        <a:font script="Hans" typeface="宋体"/>
+        <a:font script="Hant" typeface="新細明體"/>
+        <a:font script="Arab" typeface="Times New Roman"/>
+        <a:font script="Hebr" typeface="Times New Roman"/>
+        <a:font script="Thai" typeface="Angsana New"/>
+        <a:font script="Ethi" typeface="Nyala"/>
+        <a:font script="Beng" typeface="Vrinda"/>
+        <a:font script="Gujr" typeface="Shruti"/>
+        <a:font script="Khmr" typeface="MoolBoran"/>
+        <a:font script="Knda" typeface="Tunga"/>
+        <a:font script="Guru" typeface="Raavi"/>
+        <a:font script="Cans" typeface="Euphemia"/>
+        <a:font script="Cher" typeface="Plantagenet Cherokee"/>
+        <a:font script="Yiii" typeface="Microsoft Yi Baiti"/>
+        <a:font script="Tibt" typeface="Microsoft Himalaya"/>
+        <a:font script="Thaa" typeface="MV Boli"/>
+        <a:font script="Deva" typeface="Mangal"/>
+        <a:font script="Telu" typeface="Gautami"/>
+        <a:font script="Taml" typeface="Latha"/>
+        <a:font script="Syrc" typeface="Estrangelo Edessa"/>
+        <a:font script="Orya" typeface="Kalinga"/>
+        <a:font script="Mlym" typeface="Kartika"/>
+        <a:font script="Laoo" typeface="DokChampa"/>
+        <a:font script="Sinh" typeface="Iskoola Pota"/>
+        <a:font script="Mong" typeface="Mongolian Baiti"/>
+        <a:font script="Viet" typeface="Times New Roman"/>
+        <a:font script="Uigh" typeface="Microsoft Uighur"/>
+        <a:font script="Geor" typeface="Sylfaen"/>
+      </a:majorFont>
+      <a:minorFont>
+        <a:latin typeface="Calibri"/>
+        <a:ea typeface=""/>
+        <a:cs typeface=""/>
+        <a:font script="Jpan" typeface="ＭＳ Ｐゴシック"/>
+        <a:font script="Hang" typeface="맑은 고딕"/>
+        <a:font script="Hans" typeface="宋体"/>
+        <a:font script="Hant" typeface="新細明體"/>
+        <a:font script="Arab" typeface="Arial"/>
+        <a:font script="Hebr" typeface="Arial"/>
+        <a:font script="Thai" typeface="Cordia New"/>
+        <a:font script="Ethi" typeface="Nyala"/>
+        <a:font script="Beng" typeface="Vrinda"/>
+        <a:font script="Gujr" typeface="Shruti"/>
+        <a:font script="Khmr" typeface="DaunPenh"/>
+        <a:font script="Knda" typeface="Tunga"/>
+        <a:font script="Guru" typeface="Raavi"/>
+        <a:font script="Cans" typeface="Euphemia"/>
+        <a:font script="Cher" typeface="Plantagenet Cherokee"/>
+        <a:font script="Yiii" typeface="Microsoft Yi Baiti"/>
+        <a:font script="Tibt" typeface="Microsoft Himalaya"/>
+        <a:font script="Thaa" typeface="MV Boli"/>
+        <a:font script="Deva" typeface="Mangal"/>
+        <a:font script="Telu" typeface="Gautami"/>
+        <a:font script="Taml" typeface="Latha"/>
+        <a:font script="Syrc" typeface="Estrangelo Edessa"/>
+        <a:font script="Orya" typeface="Kalinga"/>
+        <a:font script="Mlym" typeface="Kartika"/>
+        <a:font script="Laoo" typeface="DokChampa"/>
+        <a:font script="Sinh" typeface="Iskoola Pota"/>
+        <a:font script="Mong" typeface="Mongolian Baiti"/>
+        <a:font script="Viet" typeface="Arial"/>
+        <a:font script="Uigh" typeface="Microsoft Uighur"/>
+        <a:font script="Geor" typeface="Sylfaen"/>
+      </a:minorFont>
+    </a:fontScheme>
+    <a:fmtScheme name="Office">
+      <a:fillStyleLst>
+        <a:solidFill>
+          <a:schemeClr val="phClr"/>
+        </a:solidFill>
+        <a:gradFill rotWithShape="1">
+          <a:gsLst>
+            <a:gs pos="0">
+              <a:schemeClr val="phClr">
+                <a:tint val="50000"/>
+                <a:satMod val="300000"/>
+              </a:schemeClr>
+            </a:gs>
+            <a:gs pos="35000">
+              <a:schemeClr val="phClr">
+                <a:tint val="37000"/>
+                <a:satMod val="300000"/>
+              </a:schemeClr>
+            </a:gs>
+            <a:gs pos="100000">
+              <a:schemeClr val="phClr">
+                <a:tint val="15000"/>
+                <a:satMod val="350000"/>
+              </a:schemeClr>
+            </a:gs>
+          </a:gsLst>
+          <a:lin ang="16200000" scaled="1"/>
+        </a:gradFill>
+        <a:gradFill rotWithShape="1">
+          <a:gsLst>
+            <a:gs pos="0">
+              <a:schemeClr val="phClr">
+                <a:tint val="100000"/>
+                <a:shade val="100000"/>
+                <a:satMod val="130000"/>
+              </a:schemeClr>
+            </a:gs>
+            <a:gs pos="100000">
+              <a:schemeClr val="phClr">
+                <a:tint val="50000"/>
+                <a:shade val="100000"/>
+                <a:satMod val="350000"/>
+              </a:schemeClr>
+            </a:gs>
+          </a:gsLst>
+          <a:lin ang="16200000" scaled="0"/>
+        </a:gradFill>
+      </a:fillStyleLst>
+      <a:lnStyleLst>
+        <a:ln w="9525" cap="flat" cmpd="sng" algn="ctr">
+          <a:solidFill>
+            <a:schemeClr val="phClr">
+              <a:shade val="95000"/>
+              <a:satMod val="105000"/>
+            </a:schemeClr>
+          </a:solidFill>
+          <a:prstDash val="solid"/>
+        </a:ln>
+        <a:ln w="25400" cap="flat" cmpd="sng" algn="ctr">
+          <a:solidFill>
+            <a:schemeClr val="phClr"/>
+          </a:solidFill>
+          <a:prstDash val="solid"/>
+        </a:ln>
+        <a:ln w="38100" cap="flat" cmpd="sng" algn="ctr">
+          <a:solidFill>
+            <a:schemeClr val="phClr"/>
+          </a:solidFill>
+          <a:prstDash val="solid"/>
+        </a:ln>
+      </a:lnStyleLst>
+      <a:effectStyleLst>
+        <a:effectStyle>
+          <a:effectLst>
+            <a:outerShdw blurRad="40000" dist="20000" dir="5400000" rotWithShape="0">
+              <a:srgbClr val="000000">
+                <a:alpha val="38000"/>
+              </a:srgbClr>
+            </a:outerShdw>
+          </a:effectLst>
+        </a:effectStyle>
+        <a:effectStyle>
+          <a:effectLst>
+            <a:outerShdw blurRad="40000" dist="23000" dir="5400000" rotWithShape="0">
+              <a:srgbClr val="000000">
+                <a:alpha val="35000"/>
+              </a:srgbClr>
+            </a:outerShdw>
+          </a:effectLst>
+        </a:effectStyle>
+        <a:effectStyle>
+          <a:effectLst>
+            <a:outerShdw blurRad="40000" dist="23000" dir="5400000" rotWithShape="0">
+              <a:srgbClr val="000000">
+                <a:alpha val="35000"/>
+              </a:srgbClr>
+            </a:outerShdw>
+          </a:effectLst>
+          <a:scene3d>
+            <a:camera prst="orthographicFront">
+              <a:rot lat="0" lon="0" rev="0"/>
+            </a:camera>
+            <a:lightRig rig="threePt" dir="t">
+              <a:rot lat="0" lon="0" rev="1200000"/>
+            </a:lightRig>
+          </a:scene3d>
+          <a:sp3d>
+            <a:bevelT w="63500" h="25400"/>
+          </a:sp3d>
+        </a:effectStyle>
+      </a:effectStyleLst>
+      <a:bgFillStyleLst>
+        <a:solidFill>
+          <a:schemeClr val="phClr"/>
+        </a:solidFill>
+        <a:gradFill rotWithShape="1">
+          <a:gsLst>
+            <a:gs pos="0">
+              <a:schemeClr val="phClr">
+                <a:tint val="40000"/>
+                <a:satMod val="350000"/>
+              </a:schemeClr>
+            </a:gs>
+            <a:gs pos="40000">
+              <a:schemeClr val="phClr">
+                <a:tint val="45000"/>
+                <a:shade val="99000"/>
+                <a:satMod val="350000"/>
+              </a:schemeClr>
+            </a:gs>
+            <a:gs pos="100000">
+              <a:schemeClr val="phClr">
+                <a:shade val="20000"/>
+                <a:satMod val="255000"/>
+              </a:schemeClr>
+            </a:gs>
+          </a:gsLst>
+          <a:path path="circle">
+            <a:fillToRect l="50000" t="-80000" r="50000" b="180000"/>
+          </a:path>
+        </a:gradFill>
+        <a:gradFill rotWithShape="1">
+          <a:gsLst>
+            <a:gs pos="0">
+              <a:schemeClr val="phClr">
+                <a:tint val="80000"/>
+                <a:satMod val="300000"/>
+              </a:schemeClr>
+            </a:gs>
+            <a:gs pos="100000">
+              <a:schemeClr val="phClr">
+                <a:shade val="30000"/>
+                <a:satMod val="200000"/>
+              </a:schemeClr>
+            </a:gs>
+          </a:gsLst>
+          <a:path path="circle">
+            <a:fillToRect l="50000" t="50000" r="50000" b="50000"/>
+          </a:path>
+        </a:gradFill>
+      </a:bgFillStyleLst>
+    </a:fmtScheme>
+  </a:themeElements>
+  <a:objectDefaults>
+    <a:spDef>
+      <a:spPr/>
+      <a:bodyPr/>
+      <a:lstStyle/>
+      <a:style>
+        <a:lnRef idx="1">
+          <a:schemeClr val="accent1"/>
+        </a:lnRef>
+        <a:fillRef idx="3">
+          <a:schemeClr val="accent1"/>
+        </a:fillRef>
+        <a:effectRef idx="2">
+          <a:schemeClr val="accent1"/>
+        </a:effectRef>
+        <a:fontRef idx="minor">
+          <a:schemeClr val="lt1"/>
+        </a:fontRef>
+      </a:style>
+    </a:spDef>
+    <a:lnDef>
+      <a:spPr/>
+      <a:bodyPr/>
+      <a:lstStyle/>
+      <a:style>
+        <a:lnRef idx="2">
+          <a:schemeClr val="accent1"/>
+        </a:lnRef>
+        <a:fillRef idx="0">
+          <a:schemeClr val="accent1"/>
+        </a:fillRef>
+        <a:effectRef idx="1">
+          <a:schemeClr val="accent1"/>
+        </a:effectRef>
+        <a:fontRef idx="minor">
+          <a:schemeClr val="tx1"/>
+        </a:fontRef>
+      </a:style>
+    </a:lnDef>
+  </a:objectDefaults>
+  <a:extraClrSchemeLst/>
+</a:theme>
 </file>